--- a/docs/参赛材料/02-演示PPT.pptx
+++ b/docs/参赛材料/02-演示PPT.pptx
@@ -10336,7 +10336,7 @@
         </p:nvSpPr>
         <p:spPr>
           <a:xfrm>
-            <a:off x="6492240" y="5532120"/>
+            <a:off x="6492240" y="5779008"/>
             <a:ext cx="5074920" cy="457200"/>
           </a:xfrm>
           <a:prstGeom prst="rect">

--- a/docs/参赛材料/02-演示PPT.pptx
+++ b/docs/参赛材料/02-演示PPT.pptx
@@ -16,6 +16,7 @@
     <p:sldId id="264" r:id="rId15"/>
     <p:sldId id="265" r:id="rId16"/>
     <p:sldId id="266" r:id="rId17"/>
+    <p:sldId id="267" r:id="rId18"/>
   </p:sldIdLst>
   <p:sldSz cx="12191695" cy="6858000" type="screen4x3"/>
   <p:notesSz cx="6858000" cy="9144000"/>
@@ -3516,7 +3517,7 @@
                 </a:solidFill>
                 <a:latin typeface="微软雅黑" a:ea="微软雅黑"/>
               </a:rPr>
-              <a:t>产业价值与落地路径</a:t>
+              <a:t>实测结果：真实数据已跑通</a:t>
             </a:r>
           </a:p>
           <a:p>
@@ -3535,7 +3536,7 @@
                 </a:solidFill>
                 <a:latin typeface="微软雅黑" a:ea="微软雅黑"/>
               </a:rPr>
-              <a:t>从「靠经验试错」到「靠证据决策」</a:t>
+              <a:t>不是概念演示——真实公开数据已入库并跑完全链路</a:t>
             </a:r>
           </a:p>
         </p:txBody>
@@ -3549,7 +3550,7 @@
         <p:spPr>
           <a:xfrm>
             <a:off x="685800" y="1691640"/>
-            <a:ext cx="3474720" cy="2286000"/>
+            <a:ext cx="2542032" cy="1691640"/>
           </a:xfrm>
           <a:prstGeom prst="roundRect">
             <a:avLst/>
@@ -3588,58 +3589,14 @@
       </p:sp>
       <p:sp>
         <p:nvSpPr>
-          <p:cNvPr id="5" name="Rectangle 4"/>
-          <p:cNvSpPr/>
-          <p:nvPr/>
-        </p:nvSpPr>
-        <p:spPr>
-          <a:xfrm>
-            <a:off x="685800" y="1691640"/>
-            <a:ext cx="68580" cy="2286000"/>
-          </a:xfrm>
-          <a:prstGeom prst="rect">
-            <a:avLst/>
-          </a:prstGeom>
-          <a:solidFill>
-            <a:srgbClr val="2F6FEB"/>
-          </a:solidFill>
-          <a:ln>
-            <a:noFill/>
-          </a:ln>
-          <a:effectLst/>
-        </p:spPr>
-        <p:style>
-          <a:lnRef idx="1">
-            <a:schemeClr val="accent1"/>
-          </a:lnRef>
-          <a:fillRef idx="3">
-            <a:schemeClr val="accent1"/>
-          </a:fillRef>
-          <a:effectRef idx="2">
-            <a:schemeClr val="accent1"/>
-          </a:effectRef>
-          <a:fontRef idx="minor">
-            <a:schemeClr val="lt1"/>
-          </a:fontRef>
-        </p:style>
-        <p:txBody>
-          <a:bodyPr rtlCol="0" anchor="ctr"/>
-          <a:lstStyle/>
-          <a:p>
-            <a:pPr algn="ctr"/>
-          </a:p>
-        </p:txBody>
-      </p:sp>
-      <p:sp>
-        <p:nvSpPr>
-          <p:cNvPr id="6" name="TextBox 5"/>
+          <p:cNvPr id="5" name="TextBox 4"/>
           <p:cNvSpPr txBox="1"/>
           <p:nvPr/>
         </p:nvSpPr>
         <p:spPr>
           <a:xfrm>
-            <a:off x="941832" y="1856232"/>
-            <a:ext cx="3017520" cy="2011680"/>
+            <a:off x="685800" y="1828800"/>
+            <a:ext cx="2542032" cy="1463040"/>
           </a:xfrm>
           <a:prstGeom prst="rect">
             <a:avLst/>
@@ -3652,112 +3609,74 @@
           </a:bodyPr>
           <a:lstStyle/>
           <a:p>
-            <a:pPr algn="l">
+            <a:pPr algn="ctr">
               <a:lnSpc>
                 <a:spcPct val="115000"/>
               </a:lnSpc>
               <a:spcAft>
+                <a:spcPts val="0"/>
+              </a:spcAft>
+            </a:pPr>
+            <a:r>
+              <a:rPr sz="3200" b="1">
+                <a:solidFill>
+                  <a:srgbClr val="2F6FEB"/>
+                </a:solidFill>
+                <a:latin typeface="微软雅黑" a:ea="微软雅黑"/>
+              </a:rPr>
+              <a:t>80</a:t>
+            </a:r>
+          </a:p>
+          <a:p>
+            <a:pPr algn="ctr">
+              <a:lnSpc>
+                <a:spcPct val="115000"/>
+              </a:lnSpc>
+              <a:spcAft>
+                <a:spcPts val="400"/>
+              </a:spcAft>
+            </a:pPr>
+            <a:r>
+              <a:rPr sz="1300" b="1">
+                <a:solidFill>
+                  <a:srgbClr val="16233D"/>
+                </a:solidFill>
+                <a:latin typeface="微软雅黑" a:ea="微软雅黑"/>
+              </a:rPr>
+              <a:t>个真实商品</a:t>
+            </a:r>
+          </a:p>
+          <a:p>
+            <a:pPr algn="ctr">
+              <a:lnSpc>
+                <a:spcPct val="115000"/>
+              </a:lnSpc>
+              <a:spcAft>
                 <a:spcPts val="600"/>
               </a:spcAft>
             </a:pPr>
             <a:r>
-              <a:rPr sz="1600" b="1">
-                <a:solidFill>
-                  <a:srgbClr val="16233D"/>
-                </a:solidFill>
-                <a:latin typeface="微软雅黑" a:ea="微软雅黑"/>
-              </a:rPr>
-              <a:t>目标用户</a:t>
-            </a:r>
-          </a:p>
-          <a:p>
-            <a:pPr algn="l">
-              <a:lnSpc>
-                <a:spcPct val="125000"/>
-              </a:lnSpc>
-              <a:spcAft>
-                <a:spcPts val="400"/>
-              </a:spcAft>
-            </a:pPr>
-            <a:r>
-              <a:rPr sz="1250" b="0">
+              <a:rPr sz="1050" b="0">
                 <a:solidFill>
                   <a:srgbClr val="6B7688"/>
                 </a:solidFill>
                 <a:latin typeface="微软雅黑" a:ea="微软雅黑"/>
               </a:rPr>
-              <a:t>中小电商卖家 / 个体创业者</a:t>
-            </a:r>
-          </a:p>
-          <a:p>
-            <a:pPr algn="l">
-              <a:lnSpc>
-                <a:spcPct val="125000"/>
-              </a:lnSpc>
-              <a:spcAft>
-                <a:spcPts val="400"/>
-              </a:spcAft>
-            </a:pPr>
-            <a:r>
-              <a:rPr sz="1250" b="0">
-                <a:solidFill>
-                  <a:srgbClr val="6B7688"/>
-                </a:solidFill>
-                <a:latin typeface="微软雅黑" a:ea="微软雅黑"/>
-              </a:rPr>
-              <a:t>品牌市场部与选品团队</a:t>
-            </a:r>
-          </a:p>
-          <a:p>
-            <a:pPr algn="l">
-              <a:lnSpc>
-                <a:spcPct val="125000"/>
-              </a:lnSpc>
-              <a:spcAft>
-                <a:spcPts val="400"/>
-              </a:spcAft>
-            </a:pPr>
-            <a:r>
-              <a:rPr sz="1250" b="0">
-                <a:solidFill>
-                  <a:srgbClr val="6B7688"/>
-                </a:solidFill>
-                <a:latin typeface="微软雅黑" a:ea="微软雅黑"/>
-              </a:rPr>
-              <a:t>投研与咨询分析师</a:t>
-            </a:r>
-          </a:p>
-          <a:p>
-            <a:pPr algn="l">
-              <a:lnSpc>
-                <a:spcPct val="125000"/>
-              </a:lnSpc>
-              <a:spcAft>
-                <a:spcPts val="400"/>
-              </a:spcAft>
-            </a:pPr>
-            <a:r>
-              <a:rPr sz="1250" b="0">
-                <a:solidFill>
-                  <a:srgbClr val="6B7688"/>
-                </a:solidFill>
-                <a:latin typeface="微软雅黑" a:ea="微软雅黑"/>
-              </a:rPr>
-              <a:t>代运营与电商服务商</a:t>
-            </a:r>
-          </a:p>
-        </p:txBody>
-      </p:sp>
-      <p:sp>
-        <p:nvSpPr>
-          <p:cNvPr id="7" name="Rounded Rectangle 6"/>
+              <a:t>苏宁公开搜索页两轮采集去重入库</a:t>
+            </a:r>
+          </a:p>
+        </p:txBody>
+      </p:sp>
+      <p:sp>
+        <p:nvSpPr>
+          <p:cNvPr id="6" name="Rounded Rectangle 5"/>
           <p:cNvSpPr/>
           <p:nvPr/>
         </p:nvSpPr>
         <p:spPr>
           <a:xfrm>
-            <a:off x="4343400" y="1691640"/>
-            <a:ext cx="3474720" cy="2286000"/>
+            <a:off x="3474720" y="1691640"/>
+            <a:ext cx="2542032" cy="1691640"/>
           </a:xfrm>
           <a:prstGeom prst="roundRect">
             <a:avLst/>
@@ -3796,58 +3715,14 @@
       </p:sp>
       <p:sp>
         <p:nvSpPr>
-          <p:cNvPr id="8" name="Rectangle 7"/>
-          <p:cNvSpPr/>
-          <p:nvPr/>
-        </p:nvSpPr>
-        <p:spPr>
-          <a:xfrm>
-            <a:off x="4343400" y="1691640"/>
-            <a:ext cx="68580" cy="2286000"/>
-          </a:xfrm>
-          <a:prstGeom prst="rect">
-            <a:avLst/>
-          </a:prstGeom>
-          <a:solidFill>
-            <a:srgbClr val="0F8F80"/>
-          </a:solidFill>
-          <a:ln>
-            <a:noFill/>
-          </a:ln>
-          <a:effectLst/>
-        </p:spPr>
-        <p:style>
-          <a:lnRef idx="1">
-            <a:schemeClr val="accent1"/>
-          </a:lnRef>
-          <a:fillRef idx="3">
-            <a:schemeClr val="accent1"/>
-          </a:fillRef>
-          <a:effectRef idx="2">
-            <a:schemeClr val="accent1"/>
-          </a:effectRef>
-          <a:fontRef idx="minor">
-            <a:schemeClr val="lt1"/>
-          </a:fontRef>
-        </p:style>
-        <p:txBody>
-          <a:bodyPr rtlCol="0" anchor="ctr"/>
-          <a:lstStyle/>
-          <a:p>
-            <a:pPr algn="ctr"/>
-          </a:p>
-        </p:txBody>
-      </p:sp>
-      <p:sp>
-        <p:nvSpPr>
-          <p:cNvPr id="9" name="TextBox 8"/>
+          <p:cNvPr id="7" name="TextBox 6"/>
           <p:cNvSpPr txBox="1"/>
           <p:nvPr/>
         </p:nvSpPr>
         <p:spPr>
           <a:xfrm>
-            <a:off x="4599432" y="1856232"/>
-            <a:ext cx="3017520" cy="2011680"/>
+            <a:off x="3474720" y="1828800"/>
+            <a:ext cx="2542032" cy="1463040"/>
           </a:xfrm>
           <a:prstGeom prst="rect">
             <a:avLst/>
@@ -3860,112 +3735,74 @@
           </a:bodyPr>
           <a:lstStyle/>
           <a:p>
-            <a:pPr algn="l">
+            <a:pPr algn="ctr">
               <a:lnSpc>
                 <a:spcPct val="115000"/>
               </a:lnSpc>
               <a:spcAft>
+                <a:spcPts val="0"/>
+              </a:spcAft>
+            </a:pPr>
+            <a:r>
+              <a:rPr sz="3200" b="1">
+                <a:solidFill>
+                  <a:srgbClr val="2F6FEB"/>
+                </a:solidFill>
+                <a:latin typeface="微软雅黑" a:ea="微软雅黑"/>
+              </a:rPr>
+              <a:t>20,082</a:t>
+            </a:r>
+          </a:p>
+          <a:p>
+            <a:pPr algn="ctr">
+              <a:lnSpc>
+                <a:spcPct val="115000"/>
+              </a:lnSpc>
+              <a:spcAft>
+                <a:spcPts val="400"/>
+              </a:spcAft>
+            </a:pPr>
+            <a:r>
+              <a:rPr sz="1300" b="1">
+                <a:solidFill>
+                  <a:srgbClr val="16233D"/>
+                </a:solidFill>
+                <a:latin typeface="微软雅黑" a:ea="微软雅黑"/>
+              </a:rPr>
+              <a:t>条日指标</a:t>
+            </a:r>
+          </a:p>
+          <a:p>
+            <a:pPr algn="ctr">
+              <a:lnSpc>
+                <a:spcPct val="115000"/>
+              </a:lnSpc>
+              <a:spcAft>
                 <a:spcPts val="600"/>
               </a:spcAft>
             </a:pPr>
             <a:r>
-              <a:rPr sz="1600" b="1">
-                <a:solidFill>
-                  <a:srgbClr val="16233D"/>
-                </a:solidFill>
-                <a:latin typeface="微软雅黑" a:ea="微软雅黑"/>
-              </a:rPr>
-              <a:t>直接价值</a:t>
-            </a:r>
-          </a:p>
-          <a:p>
-            <a:pPr algn="l">
-              <a:lnSpc>
-                <a:spcPct val="125000"/>
-              </a:lnSpc>
-              <a:spcAft>
-                <a:spcPts val="400"/>
-              </a:spcAft>
-            </a:pPr>
-            <a:r>
-              <a:rPr sz="1250" b="0">
+              <a:rPr sz="1050" b="0">
                 <a:solidFill>
                   <a:srgbClr val="6B7688"/>
                 </a:solidFill>
                 <a:latin typeface="微软雅黑" a:ea="微软雅黑"/>
               </a:rPr>
-              <a:t>把数小时人工比价压缩到 30 秒</a:t>
-            </a:r>
-          </a:p>
-          <a:p>
-            <a:pPr algn="l">
-              <a:lnSpc>
-                <a:spcPct val="125000"/>
-              </a:lnSpc>
-              <a:spcAft>
-                <a:spcPts val="400"/>
-              </a:spcAft>
-            </a:pPr>
-            <a:r>
-              <a:rPr sz="1250" b="0">
-                <a:solidFill>
-                  <a:srgbClr val="6B7688"/>
-                </a:solidFill>
-                <a:latin typeface="微软雅黑" a:ea="微软雅黑"/>
-              </a:rPr>
-              <a:t>降低选品试错与压货风险</a:t>
-            </a:r>
-          </a:p>
-          <a:p>
-            <a:pPr algn="l">
-              <a:lnSpc>
-                <a:spcPct val="125000"/>
-              </a:lnSpc>
-              <a:spcAft>
-                <a:spcPts val="400"/>
-              </a:spcAft>
-            </a:pPr>
-            <a:r>
-              <a:rPr sz="1250" b="0">
-                <a:solidFill>
-                  <a:srgbClr val="6B7688"/>
-                </a:solidFill>
-                <a:latin typeface="微软雅黑" a:ea="微软雅黑"/>
-              </a:rPr>
-              <a:t>定价有锚点、切入有理由、风险有提示</a:t>
-            </a:r>
-          </a:p>
-          <a:p>
-            <a:pPr algn="l">
-              <a:lnSpc>
-                <a:spcPct val="125000"/>
-              </a:lnSpc>
-              <a:spcAft>
-                <a:spcPts val="400"/>
-              </a:spcAft>
-            </a:pPr>
-            <a:r>
-              <a:rPr sz="1250" b="0">
-                <a:solidFill>
-                  <a:srgbClr val="6B7688"/>
-                </a:solidFill>
-                <a:latin typeface="微软雅黑" a:ea="微软雅黑"/>
-              </a:rPr>
-              <a:t>每条结论可追溯到数据来源</a:t>
-            </a:r>
-          </a:p>
-        </p:txBody>
-      </p:sp>
-      <p:sp>
-        <p:nvSpPr>
-          <p:cNvPr id="10" name="Rounded Rectangle 9"/>
+              <a:t>演示数据集 + 两轮真实数据合计</a:t>
+            </a:r>
+          </a:p>
+        </p:txBody>
+      </p:sp>
+      <p:sp>
+        <p:nvSpPr>
+          <p:cNvPr id="8" name="Rounded Rectangle 7"/>
           <p:cNvSpPr/>
           <p:nvPr/>
         </p:nvSpPr>
         <p:spPr>
           <a:xfrm>
-            <a:off x="8001000" y="1691640"/>
-            <a:ext cx="3566160" cy="2286000"/>
+            <a:off x="6263640" y="1691640"/>
+            <a:ext cx="2542032" cy="1691640"/>
           </a:xfrm>
           <a:prstGeom prst="roundRect">
             <a:avLst/>
@@ -4004,14 +3841,474 @@
       </p:sp>
       <p:sp>
         <p:nvSpPr>
-          <p:cNvPr id="11" name="Rectangle 10"/>
+          <p:cNvPr id="9" name="TextBox 8"/>
+          <p:cNvSpPr txBox="1"/>
+          <p:nvPr/>
+        </p:nvSpPr>
+        <p:spPr>
+          <a:xfrm>
+            <a:off x="6263640" y="1828800"/>
+            <a:ext cx="2542032" cy="1463040"/>
+          </a:xfrm>
+          <a:prstGeom prst="rect">
+            <a:avLst/>
+          </a:prstGeom>
+          <a:noFill/>
+        </p:spPr>
+        <p:txBody>
+          <a:bodyPr wrap="square" anchor="t">
+            <a:spAutoFit/>
+          </a:bodyPr>
+          <a:lstStyle/>
+          <a:p>
+            <a:pPr algn="ctr">
+              <a:lnSpc>
+                <a:spcPct val="115000"/>
+              </a:lnSpc>
+              <a:spcAft>
+                <a:spcPts val="0"/>
+              </a:spcAft>
+            </a:pPr>
+            <a:r>
+              <a:rPr sz="3200" b="1">
+                <a:solidFill>
+                  <a:srgbClr val="2F6FEB"/>
+                </a:solidFill>
+                <a:latin typeface="微软雅黑" a:ea="微软雅黑"/>
+              </a:rPr>
+              <a:t>44 / 18</a:t>
+            </a:r>
+          </a:p>
+          <a:p>
+            <a:pPr algn="ctr">
+              <a:lnSpc>
+                <a:spcPct val="115000"/>
+              </a:lnSpc>
+              <a:spcAft>
+                <a:spcPts val="400"/>
+              </a:spcAft>
+            </a:pPr>
+            <a:r>
+              <a:rPr sz="1300" b="1">
+                <a:solidFill>
+                  <a:srgbClr val="16233D"/>
+                </a:solidFill>
+                <a:latin typeface="微软雅黑" a:ea="微软雅黑"/>
+              </a:rPr>
+              <a:t>项测试</a:t>
+            </a:r>
+          </a:p>
+          <a:p>
+            <a:pPr algn="ctr">
+              <a:lnSpc>
+                <a:spcPct val="115000"/>
+              </a:lnSpc>
+              <a:spcAft>
+                <a:spcPts val="600"/>
+              </a:spcAft>
+            </a:pPr>
+            <a:r>
+              <a:rPr sz="1050" b="0">
+                <a:solidFill>
+                  <a:srgbClr val="6B7688"/>
+                </a:solidFill>
+                <a:latin typeface="微软雅黑" a:ea="微软雅黑"/>
+              </a:rPr>
+              <a:t>端到端冒烟 + 适配器单元测试全通过</a:t>
+            </a:r>
+          </a:p>
+        </p:txBody>
+      </p:sp>
+      <p:sp>
+        <p:nvSpPr>
+          <p:cNvPr id="10" name="Rounded Rectangle 9"/>
           <p:cNvSpPr/>
           <p:nvPr/>
         </p:nvSpPr>
         <p:spPr>
           <a:xfrm>
-            <a:off x="8001000" y="1691640"/>
-            <a:ext cx="68580" cy="2286000"/>
+            <a:off x="9052559" y="1691640"/>
+            <a:ext cx="2542032" cy="1691640"/>
+          </a:xfrm>
+          <a:prstGeom prst="roundRect">
+            <a:avLst/>
+          </a:prstGeom>
+          <a:solidFill>
+            <a:srgbClr val="FFFFFF"/>
+          </a:solidFill>
+          <a:ln w="9525">
+            <a:solidFill>
+              <a:srgbClr val="D8E0EE"/>
+            </a:solidFill>
+          </a:ln>
+          <a:effectLst/>
+        </p:spPr>
+        <p:style>
+          <a:lnRef idx="1">
+            <a:schemeClr val="accent1"/>
+          </a:lnRef>
+          <a:fillRef idx="3">
+            <a:schemeClr val="accent1"/>
+          </a:fillRef>
+          <a:effectRef idx="2">
+            <a:schemeClr val="accent1"/>
+          </a:effectRef>
+          <a:fontRef idx="minor">
+            <a:schemeClr val="lt1"/>
+          </a:fontRef>
+        </p:style>
+        <p:txBody>
+          <a:bodyPr rtlCol="0" anchor="ctr"/>
+          <a:lstStyle/>
+          <a:p>
+            <a:pPr algn="ctr"/>
+          </a:p>
+        </p:txBody>
+      </p:sp>
+      <p:sp>
+        <p:nvSpPr>
+          <p:cNvPr id="11" name="TextBox 10"/>
+          <p:cNvSpPr txBox="1"/>
+          <p:nvPr/>
+        </p:nvSpPr>
+        <p:spPr>
+          <a:xfrm>
+            <a:off x="9052559" y="1828800"/>
+            <a:ext cx="2542032" cy="1463040"/>
+          </a:xfrm>
+          <a:prstGeom prst="rect">
+            <a:avLst/>
+          </a:prstGeom>
+          <a:noFill/>
+        </p:spPr>
+        <p:txBody>
+          <a:bodyPr wrap="square" anchor="t">
+            <a:spAutoFit/>
+          </a:bodyPr>
+          <a:lstStyle/>
+          <a:p>
+            <a:pPr algn="ctr">
+              <a:lnSpc>
+                <a:spcPct val="115000"/>
+              </a:lnSpc>
+              <a:spcAft>
+                <a:spcPts val="0"/>
+              </a:spcAft>
+            </a:pPr>
+            <a:r>
+              <a:rPr sz="3200" b="1">
+                <a:solidFill>
+                  <a:srgbClr val="2F6FEB"/>
+                </a:solidFill>
+                <a:latin typeface="微软雅黑" a:ea="微软雅黑"/>
+              </a:rPr>
+              <a:t>0</a:t>
+            </a:r>
+          </a:p>
+          <a:p>
+            <a:pPr algn="ctr">
+              <a:lnSpc>
+                <a:spcPct val="115000"/>
+              </a:lnSpc>
+              <a:spcAft>
+                <a:spcPts val="400"/>
+              </a:spcAft>
+            </a:pPr>
+            <a:r>
+              <a:rPr sz="1300" b="1">
+                <a:solidFill>
+                  <a:srgbClr val="16233D"/>
+                </a:solidFill>
+                <a:latin typeface="微软雅黑" a:ea="微软雅黑"/>
+              </a:rPr>
+              <a:t>第三方依赖</a:t>
+            </a:r>
+          </a:p>
+          <a:p>
+            <a:pPr algn="ctr">
+              <a:lnSpc>
+                <a:spcPct val="115000"/>
+              </a:lnSpc>
+              <a:spcAft>
+                <a:spcPts val="600"/>
+              </a:spcAft>
+            </a:pPr>
+            <a:r>
+              <a:rPr sz="1050" b="0">
+                <a:solidFill>
+                  <a:srgbClr val="6B7688"/>
+                </a:solidFill>
+                <a:latin typeface="微软雅黑" a:ea="微软雅黑"/>
+              </a:rPr>
+              <a:t>纯 Python 标准库，两条命令复现</a:t>
+            </a:r>
+          </a:p>
+        </p:txBody>
+      </p:sp>
+      <p:sp>
+        <p:nvSpPr>
+          <p:cNvPr id="12" name="Rounded Rectangle 11"/>
+          <p:cNvSpPr/>
+          <p:nvPr/>
+        </p:nvSpPr>
+        <p:spPr>
+          <a:xfrm>
+            <a:off x="685800" y="3611880"/>
+            <a:ext cx="5349240" cy="2606040"/>
+          </a:xfrm>
+          <a:prstGeom prst="roundRect">
+            <a:avLst/>
+          </a:prstGeom>
+          <a:solidFill>
+            <a:srgbClr val="FFFFFF"/>
+          </a:solidFill>
+          <a:ln w="9525">
+            <a:solidFill>
+              <a:srgbClr val="D8E0EE"/>
+            </a:solidFill>
+          </a:ln>
+          <a:effectLst/>
+        </p:spPr>
+        <p:style>
+          <a:lnRef idx="1">
+            <a:schemeClr val="accent1"/>
+          </a:lnRef>
+          <a:fillRef idx="3">
+            <a:schemeClr val="accent1"/>
+          </a:fillRef>
+          <a:effectRef idx="2">
+            <a:schemeClr val="accent1"/>
+          </a:effectRef>
+          <a:fontRef idx="minor">
+            <a:schemeClr val="lt1"/>
+          </a:fontRef>
+        </p:style>
+        <p:txBody>
+          <a:bodyPr rtlCol="0" anchor="ctr"/>
+          <a:lstStyle/>
+          <a:p>
+            <a:pPr algn="ctr"/>
+          </a:p>
+        </p:txBody>
+      </p:sp>
+      <p:sp>
+        <p:nvSpPr>
+          <p:cNvPr id="13" name="Rectangle 12"/>
+          <p:cNvSpPr/>
+          <p:nvPr/>
+        </p:nvSpPr>
+        <p:spPr>
+          <a:xfrm>
+            <a:off x="685800" y="3611880"/>
+            <a:ext cx="68580" cy="2606040"/>
+          </a:xfrm>
+          <a:prstGeom prst="rect">
+            <a:avLst/>
+          </a:prstGeom>
+          <a:solidFill>
+            <a:srgbClr val="2F6FEB"/>
+          </a:solidFill>
+          <a:ln>
+            <a:noFill/>
+          </a:ln>
+          <a:effectLst/>
+        </p:spPr>
+        <p:style>
+          <a:lnRef idx="1">
+            <a:schemeClr val="accent1"/>
+          </a:lnRef>
+          <a:fillRef idx="3">
+            <a:schemeClr val="accent1"/>
+          </a:fillRef>
+          <a:effectRef idx="2">
+            <a:schemeClr val="accent1"/>
+          </a:effectRef>
+          <a:fontRef idx="minor">
+            <a:schemeClr val="lt1"/>
+          </a:fontRef>
+        </p:style>
+        <p:txBody>
+          <a:bodyPr rtlCol="0" anchor="ctr"/>
+          <a:lstStyle/>
+          <a:p>
+            <a:pPr algn="ctr"/>
+          </a:p>
+        </p:txBody>
+      </p:sp>
+      <p:sp>
+        <p:nvSpPr>
+          <p:cNvPr id="14" name="TextBox 13"/>
+          <p:cNvSpPr txBox="1"/>
+          <p:nvPr/>
+        </p:nvSpPr>
+        <p:spPr>
+          <a:xfrm>
+            <a:off x="941832" y="3776472"/>
+            <a:ext cx="4892040" cy="2331720"/>
+          </a:xfrm>
+          <a:prstGeom prst="rect">
+            <a:avLst/>
+          </a:prstGeom>
+          <a:noFill/>
+        </p:spPr>
+        <p:txBody>
+          <a:bodyPr wrap="square" anchor="t">
+            <a:spAutoFit/>
+          </a:bodyPr>
+          <a:lstStyle/>
+          <a:p>
+            <a:pPr algn="l">
+              <a:lnSpc>
+                <a:spcPct val="115000"/>
+              </a:lnSpc>
+              <a:spcAft>
+                <a:spcPts val="600"/>
+              </a:spcAft>
+            </a:pPr>
+            <a:r>
+              <a:rPr sz="1600" b="1">
+                <a:solidFill>
+                  <a:srgbClr val="16233D"/>
+                </a:solidFill>
+                <a:latin typeface="微软雅黑" a:ea="微软雅黑"/>
+              </a:rPr>
+              <a:t>真实数据下的分析输出（节选）</a:t>
+            </a:r>
+          </a:p>
+          <a:p>
+            <a:pPr algn="l">
+              <a:lnSpc>
+                <a:spcPct val="125000"/>
+              </a:lnSpc>
+              <a:spcAft>
+                <a:spcPts val="400"/>
+              </a:spcAft>
+            </a:pPr>
+            <a:r>
+              <a:rPr sz="1250" b="0">
+                <a:solidFill>
+                  <a:srgbClr val="6B7688"/>
+                </a:solidFill>
+                <a:latin typeface="微软雅黑" a:ea="微软雅黑"/>
+              </a:rPr>
+              <a:t>「保温杯」：30 个真实商品，CR5=0.90、HHI=0.170（高度集中）</a:t>
+            </a:r>
+          </a:p>
+          <a:p>
+            <a:pPr algn="l">
+              <a:lnSpc>
+                <a:spcPct val="125000"/>
+              </a:lnSpc>
+              <a:spcAft>
+                <a:spcPts val="400"/>
+              </a:spcAft>
+            </a:pPr>
+            <a:r>
+              <a:rPr sz="1250" b="0">
+                <a:solidFill>
+                  <a:srgbClr val="6B7688"/>
+                </a:solidFill>
+                <a:latin typeface="微软雅黑" a:ea="微软雅黑"/>
+              </a:rPr>
+              <a:t>建议动作 3 条，均为真实商品（JEKO / 希乐 / 炊大皇）</a:t>
+            </a:r>
+          </a:p>
+          <a:p>
+            <a:pPr algn="l">
+              <a:lnSpc>
+                <a:spcPct val="125000"/>
+              </a:lnSpc>
+              <a:spcAft>
+                <a:spcPts val="400"/>
+              </a:spcAft>
+            </a:pPr>
+            <a:r>
+              <a:rPr sz="1250" b="0">
+                <a:solidFill>
+                  <a:srgbClr val="6B7688"/>
+                </a:solidFill>
+                <a:latin typeface="微软雅黑" a:ea="微软雅黑"/>
+              </a:rPr>
+              <a:t>每条建议附证据指标，证据链校验通过</a:t>
+            </a:r>
+          </a:p>
+          <a:p>
+            <a:pPr algn="l">
+              <a:lnSpc>
+                <a:spcPct val="125000"/>
+              </a:lnSpc>
+              <a:spcAft>
+                <a:spcPts val="400"/>
+              </a:spcAft>
+            </a:pPr>
+            <a:r>
+              <a:rPr sz="1250" b="0">
+                <a:solidFill>
+                  <a:srgbClr val="6B7688"/>
+                </a:solidFill>
+                <a:latin typeface="微软雅黑" a:ea="微软雅黑"/>
+              </a:rPr>
+              <a:t>报告自动标注：环比不可用、价格未采集</a:t>
+            </a:r>
+          </a:p>
+        </p:txBody>
+      </p:sp>
+      <p:sp>
+        <p:nvSpPr>
+          <p:cNvPr id="15" name="Rounded Rectangle 14"/>
+          <p:cNvSpPr/>
+          <p:nvPr/>
+        </p:nvSpPr>
+        <p:spPr>
+          <a:xfrm>
+            <a:off x="6217920" y="3611880"/>
+            <a:ext cx="5349240" cy="2606040"/>
+          </a:xfrm>
+          <a:prstGeom prst="roundRect">
+            <a:avLst/>
+          </a:prstGeom>
+          <a:solidFill>
+            <a:srgbClr val="FFFFFF"/>
+          </a:solidFill>
+          <a:ln w="9525">
+            <a:solidFill>
+              <a:srgbClr val="D8E0EE"/>
+            </a:solidFill>
+          </a:ln>
+          <a:effectLst/>
+        </p:spPr>
+        <p:style>
+          <a:lnRef idx="1">
+            <a:schemeClr val="accent1"/>
+          </a:lnRef>
+          <a:fillRef idx="3">
+            <a:schemeClr val="accent1"/>
+          </a:fillRef>
+          <a:effectRef idx="2">
+            <a:schemeClr val="accent1"/>
+          </a:effectRef>
+          <a:fontRef idx="minor">
+            <a:schemeClr val="lt1"/>
+          </a:fontRef>
+        </p:style>
+        <p:txBody>
+          <a:bodyPr rtlCol="0" anchor="ctr"/>
+          <a:lstStyle/>
+          <a:p>
+            <a:pPr algn="ctr"/>
+          </a:p>
+        </p:txBody>
+      </p:sp>
+      <p:sp>
+        <p:nvSpPr>
+          <p:cNvPr id="16" name="Rectangle 15"/>
+          <p:cNvSpPr/>
+          <p:nvPr/>
+        </p:nvSpPr>
+        <p:spPr>
+          <a:xfrm>
+            <a:off x="6217920" y="3611880"/>
+            <a:ext cx="68580" cy="2606040"/>
           </a:xfrm>
           <a:prstGeom prst="rect">
             <a:avLst/>
@@ -4048,14 +4345,14 @@
       </p:sp>
       <p:sp>
         <p:nvSpPr>
-          <p:cNvPr id="12" name="TextBox 11"/>
+          <p:cNvPr id="17" name="TextBox 16"/>
           <p:cNvSpPr txBox="1"/>
           <p:nvPr/>
         </p:nvSpPr>
         <p:spPr>
           <a:xfrm>
-            <a:off x="8257031" y="1856232"/>
-            <a:ext cx="3108960" cy="2011680"/>
+            <a:off x="6473952" y="3776472"/>
+            <a:ext cx="4892040" cy="2331720"/>
           </a:xfrm>
           <a:prstGeom prst="rect">
             <a:avLst/>
@@ -4083,7 +4380,7 @@
                 </a:solidFill>
                 <a:latin typeface="微软雅黑" a:ea="微软雅黑"/>
               </a:rPr>
-              <a:t>商业模式</a:t>
+              <a:t>两轮采集中发现并修复的真实问题</a:t>
             </a:r>
           </a:p>
           <a:p>
@@ -4102,7 +4399,7 @@
                 </a:solidFill>
                 <a:latin typeface="微软雅黑" a:ea="微软雅黑"/>
               </a:rPr>
-              <a:t>SaaS 订阅（按类目 / 席位）</a:t>
+              <a:t>评价数是缓存展示值，日级增量观测不到 → 新增降级口径（0.40）</a:t>
             </a:r>
           </a:p>
           <a:p>
@@ -4121,7 +4418,7 @@
                 </a:solidFill>
                 <a:latin typeface="微软雅黑" a:ea="微软雅黑"/>
               </a:rPr>
-              <a:t>单份市场机会报告按次付费</a:t>
+              <a:t>同名类目在演示/真实数据中歧义 → 解析优先真实源并支持切换</a:t>
             </a:r>
           </a:p>
           <a:p>
@@ -4140,7 +4437,7 @@
                 </a:solidFill>
                 <a:latin typeface="微软雅黑" a:ea="微软雅黑"/>
               </a:rPr>
-              <a:t>为服务商提供批量选品 API</a:t>
+              <a:t>搜「猫爬架」27 条里 26 条是无关推荐位商品 → 加相关性过滤</a:t>
             </a:r>
           </a:p>
           <a:p>
@@ -4159,221 +4456,7 @@
                 </a:solidFill>
                 <a:latin typeface="微软雅黑" a:ea="微软雅黑"/>
               </a:rPr>
-              <a:t>数据合规，可对接企业采购流程</a:t>
-            </a:r>
-          </a:p>
-        </p:txBody>
-      </p:sp>
-      <p:sp>
-        <p:nvSpPr>
-          <p:cNvPr id="13" name="Rounded Rectangle 12"/>
-          <p:cNvSpPr/>
-          <p:nvPr/>
-        </p:nvSpPr>
-        <p:spPr>
-          <a:xfrm>
-            <a:off x="685800" y="4206240"/>
-            <a:ext cx="2011680" cy="457200"/>
-          </a:xfrm>
-          <a:prstGeom prst="roundRect">
-            <a:avLst/>
-          </a:prstGeom>
-          <a:solidFill>
-            <a:srgbClr val="EAF1FF"/>
-          </a:solidFill>
-          <a:ln>
-            <a:noFill/>
-          </a:ln>
-          <a:effectLst/>
-        </p:spPr>
-        <p:style>
-          <a:lnRef idx="1">
-            <a:schemeClr val="accent1"/>
-          </a:lnRef>
-          <a:fillRef idx="3">
-            <a:schemeClr val="accent1"/>
-          </a:fillRef>
-          <a:effectRef idx="2">
-            <a:schemeClr val="accent1"/>
-          </a:effectRef>
-          <a:fontRef idx="minor">
-            <a:schemeClr val="lt1"/>
-          </a:fontRef>
-        </p:style>
-        <p:txBody>
-          <a:bodyPr rtlCol="0" anchor="ctr"/>
-          <a:lstStyle/>
-          <a:p>
-            <a:pPr algn="ctr"/>
-          </a:p>
-        </p:txBody>
-      </p:sp>
-      <p:sp>
-        <p:nvSpPr>
-          <p:cNvPr id="14" name="TextBox 13"/>
-          <p:cNvSpPr txBox="1"/>
-          <p:nvPr/>
-        </p:nvSpPr>
-        <p:spPr>
-          <a:xfrm>
-            <a:off x="777240" y="4206240"/>
-            <a:ext cx="1828800" cy="457200"/>
-          </a:xfrm>
-          <a:prstGeom prst="rect">
-            <a:avLst/>
-          </a:prstGeom>
-          <a:noFill/>
-        </p:spPr>
-        <p:txBody>
-          <a:bodyPr wrap="square" anchor="ctr">
-            <a:spAutoFit/>
-          </a:bodyPr>
-          <a:lstStyle/>
-          <a:p>
-            <a:pPr algn="ctr">
-              <a:lnSpc>
-                <a:spcPct val="115000"/>
-              </a:lnSpc>
-              <a:spcAft>
-                <a:spcPts val="600"/>
-              </a:spcAft>
-            </a:pPr>
-            <a:r>
-              <a:rPr sz="1100" b="1">
-                <a:solidFill>
-                  <a:srgbClr val="2F6FEB"/>
-                </a:solidFill>
-                <a:latin typeface="微软雅黑" a:ea="微软雅黑"/>
-              </a:rPr>
-              <a:t>已完成</a:t>
-            </a:r>
-          </a:p>
-        </p:txBody>
-      </p:sp>
-      <p:sp>
-        <p:nvSpPr>
-          <p:cNvPr id="15" name="TextBox 14"/>
-          <p:cNvSpPr txBox="1"/>
-          <p:nvPr/>
-        </p:nvSpPr>
-        <p:spPr>
-          <a:xfrm>
-            <a:off x="2880360" y="4206240"/>
-            <a:ext cx="8686800" cy="457200"/>
-          </a:xfrm>
-          <a:prstGeom prst="rect">
-            <a:avLst/>
-          </a:prstGeom>
-          <a:noFill/>
-        </p:spPr>
-        <p:txBody>
-          <a:bodyPr wrap="square" anchor="ctr">
-            <a:spAutoFit/>
-          </a:bodyPr>
-          <a:lstStyle/>
-          <a:p>
-            <a:pPr algn="l">
-              <a:lnSpc>
-                <a:spcPct val="115000"/>
-              </a:lnSpc>
-              <a:spcAft>
-                <a:spcPts val="600"/>
-              </a:spcAft>
-            </a:pPr>
-            <a:r>
-              <a:rPr sz="1150" b="0">
-                <a:solidFill>
-                  <a:srgbClr val="6B7688"/>
-                </a:solidFill>
-                <a:latin typeface="微软雅黑" a:ea="微软雅黑"/>
-              </a:rPr>
-              <a:t>真实公开数据采集 + 指标 + AI 建议 + 看板全链路跑通</a:t>
-            </a:r>
-          </a:p>
-        </p:txBody>
-      </p:sp>
-      <p:sp>
-        <p:nvSpPr>
-          <p:cNvPr id="16" name="Rounded Rectangle 15"/>
-          <p:cNvSpPr/>
-          <p:nvPr/>
-        </p:nvSpPr>
-        <p:spPr>
-          <a:xfrm>
-            <a:off x="685800" y="4754879"/>
-            <a:ext cx="2011680" cy="457200"/>
-          </a:xfrm>
-          <a:prstGeom prst="roundRect">
-            <a:avLst/>
-          </a:prstGeom>
-          <a:solidFill>
-            <a:srgbClr val="EAF1FF"/>
-          </a:solidFill>
-          <a:ln>
-            <a:noFill/>
-          </a:ln>
-          <a:effectLst/>
-        </p:spPr>
-        <p:style>
-          <a:lnRef idx="1">
-            <a:schemeClr val="accent1"/>
-          </a:lnRef>
-          <a:fillRef idx="3">
-            <a:schemeClr val="accent1"/>
-          </a:fillRef>
-          <a:effectRef idx="2">
-            <a:schemeClr val="accent1"/>
-          </a:effectRef>
-          <a:fontRef idx="minor">
-            <a:schemeClr val="lt1"/>
-          </a:fontRef>
-        </p:style>
-        <p:txBody>
-          <a:bodyPr rtlCol="0" anchor="ctr"/>
-          <a:lstStyle/>
-          <a:p>
-            <a:pPr algn="ctr"/>
-          </a:p>
-        </p:txBody>
-      </p:sp>
-      <p:sp>
-        <p:nvSpPr>
-          <p:cNvPr id="17" name="TextBox 16"/>
-          <p:cNvSpPr txBox="1"/>
-          <p:nvPr/>
-        </p:nvSpPr>
-        <p:spPr>
-          <a:xfrm>
-            <a:off x="777240" y="4754879"/>
-            <a:ext cx="1828800" cy="457200"/>
-          </a:xfrm>
-          <a:prstGeom prst="rect">
-            <a:avLst/>
-          </a:prstGeom>
-          <a:noFill/>
-        </p:spPr>
-        <p:txBody>
-          <a:bodyPr wrap="square" anchor="ctr">
-            <a:spAutoFit/>
-          </a:bodyPr>
-          <a:lstStyle/>
-          <a:p>
-            <a:pPr algn="ctr">
-              <a:lnSpc>
-                <a:spcPct val="115000"/>
-              </a:lnSpc>
-              <a:spcAft>
-                <a:spcPts val="600"/>
-              </a:spcAft>
-            </a:pPr>
-            <a:r>
-              <a:rPr sz="1100" b="1">
-                <a:solidFill>
-                  <a:srgbClr val="2F6FEB"/>
-                </a:solidFill>
-                <a:latin typeface="微软雅黑" a:ea="微软雅黑"/>
-              </a:rPr>
-              <a:t>下一步（短期）</a:t>
+              <a:t>官方 API 返回滚动销量 → 不能当累计值相减 → 新增独立口径</a:t>
             </a:r>
           </a:p>
         </p:txBody>
@@ -4381,304 +4464,6 @@
       <p:sp>
         <p:nvSpPr>
           <p:cNvPr id="18" name="TextBox 17"/>
-          <p:cNvSpPr txBox="1"/>
-          <p:nvPr/>
-        </p:nvSpPr>
-        <p:spPr>
-          <a:xfrm>
-            <a:off x="2880360" y="4754879"/>
-            <a:ext cx="8686800" cy="457200"/>
-          </a:xfrm>
-          <a:prstGeom prst="rect">
-            <a:avLst/>
-          </a:prstGeom>
-          <a:noFill/>
-        </p:spPr>
-        <p:txBody>
-          <a:bodyPr wrap="square" anchor="ctr">
-            <a:spAutoFit/>
-          </a:bodyPr>
-          <a:lstStyle/>
-          <a:p>
-            <a:pPr algn="l">
-              <a:lnSpc>
-                <a:spcPct val="115000"/>
-              </a:lnSpc>
-              <a:spcAft>
-                <a:spcPts val="600"/>
-              </a:spcAft>
-            </a:pPr>
-            <a:r>
-              <a:rPr sz="1150" b="0">
-                <a:solidFill>
-                  <a:srgbClr val="6B7688"/>
-                </a:solidFill>
-                <a:latin typeface="微软雅黑" a:ea="微软雅黑"/>
-              </a:rPr>
-              <a:t>启用官方 API 补真实销量与价格；支持用户粘贴页面 / 浏览器书签采集长尾站点</a:t>
-            </a:r>
-          </a:p>
-        </p:txBody>
-      </p:sp>
-      <p:sp>
-        <p:nvSpPr>
-          <p:cNvPr id="19" name="Rounded Rectangle 18"/>
-          <p:cNvSpPr/>
-          <p:nvPr/>
-        </p:nvSpPr>
-        <p:spPr>
-          <a:xfrm>
-            <a:off x="685800" y="5303520"/>
-            <a:ext cx="2011680" cy="457200"/>
-          </a:xfrm>
-          <a:prstGeom prst="roundRect">
-            <a:avLst/>
-          </a:prstGeom>
-          <a:solidFill>
-            <a:srgbClr val="EAF1FF"/>
-          </a:solidFill>
-          <a:ln>
-            <a:noFill/>
-          </a:ln>
-          <a:effectLst/>
-        </p:spPr>
-        <p:style>
-          <a:lnRef idx="1">
-            <a:schemeClr val="accent1"/>
-          </a:lnRef>
-          <a:fillRef idx="3">
-            <a:schemeClr val="accent1"/>
-          </a:fillRef>
-          <a:effectRef idx="2">
-            <a:schemeClr val="accent1"/>
-          </a:effectRef>
-          <a:fontRef idx="minor">
-            <a:schemeClr val="lt1"/>
-          </a:fontRef>
-        </p:style>
-        <p:txBody>
-          <a:bodyPr rtlCol="0" anchor="ctr"/>
-          <a:lstStyle/>
-          <a:p>
-            <a:pPr algn="ctr"/>
-          </a:p>
-        </p:txBody>
-      </p:sp>
-      <p:sp>
-        <p:nvSpPr>
-          <p:cNvPr id="20" name="TextBox 19"/>
-          <p:cNvSpPr txBox="1"/>
-          <p:nvPr/>
-        </p:nvSpPr>
-        <p:spPr>
-          <a:xfrm>
-            <a:off x="777240" y="5303520"/>
-            <a:ext cx="1828800" cy="457200"/>
-          </a:xfrm>
-          <a:prstGeom prst="rect">
-            <a:avLst/>
-          </a:prstGeom>
-          <a:noFill/>
-        </p:spPr>
-        <p:txBody>
-          <a:bodyPr wrap="square" anchor="ctr">
-            <a:spAutoFit/>
-          </a:bodyPr>
-          <a:lstStyle/>
-          <a:p>
-            <a:pPr algn="ctr">
-              <a:lnSpc>
-                <a:spcPct val="115000"/>
-              </a:lnSpc>
-              <a:spcAft>
-                <a:spcPts val="600"/>
-              </a:spcAft>
-            </a:pPr>
-            <a:r>
-              <a:rPr sz="1100" b="1">
-                <a:solidFill>
-                  <a:srgbClr val="2F6FEB"/>
-                </a:solidFill>
-                <a:latin typeface="微软雅黑" a:ea="微软雅黑"/>
-              </a:rPr>
-              <a:t>下一步（中期）</a:t>
-            </a:r>
-          </a:p>
-        </p:txBody>
-      </p:sp>
-      <p:sp>
-        <p:nvSpPr>
-          <p:cNvPr id="21" name="TextBox 20"/>
-          <p:cNvSpPr txBox="1"/>
-          <p:nvPr/>
-        </p:nvSpPr>
-        <p:spPr>
-          <a:xfrm>
-            <a:off x="2880360" y="5303520"/>
-            <a:ext cx="8686800" cy="457200"/>
-          </a:xfrm>
-          <a:prstGeom prst="rect">
-            <a:avLst/>
-          </a:prstGeom>
-          <a:noFill/>
-        </p:spPr>
-        <p:txBody>
-          <a:bodyPr wrap="square" anchor="ctr">
-            <a:spAutoFit/>
-          </a:bodyPr>
-          <a:lstStyle/>
-          <a:p>
-            <a:pPr algn="l">
-              <a:lnSpc>
-                <a:spcPct val="115000"/>
-              </a:lnSpc>
-              <a:spcAft>
-                <a:spcPts val="600"/>
-              </a:spcAft>
-            </a:pPr>
-            <a:r>
-              <a:rPr sz="1150" b="0">
-                <a:solidFill>
-                  <a:srgbClr val="6B7688"/>
-                </a:solidFill>
-                <a:latin typeface="微软雅黑" a:ea="微软雅黑"/>
-              </a:rPr>
-              <a:t>Agent 自动生成《某品类市场机会研究报告》；对接商家后台做授权导入</a:t>
-            </a:r>
-          </a:p>
-        </p:txBody>
-      </p:sp>
-      <p:sp>
-        <p:nvSpPr>
-          <p:cNvPr id="22" name="Rounded Rectangle 21"/>
-          <p:cNvSpPr/>
-          <p:nvPr/>
-        </p:nvSpPr>
-        <p:spPr>
-          <a:xfrm>
-            <a:off x="685800" y="5852159"/>
-            <a:ext cx="2011680" cy="457200"/>
-          </a:xfrm>
-          <a:prstGeom prst="roundRect">
-            <a:avLst/>
-          </a:prstGeom>
-          <a:solidFill>
-            <a:srgbClr val="EAF1FF"/>
-          </a:solidFill>
-          <a:ln>
-            <a:noFill/>
-          </a:ln>
-          <a:effectLst/>
-        </p:spPr>
-        <p:style>
-          <a:lnRef idx="1">
-            <a:schemeClr val="accent1"/>
-          </a:lnRef>
-          <a:fillRef idx="3">
-            <a:schemeClr val="accent1"/>
-          </a:fillRef>
-          <a:effectRef idx="2">
-            <a:schemeClr val="accent1"/>
-          </a:effectRef>
-          <a:fontRef idx="minor">
-            <a:schemeClr val="lt1"/>
-          </a:fontRef>
-        </p:style>
-        <p:txBody>
-          <a:bodyPr rtlCol="0" anchor="ctr"/>
-          <a:lstStyle/>
-          <a:p>
-            <a:pPr algn="ctr"/>
-          </a:p>
-        </p:txBody>
-      </p:sp>
-      <p:sp>
-        <p:nvSpPr>
-          <p:cNvPr id="23" name="TextBox 22"/>
-          <p:cNvSpPr txBox="1"/>
-          <p:nvPr/>
-        </p:nvSpPr>
-        <p:spPr>
-          <a:xfrm>
-            <a:off x="777240" y="5852159"/>
-            <a:ext cx="1828800" cy="457200"/>
-          </a:xfrm>
-          <a:prstGeom prst="rect">
-            <a:avLst/>
-          </a:prstGeom>
-          <a:noFill/>
-        </p:spPr>
-        <p:txBody>
-          <a:bodyPr wrap="square" anchor="ctr">
-            <a:spAutoFit/>
-          </a:bodyPr>
-          <a:lstStyle/>
-          <a:p>
-            <a:pPr algn="ctr">
-              <a:lnSpc>
-                <a:spcPct val="115000"/>
-              </a:lnSpc>
-              <a:spcAft>
-                <a:spcPts val="600"/>
-              </a:spcAft>
-            </a:pPr>
-            <a:r>
-              <a:rPr sz="1100" b="1">
-                <a:solidFill>
-                  <a:srgbClr val="2F6FEB"/>
-                </a:solidFill>
-                <a:latin typeface="微软雅黑" a:ea="微软雅黑"/>
-              </a:rPr>
-              <a:t>下一步（长期）</a:t>
-            </a:r>
-          </a:p>
-        </p:txBody>
-      </p:sp>
-      <p:sp>
-        <p:nvSpPr>
-          <p:cNvPr id="24" name="TextBox 23"/>
-          <p:cNvSpPr txBox="1"/>
-          <p:nvPr/>
-        </p:nvSpPr>
-        <p:spPr>
-          <a:xfrm>
-            <a:off x="2880360" y="5852159"/>
-            <a:ext cx="8686800" cy="457200"/>
-          </a:xfrm>
-          <a:prstGeom prst="rect">
-            <a:avLst/>
-          </a:prstGeom>
-          <a:noFill/>
-        </p:spPr>
-        <p:txBody>
-          <a:bodyPr wrap="square" anchor="ctr">
-            <a:spAutoFit/>
-          </a:bodyPr>
-          <a:lstStyle/>
-          <a:p>
-            <a:pPr algn="l">
-              <a:lnSpc>
-                <a:spcPct val="115000"/>
-              </a:lnSpc>
-              <a:spcAft>
-                <a:spcPts val="600"/>
-              </a:spcAft>
-            </a:pPr>
-            <a:r>
-              <a:rPr sz="1150" b="0">
-                <a:solidFill>
-                  <a:srgbClr val="6B7688"/>
-                </a:solidFill>
-                <a:latin typeface="微软雅黑" a:ea="微软雅黑"/>
-              </a:rPr>
-              <a:t>沉淀行业级商情数据库，输出类目指数与趋势预测</a:t>
-            </a:r>
-          </a:p>
-        </p:txBody>
-      </p:sp>
-      <p:sp>
-        <p:nvSpPr>
-          <p:cNvPr id="25" name="TextBox 24"/>
           <p:cNvSpPr txBox="1"/>
           <p:nvPr/>
         </p:nvSpPr>
@@ -4720,7 +4505,7 @@
       </p:sp>
       <p:sp>
         <p:nvSpPr>
-          <p:cNvPr id="26" name="TextBox 25"/>
+          <p:cNvPr id="19" name="TextBox 18"/>
           <p:cNvSpPr txBox="1"/>
           <p:nvPr/>
         </p:nvSpPr>
@@ -4786,6 +4571,1349 @@
         </p:nvSpPr>
         <p:spPr>
           <a:xfrm>
+            <a:off x="548640" y="475488"/>
+            <a:ext cx="100584" cy="457200"/>
+          </a:xfrm>
+          <a:prstGeom prst="rect">
+            <a:avLst/>
+          </a:prstGeom>
+          <a:solidFill>
+            <a:srgbClr val="2F6FEB"/>
+          </a:solidFill>
+          <a:ln>
+            <a:noFill/>
+          </a:ln>
+          <a:effectLst/>
+        </p:spPr>
+        <p:style>
+          <a:lnRef idx="1">
+            <a:schemeClr val="accent1"/>
+          </a:lnRef>
+          <a:fillRef idx="3">
+            <a:schemeClr val="accent1"/>
+          </a:fillRef>
+          <a:effectRef idx="2">
+            <a:schemeClr val="accent1"/>
+          </a:effectRef>
+          <a:fontRef idx="minor">
+            <a:schemeClr val="lt1"/>
+          </a:fontRef>
+        </p:style>
+        <p:txBody>
+          <a:bodyPr rtlCol="0" anchor="ctr"/>
+          <a:lstStyle/>
+          <a:p>
+            <a:pPr algn="ctr"/>
+          </a:p>
+        </p:txBody>
+      </p:sp>
+      <p:sp>
+        <p:nvSpPr>
+          <p:cNvPr id="3" name="TextBox 2"/>
+          <p:cNvSpPr txBox="1"/>
+          <p:nvPr/>
+        </p:nvSpPr>
+        <p:spPr>
+          <a:xfrm>
+            <a:off x="777240" y="402336"/>
+            <a:ext cx="10881360" cy="777240"/>
+          </a:xfrm>
+          <a:prstGeom prst="rect">
+            <a:avLst/>
+          </a:prstGeom>
+          <a:noFill/>
+        </p:spPr>
+        <p:txBody>
+          <a:bodyPr wrap="square" anchor="t">
+            <a:spAutoFit/>
+          </a:bodyPr>
+          <a:lstStyle/>
+          <a:p>
+            <a:pPr algn="l">
+              <a:lnSpc>
+                <a:spcPct val="115000"/>
+              </a:lnSpc>
+              <a:spcAft>
+                <a:spcPts val="200"/>
+              </a:spcAft>
+            </a:pPr>
+            <a:r>
+              <a:rPr sz="2500" b="1">
+                <a:solidFill>
+                  <a:srgbClr val="16233D"/>
+                </a:solidFill>
+                <a:latin typeface="微软雅黑" a:ea="微软雅黑"/>
+              </a:rPr>
+              <a:t>产业价值与落地路径</a:t>
+            </a:r>
+          </a:p>
+          <a:p>
+            <a:pPr algn="l">
+              <a:lnSpc>
+                <a:spcPct val="115000"/>
+              </a:lnSpc>
+              <a:spcAft>
+                <a:spcPts val="600"/>
+              </a:spcAft>
+            </a:pPr>
+            <a:r>
+              <a:rPr sz="1250" b="0">
+                <a:solidFill>
+                  <a:srgbClr val="6B7688"/>
+                </a:solidFill>
+                <a:latin typeface="微软雅黑" a:ea="微软雅黑"/>
+              </a:rPr>
+              <a:t>从「靠经验试错」到「靠证据决策」</a:t>
+            </a:r>
+          </a:p>
+        </p:txBody>
+      </p:sp>
+      <p:sp>
+        <p:nvSpPr>
+          <p:cNvPr id="4" name="Rounded Rectangle 3"/>
+          <p:cNvSpPr/>
+          <p:nvPr/>
+        </p:nvSpPr>
+        <p:spPr>
+          <a:xfrm>
+            <a:off x="685800" y="1691640"/>
+            <a:ext cx="3474720" cy="2286000"/>
+          </a:xfrm>
+          <a:prstGeom prst="roundRect">
+            <a:avLst/>
+          </a:prstGeom>
+          <a:solidFill>
+            <a:srgbClr val="FFFFFF"/>
+          </a:solidFill>
+          <a:ln w="9525">
+            <a:solidFill>
+              <a:srgbClr val="D8E0EE"/>
+            </a:solidFill>
+          </a:ln>
+          <a:effectLst/>
+        </p:spPr>
+        <p:style>
+          <a:lnRef idx="1">
+            <a:schemeClr val="accent1"/>
+          </a:lnRef>
+          <a:fillRef idx="3">
+            <a:schemeClr val="accent1"/>
+          </a:fillRef>
+          <a:effectRef idx="2">
+            <a:schemeClr val="accent1"/>
+          </a:effectRef>
+          <a:fontRef idx="minor">
+            <a:schemeClr val="lt1"/>
+          </a:fontRef>
+        </p:style>
+        <p:txBody>
+          <a:bodyPr rtlCol="0" anchor="ctr"/>
+          <a:lstStyle/>
+          <a:p>
+            <a:pPr algn="ctr"/>
+          </a:p>
+        </p:txBody>
+      </p:sp>
+      <p:sp>
+        <p:nvSpPr>
+          <p:cNvPr id="5" name="Rectangle 4"/>
+          <p:cNvSpPr/>
+          <p:nvPr/>
+        </p:nvSpPr>
+        <p:spPr>
+          <a:xfrm>
+            <a:off x="685800" y="1691640"/>
+            <a:ext cx="68580" cy="2286000"/>
+          </a:xfrm>
+          <a:prstGeom prst="rect">
+            <a:avLst/>
+          </a:prstGeom>
+          <a:solidFill>
+            <a:srgbClr val="2F6FEB"/>
+          </a:solidFill>
+          <a:ln>
+            <a:noFill/>
+          </a:ln>
+          <a:effectLst/>
+        </p:spPr>
+        <p:style>
+          <a:lnRef idx="1">
+            <a:schemeClr val="accent1"/>
+          </a:lnRef>
+          <a:fillRef idx="3">
+            <a:schemeClr val="accent1"/>
+          </a:fillRef>
+          <a:effectRef idx="2">
+            <a:schemeClr val="accent1"/>
+          </a:effectRef>
+          <a:fontRef idx="minor">
+            <a:schemeClr val="lt1"/>
+          </a:fontRef>
+        </p:style>
+        <p:txBody>
+          <a:bodyPr rtlCol="0" anchor="ctr"/>
+          <a:lstStyle/>
+          <a:p>
+            <a:pPr algn="ctr"/>
+          </a:p>
+        </p:txBody>
+      </p:sp>
+      <p:sp>
+        <p:nvSpPr>
+          <p:cNvPr id="6" name="TextBox 5"/>
+          <p:cNvSpPr txBox="1"/>
+          <p:nvPr/>
+        </p:nvSpPr>
+        <p:spPr>
+          <a:xfrm>
+            <a:off x="941832" y="1856232"/>
+            <a:ext cx="3017520" cy="2011680"/>
+          </a:xfrm>
+          <a:prstGeom prst="rect">
+            <a:avLst/>
+          </a:prstGeom>
+          <a:noFill/>
+        </p:spPr>
+        <p:txBody>
+          <a:bodyPr wrap="square" anchor="t">
+            <a:spAutoFit/>
+          </a:bodyPr>
+          <a:lstStyle/>
+          <a:p>
+            <a:pPr algn="l">
+              <a:lnSpc>
+                <a:spcPct val="115000"/>
+              </a:lnSpc>
+              <a:spcAft>
+                <a:spcPts val="600"/>
+              </a:spcAft>
+            </a:pPr>
+            <a:r>
+              <a:rPr sz="1600" b="1">
+                <a:solidFill>
+                  <a:srgbClr val="16233D"/>
+                </a:solidFill>
+                <a:latin typeface="微软雅黑" a:ea="微软雅黑"/>
+              </a:rPr>
+              <a:t>目标用户</a:t>
+            </a:r>
+          </a:p>
+          <a:p>
+            <a:pPr algn="l">
+              <a:lnSpc>
+                <a:spcPct val="125000"/>
+              </a:lnSpc>
+              <a:spcAft>
+                <a:spcPts val="400"/>
+              </a:spcAft>
+            </a:pPr>
+            <a:r>
+              <a:rPr sz="1250" b="0">
+                <a:solidFill>
+                  <a:srgbClr val="6B7688"/>
+                </a:solidFill>
+                <a:latin typeface="微软雅黑" a:ea="微软雅黑"/>
+              </a:rPr>
+              <a:t>中小电商卖家 / 个体创业者</a:t>
+            </a:r>
+          </a:p>
+          <a:p>
+            <a:pPr algn="l">
+              <a:lnSpc>
+                <a:spcPct val="125000"/>
+              </a:lnSpc>
+              <a:spcAft>
+                <a:spcPts val="400"/>
+              </a:spcAft>
+            </a:pPr>
+            <a:r>
+              <a:rPr sz="1250" b="0">
+                <a:solidFill>
+                  <a:srgbClr val="6B7688"/>
+                </a:solidFill>
+                <a:latin typeface="微软雅黑" a:ea="微软雅黑"/>
+              </a:rPr>
+              <a:t>品牌市场部与选品团队</a:t>
+            </a:r>
+          </a:p>
+          <a:p>
+            <a:pPr algn="l">
+              <a:lnSpc>
+                <a:spcPct val="125000"/>
+              </a:lnSpc>
+              <a:spcAft>
+                <a:spcPts val="400"/>
+              </a:spcAft>
+            </a:pPr>
+            <a:r>
+              <a:rPr sz="1250" b="0">
+                <a:solidFill>
+                  <a:srgbClr val="6B7688"/>
+                </a:solidFill>
+                <a:latin typeface="微软雅黑" a:ea="微软雅黑"/>
+              </a:rPr>
+              <a:t>投研与咨询分析师</a:t>
+            </a:r>
+          </a:p>
+          <a:p>
+            <a:pPr algn="l">
+              <a:lnSpc>
+                <a:spcPct val="125000"/>
+              </a:lnSpc>
+              <a:spcAft>
+                <a:spcPts val="400"/>
+              </a:spcAft>
+            </a:pPr>
+            <a:r>
+              <a:rPr sz="1250" b="0">
+                <a:solidFill>
+                  <a:srgbClr val="6B7688"/>
+                </a:solidFill>
+                <a:latin typeface="微软雅黑" a:ea="微软雅黑"/>
+              </a:rPr>
+              <a:t>代运营与电商服务商</a:t>
+            </a:r>
+          </a:p>
+        </p:txBody>
+      </p:sp>
+      <p:sp>
+        <p:nvSpPr>
+          <p:cNvPr id="7" name="Rounded Rectangle 6"/>
+          <p:cNvSpPr/>
+          <p:nvPr/>
+        </p:nvSpPr>
+        <p:spPr>
+          <a:xfrm>
+            <a:off x="4343400" y="1691640"/>
+            <a:ext cx="3474720" cy="2286000"/>
+          </a:xfrm>
+          <a:prstGeom prst="roundRect">
+            <a:avLst/>
+          </a:prstGeom>
+          <a:solidFill>
+            <a:srgbClr val="FFFFFF"/>
+          </a:solidFill>
+          <a:ln w="9525">
+            <a:solidFill>
+              <a:srgbClr val="D8E0EE"/>
+            </a:solidFill>
+          </a:ln>
+          <a:effectLst/>
+        </p:spPr>
+        <p:style>
+          <a:lnRef idx="1">
+            <a:schemeClr val="accent1"/>
+          </a:lnRef>
+          <a:fillRef idx="3">
+            <a:schemeClr val="accent1"/>
+          </a:fillRef>
+          <a:effectRef idx="2">
+            <a:schemeClr val="accent1"/>
+          </a:effectRef>
+          <a:fontRef idx="minor">
+            <a:schemeClr val="lt1"/>
+          </a:fontRef>
+        </p:style>
+        <p:txBody>
+          <a:bodyPr rtlCol="0" anchor="ctr"/>
+          <a:lstStyle/>
+          <a:p>
+            <a:pPr algn="ctr"/>
+          </a:p>
+        </p:txBody>
+      </p:sp>
+      <p:sp>
+        <p:nvSpPr>
+          <p:cNvPr id="8" name="Rectangle 7"/>
+          <p:cNvSpPr/>
+          <p:nvPr/>
+        </p:nvSpPr>
+        <p:spPr>
+          <a:xfrm>
+            <a:off x="4343400" y="1691640"/>
+            <a:ext cx="68580" cy="2286000"/>
+          </a:xfrm>
+          <a:prstGeom prst="rect">
+            <a:avLst/>
+          </a:prstGeom>
+          <a:solidFill>
+            <a:srgbClr val="0F8F80"/>
+          </a:solidFill>
+          <a:ln>
+            <a:noFill/>
+          </a:ln>
+          <a:effectLst/>
+        </p:spPr>
+        <p:style>
+          <a:lnRef idx="1">
+            <a:schemeClr val="accent1"/>
+          </a:lnRef>
+          <a:fillRef idx="3">
+            <a:schemeClr val="accent1"/>
+          </a:fillRef>
+          <a:effectRef idx="2">
+            <a:schemeClr val="accent1"/>
+          </a:effectRef>
+          <a:fontRef idx="minor">
+            <a:schemeClr val="lt1"/>
+          </a:fontRef>
+        </p:style>
+        <p:txBody>
+          <a:bodyPr rtlCol="0" anchor="ctr"/>
+          <a:lstStyle/>
+          <a:p>
+            <a:pPr algn="ctr"/>
+          </a:p>
+        </p:txBody>
+      </p:sp>
+      <p:sp>
+        <p:nvSpPr>
+          <p:cNvPr id="9" name="TextBox 8"/>
+          <p:cNvSpPr txBox="1"/>
+          <p:nvPr/>
+        </p:nvSpPr>
+        <p:spPr>
+          <a:xfrm>
+            <a:off x="4599432" y="1856232"/>
+            <a:ext cx="3017520" cy="2011680"/>
+          </a:xfrm>
+          <a:prstGeom prst="rect">
+            <a:avLst/>
+          </a:prstGeom>
+          <a:noFill/>
+        </p:spPr>
+        <p:txBody>
+          <a:bodyPr wrap="square" anchor="t">
+            <a:spAutoFit/>
+          </a:bodyPr>
+          <a:lstStyle/>
+          <a:p>
+            <a:pPr algn="l">
+              <a:lnSpc>
+                <a:spcPct val="115000"/>
+              </a:lnSpc>
+              <a:spcAft>
+                <a:spcPts val="600"/>
+              </a:spcAft>
+            </a:pPr>
+            <a:r>
+              <a:rPr sz="1600" b="1">
+                <a:solidFill>
+                  <a:srgbClr val="16233D"/>
+                </a:solidFill>
+                <a:latin typeface="微软雅黑" a:ea="微软雅黑"/>
+              </a:rPr>
+              <a:t>直接价值</a:t>
+            </a:r>
+          </a:p>
+          <a:p>
+            <a:pPr algn="l">
+              <a:lnSpc>
+                <a:spcPct val="125000"/>
+              </a:lnSpc>
+              <a:spcAft>
+                <a:spcPts val="400"/>
+              </a:spcAft>
+            </a:pPr>
+            <a:r>
+              <a:rPr sz="1250" b="0">
+                <a:solidFill>
+                  <a:srgbClr val="6B7688"/>
+                </a:solidFill>
+                <a:latin typeface="微软雅黑" a:ea="微软雅黑"/>
+              </a:rPr>
+              <a:t>把数小时人工比价压缩到 30 秒</a:t>
+            </a:r>
+          </a:p>
+          <a:p>
+            <a:pPr algn="l">
+              <a:lnSpc>
+                <a:spcPct val="125000"/>
+              </a:lnSpc>
+              <a:spcAft>
+                <a:spcPts val="400"/>
+              </a:spcAft>
+            </a:pPr>
+            <a:r>
+              <a:rPr sz="1250" b="0">
+                <a:solidFill>
+                  <a:srgbClr val="6B7688"/>
+                </a:solidFill>
+                <a:latin typeface="微软雅黑" a:ea="微软雅黑"/>
+              </a:rPr>
+              <a:t>降低选品试错与压货风险</a:t>
+            </a:r>
+          </a:p>
+          <a:p>
+            <a:pPr algn="l">
+              <a:lnSpc>
+                <a:spcPct val="125000"/>
+              </a:lnSpc>
+              <a:spcAft>
+                <a:spcPts val="400"/>
+              </a:spcAft>
+            </a:pPr>
+            <a:r>
+              <a:rPr sz="1250" b="0">
+                <a:solidFill>
+                  <a:srgbClr val="6B7688"/>
+                </a:solidFill>
+                <a:latin typeface="微软雅黑" a:ea="微软雅黑"/>
+              </a:rPr>
+              <a:t>定价有锚点、切入有理由、风险有提示</a:t>
+            </a:r>
+          </a:p>
+          <a:p>
+            <a:pPr algn="l">
+              <a:lnSpc>
+                <a:spcPct val="125000"/>
+              </a:lnSpc>
+              <a:spcAft>
+                <a:spcPts val="400"/>
+              </a:spcAft>
+            </a:pPr>
+            <a:r>
+              <a:rPr sz="1250" b="0">
+                <a:solidFill>
+                  <a:srgbClr val="6B7688"/>
+                </a:solidFill>
+                <a:latin typeface="微软雅黑" a:ea="微软雅黑"/>
+              </a:rPr>
+              <a:t>每条结论可追溯到数据来源</a:t>
+            </a:r>
+          </a:p>
+        </p:txBody>
+      </p:sp>
+      <p:sp>
+        <p:nvSpPr>
+          <p:cNvPr id="10" name="Rounded Rectangle 9"/>
+          <p:cNvSpPr/>
+          <p:nvPr/>
+        </p:nvSpPr>
+        <p:spPr>
+          <a:xfrm>
+            <a:off x="8001000" y="1691640"/>
+            <a:ext cx="3566160" cy="2286000"/>
+          </a:xfrm>
+          <a:prstGeom prst="roundRect">
+            <a:avLst/>
+          </a:prstGeom>
+          <a:solidFill>
+            <a:srgbClr val="FFFFFF"/>
+          </a:solidFill>
+          <a:ln w="9525">
+            <a:solidFill>
+              <a:srgbClr val="D8E0EE"/>
+            </a:solidFill>
+          </a:ln>
+          <a:effectLst/>
+        </p:spPr>
+        <p:style>
+          <a:lnRef idx="1">
+            <a:schemeClr val="accent1"/>
+          </a:lnRef>
+          <a:fillRef idx="3">
+            <a:schemeClr val="accent1"/>
+          </a:fillRef>
+          <a:effectRef idx="2">
+            <a:schemeClr val="accent1"/>
+          </a:effectRef>
+          <a:fontRef idx="minor">
+            <a:schemeClr val="lt1"/>
+          </a:fontRef>
+        </p:style>
+        <p:txBody>
+          <a:bodyPr rtlCol="0" anchor="ctr"/>
+          <a:lstStyle/>
+          <a:p>
+            <a:pPr algn="ctr"/>
+          </a:p>
+        </p:txBody>
+      </p:sp>
+      <p:sp>
+        <p:nvSpPr>
+          <p:cNvPr id="11" name="Rectangle 10"/>
+          <p:cNvSpPr/>
+          <p:nvPr/>
+        </p:nvSpPr>
+        <p:spPr>
+          <a:xfrm>
+            <a:off x="8001000" y="1691640"/>
+            <a:ext cx="68580" cy="2286000"/>
+          </a:xfrm>
+          <a:prstGeom prst="rect">
+            <a:avLst/>
+          </a:prstGeom>
+          <a:solidFill>
+            <a:srgbClr val="B06608"/>
+          </a:solidFill>
+          <a:ln>
+            <a:noFill/>
+          </a:ln>
+          <a:effectLst/>
+        </p:spPr>
+        <p:style>
+          <a:lnRef idx="1">
+            <a:schemeClr val="accent1"/>
+          </a:lnRef>
+          <a:fillRef idx="3">
+            <a:schemeClr val="accent1"/>
+          </a:fillRef>
+          <a:effectRef idx="2">
+            <a:schemeClr val="accent1"/>
+          </a:effectRef>
+          <a:fontRef idx="minor">
+            <a:schemeClr val="lt1"/>
+          </a:fontRef>
+        </p:style>
+        <p:txBody>
+          <a:bodyPr rtlCol="0" anchor="ctr"/>
+          <a:lstStyle/>
+          <a:p>
+            <a:pPr algn="ctr"/>
+          </a:p>
+        </p:txBody>
+      </p:sp>
+      <p:sp>
+        <p:nvSpPr>
+          <p:cNvPr id="12" name="TextBox 11"/>
+          <p:cNvSpPr txBox="1"/>
+          <p:nvPr/>
+        </p:nvSpPr>
+        <p:spPr>
+          <a:xfrm>
+            <a:off x="8257031" y="1856232"/>
+            <a:ext cx="3108960" cy="2011680"/>
+          </a:xfrm>
+          <a:prstGeom prst="rect">
+            <a:avLst/>
+          </a:prstGeom>
+          <a:noFill/>
+        </p:spPr>
+        <p:txBody>
+          <a:bodyPr wrap="square" anchor="t">
+            <a:spAutoFit/>
+          </a:bodyPr>
+          <a:lstStyle/>
+          <a:p>
+            <a:pPr algn="l">
+              <a:lnSpc>
+                <a:spcPct val="115000"/>
+              </a:lnSpc>
+              <a:spcAft>
+                <a:spcPts val="600"/>
+              </a:spcAft>
+            </a:pPr>
+            <a:r>
+              <a:rPr sz="1600" b="1">
+                <a:solidFill>
+                  <a:srgbClr val="16233D"/>
+                </a:solidFill>
+                <a:latin typeface="微软雅黑" a:ea="微软雅黑"/>
+              </a:rPr>
+              <a:t>商业模式</a:t>
+            </a:r>
+          </a:p>
+          <a:p>
+            <a:pPr algn="l">
+              <a:lnSpc>
+                <a:spcPct val="125000"/>
+              </a:lnSpc>
+              <a:spcAft>
+                <a:spcPts val="400"/>
+              </a:spcAft>
+            </a:pPr>
+            <a:r>
+              <a:rPr sz="1250" b="0">
+                <a:solidFill>
+                  <a:srgbClr val="6B7688"/>
+                </a:solidFill>
+                <a:latin typeface="微软雅黑" a:ea="微软雅黑"/>
+              </a:rPr>
+              <a:t>SaaS 订阅（按类目 / 席位）</a:t>
+            </a:r>
+          </a:p>
+          <a:p>
+            <a:pPr algn="l">
+              <a:lnSpc>
+                <a:spcPct val="125000"/>
+              </a:lnSpc>
+              <a:spcAft>
+                <a:spcPts val="400"/>
+              </a:spcAft>
+            </a:pPr>
+            <a:r>
+              <a:rPr sz="1250" b="0">
+                <a:solidFill>
+                  <a:srgbClr val="6B7688"/>
+                </a:solidFill>
+                <a:latin typeface="微软雅黑" a:ea="微软雅黑"/>
+              </a:rPr>
+              <a:t>单份市场机会报告按次付费</a:t>
+            </a:r>
+          </a:p>
+          <a:p>
+            <a:pPr algn="l">
+              <a:lnSpc>
+                <a:spcPct val="125000"/>
+              </a:lnSpc>
+              <a:spcAft>
+                <a:spcPts val="400"/>
+              </a:spcAft>
+            </a:pPr>
+            <a:r>
+              <a:rPr sz="1250" b="0">
+                <a:solidFill>
+                  <a:srgbClr val="6B7688"/>
+                </a:solidFill>
+                <a:latin typeface="微软雅黑" a:ea="微软雅黑"/>
+              </a:rPr>
+              <a:t>为服务商提供批量选品 API</a:t>
+            </a:r>
+          </a:p>
+          <a:p>
+            <a:pPr algn="l">
+              <a:lnSpc>
+                <a:spcPct val="125000"/>
+              </a:lnSpc>
+              <a:spcAft>
+                <a:spcPts val="400"/>
+              </a:spcAft>
+            </a:pPr>
+            <a:r>
+              <a:rPr sz="1250" b="0">
+                <a:solidFill>
+                  <a:srgbClr val="6B7688"/>
+                </a:solidFill>
+                <a:latin typeface="微软雅黑" a:ea="微软雅黑"/>
+              </a:rPr>
+              <a:t>数据合规，可对接企业采购流程</a:t>
+            </a:r>
+          </a:p>
+        </p:txBody>
+      </p:sp>
+      <p:sp>
+        <p:nvSpPr>
+          <p:cNvPr id="13" name="Rounded Rectangle 12"/>
+          <p:cNvSpPr/>
+          <p:nvPr/>
+        </p:nvSpPr>
+        <p:spPr>
+          <a:xfrm>
+            <a:off x="685800" y="4206240"/>
+            <a:ext cx="2011680" cy="457200"/>
+          </a:xfrm>
+          <a:prstGeom prst="roundRect">
+            <a:avLst/>
+          </a:prstGeom>
+          <a:solidFill>
+            <a:srgbClr val="EAF1FF"/>
+          </a:solidFill>
+          <a:ln>
+            <a:noFill/>
+          </a:ln>
+          <a:effectLst/>
+        </p:spPr>
+        <p:style>
+          <a:lnRef idx="1">
+            <a:schemeClr val="accent1"/>
+          </a:lnRef>
+          <a:fillRef idx="3">
+            <a:schemeClr val="accent1"/>
+          </a:fillRef>
+          <a:effectRef idx="2">
+            <a:schemeClr val="accent1"/>
+          </a:effectRef>
+          <a:fontRef idx="minor">
+            <a:schemeClr val="lt1"/>
+          </a:fontRef>
+        </p:style>
+        <p:txBody>
+          <a:bodyPr rtlCol="0" anchor="ctr"/>
+          <a:lstStyle/>
+          <a:p>
+            <a:pPr algn="ctr"/>
+          </a:p>
+        </p:txBody>
+      </p:sp>
+      <p:sp>
+        <p:nvSpPr>
+          <p:cNvPr id="14" name="TextBox 13"/>
+          <p:cNvSpPr txBox="1"/>
+          <p:nvPr/>
+        </p:nvSpPr>
+        <p:spPr>
+          <a:xfrm>
+            <a:off x="777240" y="4206240"/>
+            <a:ext cx="1828800" cy="457200"/>
+          </a:xfrm>
+          <a:prstGeom prst="rect">
+            <a:avLst/>
+          </a:prstGeom>
+          <a:noFill/>
+        </p:spPr>
+        <p:txBody>
+          <a:bodyPr wrap="square" anchor="ctr">
+            <a:spAutoFit/>
+          </a:bodyPr>
+          <a:lstStyle/>
+          <a:p>
+            <a:pPr algn="ctr">
+              <a:lnSpc>
+                <a:spcPct val="115000"/>
+              </a:lnSpc>
+              <a:spcAft>
+                <a:spcPts val="600"/>
+              </a:spcAft>
+            </a:pPr>
+            <a:r>
+              <a:rPr sz="1100" b="1">
+                <a:solidFill>
+                  <a:srgbClr val="2F6FEB"/>
+                </a:solidFill>
+                <a:latin typeface="微软雅黑" a:ea="微软雅黑"/>
+              </a:rPr>
+              <a:t>已完成</a:t>
+            </a:r>
+          </a:p>
+        </p:txBody>
+      </p:sp>
+      <p:sp>
+        <p:nvSpPr>
+          <p:cNvPr id="15" name="TextBox 14"/>
+          <p:cNvSpPr txBox="1"/>
+          <p:nvPr/>
+        </p:nvSpPr>
+        <p:spPr>
+          <a:xfrm>
+            <a:off x="2880360" y="4206240"/>
+            <a:ext cx="8686800" cy="457200"/>
+          </a:xfrm>
+          <a:prstGeom prst="rect">
+            <a:avLst/>
+          </a:prstGeom>
+          <a:noFill/>
+        </p:spPr>
+        <p:txBody>
+          <a:bodyPr wrap="square" anchor="ctr">
+            <a:spAutoFit/>
+          </a:bodyPr>
+          <a:lstStyle/>
+          <a:p>
+            <a:pPr algn="l">
+              <a:lnSpc>
+                <a:spcPct val="115000"/>
+              </a:lnSpc>
+              <a:spcAft>
+                <a:spcPts val="600"/>
+              </a:spcAft>
+            </a:pPr>
+            <a:r>
+              <a:rPr sz="1150" b="0">
+                <a:solidFill>
+                  <a:srgbClr val="6B7688"/>
+                </a:solidFill>
+                <a:latin typeface="微软雅黑" a:ea="微软雅黑"/>
+              </a:rPr>
+              <a:t>真实公开数据采集 + 指标 + AI 建议 + 看板全链路跑通</a:t>
+            </a:r>
+          </a:p>
+        </p:txBody>
+      </p:sp>
+      <p:sp>
+        <p:nvSpPr>
+          <p:cNvPr id="16" name="Rounded Rectangle 15"/>
+          <p:cNvSpPr/>
+          <p:nvPr/>
+        </p:nvSpPr>
+        <p:spPr>
+          <a:xfrm>
+            <a:off x="685800" y="4754879"/>
+            <a:ext cx="2011680" cy="457200"/>
+          </a:xfrm>
+          <a:prstGeom prst="roundRect">
+            <a:avLst/>
+          </a:prstGeom>
+          <a:solidFill>
+            <a:srgbClr val="EAF1FF"/>
+          </a:solidFill>
+          <a:ln>
+            <a:noFill/>
+          </a:ln>
+          <a:effectLst/>
+        </p:spPr>
+        <p:style>
+          <a:lnRef idx="1">
+            <a:schemeClr val="accent1"/>
+          </a:lnRef>
+          <a:fillRef idx="3">
+            <a:schemeClr val="accent1"/>
+          </a:fillRef>
+          <a:effectRef idx="2">
+            <a:schemeClr val="accent1"/>
+          </a:effectRef>
+          <a:fontRef idx="minor">
+            <a:schemeClr val="lt1"/>
+          </a:fontRef>
+        </p:style>
+        <p:txBody>
+          <a:bodyPr rtlCol="0" anchor="ctr"/>
+          <a:lstStyle/>
+          <a:p>
+            <a:pPr algn="ctr"/>
+          </a:p>
+        </p:txBody>
+      </p:sp>
+      <p:sp>
+        <p:nvSpPr>
+          <p:cNvPr id="17" name="TextBox 16"/>
+          <p:cNvSpPr txBox="1"/>
+          <p:nvPr/>
+        </p:nvSpPr>
+        <p:spPr>
+          <a:xfrm>
+            <a:off x="777240" y="4754879"/>
+            <a:ext cx="1828800" cy="457200"/>
+          </a:xfrm>
+          <a:prstGeom prst="rect">
+            <a:avLst/>
+          </a:prstGeom>
+          <a:noFill/>
+        </p:spPr>
+        <p:txBody>
+          <a:bodyPr wrap="square" anchor="ctr">
+            <a:spAutoFit/>
+          </a:bodyPr>
+          <a:lstStyle/>
+          <a:p>
+            <a:pPr algn="ctr">
+              <a:lnSpc>
+                <a:spcPct val="115000"/>
+              </a:lnSpc>
+              <a:spcAft>
+                <a:spcPts val="600"/>
+              </a:spcAft>
+            </a:pPr>
+            <a:r>
+              <a:rPr sz="1100" b="1">
+                <a:solidFill>
+                  <a:srgbClr val="2F6FEB"/>
+                </a:solidFill>
+                <a:latin typeface="微软雅黑" a:ea="微软雅黑"/>
+              </a:rPr>
+              <a:t>下一步（短期）</a:t>
+            </a:r>
+          </a:p>
+        </p:txBody>
+      </p:sp>
+      <p:sp>
+        <p:nvSpPr>
+          <p:cNvPr id="18" name="TextBox 17"/>
+          <p:cNvSpPr txBox="1"/>
+          <p:nvPr/>
+        </p:nvSpPr>
+        <p:spPr>
+          <a:xfrm>
+            <a:off x="2880360" y="4754879"/>
+            <a:ext cx="8686800" cy="457200"/>
+          </a:xfrm>
+          <a:prstGeom prst="rect">
+            <a:avLst/>
+          </a:prstGeom>
+          <a:noFill/>
+        </p:spPr>
+        <p:txBody>
+          <a:bodyPr wrap="square" anchor="ctr">
+            <a:spAutoFit/>
+          </a:bodyPr>
+          <a:lstStyle/>
+          <a:p>
+            <a:pPr algn="l">
+              <a:lnSpc>
+                <a:spcPct val="115000"/>
+              </a:lnSpc>
+              <a:spcAft>
+                <a:spcPts val="600"/>
+              </a:spcAft>
+            </a:pPr>
+            <a:r>
+              <a:rPr sz="1150" b="0">
+                <a:solidFill>
+                  <a:srgbClr val="6B7688"/>
+                </a:solidFill>
+                <a:latin typeface="微软雅黑" a:ea="微软雅黑"/>
+              </a:rPr>
+              <a:t>启用官方 API 补真实销量与价格；支持用户粘贴页面 / 浏览器书签采集长尾站点</a:t>
+            </a:r>
+          </a:p>
+        </p:txBody>
+      </p:sp>
+      <p:sp>
+        <p:nvSpPr>
+          <p:cNvPr id="19" name="Rounded Rectangle 18"/>
+          <p:cNvSpPr/>
+          <p:nvPr/>
+        </p:nvSpPr>
+        <p:spPr>
+          <a:xfrm>
+            <a:off x="685800" y="5303520"/>
+            <a:ext cx="2011680" cy="457200"/>
+          </a:xfrm>
+          <a:prstGeom prst="roundRect">
+            <a:avLst/>
+          </a:prstGeom>
+          <a:solidFill>
+            <a:srgbClr val="EAF1FF"/>
+          </a:solidFill>
+          <a:ln>
+            <a:noFill/>
+          </a:ln>
+          <a:effectLst/>
+        </p:spPr>
+        <p:style>
+          <a:lnRef idx="1">
+            <a:schemeClr val="accent1"/>
+          </a:lnRef>
+          <a:fillRef idx="3">
+            <a:schemeClr val="accent1"/>
+          </a:fillRef>
+          <a:effectRef idx="2">
+            <a:schemeClr val="accent1"/>
+          </a:effectRef>
+          <a:fontRef idx="minor">
+            <a:schemeClr val="lt1"/>
+          </a:fontRef>
+        </p:style>
+        <p:txBody>
+          <a:bodyPr rtlCol="0" anchor="ctr"/>
+          <a:lstStyle/>
+          <a:p>
+            <a:pPr algn="ctr"/>
+          </a:p>
+        </p:txBody>
+      </p:sp>
+      <p:sp>
+        <p:nvSpPr>
+          <p:cNvPr id="20" name="TextBox 19"/>
+          <p:cNvSpPr txBox="1"/>
+          <p:nvPr/>
+        </p:nvSpPr>
+        <p:spPr>
+          <a:xfrm>
+            <a:off x="777240" y="5303520"/>
+            <a:ext cx="1828800" cy="457200"/>
+          </a:xfrm>
+          <a:prstGeom prst="rect">
+            <a:avLst/>
+          </a:prstGeom>
+          <a:noFill/>
+        </p:spPr>
+        <p:txBody>
+          <a:bodyPr wrap="square" anchor="ctr">
+            <a:spAutoFit/>
+          </a:bodyPr>
+          <a:lstStyle/>
+          <a:p>
+            <a:pPr algn="ctr">
+              <a:lnSpc>
+                <a:spcPct val="115000"/>
+              </a:lnSpc>
+              <a:spcAft>
+                <a:spcPts val="600"/>
+              </a:spcAft>
+            </a:pPr>
+            <a:r>
+              <a:rPr sz="1100" b="1">
+                <a:solidFill>
+                  <a:srgbClr val="2F6FEB"/>
+                </a:solidFill>
+                <a:latin typeface="微软雅黑" a:ea="微软雅黑"/>
+              </a:rPr>
+              <a:t>下一步（中期）</a:t>
+            </a:r>
+          </a:p>
+        </p:txBody>
+      </p:sp>
+      <p:sp>
+        <p:nvSpPr>
+          <p:cNvPr id="21" name="TextBox 20"/>
+          <p:cNvSpPr txBox="1"/>
+          <p:nvPr/>
+        </p:nvSpPr>
+        <p:spPr>
+          <a:xfrm>
+            <a:off x="2880360" y="5303520"/>
+            <a:ext cx="8686800" cy="457200"/>
+          </a:xfrm>
+          <a:prstGeom prst="rect">
+            <a:avLst/>
+          </a:prstGeom>
+          <a:noFill/>
+        </p:spPr>
+        <p:txBody>
+          <a:bodyPr wrap="square" anchor="ctr">
+            <a:spAutoFit/>
+          </a:bodyPr>
+          <a:lstStyle/>
+          <a:p>
+            <a:pPr algn="l">
+              <a:lnSpc>
+                <a:spcPct val="115000"/>
+              </a:lnSpc>
+              <a:spcAft>
+                <a:spcPts val="600"/>
+              </a:spcAft>
+            </a:pPr>
+            <a:r>
+              <a:rPr sz="1150" b="0">
+                <a:solidFill>
+                  <a:srgbClr val="6B7688"/>
+                </a:solidFill>
+                <a:latin typeface="微软雅黑" a:ea="微软雅黑"/>
+              </a:rPr>
+              <a:t>Agent 自动生成《某品类市场机会研究报告》；对接商家后台做授权导入</a:t>
+            </a:r>
+          </a:p>
+        </p:txBody>
+      </p:sp>
+      <p:sp>
+        <p:nvSpPr>
+          <p:cNvPr id="22" name="Rounded Rectangle 21"/>
+          <p:cNvSpPr/>
+          <p:nvPr/>
+        </p:nvSpPr>
+        <p:spPr>
+          <a:xfrm>
+            <a:off x="685800" y="5852159"/>
+            <a:ext cx="2011680" cy="457200"/>
+          </a:xfrm>
+          <a:prstGeom prst="roundRect">
+            <a:avLst/>
+          </a:prstGeom>
+          <a:solidFill>
+            <a:srgbClr val="EAF1FF"/>
+          </a:solidFill>
+          <a:ln>
+            <a:noFill/>
+          </a:ln>
+          <a:effectLst/>
+        </p:spPr>
+        <p:style>
+          <a:lnRef idx="1">
+            <a:schemeClr val="accent1"/>
+          </a:lnRef>
+          <a:fillRef idx="3">
+            <a:schemeClr val="accent1"/>
+          </a:fillRef>
+          <a:effectRef idx="2">
+            <a:schemeClr val="accent1"/>
+          </a:effectRef>
+          <a:fontRef idx="minor">
+            <a:schemeClr val="lt1"/>
+          </a:fontRef>
+        </p:style>
+        <p:txBody>
+          <a:bodyPr rtlCol="0" anchor="ctr"/>
+          <a:lstStyle/>
+          <a:p>
+            <a:pPr algn="ctr"/>
+          </a:p>
+        </p:txBody>
+      </p:sp>
+      <p:sp>
+        <p:nvSpPr>
+          <p:cNvPr id="23" name="TextBox 22"/>
+          <p:cNvSpPr txBox="1"/>
+          <p:nvPr/>
+        </p:nvSpPr>
+        <p:spPr>
+          <a:xfrm>
+            <a:off x="777240" y="5852159"/>
+            <a:ext cx="1828800" cy="457200"/>
+          </a:xfrm>
+          <a:prstGeom prst="rect">
+            <a:avLst/>
+          </a:prstGeom>
+          <a:noFill/>
+        </p:spPr>
+        <p:txBody>
+          <a:bodyPr wrap="square" anchor="ctr">
+            <a:spAutoFit/>
+          </a:bodyPr>
+          <a:lstStyle/>
+          <a:p>
+            <a:pPr algn="ctr">
+              <a:lnSpc>
+                <a:spcPct val="115000"/>
+              </a:lnSpc>
+              <a:spcAft>
+                <a:spcPts val="600"/>
+              </a:spcAft>
+            </a:pPr>
+            <a:r>
+              <a:rPr sz="1100" b="1">
+                <a:solidFill>
+                  <a:srgbClr val="2F6FEB"/>
+                </a:solidFill>
+                <a:latin typeface="微软雅黑" a:ea="微软雅黑"/>
+              </a:rPr>
+              <a:t>下一步（长期）</a:t>
+            </a:r>
+          </a:p>
+        </p:txBody>
+      </p:sp>
+      <p:sp>
+        <p:nvSpPr>
+          <p:cNvPr id="24" name="TextBox 23"/>
+          <p:cNvSpPr txBox="1"/>
+          <p:nvPr/>
+        </p:nvSpPr>
+        <p:spPr>
+          <a:xfrm>
+            <a:off x="2880360" y="5852159"/>
+            <a:ext cx="8686800" cy="457200"/>
+          </a:xfrm>
+          <a:prstGeom prst="rect">
+            <a:avLst/>
+          </a:prstGeom>
+          <a:noFill/>
+        </p:spPr>
+        <p:txBody>
+          <a:bodyPr wrap="square" anchor="ctr">
+            <a:spAutoFit/>
+          </a:bodyPr>
+          <a:lstStyle/>
+          <a:p>
+            <a:pPr algn="l">
+              <a:lnSpc>
+                <a:spcPct val="115000"/>
+              </a:lnSpc>
+              <a:spcAft>
+                <a:spcPts val="600"/>
+              </a:spcAft>
+            </a:pPr>
+            <a:r>
+              <a:rPr sz="1150" b="0">
+                <a:solidFill>
+                  <a:srgbClr val="6B7688"/>
+                </a:solidFill>
+                <a:latin typeface="微软雅黑" a:ea="微软雅黑"/>
+              </a:rPr>
+              <a:t>沉淀行业级商情数据库，输出类目指数与趋势预测</a:t>
+            </a:r>
+          </a:p>
+        </p:txBody>
+      </p:sp>
+      <p:sp>
+        <p:nvSpPr>
+          <p:cNvPr id="25" name="TextBox 24"/>
+          <p:cNvSpPr txBox="1"/>
+          <p:nvPr/>
+        </p:nvSpPr>
+        <p:spPr>
+          <a:xfrm>
+            <a:off x="548640" y="6355080"/>
+            <a:ext cx="7315200" cy="320040"/>
+          </a:xfrm>
+          <a:prstGeom prst="rect">
+            <a:avLst/>
+          </a:prstGeom>
+          <a:noFill/>
+        </p:spPr>
+        <p:txBody>
+          <a:bodyPr wrap="square" anchor="t">
+            <a:spAutoFit/>
+          </a:bodyPr>
+          <a:lstStyle/>
+          <a:p>
+            <a:pPr algn="l">
+              <a:lnSpc>
+                <a:spcPct val="115000"/>
+              </a:lnSpc>
+              <a:spcAft>
+                <a:spcPts val="600"/>
+              </a:spcAft>
+            </a:pPr>
+            <a:r>
+              <a:rPr sz="950" b="0">
+                <a:solidFill>
+                  <a:srgbClr val="6B7688"/>
+                </a:solidFill>
+                <a:latin typeface="微软雅黑" a:ea="微软雅黑"/>
+              </a:rPr>
+              <a:t>商情罗盘 MarketCompass · AI 应用大赛（产业应用类）</a:t>
+            </a:r>
+          </a:p>
+        </p:txBody>
+      </p:sp>
+      <p:sp>
+        <p:nvSpPr>
+          <p:cNvPr id="26" name="TextBox 25"/>
+          <p:cNvSpPr txBox="1"/>
+          <p:nvPr/>
+        </p:nvSpPr>
+        <p:spPr>
+          <a:xfrm>
+            <a:off x="11155680" y="6355080"/>
+            <a:ext cx="548640" cy="320040"/>
+          </a:xfrm>
+          <a:prstGeom prst="rect">
+            <a:avLst/>
+          </a:prstGeom>
+          <a:noFill/>
+        </p:spPr>
+        <p:txBody>
+          <a:bodyPr wrap="square" anchor="t">
+            <a:spAutoFit/>
+          </a:bodyPr>
+          <a:lstStyle/>
+          <a:p>
+            <a:pPr algn="r">
+              <a:lnSpc>
+                <a:spcPct val="115000"/>
+              </a:lnSpc>
+              <a:spcAft>
+                <a:spcPts val="600"/>
+              </a:spcAft>
+            </a:pPr>
+            <a:r>
+              <a:rPr sz="950" b="0">
+                <a:solidFill>
+                  <a:srgbClr val="6B7688"/>
+                </a:solidFill>
+                <a:latin typeface="微软雅黑" a:ea="微软雅黑"/>
+              </a:rPr>
+              <a:t>11</a:t>
+            </a:r>
+          </a:p>
+        </p:txBody>
+      </p:sp>
+    </p:spTree>
+  </p:cSld>
+  <p:clrMapOvr>
+    <a:masterClrMapping/>
+  </p:clrMapOvr>
+</p:sld>
+</file>
+
+<file path=ppt/slides/slide12.xml><?xml version="1.0" encoding="utf-8"?>
+<p:sld xmlns:a="http://schemas.openxmlformats.org/drawingml/2006/main" xmlns:p="http://schemas.openxmlformats.org/presentationml/2006/main" xmlns:r="http://schemas.openxmlformats.org/officeDocument/2006/relationships">
+  <p:cSld>
+    <p:spTree>
+      <p:nvGrpSpPr>
+        <p:cNvPr id="1" name=""/>
+        <p:cNvGrpSpPr/>
+        <p:nvPr/>
+      </p:nvGrpSpPr>
+      <p:grpSpPr/>
+      <p:sp>
+        <p:nvSpPr>
+          <p:cNvPr id="2" name="Rectangle 1"/>
+          <p:cNvSpPr/>
+          <p:nvPr/>
+        </p:nvSpPr>
+        <p:spPr>
+          <a:xfrm>
             <a:off x="0" y="0"/>
             <a:ext cx="12191695" cy="6858000"/>
           </a:xfrm>
@@ -5008,7 +6136,7 @@
                 </a:solidFill>
                 <a:latin typeface="微软雅黑" a:ea="微软雅黑"/>
               </a:rPr>
-              <a:t>73 个真实商品已入库   ·   19,936 条日指标   ·   62 项测试通过   ·   0 第三方依赖</a:t>
+              <a:t>80 个真实商品已入库   ·   20,082 条日指标   ·   62 项测试通过   ·   0 第三方依赖</a:t>
             </a:r>
           </a:p>
           <a:p>
@@ -11387,6 +12515,1144 @@
                 </a:solidFill>
                 <a:latin typeface="微软雅黑" a:ea="微软雅黑"/>
               </a:rPr>
+              <a:t>数据源决定口径，口径决定可信度</a:t>
+            </a:r>
+          </a:p>
+          <a:p>
+            <a:pPr algn="l">
+              <a:lnSpc>
+                <a:spcPct val="115000"/>
+              </a:lnSpc>
+              <a:spcAft>
+                <a:spcPts val="600"/>
+              </a:spcAft>
+            </a:pPr>
+            <a:r>
+              <a:rPr sz="1250" b="0">
+                <a:solidFill>
+                  <a:srgbClr val="6B7688"/>
+                </a:solidFill>
+                <a:latin typeface="微软雅黑" a:ea="微软雅黑"/>
+              </a:rPr>
+              <a:t>越权威的来源指标越硬；换源后机制不变，只是口径升级</a:t>
+            </a:r>
+          </a:p>
+        </p:txBody>
+      </p:sp>
+      <p:graphicFrame>
+        <p:nvGraphicFramePr>
+          <p:cNvPr id="4" name="Table 3"/>
+          <p:cNvGraphicFramePr>
+            <a:graphicFrameLocks noGrp="1"/>
+          </p:cNvGraphicFramePr>
+          <p:nvPr/>
+        </p:nvGraphicFramePr>
+        <p:xfrm>
+          <a:off x="685800" y="1627632"/>
+          <a:ext cx="10881360" cy="2240280"/>
+        </p:xfrm>
+        <a:graphic>
+          <a:graphicData uri="http://schemas.openxmlformats.org/drawingml/2006/table">
+            <a:tbl>
+              <a:tblPr firstRow="1" bandRow="1">
+                <a:tableStyleId>{5C22544A-7EE6-4342-B048-85BDC9FD1C3A}</a:tableStyleId>
+              </a:tblPr>
+              <a:tblGrid>
+                <a:gridCol w="2468880"/>
+                <a:gridCol w="3108960"/>
+                <a:gridCol w="3931920"/>
+                <a:gridCol w="1371600"/>
+              </a:tblGrid>
+              <a:tr h="448056">
+                <a:tc>
+                  <a:txBody>
+                    <a:bodyPr/>
+                    <a:lstStyle/>
+                    <a:p>
+                      <a:r>
+                        <a:rPr sz="1150" b="1">
+                          <a:solidFill>
+                            <a:srgbClr val="FFFFFF"/>
+                          </a:solidFill>
+                          <a:latin typeface="微软雅黑" a:ea="微软雅黑"/>
+                        </a:rPr>
+                        <a:t>数据源</a:t>
+                      </a:r>
+                    </a:p>
+                  </a:txBody>
+                  <a:tcPr marL="73152" marT="18288">
+                    <a:solidFill>
+                      <a:srgbClr val="2F6FEB"/>
+                    </a:solidFill>
+                  </a:tcPr>
+                </a:tc>
+                <a:tc>
+                  <a:txBody>
+                    <a:bodyPr/>
+                    <a:lstStyle/>
+                    <a:p>
+                      <a:r>
+                        <a:rPr sz="1150" b="1">
+                          <a:solidFill>
+                            <a:srgbClr val="FFFFFF"/>
+                          </a:solidFill>
+                          <a:latin typeface="微软雅黑" a:ea="微软雅黑"/>
+                        </a:rPr>
+                        <a:t>可获取字段</a:t>
+                      </a:r>
+                    </a:p>
+                  </a:txBody>
+                  <a:tcPr marL="73152" marT="18288">
+                    <a:solidFill>
+                      <a:srgbClr val="2F6FEB"/>
+                    </a:solidFill>
+                  </a:tcPr>
+                </a:tc>
+                <a:tc>
+                  <a:txBody>
+                    <a:bodyPr/>
+                    <a:lstStyle/>
+                    <a:p>
+                      <a:r>
+                        <a:rPr sz="1150" b="1">
+                          <a:solidFill>
+                            <a:srgbClr val="FFFFFF"/>
+                          </a:solidFill>
+                          <a:latin typeface="微软雅黑" a:ea="微软雅黑"/>
+                        </a:rPr>
+                        <a:t>指标口径 mode</a:t>
+                      </a:r>
+                    </a:p>
+                  </a:txBody>
+                  <a:tcPr marL="73152" marT="18288">
+                    <a:solidFill>
+                      <a:srgbClr val="2F6FEB"/>
+                    </a:solidFill>
+                  </a:tcPr>
+                </a:tc>
+                <a:tc>
+                  <a:txBody>
+                    <a:bodyPr/>
+                    <a:lstStyle/>
+                    <a:p>
+                      <a:r>
+                        <a:rPr sz="1150" b="1">
+                          <a:solidFill>
+                            <a:srgbClr val="FFFFFF"/>
+                          </a:solidFill>
+                          <a:latin typeface="微软雅黑" a:ea="微软雅黑"/>
+                        </a:rPr>
+                        <a:t>置信度上限</a:t>
+                      </a:r>
+                    </a:p>
+                  </a:txBody>
+                  <a:tcPr marL="73152" marT="18288">
+                    <a:solidFill>
+                      <a:srgbClr val="2F6FEB"/>
+                    </a:solidFill>
+                  </a:tcPr>
+                </a:tc>
+              </a:tr>
+              <a:tr h="448056">
+                <a:tc>
+                  <a:txBody>
+                    <a:bodyPr/>
+                    <a:lstStyle/>
+                    <a:p>
+                      <a:r>
+                        <a:rPr sz="1000" b="0">
+                          <a:solidFill>
+                            <a:srgbClr val="16233D"/>
+                          </a:solidFill>
+                          <a:latin typeface="微软雅黑" a:ea="微软雅黑"/>
+                        </a:rPr>
+                        <a:t>官方开放平台 API</a:t>
+                      </a:r>
+                    </a:p>
+                  </a:txBody>
+                  <a:tcPr marL="73152" marT="18288">
+                    <a:solidFill>
+                      <a:srgbClr val="FFFFFF"/>
+                    </a:solidFill>
+                  </a:tcPr>
+                </a:tc>
+                <a:tc>
+                  <a:txBody>
+                    <a:bodyPr/>
+                    <a:lstStyle/>
+                    <a:p>
+                      <a:r>
+                        <a:rPr sz="1000" b="0">
+                          <a:solidFill>
+                            <a:srgbClr val="6B7688"/>
+                          </a:solidFill>
+                          <a:latin typeface="微软雅黑" a:ea="微软雅黑"/>
+                        </a:rPr>
+                        <a:t>真实销量、价格、类目、库存</a:t>
+                      </a:r>
+                    </a:p>
+                  </a:txBody>
+                  <a:tcPr marL="73152" marT="18288">
+                    <a:solidFill>
+                      <a:srgbClr val="FFFFFF"/>
+                    </a:solidFill>
+                  </a:tcPr>
+                </a:tc>
+                <a:tc>
+                  <a:txBody>
+                    <a:bodyPr/>
+                    <a:lstStyle/>
+                    <a:p>
+                      <a:r>
+                        <a:rPr sz="1000" b="0">
+                          <a:solidFill>
+                            <a:srgbClr val="6B7688"/>
+                          </a:solidFill>
+                          <a:latin typeface="微软雅黑" a:ea="微软雅黑"/>
+                        </a:rPr>
+                        <a:t>api_volume_direct</a:t>
+                      </a:r>
+                    </a:p>
+                  </a:txBody>
+                  <a:tcPr marL="73152" marT="18288">
+                    <a:solidFill>
+                      <a:srgbClr val="FFFFFF"/>
+                    </a:solidFill>
+                  </a:tcPr>
+                </a:tc>
+                <a:tc>
+                  <a:txBody>
+                    <a:bodyPr/>
+                    <a:lstStyle/>
+                    <a:p>
+                      <a:r>
+                        <a:rPr sz="1000" b="0">
+                          <a:solidFill>
+                            <a:srgbClr val="6B7688"/>
+                          </a:solidFill>
+                          <a:latin typeface="微软雅黑" a:ea="微软雅黑"/>
+                        </a:rPr>
+                        <a:t>0.85</a:t>
+                      </a:r>
+                    </a:p>
+                  </a:txBody>
+                  <a:tcPr marL="73152" marT="18288">
+                    <a:solidFill>
+                      <a:srgbClr val="FFFFFF"/>
+                    </a:solidFill>
+                  </a:tcPr>
+                </a:tc>
+              </a:tr>
+              <a:tr h="448056">
+                <a:tc>
+                  <a:txBody>
+                    <a:bodyPr/>
+                    <a:lstStyle/>
+                    <a:p>
+                      <a:r>
+                        <a:rPr sz="1000" b="0">
+                          <a:solidFill>
+                            <a:srgbClr val="16233D"/>
+                          </a:solidFill>
+                          <a:latin typeface="微软雅黑" a:ea="微软雅黑"/>
+                        </a:rPr>
+                        <a:t>公开页面（≥2 天）</a:t>
+                      </a:r>
+                    </a:p>
+                  </a:txBody>
+                  <a:tcPr marL="73152" marT="18288">
+                    <a:solidFill>
+                      <a:srgbClr val="F5F7FA"/>
+                    </a:solidFill>
+                  </a:tcPr>
+                </a:tc>
+                <a:tc>
+                  <a:txBody>
+                    <a:bodyPr/>
+                    <a:lstStyle/>
+                    <a:p>
+                      <a:r>
+                        <a:rPr sz="1000" b="0">
+                          <a:solidFill>
+                            <a:srgbClr val="6B7688"/>
+                          </a:solidFill>
+                          <a:latin typeface="微软雅黑" a:ea="微软雅黑"/>
+                        </a:rPr>
+                        <a:t>评价数、榜单排名、店铺类型</a:t>
+                      </a:r>
+                    </a:p>
+                  </a:txBody>
+                  <a:tcPr marL="73152" marT="18288">
+                    <a:solidFill>
+                      <a:srgbClr val="F5F7FA"/>
+                    </a:solidFill>
+                  </a:tcPr>
+                </a:tc>
+                <a:tc>
+                  <a:txBody>
+                    <a:bodyPr/>
+                    <a:lstStyle/>
+                    <a:p>
+                      <a:r>
+                        <a:rPr sz="1000" b="0">
+                          <a:solidFill>
+                            <a:srgbClr val="6B7688"/>
+                          </a:solidFill>
+                          <a:latin typeface="微软雅黑" a:ea="微软雅黑"/>
+                        </a:rPr>
+                        <a:t>review_increment_basis</a:t>
+                      </a:r>
+                    </a:p>
+                  </a:txBody>
+                  <a:tcPr marL="73152" marT="18288">
+                    <a:solidFill>
+                      <a:srgbClr val="F5F7FA"/>
+                    </a:solidFill>
+                  </a:tcPr>
+                </a:tc>
+                <a:tc>
+                  <a:txBody>
+                    <a:bodyPr/>
+                    <a:lstStyle/>
+                    <a:p>
+                      <a:r>
+                        <a:rPr sz="1000" b="0">
+                          <a:solidFill>
+                            <a:srgbClr val="6B7688"/>
+                          </a:solidFill>
+                          <a:latin typeface="微软雅黑" a:ea="微软雅黑"/>
+                        </a:rPr>
+                        <a:t>0.46</a:t>
+                      </a:r>
+                    </a:p>
+                  </a:txBody>
+                  <a:tcPr marL="73152" marT="18288">
+                    <a:solidFill>
+                      <a:srgbClr val="F5F7FA"/>
+                    </a:solidFill>
+                  </a:tcPr>
+                </a:tc>
+              </a:tr>
+              <a:tr h="448056">
+                <a:tc>
+                  <a:txBody>
+                    <a:bodyPr/>
+                    <a:lstStyle/>
+                    <a:p>
+                      <a:r>
+                        <a:rPr sz="1000" b="0">
+                          <a:solidFill>
+                            <a:srgbClr val="16233D"/>
+                          </a:solidFill>
+                          <a:latin typeface="微软雅黑" a:ea="微软雅黑"/>
+                        </a:rPr>
+                        <a:t>公开页面（仅 1 天）</a:t>
+                      </a:r>
+                    </a:p>
+                  </a:txBody>
+                  <a:tcPr marL="73152" marT="18288">
+                    <a:solidFill>
+                      <a:srgbClr val="FFFFFF"/>
+                    </a:solidFill>
+                  </a:tcPr>
+                </a:tc>
+                <a:tc>
+                  <a:txBody>
+                    <a:bodyPr/>
+                    <a:lstStyle/>
+                    <a:p>
+                      <a:r>
+                        <a:rPr sz="1000" b="0">
+                          <a:solidFill>
+                            <a:srgbClr val="6B7688"/>
+                          </a:solidFill>
+                          <a:latin typeface="微软雅黑" a:ea="微软雅黑"/>
+                        </a:rPr>
+                        <a:t>同上</a:t>
+                      </a:r>
+                    </a:p>
+                  </a:txBody>
+                  <a:tcPr marL="73152" marT="18288">
+                    <a:solidFill>
+                      <a:srgbClr val="FFFFFF"/>
+                    </a:solidFill>
+                  </a:tcPr>
+                </a:tc>
+                <a:tc>
+                  <a:txBody>
+                    <a:bodyPr/>
+                    <a:lstStyle/>
+                    <a:p>
+                      <a:r>
+                        <a:rPr sz="1000" b="0">
+                          <a:solidFill>
+                            <a:srgbClr val="6B7688"/>
+                          </a:solidFill>
+                          <a:latin typeface="微软雅黑" a:ea="微软雅黑"/>
+                        </a:rPr>
+                        <a:t>single_snapshot_stock_basis</a:t>
+                      </a:r>
+                    </a:p>
+                  </a:txBody>
+                  <a:tcPr marL="73152" marT="18288">
+                    <a:solidFill>
+                      <a:srgbClr val="FFFFFF"/>
+                    </a:solidFill>
+                  </a:tcPr>
+                </a:tc>
+                <a:tc>
+                  <a:txBody>
+                    <a:bodyPr/>
+                    <a:lstStyle/>
+                    <a:p>
+                      <a:r>
+                        <a:rPr sz="1000" b="0">
+                          <a:solidFill>
+                            <a:srgbClr val="6B7688"/>
+                          </a:solidFill>
+                          <a:latin typeface="微软雅黑" a:ea="微软雅黑"/>
+                        </a:rPr>
+                        <a:t>0.46</a:t>
+                      </a:r>
+                    </a:p>
+                  </a:txBody>
+                  <a:tcPr marL="73152" marT="18288">
+                    <a:solidFill>
+                      <a:srgbClr val="FFFFFF"/>
+                    </a:solidFill>
+                  </a:tcPr>
+                </a:tc>
+              </a:tr>
+              <a:tr h="448056">
+                <a:tc>
+                  <a:txBody>
+                    <a:bodyPr/>
+                    <a:lstStyle/>
+                    <a:p>
+                      <a:r>
+                        <a:rPr sz="1000" b="0">
+                          <a:solidFill>
+                            <a:srgbClr val="16233D"/>
+                          </a:solidFill>
+                          <a:latin typeface="微软雅黑" a:ea="微软雅黑"/>
+                        </a:rPr>
+                        <a:t>公开页面（增量不可观测）</a:t>
+                      </a:r>
+                    </a:p>
+                  </a:txBody>
+                  <a:tcPr marL="73152" marT="18288">
+                    <a:solidFill>
+                      <a:srgbClr val="F5F7FA"/>
+                    </a:solidFill>
+                  </a:tcPr>
+                </a:tc>
+                <a:tc>
+                  <a:txBody>
+                    <a:bodyPr/>
+                    <a:lstStyle/>
+                    <a:p>
+                      <a:r>
+                        <a:rPr sz="1000" b="0">
+                          <a:solidFill>
+                            <a:srgbClr val="6B7688"/>
+                          </a:solidFill>
+                          <a:latin typeface="微软雅黑" a:ea="微软雅黑"/>
+                        </a:rPr>
+                        <a:t>同上（评价数为缓存展示值）</a:t>
+                      </a:r>
+                    </a:p>
+                  </a:txBody>
+                  <a:tcPr marL="73152" marT="18288">
+                    <a:solidFill>
+                      <a:srgbClr val="F5F7FA"/>
+                    </a:solidFill>
+                  </a:tcPr>
+                </a:tc>
+                <a:tc>
+                  <a:txBody>
+                    <a:bodyPr/>
+                    <a:lstStyle/>
+                    <a:p>
+                      <a:r>
+                        <a:rPr sz="1000" b="0">
+                          <a:solidFill>
+                            <a:srgbClr val="6B7688"/>
+                          </a:solidFill>
+                          <a:latin typeface="微软雅黑" a:ea="微软雅黑"/>
+                        </a:rPr>
+                        <a:t>review_increment_stale_stock_fallback</a:t>
+                      </a:r>
+                    </a:p>
+                  </a:txBody>
+                  <a:tcPr marL="73152" marT="18288">
+                    <a:solidFill>
+                      <a:srgbClr val="F5F7FA"/>
+                    </a:solidFill>
+                  </a:tcPr>
+                </a:tc>
+                <a:tc>
+                  <a:txBody>
+                    <a:bodyPr/>
+                    <a:lstStyle/>
+                    <a:p>
+                      <a:r>
+                        <a:rPr sz="1000" b="0">
+                          <a:solidFill>
+                            <a:srgbClr val="6B7688"/>
+                          </a:solidFill>
+                          <a:latin typeface="微软雅黑" a:ea="微软雅黑"/>
+                        </a:rPr>
+                        <a:t>0.40</a:t>
+                      </a:r>
+                    </a:p>
+                  </a:txBody>
+                  <a:tcPr marL="73152" marT="18288">
+                    <a:solidFill>
+                      <a:srgbClr val="F5F7FA"/>
+                    </a:solidFill>
+                  </a:tcPr>
+                </a:tc>
+              </a:tr>
+            </a:tbl>
+          </a:graphicData>
+        </a:graphic>
+      </p:graphicFrame>
+      <p:sp>
+        <p:nvSpPr>
+          <p:cNvPr id="5" name="Rounded Rectangle 4"/>
+          <p:cNvSpPr/>
+          <p:nvPr/>
+        </p:nvSpPr>
+        <p:spPr>
+          <a:xfrm>
+            <a:off x="685800" y="4160520"/>
+            <a:ext cx="3474720" cy="1828800"/>
+          </a:xfrm>
+          <a:prstGeom prst="roundRect">
+            <a:avLst/>
+          </a:prstGeom>
+          <a:solidFill>
+            <a:srgbClr val="FFFFFF"/>
+          </a:solidFill>
+          <a:ln w="9525">
+            <a:solidFill>
+              <a:srgbClr val="D8E0EE"/>
+            </a:solidFill>
+          </a:ln>
+          <a:effectLst/>
+        </p:spPr>
+        <p:style>
+          <a:lnRef idx="1">
+            <a:schemeClr val="accent1"/>
+          </a:lnRef>
+          <a:fillRef idx="3">
+            <a:schemeClr val="accent1"/>
+          </a:fillRef>
+          <a:effectRef idx="2">
+            <a:schemeClr val="accent1"/>
+          </a:effectRef>
+          <a:fontRef idx="minor">
+            <a:schemeClr val="lt1"/>
+          </a:fontRef>
+        </p:style>
+        <p:txBody>
+          <a:bodyPr rtlCol="0" anchor="ctr"/>
+          <a:lstStyle/>
+          <a:p>
+            <a:pPr algn="ctr"/>
+          </a:p>
+        </p:txBody>
+      </p:sp>
+      <p:sp>
+        <p:nvSpPr>
+          <p:cNvPr id="6" name="Rectangle 5"/>
+          <p:cNvSpPr/>
+          <p:nvPr/>
+        </p:nvSpPr>
+        <p:spPr>
+          <a:xfrm>
+            <a:off x="685800" y="4160520"/>
+            <a:ext cx="68580" cy="1828800"/>
+          </a:xfrm>
+          <a:prstGeom prst="rect">
+            <a:avLst/>
+          </a:prstGeom>
+          <a:solidFill>
+            <a:srgbClr val="B06608"/>
+          </a:solidFill>
+          <a:ln>
+            <a:noFill/>
+          </a:ln>
+          <a:effectLst/>
+        </p:spPr>
+        <p:style>
+          <a:lnRef idx="1">
+            <a:schemeClr val="accent1"/>
+          </a:lnRef>
+          <a:fillRef idx="3">
+            <a:schemeClr val="accent1"/>
+          </a:fillRef>
+          <a:effectRef idx="2">
+            <a:schemeClr val="accent1"/>
+          </a:effectRef>
+          <a:fontRef idx="minor">
+            <a:schemeClr val="lt1"/>
+          </a:fontRef>
+        </p:style>
+        <p:txBody>
+          <a:bodyPr rtlCol="0" anchor="ctr"/>
+          <a:lstStyle/>
+          <a:p>
+            <a:pPr algn="ctr"/>
+          </a:p>
+        </p:txBody>
+      </p:sp>
+      <p:sp>
+        <p:nvSpPr>
+          <p:cNvPr id="7" name="TextBox 6"/>
+          <p:cNvSpPr txBox="1"/>
+          <p:nvPr/>
+        </p:nvSpPr>
+        <p:spPr>
+          <a:xfrm>
+            <a:off x="941832" y="4325112"/>
+            <a:ext cx="3017520" cy="1554480"/>
+          </a:xfrm>
+          <a:prstGeom prst="rect">
+            <a:avLst/>
+          </a:prstGeom>
+          <a:noFill/>
+        </p:spPr>
+        <p:txBody>
+          <a:bodyPr wrap="square" anchor="t">
+            <a:spAutoFit/>
+          </a:bodyPr>
+          <a:lstStyle/>
+          <a:p>
+            <a:pPr algn="l">
+              <a:lnSpc>
+                <a:spcPct val="115000"/>
+              </a:lnSpc>
+              <a:spcAft>
+                <a:spcPts val="600"/>
+              </a:spcAft>
+            </a:pPr>
+            <a:r>
+              <a:rPr sz="1400" b="1">
+                <a:solidFill>
+                  <a:srgbClr val="16233D"/>
+                </a:solidFill>
+                <a:latin typeface="微软雅黑" a:ea="微软雅黑"/>
+              </a:rPr>
+              <a:t>滚动销量 ≠ 累计销量</a:t>
+            </a:r>
+          </a:p>
+          <a:p>
+            <a:pPr algn="l">
+              <a:lnSpc>
+                <a:spcPct val="125000"/>
+              </a:lnSpc>
+              <a:spcAft>
+                <a:spcPts val="400"/>
+              </a:spcAft>
+            </a:pPr>
+            <a:r>
+              <a:rPr sz="1100" b="0">
+                <a:solidFill>
+                  <a:srgbClr val="6B7688"/>
+                </a:solidFill>
+                <a:latin typeface="微软雅黑" a:ea="微软雅黑"/>
+              </a:rPr>
+              <a:t>官方接口给的是「近 30 天销量」这类滚动值，当累计值相减会得到无意义的数。系统用 sales_semantics 标记隔离，只作规模值，不参与增量推算。</a:t>
+            </a:r>
+          </a:p>
+        </p:txBody>
+      </p:sp>
+      <p:sp>
+        <p:nvSpPr>
+          <p:cNvPr id="8" name="Rounded Rectangle 7"/>
+          <p:cNvSpPr/>
+          <p:nvPr/>
+        </p:nvSpPr>
+        <p:spPr>
+          <a:xfrm>
+            <a:off x="4389120" y="4160520"/>
+            <a:ext cx="3474720" cy="1828800"/>
+          </a:xfrm>
+          <a:prstGeom prst="roundRect">
+            <a:avLst/>
+          </a:prstGeom>
+          <a:solidFill>
+            <a:srgbClr val="FFFFFF"/>
+          </a:solidFill>
+          <a:ln w="9525">
+            <a:solidFill>
+              <a:srgbClr val="D8E0EE"/>
+            </a:solidFill>
+          </a:ln>
+          <a:effectLst/>
+        </p:spPr>
+        <p:style>
+          <a:lnRef idx="1">
+            <a:schemeClr val="accent1"/>
+          </a:lnRef>
+          <a:fillRef idx="3">
+            <a:schemeClr val="accent1"/>
+          </a:fillRef>
+          <a:effectRef idx="2">
+            <a:schemeClr val="accent1"/>
+          </a:effectRef>
+          <a:fontRef idx="minor">
+            <a:schemeClr val="lt1"/>
+          </a:fontRef>
+        </p:style>
+        <p:txBody>
+          <a:bodyPr rtlCol="0" anchor="ctr"/>
+          <a:lstStyle/>
+          <a:p>
+            <a:pPr algn="ctr"/>
+          </a:p>
+        </p:txBody>
+      </p:sp>
+      <p:sp>
+        <p:nvSpPr>
+          <p:cNvPr id="9" name="Rectangle 8"/>
+          <p:cNvSpPr/>
+          <p:nvPr/>
+        </p:nvSpPr>
+        <p:spPr>
+          <a:xfrm>
+            <a:off x="4389120" y="4160520"/>
+            <a:ext cx="68580" cy="1828800"/>
+          </a:xfrm>
+          <a:prstGeom prst="rect">
+            <a:avLst/>
+          </a:prstGeom>
+          <a:solidFill>
+            <a:srgbClr val="0F8F80"/>
+          </a:solidFill>
+          <a:ln>
+            <a:noFill/>
+          </a:ln>
+          <a:effectLst/>
+        </p:spPr>
+        <p:style>
+          <a:lnRef idx="1">
+            <a:schemeClr val="accent1"/>
+          </a:lnRef>
+          <a:fillRef idx="3">
+            <a:schemeClr val="accent1"/>
+          </a:fillRef>
+          <a:effectRef idx="2">
+            <a:schemeClr val="accent1"/>
+          </a:effectRef>
+          <a:fontRef idx="minor">
+            <a:schemeClr val="lt1"/>
+          </a:fontRef>
+        </p:style>
+        <p:txBody>
+          <a:bodyPr rtlCol="0" anchor="ctr"/>
+          <a:lstStyle/>
+          <a:p>
+            <a:pPr algn="ctr"/>
+          </a:p>
+        </p:txBody>
+      </p:sp>
+      <p:sp>
+        <p:nvSpPr>
+          <p:cNvPr id="10" name="TextBox 9"/>
+          <p:cNvSpPr txBox="1"/>
+          <p:nvPr/>
+        </p:nvSpPr>
+        <p:spPr>
+          <a:xfrm>
+            <a:off x="4645152" y="4325112"/>
+            <a:ext cx="3017520" cy="1554480"/>
+          </a:xfrm>
+          <a:prstGeom prst="rect">
+            <a:avLst/>
+          </a:prstGeom>
+          <a:noFill/>
+        </p:spPr>
+        <p:txBody>
+          <a:bodyPr wrap="square" anchor="t">
+            <a:spAutoFit/>
+          </a:bodyPr>
+          <a:lstStyle/>
+          <a:p>
+            <a:pPr algn="l">
+              <a:lnSpc>
+                <a:spcPct val="115000"/>
+              </a:lnSpc>
+              <a:spcAft>
+                <a:spcPts val="600"/>
+              </a:spcAft>
+            </a:pPr>
+            <a:r>
+              <a:rPr sz="1400" b="1">
+                <a:solidFill>
+                  <a:srgbClr val="16233D"/>
+                </a:solidFill>
+                <a:latin typeface="微软雅黑" a:ea="微软雅黑"/>
+              </a:rPr>
+              <a:t>平台之间的精度差异</a:t>
+            </a:r>
+          </a:p>
+          <a:p>
+            <a:pPr algn="l">
+              <a:lnSpc>
+                <a:spcPct val="125000"/>
+              </a:lnSpc>
+              <a:spcAft>
+                <a:spcPts val="400"/>
+              </a:spcAft>
+            </a:pPr>
+            <a:r>
+              <a:rPr sz="1100" b="0">
+                <a:solidFill>
+                  <a:srgbClr val="6B7688"/>
+                </a:solidFill>
+                <a:latin typeface="微软雅黑" a:ea="微软雅黑"/>
+              </a:rPr>
+              <a:t>淘宝 volume 返回具体数字；拼多多 sales_tip 返回「1万+」区间提示。申请凭据时优先选择返回精确值的接口。</a:t>
+            </a:r>
+          </a:p>
+        </p:txBody>
+      </p:sp>
+      <p:sp>
+        <p:nvSpPr>
+          <p:cNvPr id="11" name="Rounded Rectangle 10"/>
+          <p:cNvSpPr/>
+          <p:nvPr/>
+        </p:nvSpPr>
+        <p:spPr>
+          <a:xfrm>
+            <a:off x="8092440" y="4160520"/>
+            <a:ext cx="3474720" cy="1828800"/>
+          </a:xfrm>
+          <a:prstGeom prst="roundRect">
+            <a:avLst/>
+          </a:prstGeom>
+          <a:solidFill>
+            <a:srgbClr val="FFFFFF"/>
+          </a:solidFill>
+          <a:ln w="9525">
+            <a:solidFill>
+              <a:srgbClr val="D8E0EE"/>
+            </a:solidFill>
+          </a:ln>
+          <a:effectLst/>
+        </p:spPr>
+        <p:style>
+          <a:lnRef idx="1">
+            <a:schemeClr val="accent1"/>
+          </a:lnRef>
+          <a:fillRef idx="3">
+            <a:schemeClr val="accent1"/>
+          </a:fillRef>
+          <a:effectRef idx="2">
+            <a:schemeClr val="accent1"/>
+          </a:effectRef>
+          <a:fontRef idx="minor">
+            <a:schemeClr val="lt1"/>
+          </a:fontRef>
+        </p:style>
+        <p:txBody>
+          <a:bodyPr rtlCol="0" anchor="ctr"/>
+          <a:lstStyle/>
+          <a:p>
+            <a:pPr algn="ctr"/>
+          </a:p>
+        </p:txBody>
+      </p:sp>
+      <p:sp>
+        <p:nvSpPr>
+          <p:cNvPr id="12" name="Rectangle 11"/>
+          <p:cNvSpPr/>
+          <p:nvPr/>
+        </p:nvSpPr>
+        <p:spPr>
+          <a:xfrm>
+            <a:off x="8092440" y="4160520"/>
+            <a:ext cx="68580" cy="1828800"/>
+          </a:xfrm>
+          <a:prstGeom prst="rect">
+            <a:avLst/>
+          </a:prstGeom>
+          <a:solidFill>
+            <a:srgbClr val="2F6FEB"/>
+          </a:solidFill>
+          <a:ln>
+            <a:noFill/>
+          </a:ln>
+          <a:effectLst/>
+        </p:spPr>
+        <p:style>
+          <a:lnRef idx="1">
+            <a:schemeClr val="accent1"/>
+          </a:lnRef>
+          <a:fillRef idx="3">
+            <a:schemeClr val="accent1"/>
+          </a:fillRef>
+          <a:effectRef idx="2">
+            <a:schemeClr val="accent1"/>
+          </a:effectRef>
+          <a:fontRef idx="minor">
+            <a:schemeClr val="lt1"/>
+          </a:fontRef>
+        </p:style>
+        <p:txBody>
+          <a:bodyPr rtlCol="0" anchor="ctr"/>
+          <a:lstStyle/>
+          <a:p>
+            <a:pPr algn="ctr"/>
+          </a:p>
+        </p:txBody>
+      </p:sp>
+      <p:sp>
+        <p:nvSpPr>
+          <p:cNvPr id="13" name="TextBox 12"/>
+          <p:cNvSpPr txBox="1"/>
+          <p:nvPr/>
+        </p:nvSpPr>
+        <p:spPr>
+          <a:xfrm>
+            <a:off x="8348471" y="4325112"/>
+            <a:ext cx="3017520" cy="1554480"/>
+          </a:xfrm>
+          <a:prstGeom prst="rect">
+            <a:avLst/>
+          </a:prstGeom>
+          <a:noFill/>
+        </p:spPr>
+        <p:txBody>
+          <a:bodyPr wrap="square" anchor="t">
+            <a:spAutoFit/>
+          </a:bodyPr>
+          <a:lstStyle/>
+          <a:p>
+            <a:pPr algn="l">
+              <a:lnSpc>
+                <a:spcPct val="115000"/>
+              </a:lnSpc>
+              <a:spcAft>
+                <a:spcPts val="600"/>
+              </a:spcAft>
+            </a:pPr>
+            <a:r>
+              <a:rPr sz="1400" b="1">
+                <a:solidFill>
+                  <a:srgbClr val="16233D"/>
+                </a:solidFill>
+                <a:latin typeface="微软雅黑" a:ea="微软雅黑"/>
+              </a:rPr>
+              <a:t>换源不改机制</a:t>
+            </a:r>
+          </a:p>
+          <a:p>
+            <a:pPr algn="l">
+              <a:lnSpc>
+                <a:spcPct val="125000"/>
+              </a:lnSpc>
+              <a:spcAft>
+                <a:spcPts val="400"/>
+              </a:spcAft>
+            </a:pPr>
+            <a:r>
+              <a:rPr sz="1100" b="0">
+                <a:solidFill>
+                  <a:srgbClr val="6B7688"/>
+                </a:solidFill>
+                <a:latin typeface="微软雅黑" a:ea="微软雅黑"/>
+              </a:rPr>
+              <a:t>无论数据来自公开页还是官方 API，口径、置信度、证据链全部透明可追溯—— 这才是可信度的真正保障。</a:t>
+            </a:r>
+          </a:p>
+        </p:txBody>
+      </p:sp>
+      <p:sp>
+        <p:nvSpPr>
+          <p:cNvPr id="14" name="TextBox 13"/>
+          <p:cNvSpPr txBox="1"/>
+          <p:nvPr/>
+        </p:nvSpPr>
+        <p:spPr>
+          <a:xfrm>
+            <a:off x="548640" y="6355080"/>
+            <a:ext cx="7315200" cy="320040"/>
+          </a:xfrm>
+          <a:prstGeom prst="rect">
+            <a:avLst/>
+          </a:prstGeom>
+          <a:noFill/>
+        </p:spPr>
+        <p:txBody>
+          <a:bodyPr wrap="square" anchor="t">
+            <a:spAutoFit/>
+          </a:bodyPr>
+          <a:lstStyle/>
+          <a:p>
+            <a:pPr algn="l">
+              <a:lnSpc>
+                <a:spcPct val="115000"/>
+              </a:lnSpc>
+              <a:spcAft>
+                <a:spcPts val="600"/>
+              </a:spcAft>
+            </a:pPr>
+            <a:r>
+              <a:rPr sz="950" b="0">
+                <a:solidFill>
+                  <a:srgbClr val="6B7688"/>
+                </a:solidFill>
+                <a:latin typeface="微软雅黑" a:ea="微软雅黑"/>
+              </a:rPr>
+              <a:t>商情罗盘 MarketCompass · AI 应用大赛（产业应用类）</a:t>
+            </a:r>
+          </a:p>
+        </p:txBody>
+      </p:sp>
+      <p:sp>
+        <p:nvSpPr>
+          <p:cNvPr id="15" name="TextBox 14"/>
+          <p:cNvSpPr txBox="1"/>
+          <p:nvPr/>
+        </p:nvSpPr>
+        <p:spPr>
+          <a:xfrm>
+            <a:off x="11155680" y="6355080"/>
+            <a:ext cx="548640" cy="320040"/>
+          </a:xfrm>
+          <a:prstGeom prst="rect">
+            <a:avLst/>
+          </a:prstGeom>
+          <a:noFill/>
+        </p:spPr>
+        <p:txBody>
+          <a:bodyPr wrap="square" anchor="t">
+            <a:spAutoFit/>
+          </a:bodyPr>
+          <a:lstStyle/>
+          <a:p>
+            <a:pPr algn="r">
+              <a:lnSpc>
+                <a:spcPct val="115000"/>
+              </a:lnSpc>
+              <a:spcAft>
+                <a:spcPts val="600"/>
+              </a:spcAft>
+            </a:pPr>
+            <a:r>
+              <a:rPr sz="950" b="0">
+                <a:solidFill>
+                  <a:srgbClr val="6B7688"/>
+                </a:solidFill>
+                <a:latin typeface="微软雅黑" a:ea="微软雅黑"/>
+              </a:rPr>
+              <a:t>8</a:t>
+            </a:r>
+          </a:p>
+        </p:txBody>
+      </p:sp>
+    </p:spTree>
+  </p:cSld>
+  <p:clrMapOvr>
+    <a:masterClrMapping/>
+  </p:clrMapOvr>
+</p:sld>
+</file>
+
+<file path=ppt/slides/slide9.xml><?xml version="1.0" encoding="utf-8"?>
+<p:sld xmlns:a="http://schemas.openxmlformats.org/drawingml/2006/main" xmlns:p="http://schemas.openxmlformats.org/presentationml/2006/main" xmlns:r="http://schemas.openxmlformats.org/officeDocument/2006/relationships">
+  <p:cSld>
+    <p:spTree>
+      <p:nvGrpSpPr>
+        <p:cNvPr id="1" name=""/>
+        <p:cNvGrpSpPr/>
+        <p:nvPr/>
+      </p:nvGrpSpPr>
+      <p:grpSpPr/>
+      <p:sp>
+        <p:nvSpPr>
+          <p:cNvPr id="2" name="Rectangle 1"/>
+          <p:cNvSpPr/>
+          <p:nvPr/>
+        </p:nvSpPr>
+        <p:spPr>
+          <a:xfrm>
+            <a:off x="548640" y="475488"/>
+            <a:ext cx="100584" cy="457200"/>
+          </a:xfrm>
+          <a:prstGeom prst="rect">
+            <a:avLst/>
+          </a:prstGeom>
+          <a:solidFill>
+            <a:srgbClr val="2F6FEB"/>
+          </a:solidFill>
+          <a:ln>
+            <a:noFill/>
+          </a:ln>
+          <a:effectLst/>
+        </p:spPr>
+        <p:style>
+          <a:lnRef idx="1">
+            <a:schemeClr val="accent1"/>
+          </a:lnRef>
+          <a:fillRef idx="3">
+            <a:schemeClr val="accent1"/>
+          </a:fillRef>
+          <a:effectRef idx="2">
+            <a:schemeClr val="accent1"/>
+          </a:effectRef>
+          <a:fontRef idx="minor">
+            <a:schemeClr val="lt1"/>
+          </a:fontRef>
+        </p:style>
+        <p:txBody>
+          <a:bodyPr rtlCol="0" anchor="ctr"/>
+          <a:lstStyle/>
+          <a:p>
+            <a:pPr algn="ctr"/>
+          </a:p>
+        </p:txBody>
+      </p:sp>
+      <p:sp>
+        <p:nvSpPr>
+          <p:cNvPr id="3" name="TextBox 2"/>
+          <p:cNvSpPr txBox="1"/>
+          <p:nvPr/>
+        </p:nvSpPr>
+        <p:spPr>
+          <a:xfrm>
+            <a:off x="777240" y="402336"/>
+            <a:ext cx="10881360" cy="777240"/>
+          </a:xfrm>
+          <a:prstGeom prst="rect">
+            <a:avLst/>
+          </a:prstGeom>
+          <a:noFill/>
+        </p:spPr>
+        <p:txBody>
+          <a:bodyPr wrap="square" anchor="t">
+            <a:spAutoFit/>
+          </a:bodyPr>
+          <a:lstStyle/>
+          <a:p>
+            <a:pPr algn="l">
+              <a:lnSpc>
+                <a:spcPct val="115000"/>
+              </a:lnSpc>
+              <a:spcAft>
+                <a:spcPts val="200"/>
+              </a:spcAft>
+            </a:pPr>
+            <a:r>
+              <a:rPr sz="2500" b="1">
+                <a:solidFill>
+                  <a:srgbClr val="16233D"/>
+                </a:solidFill>
+                <a:latin typeface="微软雅黑" a:ea="微软雅黑"/>
+              </a:rPr>
               <a:t>数据源与合规：能抓什么，不抓什么</a:t>
             </a:r>
           </a:p>
@@ -12267,1133 +14533,6 @@
       <p:sp>
         <p:nvSpPr>
           <p:cNvPr id="12" name="TextBox 11"/>
-          <p:cNvSpPr txBox="1"/>
-          <p:nvPr/>
-        </p:nvSpPr>
-        <p:spPr>
-          <a:xfrm>
-            <a:off x="11155680" y="6355080"/>
-            <a:ext cx="548640" cy="320040"/>
-          </a:xfrm>
-          <a:prstGeom prst="rect">
-            <a:avLst/>
-          </a:prstGeom>
-          <a:noFill/>
-        </p:spPr>
-        <p:txBody>
-          <a:bodyPr wrap="square" anchor="t">
-            <a:spAutoFit/>
-          </a:bodyPr>
-          <a:lstStyle/>
-          <a:p>
-            <a:pPr algn="r">
-              <a:lnSpc>
-                <a:spcPct val="115000"/>
-              </a:lnSpc>
-              <a:spcAft>
-                <a:spcPts val="600"/>
-              </a:spcAft>
-            </a:pPr>
-            <a:r>
-              <a:rPr sz="950" b="0">
-                <a:solidFill>
-                  <a:srgbClr val="6B7688"/>
-                </a:solidFill>
-                <a:latin typeface="微软雅黑" a:ea="微软雅黑"/>
-              </a:rPr>
-              <a:t>8</a:t>
-            </a:r>
-          </a:p>
-        </p:txBody>
-      </p:sp>
-    </p:spTree>
-  </p:cSld>
-  <p:clrMapOvr>
-    <a:masterClrMapping/>
-  </p:clrMapOvr>
-</p:sld>
-</file>
-
-<file path=ppt/slides/slide9.xml><?xml version="1.0" encoding="utf-8"?>
-<p:sld xmlns:a="http://schemas.openxmlformats.org/drawingml/2006/main" xmlns:p="http://schemas.openxmlformats.org/presentationml/2006/main" xmlns:r="http://schemas.openxmlformats.org/officeDocument/2006/relationships">
-  <p:cSld>
-    <p:spTree>
-      <p:nvGrpSpPr>
-        <p:cNvPr id="1" name=""/>
-        <p:cNvGrpSpPr/>
-        <p:nvPr/>
-      </p:nvGrpSpPr>
-      <p:grpSpPr/>
-      <p:sp>
-        <p:nvSpPr>
-          <p:cNvPr id="2" name="Rectangle 1"/>
-          <p:cNvSpPr/>
-          <p:nvPr/>
-        </p:nvSpPr>
-        <p:spPr>
-          <a:xfrm>
-            <a:off x="548640" y="475488"/>
-            <a:ext cx="100584" cy="457200"/>
-          </a:xfrm>
-          <a:prstGeom prst="rect">
-            <a:avLst/>
-          </a:prstGeom>
-          <a:solidFill>
-            <a:srgbClr val="2F6FEB"/>
-          </a:solidFill>
-          <a:ln>
-            <a:noFill/>
-          </a:ln>
-          <a:effectLst/>
-        </p:spPr>
-        <p:style>
-          <a:lnRef idx="1">
-            <a:schemeClr val="accent1"/>
-          </a:lnRef>
-          <a:fillRef idx="3">
-            <a:schemeClr val="accent1"/>
-          </a:fillRef>
-          <a:effectRef idx="2">
-            <a:schemeClr val="accent1"/>
-          </a:effectRef>
-          <a:fontRef idx="minor">
-            <a:schemeClr val="lt1"/>
-          </a:fontRef>
-        </p:style>
-        <p:txBody>
-          <a:bodyPr rtlCol="0" anchor="ctr"/>
-          <a:lstStyle/>
-          <a:p>
-            <a:pPr algn="ctr"/>
-          </a:p>
-        </p:txBody>
-      </p:sp>
-      <p:sp>
-        <p:nvSpPr>
-          <p:cNvPr id="3" name="TextBox 2"/>
-          <p:cNvSpPr txBox="1"/>
-          <p:nvPr/>
-        </p:nvSpPr>
-        <p:spPr>
-          <a:xfrm>
-            <a:off x="777240" y="402336"/>
-            <a:ext cx="10881360" cy="777240"/>
-          </a:xfrm>
-          <a:prstGeom prst="rect">
-            <a:avLst/>
-          </a:prstGeom>
-          <a:noFill/>
-        </p:spPr>
-        <p:txBody>
-          <a:bodyPr wrap="square" anchor="t">
-            <a:spAutoFit/>
-          </a:bodyPr>
-          <a:lstStyle/>
-          <a:p>
-            <a:pPr algn="l">
-              <a:lnSpc>
-                <a:spcPct val="115000"/>
-              </a:lnSpc>
-              <a:spcAft>
-                <a:spcPts val="200"/>
-              </a:spcAft>
-            </a:pPr>
-            <a:r>
-              <a:rPr sz="2500" b="1">
-                <a:solidFill>
-                  <a:srgbClr val="16233D"/>
-                </a:solidFill>
-                <a:latin typeface="微软雅黑" a:ea="微软雅黑"/>
-              </a:rPr>
-              <a:t>实测结果：真实数据已跑通</a:t>
-            </a:r>
-          </a:p>
-          <a:p>
-            <a:pPr algn="l">
-              <a:lnSpc>
-                <a:spcPct val="115000"/>
-              </a:lnSpc>
-              <a:spcAft>
-                <a:spcPts val="600"/>
-              </a:spcAft>
-            </a:pPr>
-            <a:r>
-              <a:rPr sz="1250" b="0">
-                <a:solidFill>
-                  <a:srgbClr val="6B7688"/>
-                </a:solidFill>
-                <a:latin typeface="微软雅黑" a:ea="微软雅黑"/>
-              </a:rPr>
-              <a:t>不是概念演示——真实公开数据已入库并跑完全链路</a:t>
-            </a:r>
-          </a:p>
-        </p:txBody>
-      </p:sp>
-      <p:sp>
-        <p:nvSpPr>
-          <p:cNvPr id="4" name="Rounded Rectangle 3"/>
-          <p:cNvSpPr/>
-          <p:nvPr/>
-        </p:nvSpPr>
-        <p:spPr>
-          <a:xfrm>
-            <a:off x="685800" y="1691640"/>
-            <a:ext cx="2542032" cy="1691640"/>
-          </a:xfrm>
-          <a:prstGeom prst="roundRect">
-            <a:avLst/>
-          </a:prstGeom>
-          <a:solidFill>
-            <a:srgbClr val="FFFFFF"/>
-          </a:solidFill>
-          <a:ln w="9525">
-            <a:solidFill>
-              <a:srgbClr val="D8E0EE"/>
-            </a:solidFill>
-          </a:ln>
-          <a:effectLst/>
-        </p:spPr>
-        <p:style>
-          <a:lnRef idx="1">
-            <a:schemeClr val="accent1"/>
-          </a:lnRef>
-          <a:fillRef idx="3">
-            <a:schemeClr val="accent1"/>
-          </a:fillRef>
-          <a:effectRef idx="2">
-            <a:schemeClr val="accent1"/>
-          </a:effectRef>
-          <a:fontRef idx="minor">
-            <a:schemeClr val="lt1"/>
-          </a:fontRef>
-        </p:style>
-        <p:txBody>
-          <a:bodyPr rtlCol="0" anchor="ctr"/>
-          <a:lstStyle/>
-          <a:p>
-            <a:pPr algn="ctr"/>
-          </a:p>
-        </p:txBody>
-      </p:sp>
-      <p:sp>
-        <p:nvSpPr>
-          <p:cNvPr id="5" name="TextBox 4"/>
-          <p:cNvSpPr txBox="1"/>
-          <p:nvPr/>
-        </p:nvSpPr>
-        <p:spPr>
-          <a:xfrm>
-            <a:off x="685800" y="1828800"/>
-            <a:ext cx="2542032" cy="1463040"/>
-          </a:xfrm>
-          <a:prstGeom prst="rect">
-            <a:avLst/>
-          </a:prstGeom>
-          <a:noFill/>
-        </p:spPr>
-        <p:txBody>
-          <a:bodyPr wrap="square" anchor="t">
-            <a:spAutoFit/>
-          </a:bodyPr>
-          <a:lstStyle/>
-          <a:p>
-            <a:pPr algn="ctr">
-              <a:lnSpc>
-                <a:spcPct val="115000"/>
-              </a:lnSpc>
-              <a:spcAft>
-                <a:spcPts val="0"/>
-              </a:spcAft>
-            </a:pPr>
-            <a:r>
-              <a:rPr sz="3200" b="1">
-                <a:solidFill>
-                  <a:srgbClr val="2F6FEB"/>
-                </a:solidFill>
-                <a:latin typeface="微软雅黑" a:ea="微软雅黑"/>
-              </a:rPr>
-              <a:t>73</a:t>
-            </a:r>
-          </a:p>
-          <a:p>
-            <a:pPr algn="ctr">
-              <a:lnSpc>
-                <a:spcPct val="115000"/>
-              </a:lnSpc>
-              <a:spcAft>
-                <a:spcPts val="400"/>
-              </a:spcAft>
-            </a:pPr>
-            <a:r>
-              <a:rPr sz="1300" b="1">
-                <a:solidFill>
-                  <a:srgbClr val="16233D"/>
-                </a:solidFill>
-                <a:latin typeface="微软雅黑" a:ea="微软雅黑"/>
-              </a:rPr>
-              <a:t>个真实商品</a:t>
-            </a:r>
-          </a:p>
-          <a:p>
-            <a:pPr algn="ctr">
-              <a:lnSpc>
-                <a:spcPct val="115000"/>
-              </a:lnSpc>
-              <a:spcAft>
-                <a:spcPts val="600"/>
-              </a:spcAft>
-            </a:pPr>
-            <a:r>
-              <a:rPr sz="1050" b="0">
-                <a:solidFill>
-                  <a:srgbClr val="6B7688"/>
-                </a:solidFill>
-                <a:latin typeface="微软雅黑" a:ea="微软雅黑"/>
-              </a:rPr>
-              <a:t>苏宁公开搜索页实测入库</a:t>
-            </a:r>
-          </a:p>
-        </p:txBody>
-      </p:sp>
-      <p:sp>
-        <p:nvSpPr>
-          <p:cNvPr id="6" name="Rounded Rectangle 5"/>
-          <p:cNvSpPr/>
-          <p:nvPr/>
-        </p:nvSpPr>
-        <p:spPr>
-          <a:xfrm>
-            <a:off x="3474720" y="1691640"/>
-            <a:ext cx="2542032" cy="1691640"/>
-          </a:xfrm>
-          <a:prstGeom prst="roundRect">
-            <a:avLst/>
-          </a:prstGeom>
-          <a:solidFill>
-            <a:srgbClr val="FFFFFF"/>
-          </a:solidFill>
-          <a:ln w="9525">
-            <a:solidFill>
-              <a:srgbClr val="D8E0EE"/>
-            </a:solidFill>
-          </a:ln>
-          <a:effectLst/>
-        </p:spPr>
-        <p:style>
-          <a:lnRef idx="1">
-            <a:schemeClr val="accent1"/>
-          </a:lnRef>
-          <a:fillRef idx="3">
-            <a:schemeClr val="accent1"/>
-          </a:fillRef>
-          <a:effectRef idx="2">
-            <a:schemeClr val="accent1"/>
-          </a:effectRef>
-          <a:fontRef idx="minor">
-            <a:schemeClr val="lt1"/>
-          </a:fontRef>
-        </p:style>
-        <p:txBody>
-          <a:bodyPr rtlCol="0" anchor="ctr"/>
-          <a:lstStyle/>
-          <a:p>
-            <a:pPr algn="ctr"/>
-          </a:p>
-        </p:txBody>
-      </p:sp>
-      <p:sp>
-        <p:nvSpPr>
-          <p:cNvPr id="7" name="TextBox 6"/>
-          <p:cNvSpPr txBox="1"/>
-          <p:nvPr/>
-        </p:nvSpPr>
-        <p:spPr>
-          <a:xfrm>
-            <a:off x="3474720" y="1828800"/>
-            <a:ext cx="2542032" cy="1463040"/>
-          </a:xfrm>
-          <a:prstGeom prst="rect">
-            <a:avLst/>
-          </a:prstGeom>
-          <a:noFill/>
-        </p:spPr>
-        <p:txBody>
-          <a:bodyPr wrap="square" anchor="t">
-            <a:spAutoFit/>
-          </a:bodyPr>
-          <a:lstStyle/>
-          <a:p>
-            <a:pPr algn="ctr">
-              <a:lnSpc>
-                <a:spcPct val="115000"/>
-              </a:lnSpc>
-              <a:spcAft>
-                <a:spcPts val="0"/>
-              </a:spcAft>
-            </a:pPr>
-            <a:r>
-              <a:rPr sz="3200" b="1">
-                <a:solidFill>
-                  <a:srgbClr val="2F6FEB"/>
-                </a:solidFill>
-                <a:latin typeface="微软雅黑" a:ea="微软雅黑"/>
-              </a:rPr>
-              <a:t>19,936</a:t>
-            </a:r>
-          </a:p>
-          <a:p>
-            <a:pPr algn="ctr">
-              <a:lnSpc>
-                <a:spcPct val="115000"/>
-              </a:lnSpc>
-              <a:spcAft>
-                <a:spcPts val="400"/>
-              </a:spcAft>
-            </a:pPr>
-            <a:r>
-              <a:rPr sz="1300" b="1">
-                <a:solidFill>
-                  <a:srgbClr val="16233D"/>
-                </a:solidFill>
-                <a:latin typeface="微软雅黑" a:ea="微软雅黑"/>
-              </a:rPr>
-              <a:t>条日指标</a:t>
-            </a:r>
-          </a:p>
-          <a:p>
-            <a:pPr algn="ctr">
-              <a:lnSpc>
-                <a:spcPct val="115000"/>
-              </a:lnSpc>
-              <a:spcAft>
-                <a:spcPts val="600"/>
-              </a:spcAft>
-            </a:pPr>
-            <a:r>
-              <a:rPr sz="1050" b="0">
-                <a:solidFill>
-                  <a:srgbClr val="6B7688"/>
-                </a:solidFill>
-                <a:latin typeface="微软雅黑" a:ea="微软雅黑"/>
-              </a:rPr>
-              <a:t>演示数据集 + 真实数据合计</a:t>
-            </a:r>
-          </a:p>
-        </p:txBody>
-      </p:sp>
-      <p:sp>
-        <p:nvSpPr>
-          <p:cNvPr id="8" name="Rounded Rectangle 7"/>
-          <p:cNvSpPr/>
-          <p:nvPr/>
-        </p:nvSpPr>
-        <p:spPr>
-          <a:xfrm>
-            <a:off x="6263640" y="1691640"/>
-            <a:ext cx="2542032" cy="1691640"/>
-          </a:xfrm>
-          <a:prstGeom prst="roundRect">
-            <a:avLst/>
-          </a:prstGeom>
-          <a:solidFill>
-            <a:srgbClr val="FFFFFF"/>
-          </a:solidFill>
-          <a:ln w="9525">
-            <a:solidFill>
-              <a:srgbClr val="D8E0EE"/>
-            </a:solidFill>
-          </a:ln>
-          <a:effectLst/>
-        </p:spPr>
-        <p:style>
-          <a:lnRef idx="1">
-            <a:schemeClr val="accent1"/>
-          </a:lnRef>
-          <a:fillRef idx="3">
-            <a:schemeClr val="accent1"/>
-          </a:fillRef>
-          <a:effectRef idx="2">
-            <a:schemeClr val="accent1"/>
-          </a:effectRef>
-          <a:fontRef idx="minor">
-            <a:schemeClr val="lt1"/>
-          </a:fontRef>
-        </p:style>
-        <p:txBody>
-          <a:bodyPr rtlCol="0" anchor="ctr"/>
-          <a:lstStyle/>
-          <a:p>
-            <a:pPr algn="ctr"/>
-          </a:p>
-        </p:txBody>
-      </p:sp>
-      <p:sp>
-        <p:nvSpPr>
-          <p:cNvPr id="9" name="TextBox 8"/>
-          <p:cNvSpPr txBox="1"/>
-          <p:nvPr/>
-        </p:nvSpPr>
-        <p:spPr>
-          <a:xfrm>
-            <a:off x="6263640" y="1828800"/>
-            <a:ext cx="2542032" cy="1463040"/>
-          </a:xfrm>
-          <a:prstGeom prst="rect">
-            <a:avLst/>
-          </a:prstGeom>
-          <a:noFill/>
-        </p:spPr>
-        <p:txBody>
-          <a:bodyPr wrap="square" anchor="t">
-            <a:spAutoFit/>
-          </a:bodyPr>
-          <a:lstStyle/>
-          <a:p>
-            <a:pPr algn="ctr">
-              <a:lnSpc>
-                <a:spcPct val="115000"/>
-              </a:lnSpc>
-              <a:spcAft>
-                <a:spcPts val="0"/>
-              </a:spcAft>
-            </a:pPr>
-            <a:r>
-              <a:rPr sz="3200" b="1">
-                <a:solidFill>
-                  <a:srgbClr val="2F6FEB"/>
-                </a:solidFill>
-                <a:latin typeface="微软雅黑" a:ea="微软雅黑"/>
-              </a:rPr>
-              <a:t>44 / 18</a:t>
-            </a:r>
-          </a:p>
-          <a:p>
-            <a:pPr algn="ctr">
-              <a:lnSpc>
-                <a:spcPct val="115000"/>
-              </a:lnSpc>
-              <a:spcAft>
-                <a:spcPts val="400"/>
-              </a:spcAft>
-            </a:pPr>
-            <a:r>
-              <a:rPr sz="1300" b="1">
-                <a:solidFill>
-                  <a:srgbClr val="16233D"/>
-                </a:solidFill>
-                <a:latin typeface="微软雅黑" a:ea="微软雅黑"/>
-              </a:rPr>
-              <a:t>项测试</a:t>
-            </a:r>
-          </a:p>
-          <a:p>
-            <a:pPr algn="ctr">
-              <a:lnSpc>
-                <a:spcPct val="115000"/>
-              </a:lnSpc>
-              <a:spcAft>
-                <a:spcPts val="600"/>
-              </a:spcAft>
-            </a:pPr>
-            <a:r>
-              <a:rPr sz="1050" b="0">
-                <a:solidFill>
-                  <a:srgbClr val="6B7688"/>
-                </a:solidFill>
-                <a:latin typeface="微软雅黑" a:ea="微软雅黑"/>
-              </a:rPr>
-              <a:t>端到端冒烟 + 适配器单元测试全通过</a:t>
-            </a:r>
-          </a:p>
-        </p:txBody>
-      </p:sp>
-      <p:sp>
-        <p:nvSpPr>
-          <p:cNvPr id="10" name="Rounded Rectangle 9"/>
-          <p:cNvSpPr/>
-          <p:nvPr/>
-        </p:nvSpPr>
-        <p:spPr>
-          <a:xfrm>
-            <a:off x="9052559" y="1691640"/>
-            <a:ext cx="2542032" cy="1691640"/>
-          </a:xfrm>
-          <a:prstGeom prst="roundRect">
-            <a:avLst/>
-          </a:prstGeom>
-          <a:solidFill>
-            <a:srgbClr val="FFFFFF"/>
-          </a:solidFill>
-          <a:ln w="9525">
-            <a:solidFill>
-              <a:srgbClr val="D8E0EE"/>
-            </a:solidFill>
-          </a:ln>
-          <a:effectLst/>
-        </p:spPr>
-        <p:style>
-          <a:lnRef idx="1">
-            <a:schemeClr val="accent1"/>
-          </a:lnRef>
-          <a:fillRef idx="3">
-            <a:schemeClr val="accent1"/>
-          </a:fillRef>
-          <a:effectRef idx="2">
-            <a:schemeClr val="accent1"/>
-          </a:effectRef>
-          <a:fontRef idx="minor">
-            <a:schemeClr val="lt1"/>
-          </a:fontRef>
-        </p:style>
-        <p:txBody>
-          <a:bodyPr rtlCol="0" anchor="ctr"/>
-          <a:lstStyle/>
-          <a:p>
-            <a:pPr algn="ctr"/>
-          </a:p>
-        </p:txBody>
-      </p:sp>
-      <p:sp>
-        <p:nvSpPr>
-          <p:cNvPr id="11" name="TextBox 10"/>
-          <p:cNvSpPr txBox="1"/>
-          <p:nvPr/>
-        </p:nvSpPr>
-        <p:spPr>
-          <a:xfrm>
-            <a:off x="9052559" y="1828800"/>
-            <a:ext cx="2542032" cy="1463040"/>
-          </a:xfrm>
-          <a:prstGeom prst="rect">
-            <a:avLst/>
-          </a:prstGeom>
-          <a:noFill/>
-        </p:spPr>
-        <p:txBody>
-          <a:bodyPr wrap="square" anchor="t">
-            <a:spAutoFit/>
-          </a:bodyPr>
-          <a:lstStyle/>
-          <a:p>
-            <a:pPr algn="ctr">
-              <a:lnSpc>
-                <a:spcPct val="115000"/>
-              </a:lnSpc>
-              <a:spcAft>
-                <a:spcPts val="0"/>
-              </a:spcAft>
-            </a:pPr>
-            <a:r>
-              <a:rPr sz="3200" b="1">
-                <a:solidFill>
-                  <a:srgbClr val="2F6FEB"/>
-                </a:solidFill>
-                <a:latin typeface="微软雅黑" a:ea="微软雅黑"/>
-              </a:rPr>
-              <a:t>0</a:t>
-            </a:r>
-          </a:p>
-          <a:p>
-            <a:pPr algn="ctr">
-              <a:lnSpc>
-                <a:spcPct val="115000"/>
-              </a:lnSpc>
-              <a:spcAft>
-                <a:spcPts val="400"/>
-              </a:spcAft>
-            </a:pPr>
-            <a:r>
-              <a:rPr sz="1300" b="1">
-                <a:solidFill>
-                  <a:srgbClr val="16233D"/>
-                </a:solidFill>
-                <a:latin typeface="微软雅黑" a:ea="微软雅黑"/>
-              </a:rPr>
-              <a:t>第三方依赖</a:t>
-            </a:r>
-          </a:p>
-          <a:p>
-            <a:pPr algn="ctr">
-              <a:lnSpc>
-                <a:spcPct val="115000"/>
-              </a:lnSpc>
-              <a:spcAft>
-                <a:spcPts val="600"/>
-              </a:spcAft>
-            </a:pPr>
-            <a:r>
-              <a:rPr sz="1050" b="0">
-                <a:solidFill>
-                  <a:srgbClr val="6B7688"/>
-                </a:solidFill>
-                <a:latin typeface="微软雅黑" a:ea="微软雅黑"/>
-              </a:rPr>
-              <a:t>纯 Python 标准库，两条命令复现</a:t>
-            </a:r>
-          </a:p>
-        </p:txBody>
-      </p:sp>
-      <p:sp>
-        <p:nvSpPr>
-          <p:cNvPr id="12" name="Rounded Rectangle 11"/>
-          <p:cNvSpPr/>
-          <p:nvPr/>
-        </p:nvSpPr>
-        <p:spPr>
-          <a:xfrm>
-            <a:off x="685800" y="3611880"/>
-            <a:ext cx="5349240" cy="2606040"/>
-          </a:xfrm>
-          <a:prstGeom prst="roundRect">
-            <a:avLst/>
-          </a:prstGeom>
-          <a:solidFill>
-            <a:srgbClr val="FFFFFF"/>
-          </a:solidFill>
-          <a:ln w="9525">
-            <a:solidFill>
-              <a:srgbClr val="D8E0EE"/>
-            </a:solidFill>
-          </a:ln>
-          <a:effectLst/>
-        </p:spPr>
-        <p:style>
-          <a:lnRef idx="1">
-            <a:schemeClr val="accent1"/>
-          </a:lnRef>
-          <a:fillRef idx="3">
-            <a:schemeClr val="accent1"/>
-          </a:fillRef>
-          <a:effectRef idx="2">
-            <a:schemeClr val="accent1"/>
-          </a:effectRef>
-          <a:fontRef idx="minor">
-            <a:schemeClr val="lt1"/>
-          </a:fontRef>
-        </p:style>
-        <p:txBody>
-          <a:bodyPr rtlCol="0" anchor="ctr"/>
-          <a:lstStyle/>
-          <a:p>
-            <a:pPr algn="ctr"/>
-          </a:p>
-        </p:txBody>
-      </p:sp>
-      <p:sp>
-        <p:nvSpPr>
-          <p:cNvPr id="13" name="Rectangle 12"/>
-          <p:cNvSpPr/>
-          <p:nvPr/>
-        </p:nvSpPr>
-        <p:spPr>
-          <a:xfrm>
-            <a:off x="685800" y="3611880"/>
-            <a:ext cx="68580" cy="2606040"/>
-          </a:xfrm>
-          <a:prstGeom prst="rect">
-            <a:avLst/>
-          </a:prstGeom>
-          <a:solidFill>
-            <a:srgbClr val="2F6FEB"/>
-          </a:solidFill>
-          <a:ln>
-            <a:noFill/>
-          </a:ln>
-          <a:effectLst/>
-        </p:spPr>
-        <p:style>
-          <a:lnRef idx="1">
-            <a:schemeClr val="accent1"/>
-          </a:lnRef>
-          <a:fillRef idx="3">
-            <a:schemeClr val="accent1"/>
-          </a:fillRef>
-          <a:effectRef idx="2">
-            <a:schemeClr val="accent1"/>
-          </a:effectRef>
-          <a:fontRef idx="minor">
-            <a:schemeClr val="lt1"/>
-          </a:fontRef>
-        </p:style>
-        <p:txBody>
-          <a:bodyPr rtlCol="0" anchor="ctr"/>
-          <a:lstStyle/>
-          <a:p>
-            <a:pPr algn="ctr"/>
-          </a:p>
-        </p:txBody>
-      </p:sp>
-      <p:sp>
-        <p:nvSpPr>
-          <p:cNvPr id="14" name="TextBox 13"/>
-          <p:cNvSpPr txBox="1"/>
-          <p:nvPr/>
-        </p:nvSpPr>
-        <p:spPr>
-          <a:xfrm>
-            <a:off x="941832" y="3776472"/>
-            <a:ext cx="4892040" cy="2331720"/>
-          </a:xfrm>
-          <a:prstGeom prst="rect">
-            <a:avLst/>
-          </a:prstGeom>
-          <a:noFill/>
-        </p:spPr>
-        <p:txBody>
-          <a:bodyPr wrap="square" anchor="t">
-            <a:spAutoFit/>
-          </a:bodyPr>
-          <a:lstStyle/>
-          <a:p>
-            <a:pPr algn="l">
-              <a:lnSpc>
-                <a:spcPct val="115000"/>
-              </a:lnSpc>
-              <a:spcAft>
-                <a:spcPts val="600"/>
-              </a:spcAft>
-            </a:pPr>
-            <a:r>
-              <a:rPr sz="1600" b="1">
-                <a:solidFill>
-                  <a:srgbClr val="16233D"/>
-                </a:solidFill>
-                <a:latin typeface="微软雅黑" a:ea="微软雅黑"/>
-              </a:rPr>
-              <a:t>真实数据下的分析输出（节选）</a:t>
-            </a:r>
-          </a:p>
-          <a:p>
-            <a:pPr algn="l">
-              <a:lnSpc>
-                <a:spcPct val="125000"/>
-              </a:lnSpc>
-              <a:spcAft>
-                <a:spcPts val="400"/>
-              </a:spcAft>
-            </a:pPr>
-            <a:r>
-              <a:rPr sz="1250" b="0">
-                <a:solidFill>
-                  <a:srgbClr val="6B7688"/>
-                </a:solidFill>
-                <a:latin typeface="微软雅黑" a:ea="微软雅黑"/>
-              </a:rPr>
-              <a:t>「保温杯」：29 个真实商品，CR5=0.98、HHI=0.193（高度集中）</a:t>
-            </a:r>
-          </a:p>
-          <a:p>
-            <a:pPr algn="l">
-              <a:lnSpc>
-                <a:spcPct val="125000"/>
-              </a:lnSpc>
-              <a:spcAft>
-                <a:spcPts val="400"/>
-              </a:spcAft>
-            </a:pPr>
-            <a:r>
-              <a:rPr sz="1250" b="0">
-                <a:solidFill>
-                  <a:srgbClr val="6B7688"/>
-                </a:solidFill>
-                <a:latin typeface="微软雅黑" a:ea="微软雅黑"/>
-              </a:rPr>
-              <a:t>建议动作 3 条，均为真实商品（JEKO / 希乐 / 炊大皇）</a:t>
-            </a:r>
-          </a:p>
-          <a:p>
-            <a:pPr algn="l">
-              <a:lnSpc>
-                <a:spcPct val="125000"/>
-              </a:lnSpc>
-              <a:spcAft>
-                <a:spcPts val="400"/>
-              </a:spcAft>
-            </a:pPr>
-            <a:r>
-              <a:rPr sz="1250" b="0">
-                <a:solidFill>
-                  <a:srgbClr val="6B7688"/>
-                </a:solidFill>
-                <a:latin typeface="微软雅黑" a:ea="微软雅黑"/>
-              </a:rPr>
-              <a:t>每条建议附证据指标，证据链校验通过</a:t>
-            </a:r>
-          </a:p>
-          <a:p>
-            <a:pPr algn="l">
-              <a:lnSpc>
-                <a:spcPct val="125000"/>
-              </a:lnSpc>
-              <a:spcAft>
-                <a:spcPts val="400"/>
-              </a:spcAft>
-            </a:pPr>
-            <a:r>
-              <a:rPr sz="1250" b="0">
-                <a:solidFill>
-                  <a:srgbClr val="6B7688"/>
-                </a:solidFill>
-                <a:latin typeface="微软雅黑" a:ea="微软雅黑"/>
-              </a:rPr>
-              <a:t>报告自动标注：环比暂不可用、价格未采集</a:t>
-            </a:r>
-          </a:p>
-        </p:txBody>
-      </p:sp>
-      <p:sp>
-        <p:nvSpPr>
-          <p:cNvPr id="15" name="Rounded Rectangle 14"/>
-          <p:cNvSpPr/>
-          <p:nvPr/>
-        </p:nvSpPr>
-        <p:spPr>
-          <a:xfrm>
-            <a:off x="6217920" y="3611880"/>
-            <a:ext cx="5349240" cy="2606040"/>
-          </a:xfrm>
-          <a:prstGeom prst="roundRect">
-            <a:avLst/>
-          </a:prstGeom>
-          <a:solidFill>
-            <a:srgbClr val="FFFFFF"/>
-          </a:solidFill>
-          <a:ln w="9525">
-            <a:solidFill>
-              <a:srgbClr val="D8E0EE"/>
-            </a:solidFill>
-          </a:ln>
-          <a:effectLst/>
-        </p:spPr>
-        <p:style>
-          <a:lnRef idx="1">
-            <a:schemeClr val="accent1"/>
-          </a:lnRef>
-          <a:fillRef idx="3">
-            <a:schemeClr val="accent1"/>
-          </a:fillRef>
-          <a:effectRef idx="2">
-            <a:schemeClr val="accent1"/>
-          </a:effectRef>
-          <a:fontRef idx="minor">
-            <a:schemeClr val="lt1"/>
-          </a:fontRef>
-        </p:style>
-        <p:txBody>
-          <a:bodyPr rtlCol="0" anchor="ctr"/>
-          <a:lstStyle/>
-          <a:p>
-            <a:pPr algn="ctr"/>
-          </a:p>
-        </p:txBody>
-      </p:sp>
-      <p:sp>
-        <p:nvSpPr>
-          <p:cNvPr id="16" name="Rectangle 15"/>
-          <p:cNvSpPr/>
-          <p:nvPr/>
-        </p:nvSpPr>
-        <p:spPr>
-          <a:xfrm>
-            <a:off x="6217920" y="3611880"/>
-            <a:ext cx="68580" cy="2606040"/>
-          </a:xfrm>
-          <a:prstGeom prst="rect">
-            <a:avLst/>
-          </a:prstGeom>
-          <a:solidFill>
-            <a:srgbClr val="B06608"/>
-          </a:solidFill>
-          <a:ln>
-            <a:noFill/>
-          </a:ln>
-          <a:effectLst/>
-        </p:spPr>
-        <p:style>
-          <a:lnRef idx="1">
-            <a:schemeClr val="accent1"/>
-          </a:lnRef>
-          <a:fillRef idx="3">
-            <a:schemeClr val="accent1"/>
-          </a:fillRef>
-          <a:effectRef idx="2">
-            <a:schemeClr val="accent1"/>
-          </a:effectRef>
-          <a:fontRef idx="minor">
-            <a:schemeClr val="lt1"/>
-          </a:fontRef>
-        </p:style>
-        <p:txBody>
-          <a:bodyPr rtlCol="0" anchor="ctr"/>
-          <a:lstStyle/>
-          <a:p>
-            <a:pPr algn="ctr"/>
-          </a:p>
-        </p:txBody>
-      </p:sp>
-      <p:sp>
-        <p:nvSpPr>
-          <p:cNvPr id="17" name="TextBox 16"/>
-          <p:cNvSpPr txBox="1"/>
-          <p:nvPr/>
-        </p:nvSpPr>
-        <p:spPr>
-          <a:xfrm>
-            <a:off x="6473952" y="3776472"/>
-            <a:ext cx="4892040" cy="2331720"/>
-          </a:xfrm>
-          <a:prstGeom prst="rect">
-            <a:avLst/>
-          </a:prstGeom>
-          <a:noFill/>
-        </p:spPr>
-        <p:txBody>
-          <a:bodyPr wrap="square" anchor="t">
-            <a:spAutoFit/>
-          </a:bodyPr>
-          <a:lstStyle/>
-          <a:p>
-            <a:pPr algn="l">
-              <a:lnSpc>
-                <a:spcPct val="115000"/>
-              </a:lnSpc>
-              <a:spcAft>
-                <a:spcPts val="600"/>
-              </a:spcAft>
-            </a:pPr>
-            <a:r>
-              <a:rPr sz="1600" b="1">
-                <a:solidFill>
-                  <a:srgbClr val="16233D"/>
-                </a:solidFill>
-                <a:latin typeface="微软雅黑" a:ea="微软雅黑"/>
-              </a:rPr>
-              <a:t>过程中发现并修复的真实问题</a:t>
-            </a:r>
-          </a:p>
-          <a:p>
-            <a:pPr algn="l">
-              <a:lnSpc>
-                <a:spcPct val="125000"/>
-              </a:lnSpc>
-              <a:spcAft>
-                <a:spcPts val="400"/>
-              </a:spcAft>
-            </a:pPr>
-            <a:r>
-              <a:rPr sz="1250" b="0">
-                <a:solidFill>
-                  <a:srgbClr val="6B7688"/>
-                </a:solidFill>
-                <a:latin typeface="微软雅黑" a:ea="微软雅黑"/>
-              </a:rPr>
-              <a:t>搜「猫爬架」27 条里 26 条是无关推荐位商品 → 加相关性过滤</a:t>
-            </a:r>
-          </a:p>
-          <a:p>
-            <a:pPr algn="l">
-              <a:lnSpc>
-                <a:spcPct val="125000"/>
-              </a:lnSpc>
-              <a:spcAft>
-                <a:spcPts val="400"/>
-              </a:spcAft>
-            </a:pPr>
-            <a:r>
-              <a:rPr sz="1250" b="0">
-                <a:solidFill>
-                  <a:srgbClr val="6B7688"/>
-                </a:solidFill>
-                <a:latin typeface="微软雅黑" a:ea="微软雅黑"/>
-              </a:rPr>
-              <a:t>同款不同颜色的 SKU 标题相同 → 建议重复 3 条 → 按前缀归组</a:t>
-            </a:r>
-          </a:p>
-          <a:p>
-            <a:pPr algn="l">
-              <a:lnSpc>
-                <a:spcPct val="125000"/>
-              </a:lnSpc>
-              <a:spcAft>
-                <a:spcPts val="400"/>
-              </a:spcAft>
-            </a:pPr>
-            <a:r>
-              <a:rPr sz="1250" b="0">
-                <a:solidFill>
-                  <a:srgbClr val="6B7688"/>
-                </a:solidFill>
-                <a:latin typeface="微软雅黑" a:ea="微软雅黑"/>
-              </a:rPr>
-              <a:t>官方 API 返回的是滚动销量 → 不能当累计值相减 → 新增独立口径</a:t>
-            </a:r>
-          </a:p>
-          <a:p>
-            <a:pPr algn="l">
-              <a:lnSpc>
-                <a:spcPct val="125000"/>
-              </a:lnSpc>
-              <a:spcAft>
-                <a:spcPts val="400"/>
-              </a:spcAft>
-            </a:pPr>
-            <a:r>
-              <a:rPr sz="1250" b="0">
-                <a:solidFill>
-                  <a:srgbClr val="6B7688"/>
-                </a:solidFill>
-                <a:latin typeface="微软雅黑" a:ea="微软雅黑"/>
-              </a:rPr>
-              <a:t>演示数据与真实数据时间轴不一致 → 混合时窗口失效 → 对齐当天</a:t>
-            </a:r>
-          </a:p>
-        </p:txBody>
-      </p:sp>
-      <p:sp>
-        <p:nvSpPr>
-          <p:cNvPr id="18" name="TextBox 17"/>
-          <p:cNvSpPr txBox="1"/>
-          <p:nvPr/>
-        </p:nvSpPr>
-        <p:spPr>
-          <a:xfrm>
-            <a:off x="548640" y="6355080"/>
-            <a:ext cx="7315200" cy="320040"/>
-          </a:xfrm>
-          <a:prstGeom prst="rect">
-            <a:avLst/>
-          </a:prstGeom>
-          <a:noFill/>
-        </p:spPr>
-        <p:txBody>
-          <a:bodyPr wrap="square" anchor="t">
-            <a:spAutoFit/>
-          </a:bodyPr>
-          <a:lstStyle/>
-          <a:p>
-            <a:pPr algn="l">
-              <a:lnSpc>
-                <a:spcPct val="115000"/>
-              </a:lnSpc>
-              <a:spcAft>
-                <a:spcPts val="600"/>
-              </a:spcAft>
-            </a:pPr>
-            <a:r>
-              <a:rPr sz="950" b="0">
-                <a:solidFill>
-                  <a:srgbClr val="6B7688"/>
-                </a:solidFill>
-                <a:latin typeface="微软雅黑" a:ea="微软雅黑"/>
-              </a:rPr>
-              <a:t>商情罗盘 MarketCompass · AI 应用大赛（产业应用类）</a:t>
-            </a:r>
-          </a:p>
-        </p:txBody>
-      </p:sp>
-      <p:sp>
-        <p:nvSpPr>
-          <p:cNvPr id="19" name="TextBox 18"/>
           <p:cNvSpPr txBox="1"/>
           <p:nvPr/>
         </p:nvSpPr>

--- a/docs/参赛材料/02-演示PPT.pptx
+++ b/docs/参赛材料/02-演示PPT.pptx
@@ -3876,7 +3876,7 @@
                 </a:solidFill>
                 <a:latin typeface="微软雅黑" a:ea="微软雅黑"/>
               </a:rPr>
-              <a:t>44 / 18</a:t>
+              <a:t>35 / 18</a:t>
             </a:r>
           </a:p>
           <a:p>
@@ -6136,7 +6136,7 @@
                 </a:solidFill>
                 <a:latin typeface="微软雅黑" a:ea="微软雅黑"/>
               </a:rPr>
-              <a:t>80 个真实商品已入库   ·   20,082 条日指标   ·   62 项测试通过   ·   0 第三方依赖</a:t>
+              <a:t>80 个真实商品已入库   ·   20,082 条日指标   ·   53 项测试通过   ·   0 第三方依赖</a:t>
             </a:r>
           </a:p>
           <a:p>
@@ -13961,7 +13961,7 @@
                           </a:solidFill>
                           <a:latin typeface="微软雅黑" a:ea="微软雅黑"/>
                         </a:rPr>
-                        <a:t>✅ 4 大类 15 子类 / 356 商品 / 19,936 条日指标</a:t>
+                        <a:t>✅ 4 大类 15 子类 / 356 条目 / 19,936 条日指标</a:t>
                       </a:r>
                     </a:p>
                   </a:txBody>

--- a/docs/参赛材料/02-演示PPT.pptx
+++ b/docs/参赛材料/02-演示PPT.pptx
@@ -3413,7 +3413,7 @@
                 </a:solidFill>
                 <a:latin typeface="微软雅黑" a:ea="微软雅黑"/>
               </a:rPr>
-              <a:t>AI 应用大赛 · 产业应用类   |   已跑通真实公开数据采集与端到端验证</a:t>
+              <a:t>AI 应用大赛 · 产业应用 · 数据分析   |   已跑通真实公开数据采集与端到端验证</a:t>
             </a:r>
           </a:p>
         </p:txBody>
@@ -4040,7 +4040,7 @@
                 </a:solidFill>
                 <a:latin typeface="微软雅黑" a:ea="微软雅黑"/>
               </a:rPr>
-              <a:t>纯 Python 标准库，两条命令复现</a:t>
+              <a:t>纯 Python 标准库 · MIT 开源</a:t>
             </a:r>
           </a:p>
         </p:txBody>
@@ -4498,7 +4498,7 @@
                 </a:solidFill>
                 <a:latin typeface="微软雅黑" a:ea="微软雅黑"/>
               </a:rPr>
-              <a:t>商情罗盘 MarketCompass · AI 应用大赛（产业应用类）</a:t>
+              <a:t>商情罗盘 MarketCompass · AI 应用大赛（产业应用 · 数据分析）</a:t>
             </a:r>
           </a:p>
         </p:txBody>
@@ -5841,7 +5841,7 @@
                 </a:solidFill>
                 <a:latin typeface="微软雅黑" a:ea="微软雅黑"/>
               </a:rPr>
-              <a:t>商情罗盘 MarketCompass · AI 应用大赛（产业应用类）</a:t>
+              <a:t>商情罗盘 MarketCompass · AI 应用大赛（产业应用 · 数据分析）</a:t>
             </a:r>
           </a:p>
         </p:txBody>
@@ -6973,7 +6973,7 @@
                 </a:solidFill>
                 <a:latin typeface="微软雅黑" a:ea="微软雅黑"/>
               </a:rPr>
-              <a:t>商情罗盘 MarketCompass · AI 应用大赛（产业应用类）</a:t>
+              <a:t>商情罗盘 MarketCompass · AI 应用大赛（产业应用 · 数据分析）</a:t>
             </a:r>
           </a:p>
         </p:txBody>
@@ -8471,7 +8471,7 @@
                 </a:solidFill>
                 <a:latin typeface="微软雅黑" a:ea="微软雅黑"/>
               </a:rPr>
-              <a:t>通用大模型：给结论，没有数据</a:t>
+              <a:t>通用大模型：直接生成结论，因此会编</a:t>
             </a:r>
           </a:p>
           <a:p>
@@ -8490,7 +8490,7 @@
                 </a:solidFill>
                 <a:latin typeface="微软雅黑" a:ea="微软雅黑"/>
               </a:rPr>
-              <a:t>商情罗盘：给结论，且每个数字都能回指标层重算复现</a:t>
+              <a:t>商情罗盘：结论必须能回指标层重算复现，编不出来就整体降级</a:t>
             </a:r>
           </a:p>
         </p:txBody>
@@ -8532,7 +8532,7 @@
                 </a:solidFill>
                 <a:latin typeface="微软雅黑" a:ea="微软雅黑"/>
               </a:rPr>
-              <a:t>商情罗盘 MarketCompass · AI 应用大赛（产业应用类）</a:t>
+              <a:t>商情罗盘 MarketCompass · AI 应用大赛（产业应用 · 数据分析）</a:t>
             </a:r>
           </a:p>
         </p:txBody>
@@ -9609,7 +9609,7 @@
                 </a:solidFill>
                 <a:latin typeface="微软雅黑" a:ea="微软雅黑"/>
               </a:rPr>
-              <a:t>商情罗盘 MarketCompass · AI 应用大赛（产业应用类）</a:t>
+              <a:t>商情罗盘 MarketCompass · AI 应用大赛（产业应用 · 数据分析）</a:t>
             </a:r>
           </a:p>
         </p:txBody>
@@ -10547,7 +10547,7 @@
                 </a:solidFill>
                 <a:latin typeface="微软雅黑" a:ea="微软雅黑"/>
               </a:rPr>
-              <a:t>商情罗盘 MarketCompass · AI 应用大赛（产业应用类）</a:t>
+              <a:t>商情罗盘 MarketCompass · AI 应用大赛（产业应用 · 数据分析）</a:t>
             </a:r>
           </a:p>
         </p:txBody>
@@ -11535,7 +11535,7 @@
                 </a:solidFill>
                 <a:latin typeface="微软雅黑" a:ea="微软雅黑"/>
               </a:rPr>
-              <a:t>商情罗盘 MarketCompass · AI 应用大赛（产业应用类）</a:t>
+              <a:t>商情罗盘 MarketCompass · AI 应用大赛（产业应用 · 数据分析）</a:t>
             </a:r>
           </a:p>
         </p:txBody>
@@ -12369,7 +12369,7 @@
                 </a:solidFill>
                 <a:latin typeface="微软雅黑" a:ea="微软雅黑"/>
               </a:rPr>
-              <a:t>商情罗盘 MarketCompass · AI 应用大赛（产业应用类）</a:t>
+              <a:t>商情罗盘 MarketCompass · AI 应用大赛（产业应用 · 数据分析）</a:t>
             </a:r>
           </a:p>
         </p:txBody>
@@ -13507,7 +13507,7 @@
                 </a:solidFill>
                 <a:latin typeface="微软雅黑" a:ea="微软雅黑"/>
               </a:rPr>
-              <a:t>商情罗盘 MarketCompass · AI 应用大赛（产业应用类）</a:t>
+              <a:t>商情罗盘 MarketCompass · AI 应用大赛（产业应用 · 数据分析）</a:t>
             </a:r>
           </a:p>
         </p:txBody>
@@ -14525,7 +14525,7 @@
                 </a:solidFill>
                 <a:latin typeface="微软雅黑" a:ea="微软雅黑"/>
               </a:rPr>
-              <a:t>商情罗盘 MarketCompass · AI 应用大赛（产业应用类）</a:t>
+              <a:t>商情罗盘 MarketCompass · AI 应用大赛（产业应用 · 数据分析）</a:t>
             </a:r>
           </a:p>
         </p:txBody>

--- a/docs/参赛材料/02-演示PPT.pptx
+++ b/docs/参赛材料/02-演示PPT.pptx
@@ -17,6 +17,7 @@
     <p:sldId id="265" r:id="rId16"/>
     <p:sldId id="266" r:id="rId17"/>
     <p:sldId id="267" r:id="rId18"/>
+    <p:sldId id="268" r:id="rId19"/>
   </p:sldIdLst>
   <p:sldSz cx="12191695" cy="6858000" type="screen4x3"/>
   <p:notesSz cx="6858000" cy="9144000"/>
@@ -3517,7 +3518,7 @@
                 </a:solidFill>
                 <a:latin typeface="微软雅黑" a:ea="微软雅黑"/>
               </a:rPr>
-              <a:t>实测结果：真实数据已跑通</a:t>
+              <a:t>数据源与合规：能抓什么，不抓什么</a:t>
             </a:r>
           </a:p>
           <a:p>
@@ -3536,21 +3537,320 @@
                 </a:solidFill>
                 <a:latin typeface="微软雅黑" a:ea="微软雅黑"/>
               </a:rPr>
-              <a:t>不是概念演示——真实公开数据已入库并跑完全链路</a:t>
-            </a:r>
-          </a:p>
-        </p:txBody>
-      </p:sp>
-      <p:sp>
-        <p:nvSpPr>
-          <p:cNvPr id="4" name="Rounded Rectangle 3"/>
+              <a:t>合规不是答辩时的补丁，而是写进采集器的硬约束</a:t>
+            </a:r>
+          </a:p>
+        </p:txBody>
+      </p:sp>
+      <p:graphicFrame>
+        <p:nvGraphicFramePr>
+          <p:cNvPr id="4" name="Table 3"/>
+          <p:cNvGraphicFramePr>
+            <a:graphicFrameLocks noGrp="1"/>
+          </p:cNvGraphicFramePr>
+          <p:nvPr/>
+        </p:nvGraphicFramePr>
+        <p:xfrm>
+          <a:off x="685800" y="1645920"/>
+          <a:ext cx="5852160" cy="1737360"/>
+        </p:xfrm>
+        <a:graphic>
+          <a:graphicData uri="http://schemas.openxmlformats.org/drawingml/2006/table">
+            <a:tbl>
+              <a:tblPr firstRow="1" bandRow="1">
+                <a:tableStyleId>{5C22544A-7EE6-4342-B048-85BDC9FD1C3A}</a:tableStyleId>
+              </a:tblPr>
+              <a:tblGrid>
+                <a:gridCol w="1554480"/>
+                <a:gridCol w="2103120"/>
+                <a:gridCol w="2194560"/>
+              </a:tblGrid>
+              <a:tr h="434340">
+                <a:tc>
+                  <a:txBody>
+                    <a:bodyPr/>
+                    <a:lstStyle/>
+                    <a:p>
+                      <a:r>
+                        <a:rPr sz="1050" b="1">
+                          <a:solidFill>
+                            <a:srgbClr val="FFFFFF"/>
+                          </a:solidFill>
+                          <a:latin typeface="微软雅黑" a:ea="微软雅黑"/>
+                        </a:rPr>
+                        <a:t>数据源</a:t>
+                      </a:r>
+                    </a:p>
+                  </a:txBody>
+                  <a:tcPr marL="64008">
+                    <a:solidFill>
+                      <a:srgbClr val="2F6FEB"/>
+                    </a:solidFill>
+                  </a:tcPr>
+                </a:tc>
+                <a:tc>
+                  <a:txBody>
+                    <a:bodyPr/>
+                    <a:lstStyle/>
+                    <a:p>
+                      <a:r>
+                        <a:rPr sz="1050" b="1">
+                          <a:solidFill>
+                            <a:srgbClr val="FFFFFF"/>
+                          </a:solidFill>
+                          <a:latin typeface="微软雅黑" a:ea="微软雅黑"/>
+                        </a:rPr>
+                        <a:t>接入方式</a:t>
+                      </a:r>
+                    </a:p>
+                  </a:txBody>
+                  <a:tcPr marL="64008">
+                    <a:solidFill>
+                      <a:srgbClr val="2F6FEB"/>
+                    </a:solidFill>
+                  </a:tcPr>
+                </a:tc>
+                <a:tc>
+                  <a:txBody>
+                    <a:bodyPr/>
+                    <a:lstStyle/>
+                    <a:p>
+                      <a:r>
+                        <a:rPr sz="1050" b="1">
+                          <a:solidFill>
+                            <a:srgbClr val="FFFFFF"/>
+                          </a:solidFill>
+                          <a:latin typeface="微软雅黑" a:ea="微软雅黑"/>
+                        </a:rPr>
+                        <a:t>实测结果</a:t>
+                      </a:r>
+                    </a:p>
+                  </a:txBody>
+                  <a:tcPr marL="64008">
+                    <a:solidFill>
+                      <a:srgbClr val="2F6FEB"/>
+                    </a:solidFill>
+                  </a:tcPr>
+                </a:tc>
+              </a:tr>
+              <a:tr h="434340">
+                <a:tc>
+                  <a:txBody>
+                    <a:bodyPr/>
+                    <a:lstStyle/>
+                    <a:p>
+                      <a:r>
+                        <a:rPr sz="1000" b="0">
+                          <a:solidFill>
+                            <a:srgbClr val="6B7688"/>
+                          </a:solidFill>
+                          <a:latin typeface="微软雅黑" a:ea="微软雅黑"/>
+                        </a:rPr>
+                        <a:t>苏宁易购</a:t>
+                      </a:r>
+                    </a:p>
+                  </a:txBody>
+                  <a:tcPr marL="64008">
+                    <a:solidFill>
+                      <a:srgbClr val="FFFFFF"/>
+                    </a:solidFill>
+                  </a:tcPr>
+                </a:tc>
+                <a:tc>
+                  <a:txBody>
+                    <a:bodyPr/>
+                    <a:lstStyle/>
+                    <a:p>
+                      <a:r>
+                        <a:rPr sz="1000" b="0">
+                          <a:solidFill>
+                            <a:srgbClr val="6B7688"/>
+                          </a:solidFill>
+                          <a:latin typeface="微软雅黑" a:ea="微软雅黑"/>
+                        </a:rPr>
+                        <a:t>公开搜索结果页</a:t>
+                      </a:r>
+                    </a:p>
+                  </a:txBody>
+                  <a:tcPr marL="64008">
+                    <a:solidFill>
+                      <a:srgbClr val="FFFFFF"/>
+                    </a:solidFill>
+                  </a:tcPr>
+                </a:tc>
+                <a:tc>
+                  <a:txBody>
+                    <a:bodyPr/>
+                    <a:lstStyle/>
+                    <a:p>
+                      <a:r>
+                        <a:rPr sz="1000" b="0">
+                          <a:solidFill>
+                            <a:srgbClr val="6B7688"/>
+                          </a:solidFill>
+                          <a:latin typeface="微软雅黑" a:ea="微软雅黑"/>
+                        </a:rPr>
+                        <a:t>✅ 稳定解析 SKU/标题/卖点/评价数/店铺/排名</a:t>
+                      </a:r>
+                    </a:p>
+                  </a:txBody>
+                  <a:tcPr marL="64008">
+                    <a:solidFill>
+                      <a:srgbClr val="FFFFFF"/>
+                    </a:solidFill>
+                  </a:tcPr>
+                </a:tc>
+              </a:tr>
+              <a:tr h="434340">
+                <a:tc>
+                  <a:txBody>
+                    <a:bodyPr/>
+                    <a:lstStyle/>
+                    <a:p>
+                      <a:r>
+                        <a:rPr sz="1000" b="0">
+                          <a:solidFill>
+                            <a:srgbClr val="6B7688"/>
+                          </a:solidFill>
+                          <a:latin typeface="微软雅黑" a:ea="微软雅黑"/>
+                        </a:rPr>
+                        <a:t>官方开放平台</a:t>
+                      </a:r>
+                    </a:p>
+                  </a:txBody>
+                  <a:tcPr marL="64008">
+                    <a:solidFill>
+                      <a:srgbClr val="F5F7FA"/>
+                    </a:solidFill>
+                  </a:tcPr>
+                </a:tc>
+                <a:tc>
+                  <a:txBody>
+                    <a:bodyPr/>
+                    <a:lstStyle/>
+                    <a:p>
+                      <a:r>
+                        <a:rPr sz="1000" b="0">
+                          <a:solidFill>
+                            <a:srgbClr val="6B7688"/>
+                          </a:solidFill>
+                          <a:latin typeface="微软雅黑" a:ea="微软雅黑"/>
+                        </a:rPr>
+                        <a:t>淘宝 / 京东 / 拼多多授权接口</a:t>
+                      </a:r>
+                    </a:p>
+                  </a:txBody>
+                  <a:tcPr marL="64008">
+                    <a:solidFill>
+                      <a:srgbClr val="F5F7FA"/>
+                    </a:solidFill>
+                  </a:tcPr>
+                </a:tc>
+                <a:tc>
+                  <a:txBody>
+                    <a:bodyPr/>
+                    <a:lstStyle/>
+                    <a:p>
+                      <a:r>
+                        <a:rPr sz="1000" b="0">
+                          <a:solidFill>
+                            <a:srgbClr val="6B7688"/>
+                          </a:solidFill>
+                          <a:latin typeface="微软雅黑" a:ea="微软雅黑"/>
+                        </a:rPr>
+                        <a:t>✅ 适配器与配置向导完成，待凭据启用</a:t>
+                      </a:r>
+                    </a:p>
+                  </a:txBody>
+                  <a:tcPr marL="64008">
+                    <a:solidFill>
+                      <a:srgbClr val="F5F7FA"/>
+                    </a:solidFill>
+                  </a:tcPr>
+                </a:tc>
+              </a:tr>
+              <a:tr h="434340">
+                <a:tc>
+                  <a:txBody>
+                    <a:bodyPr/>
+                    <a:lstStyle/>
+                    <a:p>
+                      <a:r>
+                        <a:rPr sz="1000" b="0">
+                          <a:solidFill>
+                            <a:srgbClr val="6B7688"/>
+                          </a:solidFill>
+                          <a:latin typeface="微软雅黑" a:ea="微软雅黑"/>
+                        </a:rPr>
+                        <a:t>演示数据集</a:t>
+                      </a:r>
+                    </a:p>
+                  </a:txBody>
+                  <a:tcPr marL="64008">
+                    <a:solidFill>
+                      <a:srgbClr val="FFFFFF"/>
+                    </a:solidFill>
+                  </a:tcPr>
+                </a:tc>
+                <a:tc>
+                  <a:txBody>
+                    <a:bodyPr/>
+                    <a:lstStyle/>
+                    <a:p>
+                      <a:r>
+                        <a:rPr sz="1000" b="0">
+                          <a:solidFill>
+                            <a:srgbClr val="6B7688"/>
+                          </a:solidFill>
+                          <a:latin typeface="微软雅黑" a:ea="微软雅黑"/>
+                        </a:rPr>
+                        <a:t>本地合成</a:t>
+                      </a:r>
+                    </a:p>
+                  </a:txBody>
+                  <a:tcPr marL="64008">
+                    <a:solidFill>
+                      <a:srgbClr val="FFFFFF"/>
+                    </a:solidFill>
+                  </a:tcPr>
+                </a:tc>
+                <a:tc>
+                  <a:txBody>
+                    <a:bodyPr/>
+                    <a:lstStyle/>
+                    <a:p>
+                      <a:r>
+                        <a:rPr sz="1000" b="0">
+                          <a:solidFill>
+                            <a:srgbClr val="6B7688"/>
+                          </a:solidFill>
+                          <a:latin typeface="微软雅黑" a:ea="微软雅黑"/>
+                        </a:rPr>
+                        <a:t>✅ 4 大类 15 子类 / 356 条目 / 19,936 条日指标</a:t>
+                      </a:r>
+                    </a:p>
+                  </a:txBody>
+                  <a:tcPr marL="64008">
+                    <a:solidFill>
+                      <a:srgbClr val="FFFFFF"/>
+                    </a:solidFill>
+                  </a:tcPr>
+                </a:tc>
+              </a:tr>
+            </a:tbl>
+          </a:graphicData>
+        </a:graphic>
+      </p:graphicFrame>
+      <p:sp>
+        <p:nvSpPr>
+          <p:cNvPr id="5" name="Rounded Rectangle 4"/>
           <p:cNvSpPr/>
           <p:nvPr/>
         </p:nvSpPr>
         <p:spPr>
           <a:xfrm>
-            <a:off x="685800" y="1691640"/>
-            <a:ext cx="2542032" cy="1691640"/>
+            <a:off x="685800" y="3611880"/>
+            <a:ext cx="5852160" cy="2286000"/>
           </a:xfrm>
           <a:prstGeom prst="roundRect">
             <a:avLst/>
@@ -3589,14 +3889,58 @@
       </p:sp>
       <p:sp>
         <p:nvSpPr>
-          <p:cNvPr id="5" name="TextBox 4"/>
+          <p:cNvPr id="6" name="Rectangle 5"/>
+          <p:cNvSpPr/>
+          <p:nvPr/>
+        </p:nvSpPr>
+        <p:spPr>
+          <a:xfrm>
+            <a:off x="685800" y="3611880"/>
+            <a:ext cx="68580" cy="2286000"/>
+          </a:xfrm>
+          <a:prstGeom prst="rect">
+            <a:avLst/>
+          </a:prstGeom>
+          <a:solidFill>
+            <a:srgbClr val="0F8F80"/>
+          </a:solidFill>
+          <a:ln>
+            <a:noFill/>
+          </a:ln>
+          <a:effectLst/>
+        </p:spPr>
+        <p:style>
+          <a:lnRef idx="1">
+            <a:schemeClr val="accent1"/>
+          </a:lnRef>
+          <a:fillRef idx="3">
+            <a:schemeClr val="accent1"/>
+          </a:fillRef>
+          <a:effectRef idx="2">
+            <a:schemeClr val="accent1"/>
+          </a:effectRef>
+          <a:fontRef idx="minor">
+            <a:schemeClr val="lt1"/>
+          </a:fontRef>
+        </p:style>
+        <p:txBody>
+          <a:bodyPr rtlCol="0" anchor="ctr"/>
+          <a:lstStyle/>
+          <a:p>
+            <a:pPr algn="ctr"/>
+          </a:p>
+        </p:txBody>
+      </p:sp>
+      <p:sp>
+        <p:nvSpPr>
+          <p:cNvPr id="7" name="TextBox 6"/>
           <p:cNvSpPr txBox="1"/>
           <p:nvPr/>
         </p:nvSpPr>
         <p:spPr>
           <a:xfrm>
-            <a:off x="685800" y="1828800"/>
-            <a:ext cx="2542032" cy="1463040"/>
+            <a:off x="941832" y="3776472"/>
+            <a:ext cx="5394960" cy="2011680"/>
           </a:xfrm>
           <a:prstGeom prst="rect">
             <a:avLst/>
@@ -3609,74 +3953,131 @@
           </a:bodyPr>
           <a:lstStyle/>
           <a:p>
-            <a:pPr algn="ctr">
+            <a:pPr algn="l">
               <a:lnSpc>
                 <a:spcPct val="115000"/>
               </a:lnSpc>
               <a:spcAft>
-                <a:spcPts val="0"/>
-              </a:spcAft>
-            </a:pPr>
-            <a:r>
-              <a:rPr sz="3200" b="1">
-                <a:solidFill>
-                  <a:srgbClr val="2F6FEB"/>
-                </a:solidFill>
-                <a:latin typeface="微软雅黑" a:ea="微软雅黑"/>
-              </a:rPr>
-              <a:t>80</a:t>
-            </a:r>
-          </a:p>
-          <a:p>
-            <a:pPr algn="ctr">
-              <a:lnSpc>
-                <a:spcPct val="115000"/>
+                <a:spcPts val="600"/>
+              </a:spcAft>
+            </a:pPr>
+            <a:r>
+              <a:rPr sz="1600" b="1">
+                <a:solidFill>
+                  <a:srgbClr val="16233D"/>
+                </a:solidFill>
+                <a:latin typeface="微软雅黑" a:ea="微软雅黑"/>
+              </a:rPr>
+              <a:t>合规红线（已写入代码）</a:t>
+            </a:r>
+          </a:p>
+          <a:p>
+            <a:pPr algn="l">
+              <a:lnSpc>
+                <a:spcPct val="125000"/>
               </a:lnSpc>
               <a:spcAft>
                 <a:spcPts val="400"/>
               </a:spcAft>
             </a:pPr>
             <a:r>
-              <a:rPr sz="1300" b="1">
-                <a:solidFill>
-                  <a:srgbClr val="16233D"/>
-                </a:solidFill>
-                <a:latin typeface="微软雅黑" a:ea="微软雅黑"/>
-              </a:rPr>
-              <a:t>个真实商品</a:t>
-            </a:r>
-          </a:p>
-          <a:p>
-            <a:pPr algn="ctr">
-              <a:lnSpc>
-                <a:spcPct val="115000"/>
-              </a:lnSpc>
-              <a:spcAft>
-                <a:spcPts val="600"/>
-              </a:spcAft>
-            </a:pPr>
-            <a:r>
-              <a:rPr sz="1050" b="0">
+              <a:rPr sz="1250" b="0">
                 <a:solidFill>
                   <a:srgbClr val="6B7688"/>
                 </a:solidFill>
                 <a:latin typeface="微软雅黑" a:ea="微软雅黑"/>
               </a:rPr>
-              <a:t>苏宁公开搜索页两轮采集去重入库</a:t>
-            </a:r>
-          </a:p>
-        </p:txBody>
-      </p:sp>
-      <p:sp>
-        <p:nvSpPr>
-          <p:cNvPr id="6" name="Rounded Rectangle 5"/>
+              <a:t>遵守 robots.txt，且识别「robots.txt 被返回成首页 HTML」的陷阱</a:t>
+            </a:r>
+          </a:p>
+          <a:p>
+            <a:pPr algn="l">
+              <a:lnSpc>
+                <a:spcPct val="125000"/>
+              </a:lnSpc>
+              <a:spcAft>
+                <a:spcPts val="400"/>
+              </a:spcAft>
+            </a:pPr>
+            <a:r>
+              <a:rPr sz="1250" b="0">
+                <a:solidFill>
+                  <a:srgbClr val="6B7688"/>
+                </a:solidFill>
+                <a:latin typeface="微软雅黑" a:ea="微软雅黑"/>
+              </a:rPr>
+              <a:t>默认限速 3 秒/请求，不并发、不重试轰炸</a:t>
+            </a:r>
+          </a:p>
+          <a:p>
+            <a:pPr algn="l">
+              <a:lnSpc>
+                <a:spcPct val="125000"/>
+              </a:lnSpc>
+              <a:spcAft>
+                <a:spcPts val="400"/>
+              </a:spcAft>
+            </a:pPr>
+            <a:r>
+              <a:rPr sz="1250" b="0">
+                <a:solidFill>
+                  <a:srgbClr val="6B7688"/>
+                </a:solidFill>
+                <a:latin typeface="微软雅黑" a:ea="微软雅黑"/>
+              </a:rPr>
+              <a:t>不采集任何个人信息（无用户 ID、无评论正文）</a:t>
+            </a:r>
+          </a:p>
+          <a:p>
+            <a:pPr algn="l">
+              <a:lnSpc>
+                <a:spcPct val="125000"/>
+              </a:lnSpc>
+              <a:spcAft>
+                <a:spcPts val="400"/>
+              </a:spcAft>
+            </a:pPr>
+            <a:r>
+              <a:rPr sz="1250" b="0">
+                <a:solidFill>
+                  <a:srgbClr val="6B7688"/>
+                </a:solidFill>
+                <a:latin typeface="微软雅黑" a:ea="微软雅黑"/>
+              </a:rPr>
+              <a:t>不绕过登录与风控；被禁止的平台直接不抓</a:t>
+            </a:r>
+          </a:p>
+          <a:p>
+            <a:pPr algn="l">
+              <a:lnSpc>
+                <a:spcPct val="125000"/>
+              </a:lnSpc>
+              <a:spcAft>
+                <a:spcPts val="400"/>
+              </a:spcAft>
+            </a:pPr>
+            <a:r>
+              <a:rPr sz="1250" b="0">
+                <a:solidFill>
+                  <a:srgbClr val="6B7688"/>
+                </a:solidFill>
+                <a:latin typeface="微软雅黑" a:ea="微软雅黑"/>
+              </a:rPr>
+              <a:t>每次采集写审计台账：来源 / URL / 时间 / robots 判定 / 字段 / 批次</a:t>
+            </a:r>
+          </a:p>
+        </p:txBody>
+      </p:sp>
+      <p:sp>
+        <p:nvSpPr>
+          <p:cNvPr id="8" name="Rounded Rectangle 7"/>
           <p:cNvSpPr/>
           <p:nvPr/>
         </p:nvSpPr>
         <p:spPr>
           <a:xfrm>
-            <a:off x="3474720" y="1691640"/>
-            <a:ext cx="2542032" cy="1691640"/>
+            <a:off x="6858000" y="1645920"/>
+            <a:ext cx="4709160" cy="4251960"/>
           </a:xfrm>
           <a:prstGeom prst="roundRect">
             <a:avLst/>
@@ -3715,600 +4116,14 @@
       </p:sp>
       <p:sp>
         <p:nvSpPr>
-          <p:cNvPr id="7" name="TextBox 6"/>
-          <p:cNvSpPr txBox="1"/>
-          <p:nvPr/>
-        </p:nvSpPr>
-        <p:spPr>
-          <a:xfrm>
-            <a:off x="3474720" y="1828800"/>
-            <a:ext cx="2542032" cy="1463040"/>
-          </a:xfrm>
-          <a:prstGeom prst="rect">
-            <a:avLst/>
-          </a:prstGeom>
-          <a:noFill/>
-        </p:spPr>
-        <p:txBody>
-          <a:bodyPr wrap="square" anchor="t">
-            <a:spAutoFit/>
-          </a:bodyPr>
-          <a:lstStyle/>
-          <a:p>
-            <a:pPr algn="ctr">
-              <a:lnSpc>
-                <a:spcPct val="115000"/>
-              </a:lnSpc>
-              <a:spcAft>
-                <a:spcPts val="0"/>
-              </a:spcAft>
-            </a:pPr>
-            <a:r>
-              <a:rPr sz="3200" b="1">
-                <a:solidFill>
-                  <a:srgbClr val="2F6FEB"/>
-                </a:solidFill>
-                <a:latin typeface="微软雅黑" a:ea="微软雅黑"/>
-              </a:rPr>
-              <a:t>20,082</a:t>
-            </a:r>
-          </a:p>
-          <a:p>
-            <a:pPr algn="ctr">
-              <a:lnSpc>
-                <a:spcPct val="115000"/>
-              </a:lnSpc>
-              <a:spcAft>
-                <a:spcPts val="400"/>
-              </a:spcAft>
-            </a:pPr>
-            <a:r>
-              <a:rPr sz="1300" b="1">
-                <a:solidFill>
-                  <a:srgbClr val="16233D"/>
-                </a:solidFill>
-                <a:latin typeface="微软雅黑" a:ea="微软雅黑"/>
-              </a:rPr>
-              <a:t>条日指标</a:t>
-            </a:r>
-          </a:p>
-          <a:p>
-            <a:pPr algn="ctr">
-              <a:lnSpc>
-                <a:spcPct val="115000"/>
-              </a:lnSpc>
-              <a:spcAft>
-                <a:spcPts val="600"/>
-              </a:spcAft>
-            </a:pPr>
-            <a:r>
-              <a:rPr sz="1050" b="0">
-                <a:solidFill>
-                  <a:srgbClr val="6B7688"/>
-                </a:solidFill>
-                <a:latin typeface="微软雅黑" a:ea="微软雅黑"/>
-              </a:rPr>
-              <a:t>演示数据集 + 两轮真实数据合计</a:t>
-            </a:r>
-          </a:p>
-        </p:txBody>
-      </p:sp>
-      <p:sp>
-        <p:nvSpPr>
-          <p:cNvPr id="8" name="Rounded Rectangle 7"/>
+          <p:cNvPr id="9" name="Rectangle 8"/>
           <p:cNvSpPr/>
           <p:nvPr/>
         </p:nvSpPr>
         <p:spPr>
           <a:xfrm>
-            <a:off x="6263640" y="1691640"/>
-            <a:ext cx="2542032" cy="1691640"/>
-          </a:xfrm>
-          <a:prstGeom prst="roundRect">
-            <a:avLst/>
-          </a:prstGeom>
-          <a:solidFill>
-            <a:srgbClr val="FFFFFF"/>
-          </a:solidFill>
-          <a:ln w="9525">
-            <a:solidFill>
-              <a:srgbClr val="D8E0EE"/>
-            </a:solidFill>
-          </a:ln>
-          <a:effectLst/>
-        </p:spPr>
-        <p:style>
-          <a:lnRef idx="1">
-            <a:schemeClr val="accent1"/>
-          </a:lnRef>
-          <a:fillRef idx="3">
-            <a:schemeClr val="accent1"/>
-          </a:fillRef>
-          <a:effectRef idx="2">
-            <a:schemeClr val="accent1"/>
-          </a:effectRef>
-          <a:fontRef idx="minor">
-            <a:schemeClr val="lt1"/>
-          </a:fontRef>
-        </p:style>
-        <p:txBody>
-          <a:bodyPr rtlCol="0" anchor="ctr"/>
-          <a:lstStyle/>
-          <a:p>
-            <a:pPr algn="ctr"/>
-          </a:p>
-        </p:txBody>
-      </p:sp>
-      <p:sp>
-        <p:nvSpPr>
-          <p:cNvPr id="9" name="TextBox 8"/>
-          <p:cNvSpPr txBox="1"/>
-          <p:nvPr/>
-        </p:nvSpPr>
-        <p:spPr>
-          <a:xfrm>
-            <a:off x="6263640" y="1828800"/>
-            <a:ext cx="2542032" cy="1463040"/>
-          </a:xfrm>
-          <a:prstGeom prst="rect">
-            <a:avLst/>
-          </a:prstGeom>
-          <a:noFill/>
-        </p:spPr>
-        <p:txBody>
-          <a:bodyPr wrap="square" anchor="t">
-            <a:spAutoFit/>
-          </a:bodyPr>
-          <a:lstStyle/>
-          <a:p>
-            <a:pPr algn="ctr">
-              <a:lnSpc>
-                <a:spcPct val="115000"/>
-              </a:lnSpc>
-              <a:spcAft>
-                <a:spcPts val="0"/>
-              </a:spcAft>
-            </a:pPr>
-            <a:r>
-              <a:rPr sz="3200" b="1">
-                <a:solidFill>
-                  <a:srgbClr val="2F6FEB"/>
-                </a:solidFill>
-                <a:latin typeface="微软雅黑" a:ea="微软雅黑"/>
-              </a:rPr>
-              <a:t>35 / 18</a:t>
-            </a:r>
-          </a:p>
-          <a:p>
-            <a:pPr algn="ctr">
-              <a:lnSpc>
-                <a:spcPct val="115000"/>
-              </a:lnSpc>
-              <a:spcAft>
-                <a:spcPts val="400"/>
-              </a:spcAft>
-            </a:pPr>
-            <a:r>
-              <a:rPr sz="1300" b="1">
-                <a:solidFill>
-                  <a:srgbClr val="16233D"/>
-                </a:solidFill>
-                <a:latin typeface="微软雅黑" a:ea="微软雅黑"/>
-              </a:rPr>
-              <a:t>项测试</a:t>
-            </a:r>
-          </a:p>
-          <a:p>
-            <a:pPr algn="ctr">
-              <a:lnSpc>
-                <a:spcPct val="115000"/>
-              </a:lnSpc>
-              <a:spcAft>
-                <a:spcPts val="600"/>
-              </a:spcAft>
-            </a:pPr>
-            <a:r>
-              <a:rPr sz="1050" b="0">
-                <a:solidFill>
-                  <a:srgbClr val="6B7688"/>
-                </a:solidFill>
-                <a:latin typeface="微软雅黑" a:ea="微软雅黑"/>
-              </a:rPr>
-              <a:t>端到端冒烟 + 适配器单元测试全通过</a:t>
-            </a:r>
-          </a:p>
-        </p:txBody>
-      </p:sp>
-      <p:sp>
-        <p:nvSpPr>
-          <p:cNvPr id="10" name="Rounded Rectangle 9"/>
-          <p:cNvSpPr/>
-          <p:nvPr/>
-        </p:nvSpPr>
-        <p:spPr>
-          <a:xfrm>
-            <a:off x="9052559" y="1691640"/>
-            <a:ext cx="2542032" cy="1691640"/>
-          </a:xfrm>
-          <a:prstGeom prst="roundRect">
-            <a:avLst/>
-          </a:prstGeom>
-          <a:solidFill>
-            <a:srgbClr val="FFFFFF"/>
-          </a:solidFill>
-          <a:ln w="9525">
-            <a:solidFill>
-              <a:srgbClr val="D8E0EE"/>
-            </a:solidFill>
-          </a:ln>
-          <a:effectLst/>
-        </p:spPr>
-        <p:style>
-          <a:lnRef idx="1">
-            <a:schemeClr val="accent1"/>
-          </a:lnRef>
-          <a:fillRef idx="3">
-            <a:schemeClr val="accent1"/>
-          </a:fillRef>
-          <a:effectRef idx="2">
-            <a:schemeClr val="accent1"/>
-          </a:effectRef>
-          <a:fontRef idx="minor">
-            <a:schemeClr val="lt1"/>
-          </a:fontRef>
-        </p:style>
-        <p:txBody>
-          <a:bodyPr rtlCol="0" anchor="ctr"/>
-          <a:lstStyle/>
-          <a:p>
-            <a:pPr algn="ctr"/>
-          </a:p>
-        </p:txBody>
-      </p:sp>
-      <p:sp>
-        <p:nvSpPr>
-          <p:cNvPr id="11" name="TextBox 10"/>
-          <p:cNvSpPr txBox="1"/>
-          <p:nvPr/>
-        </p:nvSpPr>
-        <p:spPr>
-          <a:xfrm>
-            <a:off x="9052559" y="1828800"/>
-            <a:ext cx="2542032" cy="1463040"/>
-          </a:xfrm>
-          <a:prstGeom prst="rect">
-            <a:avLst/>
-          </a:prstGeom>
-          <a:noFill/>
-        </p:spPr>
-        <p:txBody>
-          <a:bodyPr wrap="square" anchor="t">
-            <a:spAutoFit/>
-          </a:bodyPr>
-          <a:lstStyle/>
-          <a:p>
-            <a:pPr algn="ctr">
-              <a:lnSpc>
-                <a:spcPct val="115000"/>
-              </a:lnSpc>
-              <a:spcAft>
-                <a:spcPts val="0"/>
-              </a:spcAft>
-            </a:pPr>
-            <a:r>
-              <a:rPr sz="3200" b="1">
-                <a:solidFill>
-                  <a:srgbClr val="2F6FEB"/>
-                </a:solidFill>
-                <a:latin typeface="微软雅黑" a:ea="微软雅黑"/>
-              </a:rPr>
-              <a:t>0</a:t>
-            </a:r>
-          </a:p>
-          <a:p>
-            <a:pPr algn="ctr">
-              <a:lnSpc>
-                <a:spcPct val="115000"/>
-              </a:lnSpc>
-              <a:spcAft>
-                <a:spcPts val="400"/>
-              </a:spcAft>
-            </a:pPr>
-            <a:r>
-              <a:rPr sz="1300" b="1">
-                <a:solidFill>
-                  <a:srgbClr val="16233D"/>
-                </a:solidFill>
-                <a:latin typeface="微软雅黑" a:ea="微软雅黑"/>
-              </a:rPr>
-              <a:t>第三方依赖</a:t>
-            </a:r>
-          </a:p>
-          <a:p>
-            <a:pPr algn="ctr">
-              <a:lnSpc>
-                <a:spcPct val="115000"/>
-              </a:lnSpc>
-              <a:spcAft>
-                <a:spcPts val="600"/>
-              </a:spcAft>
-            </a:pPr>
-            <a:r>
-              <a:rPr sz="1050" b="0">
-                <a:solidFill>
-                  <a:srgbClr val="6B7688"/>
-                </a:solidFill>
-                <a:latin typeface="微软雅黑" a:ea="微软雅黑"/>
-              </a:rPr>
-              <a:t>纯 Python 标准库 · MIT 开源</a:t>
-            </a:r>
-          </a:p>
-        </p:txBody>
-      </p:sp>
-      <p:sp>
-        <p:nvSpPr>
-          <p:cNvPr id="12" name="Rounded Rectangle 11"/>
-          <p:cNvSpPr/>
-          <p:nvPr/>
-        </p:nvSpPr>
-        <p:spPr>
-          <a:xfrm>
-            <a:off x="685800" y="3611880"/>
-            <a:ext cx="5349240" cy="2606040"/>
-          </a:xfrm>
-          <a:prstGeom prst="roundRect">
-            <a:avLst/>
-          </a:prstGeom>
-          <a:solidFill>
-            <a:srgbClr val="FFFFFF"/>
-          </a:solidFill>
-          <a:ln w="9525">
-            <a:solidFill>
-              <a:srgbClr val="D8E0EE"/>
-            </a:solidFill>
-          </a:ln>
-          <a:effectLst/>
-        </p:spPr>
-        <p:style>
-          <a:lnRef idx="1">
-            <a:schemeClr val="accent1"/>
-          </a:lnRef>
-          <a:fillRef idx="3">
-            <a:schemeClr val="accent1"/>
-          </a:fillRef>
-          <a:effectRef idx="2">
-            <a:schemeClr val="accent1"/>
-          </a:effectRef>
-          <a:fontRef idx="minor">
-            <a:schemeClr val="lt1"/>
-          </a:fontRef>
-        </p:style>
-        <p:txBody>
-          <a:bodyPr rtlCol="0" anchor="ctr"/>
-          <a:lstStyle/>
-          <a:p>
-            <a:pPr algn="ctr"/>
-          </a:p>
-        </p:txBody>
-      </p:sp>
-      <p:sp>
-        <p:nvSpPr>
-          <p:cNvPr id="13" name="Rectangle 12"/>
-          <p:cNvSpPr/>
-          <p:nvPr/>
-        </p:nvSpPr>
-        <p:spPr>
-          <a:xfrm>
-            <a:off x="685800" y="3611880"/>
-            <a:ext cx="68580" cy="2606040"/>
-          </a:xfrm>
-          <a:prstGeom prst="rect">
-            <a:avLst/>
-          </a:prstGeom>
-          <a:solidFill>
-            <a:srgbClr val="2F6FEB"/>
-          </a:solidFill>
-          <a:ln>
-            <a:noFill/>
-          </a:ln>
-          <a:effectLst/>
-        </p:spPr>
-        <p:style>
-          <a:lnRef idx="1">
-            <a:schemeClr val="accent1"/>
-          </a:lnRef>
-          <a:fillRef idx="3">
-            <a:schemeClr val="accent1"/>
-          </a:fillRef>
-          <a:effectRef idx="2">
-            <a:schemeClr val="accent1"/>
-          </a:effectRef>
-          <a:fontRef idx="minor">
-            <a:schemeClr val="lt1"/>
-          </a:fontRef>
-        </p:style>
-        <p:txBody>
-          <a:bodyPr rtlCol="0" anchor="ctr"/>
-          <a:lstStyle/>
-          <a:p>
-            <a:pPr algn="ctr"/>
-          </a:p>
-        </p:txBody>
-      </p:sp>
-      <p:sp>
-        <p:nvSpPr>
-          <p:cNvPr id="14" name="TextBox 13"/>
-          <p:cNvSpPr txBox="1"/>
-          <p:nvPr/>
-        </p:nvSpPr>
-        <p:spPr>
-          <a:xfrm>
-            <a:off x="941832" y="3776472"/>
-            <a:ext cx="4892040" cy="2331720"/>
-          </a:xfrm>
-          <a:prstGeom prst="rect">
-            <a:avLst/>
-          </a:prstGeom>
-          <a:noFill/>
-        </p:spPr>
-        <p:txBody>
-          <a:bodyPr wrap="square" anchor="t">
-            <a:spAutoFit/>
-          </a:bodyPr>
-          <a:lstStyle/>
-          <a:p>
-            <a:pPr algn="l">
-              <a:lnSpc>
-                <a:spcPct val="115000"/>
-              </a:lnSpc>
-              <a:spcAft>
-                <a:spcPts val="600"/>
-              </a:spcAft>
-            </a:pPr>
-            <a:r>
-              <a:rPr sz="1600" b="1">
-                <a:solidFill>
-                  <a:srgbClr val="16233D"/>
-                </a:solidFill>
-                <a:latin typeface="微软雅黑" a:ea="微软雅黑"/>
-              </a:rPr>
-              <a:t>真实数据下的分析输出（节选）</a:t>
-            </a:r>
-          </a:p>
-          <a:p>
-            <a:pPr algn="l">
-              <a:lnSpc>
-                <a:spcPct val="125000"/>
-              </a:lnSpc>
-              <a:spcAft>
-                <a:spcPts val="400"/>
-              </a:spcAft>
-            </a:pPr>
-            <a:r>
-              <a:rPr sz="1250" b="0">
-                <a:solidFill>
-                  <a:srgbClr val="6B7688"/>
-                </a:solidFill>
-                <a:latin typeface="微软雅黑" a:ea="微软雅黑"/>
-              </a:rPr>
-              <a:t>「保温杯」：30 个真实商品，CR5=0.90、HHI=0.170（高度集中）</a:t>
-            </a:r>
-          </a:p>
-          <a:p>
-            <a:pPr algn="l">
-              <a:lnSpc>
-                <a:spcPct val="125000"/>
-              </a:lnSpc>
-              <a:spcAft>
-                <a:spcPts val="400"/>
-              </a:spcAft>
-            </a:pPr>
-            <a:r>
-              <a:rPr sz="1250" b="0">
-                <a:solidFill>
-                  <a:srgbClr val="6B7688"/>
-                </a:solidFill>
-                <a:latin typeface="微软雅黑" a:ea="微软雅黑"/>
-              </a:rPr>
-              <a:t>建议动作 3 条，均为真实商品（JEKO / 希乐 / 炊大皇）</a:t>
-            </a:r>
-          </a:p>
-          <a:p>
-            <a:pPr algn="l">
-              <a:lnSpc>
-                <a:spcPct val="125000"/>
-              </a:lnSpc>
-              <a:spcAft>
-                <a:spcPts val="400"/>
-              </a:spcAft>
-            </a:pPr>
-            <a:r>
-              <a:rPr sz="1250" b="0">
-                <a:solidFill>
-                  <a:srgbClr val="6B7688"/>
-                </a:solidFill>
-                <a:latin typeface="微软雅黑" a:ea="微软雅黑"/>
-              </a:rPr>
-              <a:t>每条建议附证据指标，证据链校验通过</a:t>
-            </a:r>
-          </a:p>
-          <a:p>
-            <a:pPr algn="l">
-              <a:lnSpc>
-                <a:spcPct val="125000"/>
-              </a:lnSpc>
-              <a:spcAft>
-                <a:spcPts val="400"/>
-              </a:spcAft>
-            </a:pPr>
-            <a:r>
-              <a:rPr sz="1250" b="0">
-                <a:solidFill>
-                  <a:srgbClr val="6B7688"/>
-                </a:solidFill>
-                <a:latin typeface="微软雅黑" a:ea="微软雅黑"/>
-              </a:rPr>
-              <a:t>报告自动标注：环比不可用、价格未采集</a:t>
-            </a:r>
-          </a:p>
-        </p:txBody>
-      </p:sp>
-      <p:sp>
-        <p:nvSpPr>
-          <p:cNvPr id="15" name="Rounded Rectangle 14"/>
-          <p:cNvSpPr/>
-          <p:nvPr/>
-        </p:nvSpPr>
-        <p:spPr>
-          <a:xfrm>
-            <a:off x="6217920" y="3611880"/>
-            <a:ext cx="5349240" cy="2606040"/>
-          </a:xfrm>
-          <a:prstGeom prst="roundRect">
-            <a:avLst/>
-          </a:prstGeom>
-          <a:solidFill>
-            <a:srgbClr val="FFFFFF"/>
-          </a:solidFill>
-          <a:ln w="9525">
-            <a:solidFill>
-              <a:srgbClr val="D8E0EE"/>
-            </a:solidFill>
-          </a:ln>
-          <a:effectLst/>
-        </p:spPr>
-        <p:style>
-          <a:lnRef idx="1">
-            <a:schemeClr val="accent1"/>
-          </a:lnRef>
-          <a:fillRef idx="3">
-            <a:schemeClr val="accent1"/>
-          </a:fillRef>
-          <a:effectRef idx="2">
-            <a:schemeClr val="accent1"/>
-          </a:effectRef>
-          <a:fontRef idx="minor">
-            <a:schemeClr val="lt1"/>
-          </a:fontRef>
-        </p:style>
-        <p:txBody>
-          <a:bodyPr rtlCol="0" anchor="ctr"/>
-          <a:lstStyle/>
-          <a:p>
-            <a:pPr algn="ctr"/>
-          </a:p>
-        </p:txBody>
-      </p:sp>
-      <p:sp>
-        <p:nvSpPr>
-          <p:cNvPr id="16" name="Rectangle 15"/>
-          <p:cNvSpPr/>
-          <p:nvPr/>
-        </p:nvSpPr>
-        <p:spPr>
-          <a:xfrm>
-            <a:off x="6217920" y="3611880"/>
-            <a:ext cx="68580" cy="2606040"/>
+            <a:off x="6858000" y="1645920"/>
+            <a:ext cx="68580" cy="4251960"/>
           </a:xfrm>
           <a:prstGeom prst="rect">
             <a:avLst/>
@@ -4345,14 +4160,14 @@
       </p:sp>
       <p:sp>
         <p:nvSpPr>
-          <p:cNvPr id="17" name="TextBox 16"/>
+          <p:cNvPr id="10" name="TextBox 9"/>
           <p:cNvSpPr txBox="1"/>
           <p:nvPr/>
         </p:nvSpPr>
         <p:spPr>
           <a:xfrm>
-            <a:off x="6473952" y="3776472"/>
-            <a:ext cx="4892040" cy="2331720"/>
+            <a:off x="7114032" y="1810512"/>
+            <a:ext cx="4251960" cy="3977640"/>
           </a:xfrm>
           <a:prstGeom prst="rect">
             <a:avLst/>
@@ -4380,7 +4195,7 @@
                 </a:solidFill>
                 <a:latin typeface="微软雅黑" a:ea="微软雅黑"/>
               </a:rPr>
-              <a:t>两轮采集中发现并修复的真实问题</a:t>
+              <a:t>为什么坚持合规路线</a:t>
             </a:r>
           </a:p>
           <a:p>
@@ -4399,7 +4214,7 @@
                 </a:solidFill>
                 <a:latin typeface="微软雅黑" a:ea="微软雅黑"/>
               </a:rPr>
-              <a:t>评价数是缓存展示值，日级增量观测不到 → 新增降级口径（0.40）</a:t>
+              <a:t>灰产式抓包（逆向 App 接口、绕过签名与验证码）违反平台协议，</a:t>
             </a:r>
           </a:p>
           <a:p>
@@ -4418,7 +4233,7 @@
                 </a:solidFill>
                 <a:latin typeface="微软雅黑" a:ea="微软雅黑"/>
               </a:rPr>
-              <a:t>同名类目在演示/真实数据中歧义 → 解析优先真实源并支持切换</a:t>
+              <a:t>可能触及《反不正当竞争法》《数据安全法》，</a:t>
             </a:r>
           </a:p>
           <a:p>
@@ -4437,7 +4252,7 @@
                 </a:solidFill>
                 <a:latin typeface="微软雅黑" a:ea="微软雅黑"/>
               </a:rPr>
-              <a:t>搜「猫爬架」27 条里 26 条是无关推荐位商品 → 加相关性过滤</a:t>
+              <a:t>在产业应用赛道属于一票否决风险。</a:t>
             </a:r>
           </a:p>
           <a:p>
@@ -4449,6 +4264,16 @@
                 <a:spcPts val="400"/>
               </a:spcAft>
             </a:pPr>
+          </a:p>
+          <a:p>
+            <a:pPr algn="l">
+              <a:lnSpc>
+                <a:spcPct val="125000"/>
+              </a:lnSpc>
+              <a:spcAft>
+                <a:spcPts val="400"/>
+              </a:spcAft>
+            </a:pPr>
             <a:r>
               <a:rPr sz="1250" b="0">
                 <a:solidFill>
@@ -4456,14 +4281,81 @@
                 </a:solidFill>
                 <a:latin typeface="微软雅黑" a:ea="微软雅黑"/>
               </a:rPr>
-              <a:t>官方 API 返回滚动销量 → 不能当累计值相减 → 新增独立口径</a:t>
-            </a:r>
-          </a:p>
-        </p:txBody>
-      </p:sp>
-      <p:sp>
-        <p:nvSpPr>
-          <p:cNvPr id="18" name="TextBox 17"/>
+              <a:t>我们选择：公开数据 + 官方授权接口 + 用户授权导入，</a:t>
+            </a:r>
+          </a:p>
+          <a:p>
+            <a:pPr algn="l">
+              <a:lnSpc>
+                <a:spcPct val="125000"/>
+              </a:lnSpc>
+              <a:spcAft>
+                <a:spcPts val="400"/>
+              </a:spcAft>
+            </a:pPr>
+            <a:r>
+              <a:rPr sz="1250" b="0">
+                <a:solidFill>
+                  <a:srgbClr val="6B7688"/>
+                </a:solidFill>
+                <a:latin typeface="微软雅黑" a:ea="微软雅黑"/>
+              </a:rPr>
+              <a:t>并把每次采集的合规判定写进审计台账，</a:t>
+            </a:r>
+          </a:p>
+          <a:p>
+            <a:pPr algn="l">
+              <a:lnSpc>
+                <a:spcPct val="125000"/>
+              </a:lnSpc>
+              <a:spcAft>
+                <a:spcPts val="400"/>
+              </a:spcAft>
+            </a:pPr>
+            <a:r>
+              <a:rPr sz="1250" b="0">
+                <a:solidFill>
+                  <a:srgbClr val="6B7688"/>
+                </a:solidFill>
+                <a:latin typeface="微软雅黑" a:ea="微软雅黑"/>
+              </a:rPr>
+              <a:t>答辩时可以直接回答「这条数据哪来的」。</a:t>
+            </a:r>
+          </a:p>
+          <a:p>
+            <a:pPr algn="l">
+              <a:lnSpc>
+                <a:spcPct val="125000"/>
+              </a:lnSpc>
+              <a:spcAft>
+                <a:spcPts val="400"/>
+              </a:spcAft>
+            </a:pPr>
+          </a:p>
+          <a:p>
+            <a:pPr algn="l">
+              <a:lnSpc>
+                <a:spcPct val="125000"/>
+              </a:lnSpc>
+              <a:spcAft>
+                <a:spcPts val="400"/>
+              </a:spcAft>
+            </a:pPr>
+            <a:r>
+              <a:rPr sz="1250" b="0">
+                <a:solidFill>
+                  <a:srgbClr val="6B7688"/>
+                </a:solidFill>
+                <a:latin typeface="微软雅黑" a:ea="微软雅黑"/>
+              </a:rPr>
+              <a:t>代价是数据完整度不如灰产，收益是产品可以真的落地。</a:t>
+            </a:r>
+          </a:p>
+        </p:txBody>
+      </p:sp>
+      <p:sp>
+        <p:nvSpPr>
+          <p:cNvPr id="11" name="TextBox 10"/>
           <p:cNvSpPr txBox="1"/>
           <p:nvPr/>
         </p:nvSpPr>
@@ -4505,7 +4397,7 @@
       </p:sp>
       <p:sp>
         <p:nvSpPr>
-          <p:cNvPr id="19" name="TextBox 18"/>
+          <p:cNvPr id="12" name="TextBox 11"/>
           <p:cNvSpPr txBox="1"/>
           <p:nvPr/>
         </p:nvSpPr>
@@ -4644,7 +4536,7 @@
                 </a:solidFill>
                 <a:latin typeface="微软雅黑" a:ea="微软雅黑"/>
               </a:rPr>
-              <a:t>产业价值与落地路径</a:t>
+              <a:t>实测结果：真实数据已跑通</a:t>
             </a:r>
           </a:p>
           <a:p>
@@ -4663,7 +4555,7 @@
                 </a:solidFill>
                 <a:latin typeface="微软雅黑" a:ea="微软雅黑"/>
               </a:rPr>
-              <a:t>从「靠经验试错」到「靠证据决策」</a:t>
+              <a:t>不是概念演示——真实公开数据已入库并跑完全链路</a:t>
             </a:r>
           </a:p>
         </p:txBody>
@@ -4677,7 +4569,7 @@
         <p:spPr>
           <a:xfrm>
             <a:off x="685800" y="1691640"/>
-            <a:ext cx="3474720" cy="2286000"/>
+            <a:ext cx="2542032" cy="1691640"/>
           </a:xfrm>
           <a:prstGeom prst="roundRect">
             <a:avLst/>
@@ -4716,58 +4608,14 @@
       </p:sp>
       <p:sp>
         <p:nvSpPr>
-          <p:cNvPr id="5" name="Rectangle 4"/>
-          <p:cNvSpPr/>
-          <p:nvPr/>
-        </p:nvSpPr>
-        <p:spPr>
-          <a:xfrm>
-            <a:off x="685800" y="1691640"/>
-            <a:ext cx="68580" cy="2286000"/>
-          </a:xfrm>
-          <a:prstGeom prst="rect">
-            <a:avLst/>
-          </a:prstGeom>
-          <a:solidFill>
-            <a:srgbClr val="2F6FEB"/>
-          </a:solidFill>
-          <a:ln>
-            <a:noFill/>
-          </a:ln>
-          <a:effectLst/>
-        </p:spPr>
-        <p:style>
-          <a:lnRef idx="1">
-            <a:schemeClr val="accent1"/>
-          </a:lnRef>
-          <a:fillRef idx="3">
-            <a:schemeClr val="accent1"/>
-          </a:fillRef>
-          <a:effectRef idx="2">
-            <a:schemeClr val="accent1"/>
-          </a:effectRef>
-          <a:fontRef idx="minor">
-            <a:schemeClr val="lt1"/>
-          </a:fontRef>
-        </p:style>
-        <p:txBody>
-          <a:bodyPr rtlCol="0" anchor="ctr"/>
-          <a:lstStyle/>
-          <a:p>
-            <a:pPr algn="ctr"/>
-          </a:p>
-        </p:txBody>
-      </p:sp>
-      <p:sp>
-        <p:nvSpPr>
-          <p:cNvPr id="6" name="TextBox 5"/>
+          <p:cNvPr id="5" name="TextBox 4"/>
           <p:cNvSpPr txBox="1"/>
           <p:nvPr/>
         </p:nvSpPr>
         <p:spPr>
           <a:xfrm>
-            <a:off x="941832" y="1856232"/>
-            <a:ext cx="3017520" cy="2011680"/>
+            <a:off x="685800" y="1828800"/>
+            <a:ext cx="2542032" cy="1463040"/>
           </a:xfrm>
           <a:prstGeom prst="rect">
             <a:avLst/>
@@ -4780,112 +4628,74 @@
           </a:bodyPr>
           <a:lstStyle/>
           <a:p>
-            <a:pPr algn="l">
+            <a:pPr algn="ctr">
               <a:lnSpc>
                 <a:spcPct val="115000"/>
               </a:lnSpc>
               <a:spcAft>
+                <a:spcPts val="0"/>
+              </a:spcAft>
+            </a:pPr>
+            <a:r>
+              <a:rPr sz="3200" b="1">
+                <a:solidFill>
+                  <a:srgbClr val="2F6FEB"/>
+                </a:solidFill>
+                <a:latin typeface="微软雅黑" a:ea="微软雅黑"/>
+              </a:rPr>
+              <a:t>80</a:t>
+            </a:r>
+          </a:p>
+          <a:p>
+            <a:pPr algn="ctr">
+              <a:lnSpc>
+                <a:spcPct val="115000"/>
+              </a:lnSpc>
+              <a:spcAft>
+                <a:spcPts val="400"/>
+              </a:spcAft>
+            </a:pPr>
+            <a:r>
+              <a:rPr sz="1300" b="1">
+                <a:solidFill>
+                  <a:srgbClr val="16233D"/>
+                </a:solidFill>
+                <a:latin typeface="微软雅黑" a:ea="微软雅黑"/>
+              </a:rPr>
+              <a:t>个真实商品</a:t>
+            </a:r>
+          </a:p>
+          <a:p>
+            <a:pPr algn="ctr">
+              <a:lnSpc>
+                <a:spcPct val="115000"/>
+              </a:lnSpc>
+              <a:spcAft>
                 <a:spcPts val="600"/>
               </a:spcAft>
             </a:pPr>
             <a:r>
-              <a:rPr sz="1600" b="1">
-                <a:solidFill>
-                  <a:srgbClr val="16233D"/>
-                </a:solidFill>
-                <a:latin typeface="微软雅黑" a:ea="微软雅黑"/>
-              </a:rPr>
-              <a:t>目标用户</a:t>
-            </a:r>
-          </a:p>
-          <a:p>
-            <a:pPr algn="l">
-              <a:lnSpc>
-                <a:spcPct val="125000"/>
-              </a:lnSpc>
-              <a:spcAft>
-                <a:spcPts val="400"/>
-              </a:spcAft>
-            </a:pPr>
-            <a:r>
-              <a:rPr sz="1250" b="0">
+              <a:rPr sz="1050" b="0">
                 <a:solidFill>
                   <a:srgbClr val="6B7688"/>
                 </a:solidFill>
                 <a:latin typeface="微软雅黑" a:ea="微软雅黑"/>
               </a:rPr>
-              <a:t>中小电商卖家 / 个体创业者</a:t>
-            </a:r>
-          </a:p>
-          <a:p>
-            <a:pPr algn="l">
-              <a:lnSpc>
-                <a:spcPct val="125000"/>
-              </a:lnSpc>
-              <a:spcAft>
-                <a:spcPts val="400"/>
-              </a:spcAft>
-            </a:pPr>
-            <a:r>
-              <a:rPr sz="1250" b="0">
-                <a:solidFill>
-                  <a:srgbClr val="6B7688"/>
-                </a:solidFill>
-                <a:latin typeface="微软雅黑" a:ea="微软雅黑"/>
-              </a:rPr>
-              <a:t>品牌市场部与选品团队</a:t>
-            </a:r>
-          </a:p>
-          <a:p>
-            <a:pPr algn="l">
-              <a:lnSpc>
-                <a:spcPct val="125000"/>
-              </a:lnSpc>
-              <a:spcAft>
-                <a:spcPts val="400"/>
-              </a:spcAft>
-            </a:pPr>
-            <a:r>
-              <a:rPr sz="1250" b="0">
-                <a:solidFill>
-                  <a:srgbClr val="6B7688"/>
-                </a:solidFill>
-                <a:latin typeface="微软雅黑" a:ea="微软雅黑"/>
-              </a:rPr>
-              <a:t>投研与咨询分析师</a:t>
-            </a:r>
-          </a:p>
-          <a:p>
-            <a:pPr algn="l">
-              <a:lnSpc>
-                <a:spcPct val="125000"/>
-              </a:lnSpc>
-              <a:spcAft>
-                <a:spcPts val="400"/>
-              </a:spcAft>
-            </a:pPr>
-            <a:r>
-              <a:rPr sz="1250" b="0">
-                <a:solidFill>
-                  <a:srgbClr val="6B7688"/>
-                </a:solidFill>
-                <a:latin typeface="微软雅黑" a:ea="微软雅黑"/>
-              </a:rPr>
-              <a:t>代运营与电商服务商</a:t>
-            </a:r>
-          </a:p>
-        </p:txBody>
-      </p:sp>
-      <p:sp>
-        <p:nvSpPr>
-          <p:cNvPr id="7" name="Rounded Rectangle 6"/>
+              <a:t>苏宁公开搜索页两轮采集去重入库</a:t>
+            </a:r>
+          </a:p>
+        </p:txBody>
+      </p:sp>
+      <p:sp>
+        <p:nvSpPr>
+          <p:cNvPr id="6" name="Rounded Rectangle 5"/>
           <p:cNvSpPr/>
           <p:nvPr/>
         </p:nvSpPr>
         <p:spPr>
           <a:xfrm>
-            <a:off x="4343400" y="1691640"/>
-            <a:ext cx="3474720" cy="2286000"/>
+            <a:off x="3474720" y="1691640"/>
+            <a:ext cx="2542032" cy="1691640"/>
           </a:xfrm>
           <a:prstGeom prst="roundRect">
             <a:avLst/>
@@ -4924,58 +4734,14 @@
       </p:sp>
       <p:sp>
         <p:nvSpPr>
-          <p:cNvPr id="8" name="Rectangle 7"/>
-          <p:cNvSpPr/>
-          <p:nvPr/>
-        </p:nvSpPr>
-        <p:spPr>
-          <a:xfrm>
-            <a:off x="4343400" y="1691640"/>
-            <a:ext cx="68580" cy="2286000"/>
-          </a:xfrm>
-          <a:prstGeom prst="rect">
-            <a:avLst/>
-          </a:prstGeom>
-          <a:solidFill>
-            <a:srgbClr val="0F8F80"/>
-          </a:solidFill>
-          <a:ln>
-            <a:noFill/>
-          </a:ln>
-          <a:effectLst/>
-        </p:spPr>
-        <p:style>
-          <a:lnRef idx="1">
-            <a:schemeClr val="accent1"/>
-          </a:lnRef>
-          <a:fillRef idx="3">
-            <a:schemeClr val="accent1"/>
-          </a:fillRef>
-          <a:effectRef idx="2">
-            <a:schemeClr val="accent1"/>
-          </a:effectRef>
-          <a:fontRef idx="minor">
-            <a:schemeClr val="lt1"/>
-          </a:fontRef>
-        </p:style>
-        <p:txBody>
-          <a:bodyPr rtlCol="0" anchor="ctr"/>
-          <a:lstStyle/>
-          <a:p>
-            <a:pPr algn="ctr"/>
-          </a:p>
-        </p:txBody>
-      </p:sp>
-      <p:sp>
-        <p:nvSpPr>
-          <p:cNvPr id="9" name="TextBox 8"/>
+          <p:cNvPr id="7" name="TextBox 6"/>
           <p:cNvSpPr txBox="1"/>
           <p:nvPr/>
         </p:nvSpPr>
         <p:spPr>
           <a:xfrm>
-            <a:off x="4599432" y="1856232"/>
-            <a:ext cx="3017520" cy="2011680"/>
+            <a:off x="3474720" y="1828800"/>
+            <a:ext cx="2542032" cy="1463040"/>
           </a:xfrm>
           <a:prstGeom prst="rect">
             <a:avLst/>
@@ -4988,112 +4754,74 @@
           </a:bodyPr>
           <a:lstStyle/>
           <a:p>
-            <a:pPr algn="l">
+            <a:pPr algn="ctr">
               <a:lnSpc>
                 <a:spcPct val="115000"/>
               </a:lnSpc>
               <a:spcAft>
+                <a:spcPts val="0"/>
+              </a:spcAft>
+            </a:pPr>
+            <a:r>
+              <a:rPr sz="3200" b="1">
+                <a:solidFill>
+                  <a:srgbClr val="2F6FEB"/>
+                </a:solidFill>
+                <a:latin typeface="微软雅黑" a:ea="微软雅黑"/>
+              </a:rPr>
+              <a:t>20,082</a:t>
+            </a:r>
+          </a:p>
+          <a:p>
+            <a:pPr algn="ctr">
+              <a:lnSpc>
+                <a:spcPct val="115000"/>
+              </a:lnSpc>
+              <a:spcAft>
+                <a:spcPts val="400"/>
+              </a:spcAft>
+            </a:pPr>
+            <a:r>
+              <a:rPr sz="1300" b="1">
+                <a:solidFill>
+                  <a:srgbClr val="16233D"/>
+                </a:solidFill>
+                <a:latin typeface="微软雅黑" a:ea="微软雅黑"/>
+              </a:rPr>
+              <a:t>条日指标</a:t>
+            </a:r>
+          </a:p>
+          <a:p>
+            <a:pPr algn="ctr">
+              <a:lnSpc>
+                <a:spcPct val="115000"/>
+              </a:lnSpc>
+              <a:spcAft>
                 <a:spcPts val="600"/>
               </a:spcAft>
             </a:pPr>
             <a:r>
-              <a:rPr sz="1600" b="1">
-                <a:solidFill>
-                  <a:srgbClr val="16233D"/>
-                </a:solidFill>
-                <a:latin typeface="微软雅黑" a:ea="微软雅黑"/>
-              </a:rPr>
-              <a:t>直接价值</a:t>
-            </a:r>
-          </a:p>
-          <a:p>
-            <a:pPr algn="l">
-              <a:lnSpc>
-                <a:spcPct val="125000"/>
-              </a:lnSpc>
-              <a:spcAft>
-                <a:spcPts val="400"/>
-              </a:spcAft>
-            </a:pPr>
-            <a:r>
-              <a:rPr sz="1250" b="0">
+              <a:rPr sz="1050" b="0">
                 <a:solidFill>
                   <a:srgbClr val="6B7688"/>
                 </a:solidFill>
                 <a:latin typeface="微软雅黑" a:ea="微软雅黑"/>
               </a:rPr>
-              <a:t>把数小时人工比价压缩到 30 秒</a:t>
-            </a:r>
-          </a:p>
-          <a:p>
-            <a:pPr algn="l">
-              <a:lnSpc>
-                <a:spcPct val="125000"/>
-              </a:lnSpc>
-              <a:spcAft>
-                <a:spcPts val="400"/>
-              </a:spcAft>
-            </a:pPr>
-            <a:r>
-              <a:rPr sz="1250" b="0">
-                <a:solidFill>
-                  <a:srgbClr val="6B7688"/>
-                </a:solidFill>
-                <a:latin typeface="微软雅黑" a:ea="微软雅黑"/>
-              </a:rPr>
-              <a:t>降低选品试错与压货风险</a:t>
-            </a:r>
-          </a:p>
-          <a:p>
-            <a:pPr algn="l">
-              <a:lnSpc>
-                <a:spcPct val="125000"/>
-              </a:lnSpc>
-              <a:spcAft>
-                <a:spcPts val="400"/>
-              </a:spcAft>
-            </a:pPr>
-            <a:r>
-              <a:rPr sz="1250" b="0">
-                <a:solidFill>
-                  <a:srgbClr val="6B7688"/>
-                </a:solidFill>
-                <a:latin typeface="微软雅黑" a:ea="微软雅黑"/>
-              </a:rPr>
-              <a:t>定价有锚点、切入有理由、风险有提示</a:t>
-            </a:r>
-          </a:p>
-          <a:p>
-            <a:pPr algn="l">
-              <a:lnSpc>
-                <a:spcPct val="125000"/>
-              </a:lnSpc>
-              <a:spcAft>
-                <a:spcPts val="400"/>
-              </a:spcAft>
-            </a:pPr>
-            <a:r>
-              <a:rPr sz="1250" b="0">
-                <a:solidFill>
-                  <a:srgbClr val="6B7688"/>
-                </a:solidFill>
-                <a:latin typeface="微软雅黑" a:ea="微软雅黑"/>
-              </a:rPr>
-              <a:t>每条结论可追溯到数据来源</a:t>
-            </a:r>
-          </a:p>
-        </p:txBody>
-      </p:sp>
-      <p:sp>
-        <p:nvSpPr>
-          <p:cNvPr id="10" name="Rounded Rectangle 9"/>
+              <a:t>演示数据集 + 两轮真实数据合计</a:t>
+            </a:r>
+          </a:p>
+        </p:txBody>
+      </p:sp>
+      <p:sp>
+        <p:nvSpPr>
+          <p:cNvPr id="8" name="Rounded Rectangle 7"/>
           <p:cNvSpPr/>
           <p:nvPr/>
         </p:nvSpPr>
         <p:spPr>
           <a:xfrm>
-            <a:off x="8001000" y="1691640"/>
-            <a:ext cx="3566160" cy="2286000"/>
+            <a:off x="6263640" y="1691640"/>
+            <a:ext cx="2542032" cy="1691640"/>
           </a:xfrm>
           <a:prstGeom prst="roundRect">
             <a:avLst/>
@@ -5132,14 +4860,474 @@
       </p:sp>
       <p:sp>
         <p:nvSpPr>
-          <p:cNvPr id="11" name="Rectangle 10"/>
+          <p:cNvPr id="9" name="TextBox 8"/>
+          <p:cNvSpPr txBox="1"/>
+          <p:nvPr/>
+        </p:nvSpPr>
+        <p:spPr>
+          <a:xfrm>
+            <a:off x="6263640" y="1828800"/>
+            <a:ext cx="2542032" cy="1463040"/>
+          </a:xfrm>
+          <a:prstGeom prst="rect">
+            <a:avLst/>
+          </a:prstGeom>
+          <a:noFill/>
+        </p:spPr>
+        <p:txBody>
+          <a:bodyPr wrap="square" anchor="t">
+            <a:spAutoFit/>
+          </a:bodyPr>
+          <a:lstStyle/>
+          <a:p>
+            <a:pPr algn="ctr">
+              <a:lnSpc>
+                <a:spcPct val="115000"/>
+              </a:lnSpc>
+              <a:spcAft>
+                <a:spcPts val="0"/>
+              </a:spcAft>
+            </a:pPr>
+            <a:r>
+              <a:rPr sz="3200" b="1">
+                <a:solidFill>
+                  <a:srgbClr val="2F6FEB"/>
+                </a:solidFill>
+                <a:latin typeface="微软雅黑" a:ea="微软雅黑"/>
+              </a:rPr>
+              <a:t>62</a:t>
+            </a:r>
+          </a:p>
+          <a:p>
+            <a:pPr algn="ctr">
+              <a:lnSpc>
+                <a:spcPct val="115000"/>
+              </a:lnSpc>
+              <a:spcAft>
+                <a:spcPts val="400"/>
+              </a:spcAft>
+            </a:pPr>
+            <a:r>
+              <a:rPr sz="1300" b="1">
+                <a:solidFill>
+                  <a:srgbClr val="16233D"/>
+                </a:solidFill>
+                <a:latin typeface="微软雅黑" a:ea="微软雅黑"/>
+              </a:rPr>
+              <a:t>项测试</a:t>
+            </a:r>
+          </a:p>
+          <a:p>
+            <a:pPr algn="ctr">
+              <a:lnSpc>
+                <a:spcPct val="115000"/>
+              </a:lnSpc>
+              <a:spcAft>
+                <a:spcPts val="600"/>
+              </a:spcAft>
+            </a:pPr>
+            <a:r>
+              <a:rPr sz="1050" b="0">
+                <a:solidFill>
+                  <a:srgbClr val="6B7688"/>
+                </a:solidFill>
+                <a:latin typeface="微软雅黑" a:ea="微软雅黑"/>
+              </a:rPr>
+              <a:t>35 端到端 + 18 适配器 + 9 AI 溯源</a:t>
+            </a:r>
+          </a:p>
+        </p:txBody>
+      </p:sp>
+      <p:sp>
+        <p:nvSpPr>
+          <p:cNvPr id="10" name="Rounded Rectangle 9"/>
           <p:cNvSpPr/>
           <p:nvPr/>
         </p:nvSpPr>
         <p:spPr>
           <a:xfrm>
-            <a:off x="8001000" y="1691640"/>
-            <a:ext cx="68580" cy="2286000"/>
+            <a:off x="9052559" y="1691640"/>
+            <a:ext cx="2542032" cy="1691640"/>
+          </a:xfrm>
+          <a:prstGeom prst="roundRect">
+            <a:avLst/>
+          </a:prstGeom>
+          <a:solidFill>
+            <a:srgbClr val="FFFFFF"/>
+          </a:solidFill>
+          <a:ln w="9525">
+            <a:solidFill>
+              <a:srgbClr val="D8E0EE"/>
+            </a:solidFill>
+          </a:ln>
+          <a:effectLst/>
+        </p:spPr>
+        <p:style>
+          <a:lnRef idx="1">
+            <a:schemeClr val="accent1"/>
+          </a:lnRef>
+          <a:fillRef idx="3">
+            <a:schemeClr val="accent1"/>
+          </a:fillRef>
+          <a:effectRef idx="2">
+            <a:schemeClr val="accent1"/>
+          </a:effectRef>
+          <a:fontRef idx="minor">
+            <a:schemeClr val="lt1"/>
+          </a:fontRef>
+        </p:style>
+        <p:txBody>
+          <a:bodyPr rtlCol="0" anchor="ctr"/>
+          <a:lstStyle/>
+          <a:p>
+            <a:pPr algn="ctr"/>
+          </a:p>
+        </p:txBody>
+      </p:sp>
+      <p:sp>
+        <p:nvSpPr>
+          <p:cNvPr id="11" name="TextBox 10"/>
+          <p:cNvSpPr txBox="1"/>
+          <p:nvPr/>
+        </p:nvSpPr>
+        <p:spPr>
+          <a:xfrm>
+            <a:off x="9052559" y="1828800"/>
+            <a:ext cx="2542032" cy="1463040"/>
+          </a:xfrm>
+          <a:prstGeom prst="rect">
+            <a:avLst/>
+          </a:prstGeom>
+          <a:noFill/>
+        </p:spPr>
+        <p:txBody>
+          <a:bodyPr wrap="square" anchor="t">
+            <a:spAutoFit/>
+          </a:bodyPr>
+          <a:lstStyle/>
+          <a:p>
+            <a:pPr algn="ctr">
+              <a:lnSpc>
+                <a:spcPct val="115000"/>
+              </a:lnSpc>
+              <a:spcAft>
+                <a:spcPts val="0"/>
+              </a:spcAft>
+            </a:pPr>
+            <a:r>
+              <a:rPr sz="3200" b="1">
+                <a:solidFill>
+                  <a:srgbClr val="2F6FEB"/>
+                </a:solidFill>
+                <a:latin typeface="微软雅黑" a:ea="微软雅黑"/>
+              </a:rPr>
+              <a:t>0</a:t>
+            </a:r>
+          </a:p>
+          <a:p>
+            <a:pPr algn="ctr">
+              <a:lnSpc>
+                <a:spcPct val="115000"/>
+              </a:lnSpc>
+              <a:spcAft>
+                <a:spcPts val="400"/>
+              </a:spcAft>
+            </a:pPr>
+            <a:r>
+              <a:rPr sz="1300" b="1">
+                <a:solidFill>
+                  <a:srgbClr val="16233D"/>
+                </a:solidFill>
+                <a:latin typeface="微软雅黑" a:ea="微软雅黑"/>
+              </a:rPr>
+              <a:t>第三方依赖</a:t>
+            </a:r>
+          </a:p>
+          <a:p>
+            <a:pPr algn="ctr">
+              <a:lnSpc>
+                <a:spcPct val="115000"/>
+              </a:lnSpc>
+              <a:spcAft>
+                <a:spcPts val="600"/>
+              </a:spcAft>
+            </a:pPr>
+            <a:r>
+              <a:rPr sz="1050" b="0">
+                <a:solidFill>
+                  <a:srgbClr val="6B7688"/>
+                </a:solidFill>
+                <a:latin typeface="微软雅黑" a:ea="微软雅黑"/>
+              </a:rPr>
+              <a:t>纯 Python 标准库 · MIT 开源</a:t>
+            </a:r>
+          </a:p>
+        </p:txBody>
+      </p:sp>
+      <p:sp>
+        <p:nvSpPr>
+          <p:cNvPr id="12" name="Rounded Rectangle 11"/>
+          <p:cNvSpPr/>
+          <p:nvPr/>
+        </p:nvSpPr>
+        <p:spPr>
+          <a:xfrm>
+            <a:off x="685800" y="3611880"/>
+            <a:ext cx="5349240" cy="2606040"/>
+          </a:xfrm>
+          <a:prstGeom prst="roundRect">
+            <a:avLst/>
+          </a:prstGeom>
+          <a:solidFill>
+            <a:srgbClr val="FFFFFF"/>
+          </a:solidFill>
+          <a:ln w="9525">
+            <a:solidFill>
+              <a:srgbClr val="D8E0EE"/>
+            </a:solidFill>
+          </a:ln>
+          <a:effectLst/>
+        </p:spPr>
+        <p:style>
+          <a:lnRef idx="1">
+            <a:schemeClr val="accent1"/>
+          </a:lnRef>
+          <a:fillRef idx="3">
+            <a:schemeClr val="accent1"/>
+          </a:fillRef>
+          <a:effectRef idx="2">
+            <a:schemeClr val="accent1"/>
+          </a:effectRef>
+          <a:fontRef idx="minor">
+            <a:schemeClr val="lt1"/>
+          </a:fontRef>
+        </p:style>
+        <p:txBody>
+          <a:bodyPr rtlCol="0" anchor="ctr"/>
+          <a:lstStyle/>
+          <a:p>
+            <a:pPr algn="ctr"/>
+          </a:p>
+        </p:txBody>
+      </p:sp>
+      <p:sp>
+        <p:nvSpPr>
+          <p:cNvPr id="13" name="Rectangle 12"/>
+          <p:cNvSpPr/>
+          <p:nvPr/>
+        </p:nvSpPr>
+        <p:spPr>
+          <a:xfrm>
+            <a:off x="685800" y="3611880"/>
+            <a:ext cx="68580" cy="2606040"/>
+          </a:xfrm>
+          <a:prstGeom prst="rect">
+            <a:avLst/>
+          </a:prstGeom>
+          <a:solidFill>
+            <a:srgbClr val="2F6FEB"/>
+          </a:solidFill>
+          <a:ln>
+            <a:noFill/>
+          </a:ln>
+          <a:effectLst/>
+        </p:spPr>
+        <p:style>
+          <a:lnRef idx="1">
+            <a:schemeClr val="accent1"/>
+          </a:lnRef>
+          <a:fillRef idx="3">
+            <a:schemeClr val="accent1"/>
+          </a:fillRef>
+          <a:effectRef idx="2">
+            <a:schemeClr val="accent1"/>
+          </a:effectRef>
+          <a:fontRef idx="minor">
+            <a:schemeClr val="lt1"/>
+          </a:fontRef>
+        </p:style>
+        <p:txBody>
+          <a:bodyPr rtlCol="0" anchor="ctr"/>
+          <a:lstStyle/>
+          <a:p>
+            <a:pPr algn="ctr"/>
+          </a:p>
+        </p:txBody>
+      </p:sp>
+      <p:sp>
+        <p:nvSpPr>
+          <p:cNvPr id="14" name="TextBox 13"/>
+          <p:cNvSpPr txBox="1"/>
+          <p:nvPr/>
+        </p:nvSpPr>
+        <p:spPr>
+          <a:xfrm>
+            <a:off x="941832" y="3776472"/>
+            <a:ext cx="4892040" cy="2331720"/>
+          </a:xfrm>
+          <a:prstGeom prst="rect">
+            <a:avLst/>
+          </a:prstGeom>
+          <a:noFill/>
+        </p:spPr>
+        <p:txBody>
+          <a:bodyPr wrap="square" anchor="t">
+            <a:spAutoFit/>
+          </a:bodyPr>
+          <a:lstStyle/>
+          <a:p>
+            <a:pPr algn="l">
+              <a:lnSpc>
+                <a:spcPct val="115000"/>
+              </a:lnSpc>
+              <a:spcAft>
+                <a:spcPts val="600"/>
+              </a:spcAft>
+            </a:pPr>
+            <a:r>
+              <a:rPr sz="1600" b="1">
+                <a:solidFill>
+                  <a:srgbClr val="16233D"/>
+                </a:solidFill>
+                <a:latin typeface="微软雅黑" a:ea="微软雅黑"/>
+              </a:rPr>
+              <a:t>真实数据下的分析输出（节选）</a:t>
+            </a:r>
+          </a:p>
+          <a:p>
+            <a:pPr algn="l">
+              <a:lnSpc>
+                <a:spcPct val="125000"/>
+              </a:lnSpc>
+              <a:spcAft>
+                <a:spcPts val="400"/>
+              </a:spcAft>
+            </a:pPr>
+            <a:r>
+              <a:rPr sz="1250" b="0">
+                <a:solidFill>
+                  <a:srgbClr val="6B7688"/>
+                </a:solidFill>
+                <a:latin typeface="微软雅黑" a:ea="微软雅黑"/>
+              </a:rPr>
+              <a:t>「保温杯」：30 个真实商品，CR5=0.90、HHI=0.170（高度集中）</a:t>
+            </a:r>
+          </a:p>
+          <a:p>
+            <a:pPr algn="l">
+              <a:lnSpc>
+                <a:spcPct val="125000"/>
+              </a:lnSpc>
+              <a:spcAft>
+                <a:spcPts val="400"/>
+              </a:spcAft>
+            </a:pPr>
+            <a:r>
+              <a:rPr sz="1250" b="0">
+                <a:solidFill>
+                  <a:srgbClr val="6B7688"/>
+                </a:solidFill>
+                <a:latin typeface="微软雅黑" a:ea="微软雅黑"/>
+              </a:rPr>
+              <a:t>建议动作 3 条，均为真实商品（JEKO / 希乐 / 炊大皇）</a:t>
+            </a:r>
+          </a:p>
+          <a:p>
+            <a:pPr algn="l">
+              <a:lnSpc>
+                <a:spcPct val="125000"/>
+              </a:lnSpc>
+              <a:spcAft>
+                <a:spcPts val="400"/>
+              </a:spcAft>
+            </a:pPr>
+            <a:r>
+              <a:rPr sz="1250" b="0">
+                <a:solidFill>
+                  <a:srgbClr val="6B7688"/>
+                </a:solidFill>
+                <a:latin typeface="微软雅黑" a:ea="微软雅黑"/>
+              </a:rPr>
+              <a:t>每条建议附证据指标，证据链校验通过</a:t>
+            </a:r>
+          </a:p>
+          <a:p>
+            <a:pPr algn="l">
+              <a:lnSpc>
+                <a:spcPct val="125000"/>
+              </a:lnSpc>
+              <a:spcAft>
+                <a:spcPts val="400"/>
+              </a:spcAft>
+            </a:pPr>
+            <a:r>
+              <a:rPr sz="1250" b="0">
+                <a:solidFill>
+                  <a:srgbClr val="6B7688"/>
+                </a:solidFill>
+                <a:latin typeface="微软雅黑" a:ea="微软雅黑"/>
+              </a:rPr>
+              <a:t>报告自动标注：环比不可用、价格未采集</a:t>
+            </a:r>
+          </a:p>
+        </p:txBody>
+      </p:sp>
+      <p:sp>
+        <p:nvSpPr>
+          <p:cNvPr id="15" name="Rounded Rectangle 14"/>
+          <p:cNvSpPr/>
+          <p:nvPr/>
+        </p:nvSpPr>
+        <p:spPr>
+          <a:xfrm>
+            <a:off x="6217920" y="3611880"/>
+            <a:ext cx="5349240" cy="2606040"/>
+          </a:xfrm>
+          <a:prstGeom prst="roundRect">
+            <a:avLst/>
+          </a:prstGeom>
+          <a:solidFill>
+            <a:srgbClr val="FFFFFF"/>
+          </a:solidFill>
+          <a:ln w="9525">
+            <a:solidFill>
+              <a:srgbClr val="D8E0EE"/>
+            </a:solidFill>
+          </a:ln>
+          <a:effectLst/>
+        </p:spPr>
+        <p:style>
+          <a:lnRef idx="1">
+            <a:schemeClr val="accent1"/>
+          </a:lnRef>
+          <a:fillRef idx="3">
+            <a:schemeClr val="accent1"/>
+          </a:fillRef>
+          <a:effectRef idx="2">
+            <a:schemeClr val="accent1"/>
+          </a:effectRef>
+          <a:fontRef idx="minor">
+            <a:schemeClr val="lt1"/>
+          </a:fontRef>
+        </p:style>
+        <p:txBody>
+          <a:bodyPr rtlCol="0" anchor="ctr"/>
+          <a:lstStyle/>
+          <a:p>
+            <a:pPr algn="ctr"/>
+          </a:p>
+        </p:txBody>
+      </p:sp>
+      <p:sp>
+        <p:nvSpPr>
+          <p:cNvPr id="16" name="Rectangle 15"/>
+          <p:cNvSpPr/>
+          <p:nvPr/>
+        </p:nvSpPr>
+        <p:spPr>
+          <a:xfrm>
+            <a:off x="6217920" y="3611880"/>
+            <a:ext cx="68580" cy="2606040"/>
           </a:xfrm>
           <a:prstGeom prst="rect">
             <a:avLst/>
@@ -5176,14 +5364,14 @@
       </p:sp>
       <p:sp>
         <p:nvSpPr>
-          <p:cNvPr id="12" name="TextBox 11"/>
+          <p:cNvPr id="17" name="TextBox 16"/>
           <p:cNvSpPr txBox="1"/>
           <p:nvPr/>
         </p:nvSpPr>
         <p:spPr>
           <a:xfrm>
-            <a:off x="8257031" y="1856232"/>
-            <a:ext cx="3108960" cy="2011680"/>
+            <a:off x="6473952" y="3776472"/>
+            <a:ext cx="4892040" cy="2331720"/>
           </a:xfrm>
           <a:prstGeom prst="rect">
             <a:avLst/>
@@ -5211,7 +5399,7 @@
                 </a:solidFill>
                 <a:latin typeface="微软雅黑" a:ea="微软雅黑"/>
               </a:rPr>
-              <a:t>商业模式</a:t>
+              <a:t>两轮采集中发现并修复的真实问题</a:t>
             </a:r>
           </a:p>
           <a:p>
@@ -5230,7 +5418,7 @@
                 </a:solidFill>
                 <a:latin typeface="微软雅黑" a:ea="微软雅黑"/>
               </a:rPr>
-              <a:t>SaaS 订阅（按类目 / 席位）</a:t>
+              <a:t>评价数是缓存展示值，日级增量观测不到 → 新增降级口径（0.40）</a:t>
             </a:r>
           </a:p>
           <a:p>
@@ -5249,7 +5437,7 @@
                 </a:solidFill>
                 <a:latin typeface="微软雅黑" a:ea="微软雅黑"/>
               </a:rPr>
-              <a:t>单份市场机会报告按次付费</a:t>
+              <a:t>同名类目在演示/真实数据中歧义 → 解析优先真实源并支持切换</a:t>
             </a:r>
           </a:p>
           <a:p>
@@ -5268,7 +5456,7 @@
                 </a:solidFill>
                 <a:latin typeface="微软雅黑" a:ea="微软雅黑"/>
               </a:rPr>
-              <a:t>为服务商提供批量选品 API</a:t>
+              <a:t>搜「猫爬架」27 条里 26 条是无关推荐位商品 → 加相关性过滤</a:t>
             </a:r>
           </a:p>
           <a:p>
@@ -5287,221 +5475,7 @@
                 </a:solidFill>
                 <a:latin typeface="微软雅黑" a:ea="微软雅黑"/>
               </a:rPr>
-              <a:t>数据合规，可对接企业采购流程</a:t>
-            </a:r>
-          </a:p>
-        </p:txBody>
-      </p:sp>
-      <p:sp>
-        <p:nvSpPr>
-          <p:cNvPr id="13" name="Rounded Rectangle 12"/>
-          <p:cNvSpPr/>
-          <p:nvPr/>
-        </p:nvSpPr>
-        <p:spPr>
-          <a:xfrm>
-            <a:off x="685800" y="4206240"/>
-            <a:ext cx="2011680" cy="457200"/>
-          </a:xfrm>
-          <a:prstGeom prst="roundRect">
-            <a:avLst/>
-          </a:prstGeom>
-          <a:solidFill>
-            <a:srgbClr val="EAF1FF"/>
-          </a:solidFill>
-          <a:ln>
-            <a:noFill/>
-          </a:ln>
-          <a:effectLst/>
-        </p:spPr>
-        <p:style>
-          <a:lnRef idx="1">
-            <a:schemeClr val="accent1"/>
-          </a:lnRef>
-          <a:fillRef idx="3">
-            <a:schemeClr val="accent1"/>
-          </a:fillRef>
-          <a:effectRef idx="2">
-            <a:schemeClr val="accent1"/>
-          </a:effectRef>
-          <a:fontRef idx="minor">
-            <a:schemeClr val="lt1"/>
-          </a:fontRef>
-        </p:style>
-        <p:txBody>
-          <a:bodyPr rtlCol="0" anchor="ctr"/>
-          <a:lstStyle/>
-          <a:p>
-            <a:pPr algn="ctr"/>
-          </a:p>
-        </p:txBody>
-      </p:sp>
-      <p:sp>
-        <p:nvSpPr>
-          <p:cNvPr id="14" name="TextBox 13"/>
-          <p:cNvSpPr txBox="1"/>
-          <p:nvPr/>
-        </p:nvSpPr>
-        <p:spPr>
-          <a:xfrm>
-            <a:off x="777240" y="4206240"/>
-            <a:ext cx="1828800" cy="457200"/>
-          </a:xfrm>
-          <a:prstGeom prst="rect">
-            <a:avLst/>
-          </a:prstGeom>
-          <a:noFill/>
-        </p:spPr>
-        <p:txBody>
-          <a:bodyPr wrap="square" anchor="ctr">
-            <a:spAutoFit/>
-          </a:bodyPr>
-          <a:lstStyle/>
-          <a:p>
-            <a:pPr algn="ctr">
-              <a:lnSpc>
-                <a:spcPct val="115000"/>
-              </a:lnSpc>
-              <a:spcAft>
-                <a:spcPts val="600"/>
-              </a:spcAft>
-            </a:pPr>
-            <a:r>
-              <a:rPr sz="1100" b="1">
-                <a:solidFill>
-                  <a:srgbClr val="2F6FEB"/>
-                </a:solidFill>
-                <a:latin typeface="微软雅黑" a:ea="微软雅黑"/>
-              </a:rPr>
-              <a:t>已完成</a:t>
-            </a:r>
-          </a:p>
-        </p:txBody>
-      </p:sp>
-      <p:sp>
-        <p:nvSpPr>
-          <p:cNvPr id="15" name="TextBox 14"/>
-          <p:cNvSpPr txBox="1"/>
-          <p:nvPr/>
-        </p:nvSpPr>
-        <p:spPr>
-          <a:xfrm>
-            <a:off x="2880360" y="4206240"/>
-            <a:ext cx="8686800" cy="457200"/>
-          </a:xfrm>
-          <a:prstGeom prst="rect">
-            <a:avLst/>
-          </a:prstGeom>
-          <a:noFill/>
-        </p:spPr>
-        <p:txBody>
-          <a:bodyPr wrap="square" anchor="ctr">
-            <a:spAutoFit/>
-          </a:bodyPr>
-          <a:lstStyle/>
-          <a:p>
-            <a:pPr algn="l">
-              <a:lnSpc>
-                <a:spcPct val="115000"/>
-              </a:lnSpc>
-              <a:spcAft>
-                <a:spcPts val="600"/>
-              </a:spcAft>
-            </a:pPr>
-            <a:r>
-              <a:rPr sz="1150" b="0">
-                <a:solidFill>
-                  <a:srgbClr val="6B7688"/>
-                </a:solidFill>
-                <a:latin typeface="微软雅黑" a:ea="微软雅黑"/>
-              </a:rPr>
-              <a:t>真实公开数据采集 + 指标 + AI 建议 + 看板全链路跑通</a:t>
-            </a:r>
-          </a:p>
-        </p:txBody>
-      </p:sp>
-      <p:sp>
-        <p:nvSpPr>
-          <p:cNvPr id="16" name="Rounded Rectangle 15"/>
-          <p:cNvSpPr/>
-          <p:nvPr/>
-        </p:nvSpPr>
-        <p:spPr>
-          <a:xfrm>
-            <a:off x="685800" y="4754879"/>
-            <a:ext cx="2011680" cy="457200"/>
-          </a:xfrm>
-          <a:prstGeom prst="roundRect">
-            <a:avLst/>
-          </a:prstGeom>
-          <a:solidFill>
-            <a:srgbClr val="EAF1FF"/>
-          </a:solidFill>
-          <a:ln>
-            <a:noFill/>
-          </a:ln>
-          <a:effectLst/>
-        </p:spPr>
-        <p:style>
-          <a:lnRef idx="1">
-            <a:schemeClr val="accent1"/>
-          </a:lnRef>
-          <a:fillRef idx="3">
-            <a:schemeClr val="accent1"/>
-          </a:fillRef>
-          <a:effectRef idx="2">
-            <a:schemeClr val="accent1"/>
-          </a:effectRef>
-          <a:fontRef idx="minor">
-            <a:schemeClr val="lt1"/>
-          </a:fontRef>
-        </p:style>
-        <p:txBody>
-          <a:bodyPr rtlCol="0" anchor="ctr"/>
-          <a:lstStyle/>
-          <a:p>
-            <a:pPr algn="ctr"/>
-          </a:p>
-        </p:txBody>
-      </p:sp>
-      <p:sp>
-        <p:nvSpPr>
-          <p:cNvPr id="17" name="TextBox 16"/>
-          <p:cNvSpPr txBox="1"/>
-          <p:nvPr/>
-        </p:nvSpPr>
-        <p:spPr>
-          <a:xfrm>
-            <a:off x="777240" y="4754879"/>
-            <a:ext cx="1828800" cy="457200"/>
-          </a:xfrm>
-          <a:prstGeom prst="rect">
-            <a:avLst/>
-          </a:prstGeom>
-          <a:noFill/>
-        </p:spPr>
-        <p:txBody>
-          <a:bodyPr wrap="square" anchor="ctr">
-            <a:spAutoFit/>
-          </a:bodyPr>
-          <a:lstStyle/>
-          <a:p>
-            <a:pPr algn="ctr">
-              <a:lnSpc>
-                <a:spcPct val="115000"/>
-              </a:lnSpc>
-              <a:spcAft>
-                <a:spcPts val="600"/>
-              </a:spcAft>
-            </a:pPr>
-            <a:r>
-              <a:rPr sz="1100" b="1">
-                <a:solidFill>
-                  <a:srgbClr val="2F6FEB"/>
-                </a:solidFill>
-                <a:latin typeface="微软雅黑" a:ea="微软雅黑"/>
-              </a:rPr>
-              <a:t>下一步（短期）</a:t>
+              <a:t>官方 API 返回滚动销量 → 不能当累计值相减 → 新增独立口径</a:t>
             </a:r>
           </a:p>
         </p:txBody>
@@ -5509,304 +5483,6 @@
       <p:sp>
         <p:nvSpPr>
           <p:cNvPr id="18" name="TextBox 17"/>
-          <p:cNvSpPr txBox="1"/>
-          <p:nvPr/>
-        </p:nvSpPr>
-        <p:spPr>
-          <a:xfrm>
-            <a:off x="2880360" y="4754879"/>
-            <a:ext cx="8686800" cy="457200"/>
-          </a:xfrm>
-          <a:prstGeom prst="rect">
-            <a:avLst/>
-          </a:prstGeom>
-          <a:noFill/>
-        </p:spPr>
-        <p:txBody>
-          <a:bodyPr wrap="square" anchor="ctr">
-            <a:spAutoFit/>
-          </a:bodyPr>
-          <a:lstStyle/>
-          <a:p>
-            <a:pPr algn="l">
-              <a:lnSpc>
-                <a:spcPct val="115000"/>
-              </a:lnSpc>
-              <a:spcAft>
-                <a:spcPts val="600"/>
-              </a:spcAft>
-            </a:pPr>
-            <a:r>
-              <a:rPr sz="1150" b="0">
-                <a:solidFill>
-                  <a:srgbClr val="6B7688"/>
-                </a:solidFill>
-                <a:latin typeface="微软雅黑" a:ea="微软雅黑"/>
-              </a:rPr>
-              <a:t>启用官方 API 补真实销量与价格；支持用户粘贴页面 / 浏览器书签采集长尾站点</a:t>
-            </a:r>
-          </a:p>
-        </p:txBody>
-      </p:sp>
-      <p:sp>
-        <p:nvSpPr>
-          <p:cNvPr id="19" name="Rounded Rectangle 18"/>
-          <p:cNvSpPr/>
-          <p:nvPr/>
-        </p:nvSpPr>
-        <p:spPr>
-          <a:xfrm>
-            <a:off x="685800" y="5303520"/>
-            <a:ext cx="2011680" cy="457200"/>
-          </a:xfrm>
-          <a:prstGeom prst="roundRect">
-            <a:avLst/>
-          </a:prstGeom>
-          <a:solidFill>
-            <a:srgbClr val="EAF1FF"/>
-          </a:solidFill>
-          <a:ln>
-            <a:noFill/>
-          </a:ln>
-          <a:effectLst/>
-        </p:spPr>
-        <p:style>
-          <a:lnRef idx="1">
-            <a:schemeClr val="accent1"/>
-          </a:lnRef>
-          <a:fillRef idx="3">
-            <a:schemeClr val="accent1"/>
-          </a:fillRef>
-          <a:effectRef idx="2">
-            <a:schemeClr val="accent1"/>
-          </a:effectRef>
-          <a:fontRef idx="minor">
-            <a:schemeClr val="lt1"/>
-          </a:fontRef>
-        </p:style>
-        <p:txBody>
-          <a:bodyPr rtlCol="0" anchor="ctr"/>
-          <a:lstStyle/>
-          <a:p>
-            <a:pPr algn="ctr"/>
-          </a:p>
-        </p:txBody>
-      </p:sp>
-      <p:sp>
-        <p:nvSpPr>
-          <p:cNvPr id="20" name="TextBox 19"/>
-          <p:cNvSpPr txBox="1"/>
-          <p:nvPr/>
-        </p:nvSpPr>
-        <p:spPr>
-          <a:xfrm>
-            <a:off x="777240" y="5303520"/>
-            <a:ext cx="1828800" cy="457200"/>
-          </a:xfrm>
-          <a:prstGeom prst="rect">
-            <a:avLst/>
-          </a:prstGeom>
-          <a:noFill/>
-        </p:spPr>
-        <p:txBody>
-          <a:bodyPr wrap="square" anchor="ctr">
-            <a:spAutoFit/>
-          </a:bodyPr>
-          <a:lstStyle/>
-          <a:p>
-            <a:pPr algn="ctr">
-              <a:lnSpc>
-                <a:spcPct val="115000"/>
-              </a:lnSpc>
-              <a:spcAft>
-                <a:spcPts val="600"/>
-              </a:spcAft>
-            </a:pPr>
-            <a:r>
-              <a:rPr sz="1100" b="1">
-                <a:solidFill>
-                  <a:srgbClr val="2F6FEB"/>
-                </a:solidFill>
-                <a:latin typeface="微软雅黑" a:ea="微软雅黑"/>
-              </a:rPr>
-              <a:t>下一步（中期）</a:t>
-            </a:r>
-          </a:p>
-        </p:txBody>
-      </p:sp>
-      <p:sp>
-        <p:nvSpPr>
-          <p:cNvPr id="21" name="TextBox 20"/>
-          <p:cNvSpPr txBox="1"/>
-          <p:nvPr/>
-        </p:nvSpPr>
-        <p:spPr>
-          <a:xfrm>
-            <a:off x="2880360" y="5303520"/>
-            <a:ext cx="8686800" cy="457200"/>
-          </a:xfrm>
-          <a:prstGeom prst="rect">
-            <a:avLst/>
-          </a:prstGeom>
-          <a:noFill/>
-        </p:spPr>
-        <p:txBody>
-          <a:bodyPr wrap="square" anchor="ctr">
-            <a:spAutoFit/>
-          </a:bodyPr>
-          <a:lstStyle/>
-          <a:p>
-            <a:pPr algn="l">
-              <a:lnSpc>
-                <a:spcPct val="115000"/>
-              </a:lnSpc>
-              <a:spcAft>
-                <a:spcPts val="600"/>
-              </a:spcAft>
-            </a:pPr>
-            <a:r>
-              <a:rPr sz="1150" b="0">
-                <a:solidFill>
-                  <a:srgbClr val="6B7688"/>
-                </a:solidFill>
-                <a:latin typeface="微软雅黑" a:ea="微软雅黑"/>
-              </a:rPr>
-              <a:t>Agent 自动生成《某品类市场机会研究报告》；对接商家后台做授权导入</a:t>
-            </a:r>
-          </a:p>
-        </p:txBody>
-      </p:sp>
-      <p:sp>
-        <p:nvSpPr>
-          <p:cNvPr id="22" name="Rounded Rectangle 21"/>
-          <p:cNvSpPr/>
-          <p:nvPr/>
-        </p:nvSpPr>
-        <p:spPr>
-          <a:xfrm>
-            <a:off x="685800" y="5852159"/>
-            <a:ext cx="2011680" cy="457200"/>
-          </a:xfrm>
-          <a:prstGeom prst="roundRect">
-            <a:avLst/>
-          </a:prstGeom>
-          <a:solidFill>
-            <a:srgbClr val="EAF1FF"/>
-          </a:solidFill>
-          <a:ln>
-            <a:noFill/>
-          </a:ln>
-          <a:effectLst/>
-        </p:spPr>
-        <p:style>
-          <a:lnRef idx="1">
-            <a:schemeClr val="accent1"/>
-          </a:lnRef>
-          <a:fillRef idx="3">
-            <a:schemeClr val="accent1"/>
-          </a:fillRef>
-          <a:effectRef idx="2">
-            <a:schemeClr val="accent1"/>
-          </a:effectRef>
-          <a:fontRef idx="minor">
-            <a:schemeClr val="lt1"/>
-          </a:fontRef>
-        </p:style>
-        <p:txBody>
-          <a:bodyPr rtlCol="0" anchor="ctr"/>
-          <a:lstStyle/>
-          <a:p>
-            <a:pPr algn="ctr"/>
-          </a:p>
-        </p:txBody>
-      </p:sp>
-      <p:sp>
-        <p:nvSpPr>
-          <p:cNvPr id="23" name="TextBox 22"/>
-          <p:cNvSpPr txBox="1"/>
-          <p:nvPr/>
-        </p:nvSpPr>
-        <p:spPr>
-          <a:xfrm>
-            <a:off x="777240" y="5852159"/>
-            <a:ext cx="1828800" cy="457200"/>
-          </a:xfrm>
-          <a:prstGeom prst="rect">
-            <a:avLst/>
-          </a:prstGeom>
-          <a:noFill/>
-        </p:spPr>
-        <p:txBody>
-          <a:bodyPr wrap="square" anchor="ctr">
-            <a:spAutoFit/>
-          </a:bodyPr>
-          <a:lstStyle/>
-          <a:p>
-            <a:pPr algn="ctr">
-              <a:lnSpc>
-                <a:spcPct val="115000"/>
-              </a:lnSpc>
-              <a:spcAft>
-                <a:spcPts val="600"/>
-              </a:spcAft>
-            </a:pPr>
-            <a:r>
-              <a:rPr sz="1100" b="1">
-                <a:solidFill>
-                  <a:srgbClr val="2F6FEB"/>
-                </a:solidFill>
-                <a:latin typeface="微软雅黑" a:ea="微软雅黑"/>
-              </a:rPr>
-              <a:t>下一步（长期）</a:t>
-            </a:r>
-          </a:p>
-        </p:txBody>
-      </p:sp>
-      <p:sp>
-        <p:nvSpPr>
-          <p:cNvPr id="24" name="TextBox 23"/>
-          <p:cNvSpPr txBox="1"/>
-          <p:nvPr/>
-        </p:nvSpPr>
-        <p:spPr>
-          <a:xfrm>
-            <a:off x="2880360" y="5852159"/>
-            <a:ext cx="8686800" cy="457200"/>
-          </a:xfrm>
-          <a:prstGeom prst="rect">
-            <a:avLst/>
-          </a:prstGeom>
-          <a:noFill/>
-        </p:spPr>
-        <p:txBody>
-          <a:bodyPr wrap="square" anchor="ctr">
-            <a:spAutoFit/>
-          </a:bodyPr>
-          <a:lstStyle/>
-          <a:p>
-            <a:pPr algn="l">
-              <a:lnSpc>
-                <a:spcPct val="115000"/>
-              </a:lnSpc>
-              <a:spcAft>
-                <a:spcPts val="600"/>
-              </a:spcAft>
-            </a:pPr>
-            <a:r>
-              <a:rPr sz="1150" b="0">
-                <a:solidFill>
-                  <a:srgbClr val="6B7688"/>
-                </a:solidFill>
-                <a:latin typeface="微软雅黑" a:ea="微软雅黑"/>
-              </a:rPr>
-              <a:t>沉淀行业级商情数据库，输出类目指数与趋势预测</a:t>
-            </a:r>
-          </a:p>
-        </p:txBody>
-      </p:sp>
-      <p:sp>
-        <p:nvSpPr>
-          <p:cNvPr id="25" name="TextBox 24"/>
           <p:cNvSpPr txBox="1"/>
           <p:nvPr/>
         </p:nvSpPr>
@@ -5848,7 +5524,7 @@
       </p:sp>
       <p:sp>
         <p:nvSpPr>
-          <p:cNvPr id="26" name="TextBox 25"/>
+          <p:cNvPr id="19" name="TextBox 18"/>
           <p:cNvSpPr txBox="1"/>
           <p:nvPr/>
         </p:nvSpPr>
@@ -5914,6 +5590,1349 @@
         </p:nvSpPr>
         <p:spPr>
           <a:xfrm>
+            <a:off x="548640" y="475488"/>
+            <a:ext cx="100584" cy="457200"/>
+          </a:xfrm>
+          <a:prstGeom prst="rect">
+            <a:avLst/>
+          </a:prstGeom>
+          <a:solidFill>
+            <a:srgbClr val="2F6FEB"/>
+          </a:solidFill>
+          <a:ln>
+            <a:noFill/>
+          </a:ln>
+          <a:effectLst/>
+        </p:spPr>
+        <p:style>
+          <a:lnRef idx="1">
+            <a:schemeClr val="accent1"/>
+          </a:lnRef>
+          <a:fillRef idx="3">
+            <a:schemeClr val="accent1"/>
+          </a:fillRef>
+          <a:effectRef idx="2">
+            <a:schemeClr val="accent1"/>
+          </a:effectRef>
+          <a:fontRef idx="minor">
+            <a:schemeClr val="lt1"/>
+          </a:fontRef>
+        </p:style>
+        <p:txBody>
+          <a:bodyPr rtlCol="0" anchor="ctr"/>
+          <a:lstStyle/>
+          <a:p>
+            <a:pPr algn="ctr"/>
+          </a:p>
+        </p:txBody>
+      </p:sp>
+      <p:sp>
+        <p:nvSpPr>
+          <p:cNvPr id="3" name="TextBox 2"/>
+          <p:cNvSpPr txBox="1"/>
+          <p:nvPr/>
+        </p:nvSpPr>
+        <p:spPr>
+          <a:xfrm>
+            <a:off x="777240" y="402336"/>
+            <a:ext cx="10881360" cy="777240"/>
+          </a:xfrm>
+          <a:prstGeom prst="rect">
+            <a:avLst/>
+          </a:prstGeom>
+          <a:noFill/>
+        </p:spPr>
+        <p:txBody>
+          <a:bodyPr wrap="square" anchor="t">
+            <a:spAutoFit/>
+          </a:bodyPr>
+          <a:lstStyle/>
+          <a:p>
+            <a:pPr algn="l">
+              <a:lnSpc>
+                <a:spcPct val="115000"/>
+              </a:lnSpc>
+              <a:spcAft>
+                <a:spcPts val="200"/>
+              </a:spcAft>
+            </a:pPr>
+            <a:r>
+              <a:rPr sz="2500" b="1">
+                <a:solidFill>
+                  <a:srgbClr val="16233D"/>
+                </a:solidFill>
+                <a:latin typeface="微软雅黑" a:ea="微软雅黑"/>
+              </a:rPr>
+              <a:t>产业价值与落地路径</a:t>
+            </a:r>
+          </a:p>
+          <a:p>
+            <a:pPr algn="l">
+              <a:lnSpc>
+                <a:spcPct val="115000"/>
+              </a:lnSpc>
+              <a:spcAft>
+                <a:spcPts val="600"/>
+              </a:spcAft>
+            </a:pPr>
+            <a:r>
+              <a:rPr sz="1250" b="0">
+                <a:solidFill>
+                  <a:srgbClr val="6B7688"/>
+                </a:solidFill>
+                <a:latin typeface="微软雅黑" a:ea="微软雅黑"/>
+              </a:rPr>
+              <a:t>从「靠经验试错」到「靠证据决策」</a:t>
+            </a:r>
+          </a:p>
+        </p:txBody>
+      </p:sp>
+      <p:sp>
+        <p:nvSpPr>
+          <p:cNvPr id="4" name="Rounded Rectangle 3"/>
+          <p:cNvSpPr/>
+          <p:nvPr/>
+        </p:nvSpPr>
+        <p:spPr>
+          <a:xfrm>
+            <a:off x="685800" y="1691640"/>
+            <a:ext cx="3474720" cy="2286000"/>
+          </a:xfrm>
+          <a:prstGeom prst="roundRect">
+            <a:avLst/>
+          </a:prstGeom>
+          <a:solidFill>
+            <a:srgbClr val="FFFFFF"/>
+          </a:solidFill>
+          <a:ln w="9525">
+            <a:solidFill>
+              <a:srgbClr val="D8E0EE"/>
+            </a:solidFill>
+          </a:ln>
+          <a:effectLst/>
+        </p:spPr>
+        <p:style>
+          <a:lnRef idx="1">
+            <a:schemeClr val="accent1"/>
+          </a:lnRef>
+          <a:fillRef idx="3">
+            <a:schemeClr val="accent1"/>
+          </a:fillRef>
+          <a:effectRef idx="2">
+            <a:schemeClr val="accent1"/>
+          </a:effectRef>
+          <a:fontRef idx="minor">
+            <a:schemeClr val="lt1"/>
+          </a:fontRef>
+        </p:style>
+        <p:txBody>
+          <a:bodyPr rtlCol="0" anchor="ctr"/>
+          <a:lstStyle/>
+          <a:p>
+            <a:pPr algn="ctr"/>
+          </a:p>
+        </p:txBody>
+      </p:sp>
+      <p:sp>
+        <p:nvSpPr>
+          <p:cNvPr id="5" name="Rectangle 4"/>
+          <p:cNvSpPr/>
+          <p:nvPr/>
+        </p:nvSpPr>
+        <p:spPr>
+          <a:xfrm>
+            <a:off x="685800" y="1691640"/>
+            <a:ext cx="68580" cy="2286000"/>
+          </a:xfrm>
+          <a:prstGeom prst="rect">
+            <a:avLst/>
+          </a:prstGeom>
+          <a:solidFill>
+            <a:srgbClr val="2F6FEB"/>
+          </a:solidFill>
+          <a:ln>
+            <a:noFill/>
+          </a:ln>
+          <a:effectLst/>
+        </p:spPr>
+        <p:style>
+          <a:lnRef idx="1">
+            <a:schemeClr val="accent1"/>
+          </a:lnRef>
+          <a:fillRef idx="3">
+            <a:schemeClr val="accent1"/>
+          </a:fillRef>
+          <a:effectRef idx="2">
+            <a:schemeClr val="accent1"/>
+          </a:effectRef>
+          <a:fontRef idx="minor">
+            <a:schemeClr val="lt1"/>
+          </a:fontRef>
+        </p:style>
+        <p:txBody>
+          <a:bodyPr rtlCol="0" anchor="ctr"/>
+          <a:lstStyle/>
+          <a:p>
+            <a:pPr algn="ctr"/>
+          </a:p>
+        </p:txBody>
+      </p:sp>
+      <p:sp>
+        <p:nvSpPr>
+          <p:cNvPr id="6" name="TextBox 5"/>
+          <p:cNvSpPr txBox="1"/>
+          <p:nvPr/>
+        </p:nvSpPr>
+        <p:spPr>
+          <a:xfrm>
+            <a:off x="941832" y="1856232"/>
+            <a:ext cx="3017520" cy="2011680"/>
+          </a:xfrm>
+          <a:prstGeom prst="rect">
+            <a:avLst/>
+          </a:prstGeom>
+          <a:noFill/>
+        </p:spPr>
+        <p:txBody>
+          <a:bodyPr wrap="square" anchor="t">
+            <a:spAutoFit/>
+          </a:bodyPr>
+          <a:lstStyle/>
+          <a:p>
+            <a:pPr algn="l">
+              <a:lnSpc>
+                <a:spcPct val="115000"/>
+              </a:lnSpc>
+              <a:spcAft>
+                <a:spcPts val="600"/>
+              </a:spcAft>
+            </a:pPr>
+            <a:r>
+              <a:rPr sz="1600" b="1">
+                <a:solidFill>
+                  <a:srgbClr val="16233D"/>
+                </a:solidFill>
+                <a:latin typeface="微软雅黑" a:ea="微软雅黑"/>
+              </a:rPr>
+              <a:t>目标用户</a:t>
+            </a:r>
+          </a:p>
+          <a:p>
+            <a:pPr algn="l">
+              <a:lnSpc>
+                <a:spcPct val="125000"/>
+              </a:lnSpc>
+              <a:spcAft>
+                <a:spcPts val="400"/>
+              </a:spcAft>
+            </a:pPr>
+            <a:r>
+              <a:rPr sz="1250" b="0">
+                <a:solidFill>
+                  <a:srgbClr val="6B7688"/>
+                </a:solidFill>
+                <a:latin typeface="微软雅黑" a:ea="微软雅黑"/>
+              </a:rPr>
+              <a:t>中小电商卖家 / 个体创业者</a:t>
+            </a:r>
+          </a:p>
+          <a:p>
+            <a:pPr algn="l">
+              <a:lnSpc>
+                <a:spcPct val="125000"/>
+              </a:lnSpc>
+              <a:spcAft>
+                <a:spcPts val="400"/>
+              </a:spcAft>
+            </a:pPr>
+            <a:r>
+              <a:rPr sz="1250" b="0">
+                <a:solidFill>
+                  <a:srgbClr val="6B7688"/>
+                </a:solidFill>
+                <a:latin typeface="微软雅黑" a:ea="微软雅黑"/>
+              </a:rPr>
+              <a:t>品牌市场部与选品团队</a:t>
+            </a:r>
+          </a:p>
+          <a:p>
+            <a:pPr algn="l">
+              <a:lnSpc>
+                <a:spcPct val="125000"/>
+              </a:lnSpc>
+              <a:spcAft>
+                <a:spcPts val="400"/>
+              </a:spcAft>
+            </a:pPr>
+            <a:r>
+              <a:rPr sz="1250" b="0">
+                <a:solidFill>
+                  <a:srgbClr val="6B7688"/>
+                </a:solidFill>
+                <a:latin typeface="微软雅黑" a:ea="微软雅黑"/>
+              </a:rPr>
+              <a:t>投研与咨询分析师</a:t>
+            </a:r>
+          </a:p>
+          <a:p>
+            <a:pPr algn="l">
+              <a:lnSpc>
+                <a:spcPct val="125000"/>
+              </a:lnSpc>
+              <a:spcAft>
+                <a:spcPts val="400"/>
+              </a:spcAft>
+            </a:pPr>
+            <a:r>
+              <a:rPr sz="1250" b="0">
+                <a:solidFill>
+                  <a:srgbClr val="6B7688"/>
+                </a:solidFill>
+                <a:latin typeface="微软雅黑" a:ea="微软雅黑"/>
+              </a:rPr>
+              <a:t>代运营与电商服务商</a:t>
+            </a:r>
+          </a:p>
+        </p:txBody>
+      </p:sp>
+      <p:sp>
+        <p:nvSpPr>
+          <p:cNvPr id="7" name="Rounded Rectangle 6"/>
+          <p:cNvSpPr/>
+          <p:nvPr/>
+        </p:nvSpPr>
+        <p:spPr>
+          <a:xfrm>
+            <a:off x="4343400" y="1691640"/>
+            <a:ext cx="3474720" cy="2286000"/>
+          </a:xfrm>
+          <a:prstGeom prst="roundRect">
+            <a:avLst/>
+          </a:prstGeom>
+          <a:solidFill>
+            <a:srgbClr val="FFFFFF"/>
+          </a:solidFill>
+          <a:ln w="9525">
+            <a:solidFill>
+              <a:srgbClr val="D8E0EE"/>
+            </a:solidFill>
+          </a:ln>
+          <a:effectLst/>
+        </p:spPr>
+        <p:style>
+          <a:lnRef idx="1">
+            <a:schemeClr val="accent1"/>
+          </a:lnRef>
+          <a:fillRef idx="3">
+            <a:schemeClr val="accent1"/>
+          </a:fillRef>
+          <a:effectRef idx="2">
+            <a:schemeClr val="accent1"/>
+          </a:effectRef>
+          <a:fontRef idx="minor">
+            <a:schemeClr val="lt1"/>
+          </a:fontRef>
+        </p:style>
+        <p:txBody>
+          <a:bodyPr rtlCol="0" anchor="ctr"/>
+          <a:lstStyle/>
+          <a:p>
+            <a:pPr algn="ctr"/>
+          </a:p>
+        </p:txBody>
+      </p:sp>
+      <p:sp>
+        <p:nvSpPr>
+          <p:cNvPr id="8" name="Rectangle 7"/>
+          <p:cNvSpPr/>
+          <p:nvPr/>
+        </p:nvSpPr>
+        <p:spPr>
+          <a:xfrm>
+            <a:off x="4343400" y="1691640"/>
+            <a:ext cx="68580" cy="2286000"/>
+          </a:xfrm>
+          <a:prstGeom prst="rect">
+            <a:avLst/>
+          </a:prstGeom>
+          <a:solidFill>
+            <a:srgbClr val="0F8F80"/>
+          </a:solidFill>
+          <a:ln>
+            <a:noFill/>
+          </a:ln>
+          <a:effectLst/>
+        </p:spPr>
+        <p:style>
+          <a:lnRef idx="1">
+            <a:schemeClr val="accent1"/>
+          </a:lnRef>
+          <a:fillRef idx="3">
+            <a:schemeClr val="accent1"/>
+          </a:fillRef>
+          <a:effectRef idx="2">
+            <a:schemeClr val="accent1"/>
+          </a:effectRef>
+          <a:fontRef idx="minor">
+            <a:schemeClr val="lt1"/>
+          </a:fontRef>
+        </p:style>
+        <p:txBody>
+          <a:bodyPr rtlCol="0" anchor="ctr"/>
+          <a:lstStyle/>
+          <a:p>
+            <a:pPr algn="ctr"/>
+          </a:p>
+        </p:txBody>
+      </p:sp>
+      <p:sp>
+        <p:nvSpPr>
+          <p:cNvPr id="9" name="TextBox 8"/>
+          <p:cNvSpPr txBox="1"/>
+          <p:nvPr/>
+        </p:nvSpPr>
+        <p:spPr>
+          <a:xfrm>
+            <a:off x="4599432" y="1856232"/>
+            <a:ext cx="3017520" cy="2011680"/>
+          </a:xfrm>
+          <a:prstGeom prst="rect">
+            <a:avLst/>
+          </a:prstGeom>
+          <a:noFill/>
+        </p:spPr>
+        <p:txBody>
+          <a:bodyPr wrap="square" anchor="t">
+            <a:spAutoFit/>
+          </a:bodyPr>
+          <a:lstStyle/>
+          <a:p>
+            <a:pPr algn="l">
+              <a:lnSpc>
+                <a:spcPct val="115000"/>
+              </a:lnSpc>
+              <a:spcAft>
+                <a:spcPts val="600"/>
+              </a:spcAft>
+            </a:pPr>
+            <a:r>
+              <a:rPr sz="1600" b="1">
+                <a:solidFill>
+                  <a:srgbClr val="16233D"/>
+                </a:solidFill>
+                <a:latin typeface="微软雅黑" a:ea="微软雅黑"/>
+              </a:rPr>
+              <a:t>直接价值</a:t>
+            </a:r>
+          </a:p>
+          <a:p>
+            <a:pPr algn="l">
+              <a:lnSpc>
+                <a:spcPct val="125000"/>
+              </a:lnSpc>
+              <a:spcAft>
+                <a:spcPts val="400"/>
+              </a:spcAft>
+            </a:pPr>
+            <a:r>
+              <a:rPr sz="1250" b="0">
+                <a:solidFill>
+                  <a:srgbClr val="6B7688"/>
+                </a:solidFill>
+                <a:latin typeface="微软雅黑" a:ea="微软雅黑"/>
+              </a:rPr>
+              <a:t>把数小时人工比价压缩到 30 秒</a:t>
+            </a:r>
+          </a:p>
+          <a:p>
+            <a:pPr algn="l">
+              <a:lnSpc>
+                <a:spcPct val="125000"/>
+              </a:lnSpc>
+              <a:spcAft>
+                <a:spcPts val="400"/>
+              </a:spcAft>
+            </a:pPr>
+            <a:r>
+              <a:rPr sz="1250" b="0">
+                <a:solidFill>
+                  <a:srgbClr val="6B7688"/>
+                </a:solidFill>
+                <a:latin typeface="微软雅黑" a:ea="微软雅黑"/>
+              </a:rPr>
+              <a:t>降低选品试错与压货风险</a:t>
+            </a:r>
+          </a:p>
+          <a:p>
+            <a:pPr algn="l">
+              <a:lnSpc>
+                <a:spcPct val="125000"/>
+              </a:lnSpc>
+              <a:spcAft>
+                <a:spcPts val="400"/>
+              </a:spcAft>
+            </a:pPr>
+            <a:r>
+              <a:rPr sz="1250" b="0">
+                <a:solidFill>
+                  <a:srgbClr val="6B7688"/>
+                </a:solidFill>
+                <a:latin typeface="微软雅黑" a:ea="微软雅黑"/>
+              </a:rPr>
+              <a:t>定价有锚点、切入有理由、风险有提示</a:t>
+            </a:r>
+          </a:p>
+          <a:p>
+            <a:pPr algn="l">
+              <a:lnSpc>
+                <a:spcPct val="125000"/>
+              </a:lnSpc>
+              <a:spcAft>
+                <a:spcPts val="400"/>
+              </a:spcAft>
+            </a:pPr>
+            <a:r>
+              <a:rPr sz="1250" b="0">
+                <a:solidFill>
+                  <a:srgbClr val="6B7688"/>
+                </a:solidFill>
+                <a:latin typeface="微软雅黑" a:ea="微软雅黑"/>
+              </a:rPr>
+              <a:t>每条结论可追溯到数据来源</a:t>
+            </a:r>
+          </a:p>
+        </p:txBody>
+      </p:sp>
+      <p:sp>
+        <p:nvSpPr>
+          <p:cNvPr id="10" name="Rounded Rectangle 9"/>
+          <p:cNvSpPr/>
+          <p:nvPr/>
+        </p:nvSpPr>
+        <p:spPr>
+          <a:xfrm>
+            <a:off x="8001000" y="1691640"/>
+            <a:ext cx="3566160" cy="2286000"/>
+          </a:xfrm>
+          <a:prstGeom prst="roundRect">
+            <a:avLst/>
+          </a:prstGeom>
+          <a:solidFill>
+            <a:srgbClr val="FFFFFF"/>
+          </a:solidFill>
+          <a:ln w="9525">
+            <a:solidFill>
+              <a:srgbClr val="D8E0EE"/>
+            </a:solidFill>
+          </a:ln>
+          <a:effectLst/>
+        </p:spPr>
+        <p:style>
+          <a:lnRef idx="1">
+            <a:schemeClr val="accent1"/>
+          </a:lnRef>
+          <a:fillRef idx="3">
+            <a:schemeClr val="accent1"/>
+          </a:fillRef>
+          <a:effectRef idx="2">
+            <a:schemeClr val="accent1"/>
+          </a:effectRef>
+          <a:fontRef idx="minor">
+            <a:schemeClr val="lt1"/>
+          </a:fontRef>
+        </p:style>
+        <p:txBody>
+          <a:bodyPr rtlCol="0" anchor="ctr"/>
+          <a:lstStyle/>
+          <a:p>
+            <a:pPr algn="ctr"/>
+          </a:p>
+        </p:txBody>
+      </p:sp>
+      <p:sp>
+        <p:nvSpPr>
+          <p:cNvPr id="11" name="Rectangle 10"/>
+          <p:cNvSpPr/>
+          <p:nvPr/>
+        </p:nvSpPr>
+        <p:spPr>
+          <a:xfrm>
+            <a:off x="8001000" y="1691640"/>
+            <a:ext cx="68580" cy="2286000"/>
+          </a:xfrm>
+          <a:prstGeom prst="rect">
+            <a:avLst/>
+          </a:prstGeom>
+          <a:solidFill>
+            <a:srgbClr val="B06608"/>
+          </a:solidFill>
+          <a:ln>
+            <a:noFill/>
+          </a:ln>
+          <a:effectLst/>
+        </p:spPr>
+        <p:style>
+          <a:lnRef idx="1">
+            <a:schemeClr val="accent1"/>
+          </a:lnRef>
+          <a:fillRef idx="3">
+            <a:schemeClr val="accent1"/>
+          </a:fillRef>
+          <a:effectRef idx="2">
+            <a:schemeClr val="accent1"/>
+          </a:effectRef>
+          <a:fontRef idx="minor">
+            <a:schemeClr val="lt1"/>
+          </a:fontRef>
+        </p:style>
+        <p:txBody>
+          <a:bodyPr rtlCol="0" anchor="ctr"/>
+          <a:lstStyle/>
+          <a:p>
+            <a:pPr algn="ctr"/>
+          </a:p>
+        </p:txBody>
+      </p:sp>
+      <p:sp>
+        <p:nvSpPr>
+          <p:cNvPr id="12" name="TextBox 11"/>
+          <p:cNvSpPr txBox="1"/>
+          <p:nvPr/>
+        </p:nvSpPr>
+        <p:spPr>
+          <a:xfrm>
+            <a:off x="8257031" y="1856232"/>
+            <a:ext cx="3108960" cy="2011680"/>
+          </a:xfrm>
+          <a:prstGeom prst="rect">
+            <a:avLst/>
+          </a:prstGeom>
+          <a:noFill/>
+        </p:spPr>
+        <p:txBody>
+          <a:bodyPr wrap="square" anchor="t">
+            <a:spAutoFit/>
+          </a:bodyPr>
+          <a:lstStyle/>
+          <a:p>
+            <a:pPr algn="l">
+              <a:lnSpc>
+                <a:spcPct val="115000"/>
+              </a:lnSpc>
+              <a:spcAft>
+                <a:spcPts val="600"/>
+              </a:spcAft>
+            </a:pPr>
+            <a:r>
+              <a:rPr sz="1600" b="1">
+                <a:solidFill>
+                  <a:srgbClr val="16233D"/>
+                </a:solidFill>
+                <a:latin typeface="微软雅黑" a:ea="微软雅黑"/>
+              </a:rPr>
+              <a:t>商业模式</a:t>
+            </a:r>
+          </a:p>
+          <a:p>
+            <a:pPr algn="l">
+              <a:lnSpc>
+                <a:spcPct val="125000"/>
+              </a:lnSpc>
+              <a:spcAft>
+                <a:spcPts val="400"/>
+              </a:spcAft>
+            </a:pPr>
+            <a:r>
+              <a:rPr sz="1250" b="0">
+                <a:solidFill>
+                  <a:srgbClr val="6B7688"/>
+                </a:solidFill>
+                <a:latin typeface="微软雅黑" a:ea="微软雅黑"/>
+              </a:rPr>
+              <a:t>SaaS 订阅（按类目 / 席位）</a:t>
+            </a:r>
+          </a:p>
+          <a:p>
+            <a:pPr algn="l">
+              <a:lnSpc>
+                <a:spcPct val="125000"/>
+              </a:lnSpc>
+              <a:spcAft>
+                <a:spcPts val="400"/>
+              </a:spcAft>
+            </a:pPr>
+            <a:r>
+              <a:rPr sz="1250" b="0">
+                <a:solidFill>
+                  <a:srgbClr val="6B7688"/>
+                </a:solidFill>
+                <a:latin typeface="微软雅黑" a:ea="微软雅黑"/>
+              </a:rPr>
+              <a:t>单份市场机会报告按次付费</a:t>
+            </a:r>
+          </a:p>
+          <a:p>
+            <a:pPr algn="l">
+              <a:lnSpc>
+                <a:spcPct val="125000"/>
+              </a:lnSpc>
+              <a:spcAft>
+                <a:spcPts val="400"/>
+              </a:spcAft>
+            </a:pPr>
+            <a:r>
+              <a:rPr sz="1250" b="0">
+                <a:solidFill>
+                  <a:srgbClr val="6B7688"/>
+                </a:solidFill>
+                <a:latin typeface="微软雅黑" a:ea="微软雅黑"/>
+              </a:rPr>
+              <a:t>为服务商提供批量选品 API</a:t>
+            </a:r>
+          </a:p>
+          <a:p>
+            <a:pPr algn="l">
+              <a:lnSpc>
+                <a:spcPct val="125000"/>
+              </a:lnSpc>
+              <a:spcAft>
+                <a:spcPts val="400"/>
+              </a:spcAft>
+            </a:pPr>
+            <a:r>
+              <a:rPr sz="1250" b="0">
+                <a:solidFill>
+                  <a:srgbClr val="6B7688"/>
+                </a:solidFill>
+                <a:latin typeface="微软雅黑" a:ea="微软雅黑"/>
+              </a:rPr>
+              <a:t>数据合规，可对接企业采购流程</a:t>
+            </a:r>
+          </a:p>
+        </p:txBody>
+      </p:sp>
+      <p:sp>
+        <p:nvSpPr>
+          <p:cNvPr id="13" name="Rounded Rectangle 12"/>
+          <p:cNvSpPr/>
+          <p:nvPr/>
+        </p:nvSpPr>
+        <p:spPr>
+          <a:xfrm>
+            <a:off x="685800" y="4206240"/>
+            <a:ext cx="2011680" cy="457200"/>
+          </a:xfrm>
+          <a:prstGeom prst="roundRect">
+            <a:avLst/>
+          </a:prstGeom>
+          <a:solidFill>
+            <a:srgbClr val="EAF1FF"/>
+          </a:solidFill>
+          <a:ln>
+            <a:noFill/>
+          </a:ln>
+          <a:effectLst/>
+        </p:spPr>
+        <p:style>
+          <a:lnRef idx="1">
+            <a:schemeClr val="accent1"/>
+          </a:lnRef>
+          <a:fillRef idx="3">
+            <a:schemeClr val="accent1"/>
+          </a:fillRef>
+          <a:effectRef idx="2">
+            <a:schemeClr val="accent1"/>
+          </a:effectRef>
+          <a:fontRef idx="minor">
+            <a:schemeClr val="lt1"/>
+          </a:fontRef>
+        </p:style>
+        <p:txBody>
+          <a:bodyPr rtlCol="0" anchor="ctr"/>
+          <a:lstStyle/>
+          <a:p>
+            <a:pPr algn="ctr"/>
+          </a:p>
+        </p:txBody>
+      </p:sp>
+      <p:sp>
+        <p:nvSpPr>
+          <p:cNvPr id="14" name="TextBox 13"/>
+          <p:cNvSpPr txBox="1"/>
+          <p:nvPr/>
+        </p:nvSpPr>
+        <p:spPr>
+          <a:xfrm>
+            <a:off x="777240" y="4206240"/>
+            <a:ext cx="1828800" cy="457200"/>
+          </a:xfrm>
+          <a:prstGeom prst="rect">
+            <a:avLst/>
+          </a:prstGeom>
+          <a:noFill/>
+        </p:spPr>
+        <p:txBody>
+          <a:bodyPr wrap="square" anchor="ctr">
+            <a:spAutoFit/>
+          </a:bodyPr>
+          <a:lstStyle/>
+          <a:p>
+            <a:pPr algn="ctr">
+              <a:lnSpc>
+                <a:spcPct val="115000"/>
+              </a:lnSpc>
+              <a:spcAft>
+                <a:spcPts val="600"/>
+              </a:spcAft>
+            </a:pPr>
+            <a:r>
+              <a:rPr sz="1100" b="1">
+                <a:solidFill>
+                  <a:srgbClr val="2F6FEB"/>
+                </a:solidFill>
+                <a:latin typeface="微软雅黑" a:ea="微软雅黑"/>
+              </a:rPr>
+              <a:t>已完成</a:t>
+            </a:r>
+          </a:p>
+        </p:txBody>
+      </p:sp>
+      <p:sp>
+        <p:nvSpPr>
+          <p:cNvPr id="15" name="TextBox 14"/>
+          <p:cNvSpPr txBox="1"/>
+          <p:nvPr/>
+        </p:nvSpPr>
+        <p:spPr>
+          <a:xfrm>
+            <a:off x="2880360" y="4206240"/>
+            <a:ext cx="8686800" cy="457200"/>
+          </a:xfrm>
+          <a:prstGeom prst="rect">
+            <a:avLst/>
+          </a:prstGeom>
+          <a:noFill/>
+        </p:spPr>
+        <p:txBody>
+          <a:bodyPr wrap="square" anchor="ctr">
+            <a:spAutoFit/>
+          </a:bodyPr>
+          <a:lstStyle/>
+          <a:p>
+            <a:pPr algn="l">
+              <a:lnSpc>
+                <a:spcPct val="115000"/>
+              </a:lnSpc>
+              <a:spcAft>
+                <a:spcPts val="600"/>
+              </a:spcAft>
+            </a:pPr>
+            <a:r>
+              <a:rPr sz="1150" b="0">
+                <a:solidFill>
+                  <a:srgbClr val="6B7688"/>
+                </a:solidFill>
+                <a:latin typeface="微软雅黑" a:ea="微软雅黑"/>
+              </a:rPr>
+              <a:t>真实公开数据采集 + 指标 + AI 建议 + 看板全链路跑通</a:t>
+            </a:r>
+          </a:p>
+        </p:txBody>
+      </p:sp>
+      <p:sp>
+        <p:nvSpPr>
+          <p:cNvPr id="16" name="Rounded Rectangle 15"/>
+          <p:cNvSpPr/>
+          <p:nvPr/>
+        </p:nvSpPr>
+        <p:spPr>
+          <a:xfrm>
+            <a:off x="685800" y="4754879"/>
+            <a:ext cx="2011680" cy="457200"/>
+          </a:xfrm>
+          <a:prstGeom prst="roundRect">
+            <a:avLst/>
+          </a:prstGeom>
+          <a:solidFill>
+            <a:srgbClr val="EAF1FF"/>
+          </a:solidFill>
+          <a:ln>
+            <a:noFill/>
+          </a:ln>
+          <a:effectLst/>
+        </p:spPr>
+        <p:style>
+          <a:lnRef idx="1">
+            <a:schemeClr val="accent1"/>
+          </a:lnRef>
+          <a:fillRef idx="3">
+            <a:schemeClr val="accent1"/>
+          </a:fillRef>
+          <a:effectRef idx="2">
+            <a:schemeClr val="accent1"/>
+          </a:effectRef>
+          <a:fontRef idx="minor">
+            <a:schemeClr val="lt1"/>
+          </a:fontRef>
+        </p:style>
+        <p:txBody>
+          <a:bodyPr rtlCol="0" anchor="ctr"/>
+          <a:lstStyle/>
+          <a:p>
+            <a:pPr algn="ctr"/>
+          </a:p>
+        </p:txBody>
+      </p:sp>
+      <p:sp>
+        <p:nvSpPr>
+          <p:cNvPr id="17" name="TextBox 16"/>
+          <p:cNvSpPr txBox="1"/>
+          <p:nvPr/>
+        </p:nvSpPr>
+        <p:spPr>
+          <a:xfrm>
+            <a:off x="777240" y="4754879"/>
+            <a:ext cx="1828800" cy="457200"/>
+          </a:xfrm>
+          <a:prstGeom prst="rect">
+            <a:avLst/>
+          </a:prstGeom>
+          <a:noFill/>
+        </p:spPr>
+        <p:txBody>
+          <a:bodyPr wrap="square" anchor="ctr">
+            <a:spAutoFit/>
+          </a:bodyPr>
+          <a:lstStyle/>
+          <a:p>
+            <a:pPr algn="ctr">
+              <a:lnSpc>
+                <a:spcPct val="115000"/>
+              </a:lnSpc>
+              <a:spcAft>
+                <a:spcPts val="600"/>
+              </a:spcAft>
+            </a:pPr>
+            <a:r>
+              <a:rPr sz="1100" b="1">
+                <a:solidFill>
+                  <a:srgbClr val="2F6FEB"/>
+                </a:solidFill>
+                <a:latin typeface="微软雅黑" a:ea="微软雅黑"/>
+              </a:rPr>
+              <a:t>下一步（短期）</a:t>
+            </a:r>
+          </a:p>
+        </p:txBody>
+      </p:sp>
+      <p:sp>
+        <p:nvSpPr>
+          <p:cNvPr id="18" name="TextBox 17"/>
+          <p:cNvSpPr txBox="1"/>
+          <p:nvPr/>
+        </p:nvSpPr>
+        <p:spPr>
+          <a:xfrm>
+            <a:off x="2880360" y="4754879"/>
+            <a:ext cx="8686800" cy="457200"/>
+          </a:xfrm>
+          <a:prstGeom prst="rect">
+            <a:avLst/>
+          </a:prstGeom>
+          <a:noFill/>
+        </p:spPr>
+        <p:txBody>
+          <a:bodyPr wrap="square" anchor="ctr">
+            <a:spAutoFit/>
+          </a:bodyPr>
+          <a:lstStyle/>
+          <a:p>
+            <a:pPr algn="l">
+              <a:lnSpc>
+                <a:spcPct val="115000"/>
+              </a:lnSpc>
+              <a:spcAft>
+                <a:spcPts val="600"/>
+              </a:spcAft>
+            </a:pPr>
+            <a:r>
+              <a:rPr sz="1150" b="0">
+                <a:solidFill>
+                  <a:srgbClr val="6B7688"/>
+                </a:solidFill>
+                <a:latin typeface="微软雅黑" a:ea="微软雅黑"/>
+              </a:rPr>
+              <a:t>启用官方 API 补真实销量与价格；支持用户粘贴页面 / 浏览器书签采集长尾站点</a:t>
+            </a:r>
+          </a:p>
+        </p:txBody>
+      </p:sp>
+      <p:sp>
+        <p:nvSpPr>
+          <p:cNvPr id="19" name="Rounded Rectangle 18"/>
+          <p:cNvSpPr/>
+          <p:nvPr/>
+        </p:nvSpPr>
+        <p:spPr>
+          <a:xfrm>
+            <a:off x="685800" y="5303520"/>
+            <a:ext cx="2011680" cy="457200"/>
+          </a:xfrm>
+          <a:prstGeom prst="roundRect">
+            <a:avLst/>
+          </a:prstGeom>
+          <a:solidFill>
+            <a:srgbClr val="EAF1FF"/>
+          </a:solidFill>
+          <a:ln>
+            <a:noFill/>
+          </a:ln>
+          <a:effectLst/>
+        </p:spPr>
+        <p:style>
+          <a:lnRef idx="1">
+            <a:schemeClr val="accent1"/>
+          </a:lnRef>
+          <a:fillRef idx="3">
+            <a:schemeClr val="accent1"/>
+          </a:fillRef>
+          <a:effectRef idx="2">
+            <a:schemeClr val="accent1"/>
+          </a:effectRef>
+          <a:fontRef idx="minor">
+            <a:schemeClr val="lt1"/>
+          </a:fontRef>
+        </p:style>
+        <p:txBody>
+          <a:bodyPr rtlCol="0" anchor="ctr"/>
+          <a:lstStyle/>
+          <a:p>
+            <a:pPr algn="ctr"/>
+          </a:p>
+        </p:txBody>
+      </p:sp>
+      <p:sp>
+        <p:nvSpPr>
+          <p:cNvPr id="20" name="TextBox 19"/>
+          <p:cNvSpPr txBox="1"/>
+          <p:nvPr/>
+        </p:nvSpPr>
+        <p:spPr>
+          <a:xfrm>
+            <a:off x="777240" y="5303520"/>
+            <a:ext cx="1828800" cy="457200"/>
+          </a:xfrm>
+          <a:prstGeom prst="rect">
+            <a:avLst/>
+          </a:prstGeom>
+          <a:noFill/>
+        </p:spPr>
+        <p:txBody>
+          <a:bodyPr wrap="square" anchor="ctr">
+            <a:spAutoFit/>
+          </a:bodyPr>
+          <a:lstStyle/>
+          <a:p>
+            <a:pPr algn="ctr">
+              <a:lnSpc>
+                <a:spcPct val="115000"/>
+              </a:lnSpc>
+              <a:spcAft>
+                <a:spcPts val="600"/>
+              </a:spcAft>
+            </a:pPr>
+            <a:r>
+              <a:rPr sz="1100" b="1">
+                <a:solidFill>
+                  <a:srgbClr val="2F6FEB"/>
+                </a:solidFill>
+                <a:latin typeface="微软雅黑" a:ea="微软雅黑"/>
+              </a:rPr>
+              <a:t>下一步（中期）</a:t>
+            </a:r>
+          </a:p>
+        </p:txBody>
+      </p:sp>
+      <p:sp>
+        <p:nvSpPr>
+          <p:cNvPr id="21" name="TextBox 20"/>
+          <p:cNvSpPr txBox="1"/>
+          <p:nvPr/>
+        </p:nvSpPr>
+        <p:spPr>
+          <a:xfrm>
+            <a:off x="2880360" y="5303520"/>
+            <a:ext cx="8686800" cy="457200"/>
+          </a:xfrm>
+          <a:prstGeom prst="rect">
+            <a:avLst/>
+          </a:prstGeom>
+          <a:noFill/>
+        </p:spPr>
+        <p:txBody>
+          <a:bodyPr wrap="square" anchor="ctr">
+            <a:spAutoFit/>
+          </a:bodyPr>
+          <a:lstStyle/>
+          <a:p>
+            <a:pPr algn="l">
+              <a:lnSpc>
+                <a:spcPct val="115000"/>
+              </a:lnSpc>
+              <a:spcAft>
+                <a:spcPts val="600"/>
+              </a:spcAft>
+            </a:pPr>
+            <a:r>
+              <a:rPr sz="1150" b="0">
+                <a:solidFill>
+                  <a:srgbClr val="6B7688"/>
+                </a:solidFill>
+                <a:latin typeface="微软雅黑" a:ea="微软雅黑"/>
+              </a:rPr>
+              <a:t>Agent 自动生成《某品类市场机会研究报告》；对接商家后台做授权导入</a:t>
+            </a:r>
+          </a:p>
+        </p:txBody>
+      </p:sp>
+      <p:sp>
+        <p:nvSpPr>
+          <p:cNvPr id="22" name="Rounded Rectangle 21"/>
+          <p:cNvSpPr/>
+          <p:nvPr/>
+        </p:nvSpPr>
+        <p:spPr>
+          <a:xfrm>
+            <a:off x="685800" y="5852159"/>
+            <a:ext cx="2011680" cy="457200"/>
+          </a:xfrm>
+          <a:prstGeom prst="roundRect">
+            <a:avLst/>
+          </a:prstGeom>
+          <a:solidFill>
+            <a:srgbClr val="EAF1FF"/>
+          </a:solidFill>
+          <a:ln>
+            <a:noFill/>
+          </a:ln>
+          <a:effectLst/>
+        </p:spPr>
+        <p:style>
+          <a:lnRef idx="1">
+            <a:schemeClr val="accent1"/>
+          </a:lnRef>
+          <a:fillRef idx="3">
+            <a:schemeClr val="accent1"/>
+          </a:fillRef>
+          <a:effectRef idx="2">
+            <a:schemeClr val="accent1"/>
+          </a:effectRef>
+          <a:fontRef idx="minor">
+            <a:schemeClr val="lt1"/>
+          </a:fontRef>
+        </p:style>
+        <p:txBody>
+          <a:bodyPr rtlCol="0" anchor="ctr"/>
+          <a:lstStyle/>
+          <a:p>
+            <a:pPr algn="ctr"/>
+          </a:p>
+        </p:txBody>
+      </p:sp>
+      <p:sp>
+        <p:nvSpPr>
+          <p:cNvPr id="23" name="TextBox 22"/>
+          <p:cNvSpPr txBox="1"/>
+          <p:nvPr/>
+        </p:nvSpPr>
+        <p:spPr>
+          <a:xfrm>
+            <a:off x="777240" y="5852159"/>
+            <a:ext cx="1828800" cy="457200"/>
+          </a:xfrm>
+          <a:prstGeom prst="rect">
+            <a:avLst/>
+          </a:prstGeom>
+          <a:noFill/>
+        </p:spPr>
+        <p:txBody>
+          <a:bodyPr wrap="square" anchor="ctr">
+            <a:spAutoFit/>
+          </a:bodyPr>
+          <a:lstStyle/>
+          <a:p>
+            <a:pPr algn="ctr">
+              <a:lnSpc>
+                <a:spcPct val="115000"/>
+              </a:lnSpc>
+              <a:spcAft>
+                <a:spcPts val="600"/>
+              </a:spcAft>
+            </a:pPr>
+            <a:r>
+              <a:rPr sz="1100" b="1">
+                <a:solidFill>
+                  <a:srgbClr val="2F6FEB"/>
+                </a:solidFill>
+                <a:latin typeface="微软雅黑" a:ea="微软雅黑"/>
+              </a:rPr>
+              <a:t>下一步（长期）</a:t>
+            </a:r>
+          </a:p>
+        </p:txBody>
+      </p:sp>
+      <p:sp>
+        <p:nvSpPr>
+          <p:cNvPr id="24" name="TextBox 23"/>
+          <p:cNvSpPr txBox="1"/>
+          <p:nvPr/>
+        </p:nvSpPr>
+        <p:spPr>
+          <a:xfrm>
+            <a:off x="2880360" y="5852159"/>
+            <a:ext cx="8686800" cy="457200"/>
+          </a:xfrm>
+          <a:prstGeom prst="rect">
+            <a:avLst/>
+          </a:prstGeom>
+          <a:noFill/>
+        </p:spPr>
+        <p:txBody>
+          <a:bodyPr wrap="square" anchor="ctr">
+            <a:spAutoFit/>
+          </a:bodyPr>
+          <a:lstStyle/>
+          <a:p>
+            <a:pPr algn="l">
+              <a:lnSpc>
+                <a:spcPct val="115000"/>
+              </a:lnSpc>
+              <a:spcAft>
+                <a:spcPts val="600"/>
+              </a:spcAft>
+            </a:pPr>
+            <a:r>
+              <a:rPr sz="1150" b="0">
+                <a:solidFill>
+                  <a:srgbClr val="6B7688"/>
+                </a:solidFill>
+                <a:latin typeface="微软雅黑" a:ea="微软雅黑"/>
+              </a:rPr>
+              <a:t>沉淀行业级商情数据库，输出类目指数与趋势预测</a:t>
+            </a:r>
+          </a:p>
+        </p:txBody>
+      </p:sp>
+      <p:sp>
+        <p:nvSpPr>
+          <p:cNvPr id="25" name="TextBox 24"/>
+          <p:cNvSpPr txBox="1"/>
+          <p:nvPr/>
+        </p:nvSpPr>
+        <p:spPr>
+          <a:xfrm>
+            <a:off x="548640" y="6355080"/>
+            <a:ext cx="7315200" cy="320040"/>
+          </a:xfrm>
+          <a:prstGeom prst="rect">
+            <a:avLst/>
+          </a:prstGeom>
+          <a:noFill/>
+        </p:spPr>
+        <p:txBody>
+          <a:bodyPr wrap="square" anchor="t">
+            <a:spAutoFit/>
+          </a:bodyPr>
+          <a:lstStyle/>
+          <a:p>
+            <a:pPr algn="l">
+              <a:lnSpc>
+                <a:spcPct val="115000"/>
+              </a:lnSpc>
+              <a:spcAft>
+                <a:spcPts val="600"/>
+              </a:spcAft>
+            </a:pPr>
+            <a:r>
+              <a:rPr sz="950" b="0">
+                <a:solidFill>
+                  <a:srgbClr val="6B7688"/>
+                </a:solidFill>
+                <a:latin typeface="微软雅黑" a:ea="微软雅黑"/>
+              </a:rPr>
+              <a:t>商情罗盘 MarketCompass · AI 应用大赛（产业应用 · 数据分析）</a:t>
+            </a:r>
+          </a:p>
+        </p:txBody>
+      </p:sp>
+      <p:sp>
+        <p:nvSpPr>
+          <p:cNvPr id="26" name="TextBox 25"/>
+          <p:cNvSpPr txBox="1"/>
+          <p:nvPr/>
+        </p:nvSpPr>
+        <p:spPr>
+          <a:xfrm>
+            <a:off x="11155680" y="6355080"/>
+            <a:ext cx="548640" cy="320040"/>
+          </a:xfrm>
+          <a:prstGeom prst="rect">
+            <a:avLst/>
+          </a:prstGeom>
+          <a:noFill/>
+        </p:spPr>
+        <p:txBody>
+          <a:bodyPr wrap="square" anchor="t">
+            <a:spAutoFit/>
+          </a:bodyPr>
+          <a:lstStyle/>
+          <a:p>
+            <a:pPr algn="r">
+              <a:lnSpc>
+                <a:spcPct val="115000"/>
+              </a:lnSpc>
+              <a:spcAft>
+                <a:spcPts val="600"/>
+              </a:spcAft>
+            </a:pPr>
+            <a:r>
+              <a:rPr sz="950" b="0">
+                <a:solidFill>
+                  <a:srgbClr val="6B7688"/>
+                </a:solidFill>
+                <a:latin typeface="微软雅黑" a:ea="微软雅黑"/>
+              </a:rPr>
+              <a:t>12</a:t>
+            </a:r>
+          </a:p>
+        </p:txBody>
+      </p:sp>
+    </p:spTree>
+  </p:cSld>
+  <p:clrMapOvr>
+    <a:masterClrMapping/>
+  </p:clrMapOvr>
+</p:sld>
+</file>
+
+<file path=ppt/slides/slide13.xml><?xml version="1.0" encoding="utf-8"?>
+<p:sld xmlns:a="http://schemas.openxmlformats.org/drawingml/2006/main" xmlns:p="http://schemas.openxmlformats.org/presentationml/2006/main" xmlns:r="http://schemas.openxmlformats.org/officeDocument/2006/relationships">
+  <p:cSld>
+    <p:spTree>
+      <p:nvGrpSpPr>
+        <p:cNvPr id="1" name=""/>
+        <p:cNvGrpSpPr/>
+        <p:nvPr/>
+      </p:nvGrpSpPr>
+      <p:grpSpPr/>
+      <p:sp>
+        <p:nvSpPr>
+          <p:cNvPr id="2" name="Rectangle 1"/>
+          <p:cNvSpPr/>
+          <p:nvPr/>
+        </p:nvSpPr>
+        <p:spPr>
+          <a:xfrm>
             <a:off x="0" y="0"/>
             <a:ext cx="12191695" cy="6858000"/>
           </a:xfrm>
@@ -6136,7 +7155,7 @@
                 </a:solidFill>
                 <a:latin typeface="微软雅黑" a:ea="微软雅黑"/>
               </a:rPr>
-              <a:t>80 个真实商品已入库   ·   20,082 条日指标   ·   53 项测试通过   ·   0 第三方依赖</a:t>
+              <a:t>80 个真实商品已入库   ·   20,082 条日指标   ·   62 项测试通过   ·   0 第三方依赖</a:t>
             </a:r>
           </a:p>
           <a:p>
@@ -11591,6 +12610,1373 @@
 </file>
 
 <file path=ppt/slides/slide7.xml><?xml version="1.0" encoding="utf-8"?>
+<p:sld xmlns:a="http://schemas.openxmlformats.org/drawingml/2006/main" xmlns:p="http://schemas.openxmlformats.org/presentationml/2006/main" xmlns:r="http://schemas.openxmlformats.org/officeDocument/2006/relationships">
+  <p:cSld>
+    <p:spTree>
+      <p:nvGrpSpPr>
+        <p:cNvPr id="1" name=""/>
+        <p:cNvGrpSpPr/>
+        <p:nvPr/>
+      </p:nvGrpSpPr>
+      <p:grpSpPr/>
+      <p:sp>
+        <p:nvSpPr>
+          <p:cNvPr id="2" name="Rectangle 1"/>
+          <p:cNvSpPr/>
+          <p:nvPr/>
+        </p:nvSpPr>
+        <p:spPr>
+          <a:xfrm>
+            <a:off x="548640" y="475488"/>
+            <a:ext cx="100584" cy="457200"/>
+          </a:xfrm>
+          <a:prstGeom prst="rect">
+            <a:avLst/>
+          </a:prstGeom>
+          <a:solidFill>
+            <a:srgbClr val="2F6FEB"/>
+          </a:solidFill>
+          <a:ln>
+            <a:noFill/>
+          </a:ln>
+          <a:effectLst/>
+        </p:spPr>
+        <p:style>
+          <a:lnRef idx="1">
+            <a:schemeClr val="accent1"/>
+          </a:lnRef>
+          <a:fillRef idx="3">
+            <a:schemeClr val="accent1"/>
+          </a:fillRef>
+          <a:effectRef idx="2">
+            <a:schemeClr val="accent1"/>
+          </a:effectRef>
+          <a:fontRef idx="minor">
+            <a:schemeClr val="lt1"/>
+          </a:fontRef>
+        </p:style>
+        <p:txBody>
+          <a:bodyPr rtlCol="0" anchor="ctr"/>
+          <a:lstStyle/>
+          <a:p>
+            <a:pPr algn="ctr"/>
+          </a:p>
+        </p:txBody>
+      </p:sp>
+      <p:sp>
+        <p:nvSpPr>
+          <p:cNvPr id="3" name="TextBox 2"/>
+          <p:cNvSpPr txBox="1"/>
+          <p:nvPr/>
+        </p:nvSpPr>
+        <p:spPr>
+          <a:xfrm>
+            <a:off x="777240" y="402336"/>
+            <a:ext cx="10881360" cy="777240"/>
+          </a:xfrm>
+          <a:prstGeom prst="rect">
+            <a:avLst/>
+          </a:prstGeom>
+          <a:noFill/>
+        </p:spPr>
+        <p:txBody>
+          <a:bodyPr wrap="square" anchor="t">
+            <a:spAutoFit/>
+          </a:bodyPr>
+          <a:lstStyle/>
+          <a:p>
+            <a:pPr algn="l">
+              <a:lnSpc>
+                <a:spcPct val="115000"/>
+              </a:lnSpc>
+              <a:spcAft>
+                <a:spcPts val="200"/>
+              </a:spcAft>
+            </a:pPr>
+            <a:r>
+              <a:rPr sz="2500" b="1">
+                <a:solidFill>
+                  <a:srgbClr val="16233D"/>
+                </a:solidFill>
+                <a:latin typeface="微软雅黑" a:ea="微软雅黑"/>
+              </a:rPr>
+              <a:t>AI 追问：模型作答，数字必须能溯源</a:t>
+            </a:r>
+          </a:p>
+          <a:p>
+            <a:pPr algn="l">
+              <a:lnSpc>
+                <a:spcPct val="115000"/>
+              </a:lnSpc>
+              <a:spcAft>
+                <a:spcPts val="600"/>
+              </a:spcAft>
+            </a:pPr>
+            <a:r>
+              <a:rPr sz="1250" b="0">
+                <a:solidFill>
+                  <a:srgbClr val="6B7688"/>
+                </a:solidFill>
+                <a:latin typeface="微软雅黑" a:ea="微软雅黑"/>
+              </a:rPr>
+              <a:t>追问是模板原理上做不到的事 —— 让模型答，但每个数字事后都要回指标层核对</a:t>
+            </a:r>
+          </a:p>
+        </p:txBody>
+      </p:sp>
+      <p:sp>
+        <p:nvSpPr>
+          <p:cNvPr id="4" name="Rounded Rectangle 3"/>
+          <p:cNvSpPr/>
+          <p:nvPr/>
+        </p:nvSpPr>
+        <p:spPr>
+          <a:xfrm>
+            <a:off x="685800" y="1600200"/>
+            <a:ext cx="2542032" cy="1234440"/>
+          </a:xfrm>
+          <a:prstGeom prst="roundRect">
+            <a:avLst/>
+          </a:prstGeom>
+          <a:solidFill>
+            <a:srgbClr val="FFFFFF"/>
+          </a:solidFill>
+          <a:ln w="9525">
+            <a:solidFill>
+              <a:srgbClr val="D8E0EE"/>
+            </a:solidFill>
+          </a:ln>
+          <a:effectLst/>
+        </p:spPr>
+        <p:style>
+          <a:lnRef idx="1">
+            <a:schemeClr val="accent1"/>
+          </a:lnRef>
+          <a:fillRef idx="3">
+            <a:schemeClr val="accent1"/>
+          </a:fillRef>
+          <a:effectRef idx="2">
+            <a:schemeClr val="accent1"/>
+          </a:effectRef>
+          <a:fontRef idx="minor">
+            <a:schemeClr val="lt1"/>
+          </a:fontRef>
+        </p:style>
+        <p:txBody>
+          <a:bodyPr rtlCol="0" anchor="ctr"/>
+          <a:lstStyle/>
+          <a:p>
+            <a:pPr algn="ctr"/>
+          </a:p>
+        </p:txBody>
+      </p:sp>
+      <p:sp>
+        <p:nvSpPr>
+          <p:cNvPr id="5" name="Rectangle 4"/>
+          <p:cNvSpPr/>
+          <p:nvPr/>
+        </p:nvSpPr>
+        <p:spPr>
+          <a:xfrm>
+            <a:off x="685800" y="1600200"/>
+            <a:ext cx="2542032" cy="329184"/>
+          </a:xfrm>
+          <a:prstGeom prst="rect">
+            <a:avLst/>
+          </a:prstGeom>
+          <a:solidFill>
+            <a:srgbClr val="2F6FEB"/>
+          </a:solidFill>
+          <a:ln>
+            <a:noFill/>
+          </a:ln>
+          <a:effectLst/>
+        </p:spPr>
+        <p:style>
+          <a:lnRef idx="1">
+            <a:schemeClr val="accent1"/>
+          </a:lnRef>
+          <a:fillRef idx="3">
+            <a:schemeClr val="accent1"/>
+          </a:fillRef>
+          <a:effectRef idx="2">
+            <a:schemeClr val="accent1"/>
+          </a:effectRef>
+          <a:fontRef idx="minor">
+            <a:schemeClr val="lt1"/>
+          </a:fontRef>
+        </p:style>
+        <p:txBody>
+          <a:bodyPr rtlCol="0" anchor="ctr"/>
+          <a:lstStyle/>
+          <a:p>
+            <a:pPr algn="ctr"/>
+          </a:p>
+        </p:txBody>
+      </p:sp>
+      <p:sp>
+        <p:nvSpPr>
+          <p:cNvPr id="6" name="TextBox 5"/>
+          <p:cNvSpPr txBox="1"/>
+          <p:nvPr/>
+        </p:nvSpPr>
+        <p:spPr>
+          <a:xfrm>
+            <a:off x="685800" y="1627632"/>
+            <a:ext cx="2542032" cy="274320"/>
+          </a:xfrm>
+          <a:prstGeom prst="rect">
+            <a:avLst/>
+          </a:prstGeom>
+          <a:noFill/>
+        </p:spPr>
+        <p:txBody>
+          <a:bodyPr wrap="square" anchor="ctr">
+            <a:spAutoFit/>
+          </a:bodyPr>
+          <a:lstStyle/>
+          <a:p>
+            <a:pPr algn="ctr">
+              <a:lnSpc>
+                <a:spcPct val="115000"/>
+              </a:lnSpc>
+              <a:spcAft>
+                <a:spcPts val="600"/>
+              </a:spcAft>
+            </a:pPr>
+            <a:r>
+              <a:rPr sz="1250" b="1">
+                <a:solidFill>
+                  <a:srgbClr val="FFFFFF"/>
+                </a:solidFill>
+                <a:latin typeface="微软雅黑" a:ea="微软雅黑"/>
+              </a:rPr>
+              <a:t>1. 用户追问</a:t>
+            </a:r>
+          </a:p>
+        </p:txBody>
+      </p:sp>
+      <p:sp>
+        <p:nvSpPr>
+          <p:cNvPr id="7" name="TextBox 6"/>
+          <p:cNvSpPr txBox="1"/>
+          <p:nvPr/>
+        </p:nvSpPr>
+        <p:spPr>
+          <a:xfrm>
+            <a:off x="822960" y="2011680"/>
+            <a:ext cx="2267712" cy="777240"/>
+          </a:xfrm>
+          <a:prstGeom prst="rect">
+            <a:avLst/>
+          </a:prstGeom>
+          <a:noFill/>
+        </p:spPr>
+        <p:txBody>
+          <a:bodyPr wrap="square" anchor="t">
+            <a:spAutoFit/>
+          </a:bodyPr>
+          <a:lstStyle/>
+          <a:p>
+            <a:pPr algn="l">
+              <a:lnSpc>
+                <a:spcPct val="115000"/>
+              </a:lnSpc>
+              <a:spcAft>
+                <a:spcPts val="600"/>
+              </a:spcAft>
+            </a:pPr>
+            <a:r>
+              <a:rPr sz="1050" b="0">
+                <a:solidFill>
+                  <a:srgbClr val="6B7688"/>
+                </a:solidFill>
+                <a:latin typeface="微软雅黑" a:ea="微软雅黑"/>
+              </a:rPr>
+              <a:t>「5 万预算适合做这个类目吗？」</a:t>
+            </a:r>
+          </a:p>
+        </p:txBody>
+      </p:sp>
+      <p:sp>
+        <p:nvSpPr>
+          <p:cNvPr id="8" name="Rounded Rectangle 7"/>
+          <p:cNvSpPr/>
+          <p:nvPr/>
+        </p:nvSpPr>
+        <p:spPr>
+          <a:xfrm>
+            <a:off x="3474720" y="1600200"/>
+            <a:ext cx="2542032" cy="1234440"/>
+          </a:xfrm>
+          <a:prstGeom prst="roundRect">
+            <a:avLst/>
+          </a:prstGeom>
+          <a:solidFill>
+            <a:srgbClr val="FFFFFF"/>
+          </a:solidFill>
+          <a:ln w="9525">
+            <a:solidFill>
+              <a:srgbClr val="D8E0EE"/>
+            </a:solidFill>
+          </a:ln>
+          <a:effectLst/>
+        </p:spPr>
+        <p:style>
+          <a:lnRef idx="1">
+            <a:schemeClr val="accent1"/>
+          </a:lnRef>
+          <a:fillRef idx="3">
+            <a:schemeClr val="accent1"/>
+          </a:fillRef>
+          <a:effectRef idx="2">
+            <a:schemeClr val="accent1"/>
+          </a:effectRef>
+          <a:fontRef idx="minor">
+            <a:schemeClr val="lt1"/>
+          </a:fontRef>
+        </p:style>
+        <p:txBody>
+          <a:bodyPr rtlCol="0" anchor="ctr"/>
+          <a:lstStyle/>
+          <a:p>
+            <a:pPr algn="ctr"/>
+          </a:p>
+        </p:txBody>
+      </p:sp>
+      <p:sp>
+        <p:nvSpPr>
+          <p:cNvPr id="9" name="Rectangle 8"/>
+          <p:cNvSpPr/>
+          <p:nvPr/>
+        </p:nvSpPr>
+        <p:spPr>
+          <a:xfrm>
+            <a:off x="3474720" y="1600200"/>
+            <a:ext cx="2542032" cy="329184"/>
+          </a:xfrm>
+          <a:prstGeom prst="rect">
+            <a:avLst/>
+          </a:prstGeom>
+          <a:solidFill>
+            <a:srgbClr val="0F8F80"/>
+          </a:solidFill>
+          <a:ln>
+            <a:noFill/>
+          </a:ln>
+          <a:effectLst/>
+        </p:spPr>
+        <p:style>
+          <a:lnRef idx="1">
+            <a:schemeClr val="accent1"/>
+          </a:lnRef>
+          <a:fillRef idx="3">
+            <a:schemeClr val="accent1"/>
+          </a:fillRef>
+          <a:effectRef idx="2">
+            <a:schemeClr val="accent1"/>
+          </a:effectRef>
+          <a:fontRef idx="minor">
+            <a:schemeClr val="lt1"/>
+          </a:fontRef>
+        </p:style>
+        <p:txBody>
+          <a:bodyPr rtlCol="0" anchor="ctr"/>
+          <a:lstStyle/>
+          <a:p>
+            <a:pPr algn="ctr"/>
+          </a:p>
+        </p:txBody>
+      </p:sp>
+      <p:sp>
+        <p:nvSpPr>
+          <p:cNvPr id="10" name="TextBox 9"/>
+          <p:cNvSpPr txBox="1"/>
+          <p:nvPr/>
+        </p:nvSpPr>
+        <p:spPr>
+          <a:xfrm>
+            <a:off x="3474720" y="1627632"/>
+            <a:ext cx="2542032" cy="274320"/>
+          </a:xfrm>
+          <a:prstGeom prst="rect">
+            <a:avLst/>
+          </a:prstGeom>
+          <a:noFill/>
+        </p:spPr>
+        <p:txBody>
+          <a:bodyPr wrap="square" anchor="ctr">
+            <a:spAutoFit/>
+          </a:bodyPr>
+          <a:lstStyle/>
+          <a:p>
+            <a:pPr algn="ctr">
+              <a:lnSpc>
+                <a:spcPct val="115000"/>
+              </a:lnSpc>
+              <a:spcAft>
+                <a:spcPts val="600"/>
+              </a:spcAft>
+            </a:pPr>
+            <a:r>
+              <a:rPr sz="1250" b="1">
+                <a:solidFill>
+                  <a:srgbClr val="FFFFFF"/>
+                </a:solidFill>
+                <a:latin typeface="微软雅黑" a:ea="微软雅黑"/>
+              </a:rPr>
+              <a:t>2. 取指标快照</a:t>
+            </a:r>
+          </a:p>
+        </p:txBody>
+      </p:sp>
+      <p:sp>
+        <p:nvSpPr>
+          <p:cNvPr id="11" name="TextBox 10"/>
+          <p:cNvSpPr txBox="1"/>
+          <p:nvPr/>
+        </p:nvSpPr>
+        <p:spPr>
+          <a:xfrm>
+            <a:off x="3611879" y="2011680"/>
+            <a:ext cx="2267712" cy="777240"/>
+          </a:xfrm>
+          <a:prstGeom prst="rect">
+            <a:avLst/>
+          </a:prstGeom>
+          <a:noFill/>
+        </p:spPr>
+        <p:txBody>
+          <a:bodyPr wrap="square" anchor="t">
+            <a:spAutoFit/>
+          </a:bodyPr>
+          <a:lstStyle/>
+          <a:p>
+            <a:pPr algn="l">
+              <a:lnSpc>
+                <a:spcPct val="115000"/>
+              </a:lnSpc>
+              <a:spcAft>
+                <a:spcPts val="600"/>
+              </a:spcAft>
+            </a:pPr>
+            <a:r>
+              <a:rPr sz="1050" b="0">
+                <a:solidFill>
+                  <a:srgbClr val="6B7688"/>
+                </a:solidFill>
+                <a:latin typeface="微软雅黑" a:ea="微软雅黑"/>
+              </a:rPr>
+              <a:t>复用行情分析已算好的指标，模型只见数字</a:t>
+            </a:r>
+          </a:p>
+        </p:txBody>
+      </p:sp>
+      <p:sp>
+        <p:nvSpPr>
+          <p:cNvPr id="12" name="Rounded Rectangle 11"/>
+          <p:cNvSpPr/>
+          <p:nvPr/>
+        </p:nvSpPr>
+        <p:spPr>
+          <a:xfrm>
+            <a:off x="6263640" y="1600200"/>
+            <a:ext cx="2542032" cy="1234440"/>
+          </a:xfrm>
+          <a:prstGeom prst="roundRect">
+            <a:avLst/>
+          </a:prstGeom>
+          <a:solidFill>
+            <a:srgbClr val="FFFFFF"/>
+          </a:solidFill>
+          <a:ln w="9525">
+            <a:solidFill>
+              <a:srgbClr val="D8E0EE"/>
+            </a:solidFill>
+          </a:ln>
+          <a:effectLst/>
+        </p:spPr>
+        <p:style>
+          <a:lnRef idx="1">
+            <a:schemeClr val="accent1"/>
+          </a:lnRef>
+          <a:fillRef idx="3">
+            <a:schemeClr val="accent1"/>
+          </a:fillRef>
+          <a:effectRef idx="2">
+            <a:schemeClr val="accent1"/>
+          </a:effectRef>
+          <a:fontRef idx="minor">
+            <a:schemeClr val="lt1"/>
+          </a:fontRef>
+        </p:style>
+        <p:txBody>
+          <a:bodyPr rtlCol="0" anchor="ctr"/>
+          <a:lstStyle/>
+          <a:p>
+            <a:pPr algn="ctr"/>
+          </a:p>
+        </p:txBody>
+      </p:sp>
+      <p:sp>
+        <p:nvSpPr>
+          <p:cNvPr id="13" name="Rectangle 12"/>
+          <p:cNvSpPr/>
+          <p:nvPr/>
+        </p:nvSpPr>
+        <p:spPr>
+          <a:xfrm>
+            <a:off x="6263640" y="1600200"/>
+            <a:ext cx="2542032" cy="329184"/>
+          </a:xfrm>
+          <a:prstGeom prst="rect">
+            <a:avLst/>
+          </a:prstGeom>
+          <a:solidFill>
+            <a:srgbClr val="2F6FEB"/>
+          </a:solidFill>
+          <a:ln>
+            <a:noFill/>
+          </a:ln>
+          <a:effectLst/>
+        </p:spPr>
+        <p:style>
+          <a:lnRef idx="1">
+            <a:schemeClr val="accent1"/>
+          </a:lnRef>
+          <a:fillRef idx="3">
+            <a:schemeClr val="accent1"/>
+          </a:fillRef>
+          <a:effectRef idx="2">
+            <a:schemeClr val="accent1"/>
+          </a:effectRef>
+          <a:fontRef idx="minor">
+            <a:schemeClr val="lt1"/>
+          </a:fontRef>
+        </p:style>
+        <p:txBody>
+          <a:bodyPr rtlCol="0" anchor="ctr"/>
+          <a:lstStyle/>
+          <a:p>
+            <a:pPr algn="ctr"/>
+          </a:p>
+        </p:txBody>
+      </p:sp>
+      <p:sp>
+        <p:nvSpPr>
+          <p:cNvPr id="14" name="TextBox 13"/>
+          <p:cNvSpPr txBox="1"/>
+          <p:nvPr/>
+        </p:nvSpPr>
+        <p:spPr>
+          <a:xfrm>
+            <a:off x="6263640" y="1627632"/>
+            <a:ext cx="2542032" cy="274320"/>
+          </a:xfrm>
+          <a:prstGeom prst="rect">
+            <a:avLst/>
+          </a:prstGeom>
+          <a:noFill/>
+        </p:spPr>
+        <p:txBody>
+          <a:bodyPr wrap="square" anchor="ctr">
+            <a:spAutoFit/>
+          </a:bodyPr>
+          <a:lstStyle/>
+          <a:p>
+            <a:pPr algn="ctr">
+              <a:lnSpc>
+                <a:spcPct val="115000"/>
+              </a:lnSpc>
+              <a:spcAft>
+                <a:spcPts val="600"/>
+              </a:spcAft>
+            </a:pPr>
+            <a:r>
+              <a:rPr sz="1250" b="1">
+                <a:solidFill>
+                  <a:srgbClr val="FFFFFF"/>
+                </a:solidFill>
+                <a:latin typeface="微软雅黑" a:ea="微软雅黑"/>
+              </a:rPr>
+              <a:t>3. 模型作答</a:t>
+            </a:r>
+          </a:p>
+        </p:txBody>
+      </p:sp>
+      <p:sp>
+        <p:nvSpPr>
+          <p:cNvPr id="15" name="TextBox 14"/>
+          <p:cNvSpPr txBox="1"/>
+          <p:nvPr/>
+        </p:nvSpPr>
+        <p:spPr>
+          <a:xfrm>
+            <a:off x="6400800" y="2011680"/>
+            <a:ext cx="2267712" cy="777240"/>
+          </a:xfrm>
+          <a:prstGeom prst="rect">
+            <a:avLst/>
+          </a:prstGeom>
+          <a:noFill/>
+        </p:spPr>
+        <p:txBody>
+          <a:bodyPr wrap="square" anchor="t">
+            <a:spAutoFit/>
+          </a:bodyPr>
+          <a:lstStyle/>
+          <a:p>
+            <a:pPr algn="l">
+              <a:lnSpc>
+                <a:spcPct val="115000"/>
+              </a:lnSpc>
+              <a:spcAft>
+                <a:spcPts val="600"/>
+              </a:spcAft>
+            </a:pPr>
+            <a:r>
+              <a:rPr sz="1050" b="0">
+                <a:solidFill>
+                  <a:srgbClr val="6B7688"/>
+                </a:solidFill>
+                <a:latin typeface="微软雅黑" a:ea="微软雅黑"/>
+              </a:rPr>
+              <a:t>只组织语言，禁止引入新数字、禁止预测</a:t>
+            </a:r>
+          </a:p>
+        </p:txBody>
+      </p:sp>
+      <p:sp>
+        <p:nvSpPr>
+          <p:cNvPr id="16" name="Rounded Rectangle 15"/>
+          <p:cNvSpPr/>
+          <p:nvPr/>
+        </p:nvSpPr>
+        <p:spPr>
+          <a:xfrm>
+            <a:off x="9052559" y="1600200"/>
+            <a:ext cx="2542032" cy="1234440"/>
+          </a:xfrm>
+          <a:prstGeom prst="roundRect">
+            <a:avLst/>
+          </a:prstGeom>
+          <a:solidFill>
+            <a:srgbClr val="FFFFFF"/>
+          </a:solidFill>
+          <a:ln w="9525">
+            <a:solidFill>
+              <a:srgbClr val="D8E0EE"/>
+            </a:solidFill>
+          </a:ln>
+          <a:effectLst/>
+        </p:spPr>
+        <p:style>
+          <a:lnRef idx="1">
+            <a:schemeClr val="accent1"/>
+          </a:lnRef>
+          <a:fillRef idx="3">
+            <a:schemeClr val="accent1"/>
+          </a:fillRef>
+          <a:effectRef idx="2">
+            <a:schemeClr val="accent1"/>
+          </a:effectRef>
+          <a:fontRef idx="minor">
+            <a:schemeClr val="lt1"/>
+          </a:fontRef>
+        </p:style>
+        <p:txBody>
+          <a:bodyPr rtlCol="0" anchor="ctr"/>
+          <a:lstStyle/>
+          <a:p>
+            <a:pPr algn="ctr"/>
+          </a:p>
+        </p:txBody>
+      </p:sp>
+      <p:sp>
+        <p:nvSpPr>
+          <p:cNvPr id="17" name="Rectangle 16"/>
+          <p:cNvSpPr/>
+          <p:nvPr/>
+        </p:nvSpPr>
+        <p:spPr>
+          <a:xfrm>
+            <a:off x="9052559" y="1600200"/>
+            <a:ext cx="2542032" cy="329184"/>
+          </a:xfrm>
+          <a:prstGeom prst="rect">
+            <a:avLst/>
+          </a:prstGeom>
+          <a:solidFill>
+            <a:srgbClr val="0F8F80"/>
+          </a:solidFill>
+          <a:ln>
+            <a:noFill/>
+          </a:ln>
+          <a:effectLst/>
+        </p:spPr>
+        <p:style>
+          <a:lnRef idx="1">
+            <a:schemeClr val="accent1"/>
+          </a:lnRef>
+          <a:fillRef idx="3">
+            <a:schemeClr val="accent1"/>
+          </a:fillRef>
+          <a:effectRef idx="2">
+            <a:schemeClr val="accent1"/>
+          </a:effectRef>
+          <a:fontRef idx="minor">
+            <a:schemeClr val="lt1"/>
+          </a:fontRef>
+        </p:style>
+        <p:txBody>
+          <a:bodyPr rtlCol="0" anchor="ctr"/>
+          <a:lstStyle/>
+          <a:p>
+            <a:pPr algn="ctr"/>
+          </a:p>
+        </p:txBody>
+      </p:sp>
+      <p:sp>
+        <p:nvSpPr>
+          <p:cNvPr id="18" name="TextBox 17"/>
+          <p:cNvSpPr txBox="1"/>
+          <p:nvPr/>
+        </p:nvSpPr>
+        <p:spPr>
+          <a:xfrm>
+            <a:off x="9052559" y="1627632"/>
+            <a:ext cx="2542032" cy="274320"/>
+          </a:xfrm>
+          <a:prstGeom prst="rect">
+            <a:avLst/>
+          </a:prstGeom>
+          <a:noFill/>
+        </p:spPr>
+        <p:txBody>
+          <a:bodyPr wrap="square" anchor="ctr">
+            <a:spAutoFit/>
+          </a:bodyPr>
+          <a:lstStyle/>
+          <a:p>
+            <a:pPr algn="ctr">
+              <a:lnSpc>
+                <a:spcPct val="115000"/>
+              </a:lnSpc>
+              <a:spcAft>
+                <a:spcPts val="600"/>
+              </a:spcAft>
+            </a:pPr>
+            <a:r>
+              <a:rPr sz="1250" b="1">
+                <a:solidFill>
+                  <a:srgbClr val="FFFFFF"/>
+                </a:solidFill>
+                <a:latin typeface="微软雅黑" a:ea="微软雅黑"/>
+              </a:rPr>
+              <a:t>4. 逐数字回查</a:t>
+            </a:r>
+          </a:p>
+        </p:txBody>
+      </p:sp>
+      <p:sp>
+        <p:nvSpPr>
+          <p:cNvPr id="19" name="TextBox 18"/>
+          <p:cNvSpPr txBox="1"/>
+          <p:nvPr/>
+        </p:nvSpPr>
+        <p:spPr>
+          <a:xfrm>
+            <a:off x="9189719" y="2011680"/>
+            <a:ext cx="2267712" cy="777240"/>
+          </a:xfrm>
+          <a:prstGeom prst="rect">
+            <a:avLst/>
+          </a:prstGeom>
+          <a:noFill/>
+        </p:spPr>
+        <p:txBody>
+          <a:bodyPr wrap="square" anchor="t">
+            <a:spAutoFit/>
+          </a:bodyPr>
+          <a:lstStyle/>
+          <a:p>
+            <a:pPr algn="l">
+              <a:lnSpc>
+                <a:spcPct val="115000"/>
+              </a:lnSpc>
+              <a:spcAft>
+                <a:spcPts val="600"/>
+              </a:spcAft>
+            </a:pPr>
+            <a:r>
+              <a:rPr sz="1050" b="0">
+                <a:solidFill>
+                  <a:srgbClr val="6B7688"/>
+                </a:solidFill>
+                <a:latin typeface="微软雅黑" a:ea="微软雅黑"/>
+              </a:rPr>
+              <a:t>抽出回答中所有数字，回指标层比对（容差 2%）</a:t>
+            </a:r>
+          </a:p>
+        </p:txBody>
+      </p:sp>
+      <p:sp>
+        <p:nvSpPr>
+          <p:cNvPr id="20" name="Rounded Rectangle 19"/>
+          <p:cNvSpPr/>
+          <p:nvPr/>
+        </p:nvSpPr>
+        <p:spPr>
+          <a:xfrm>
+            <a:off x="685800" y="3063240"/>
+            <a:ext cx="5349240" cy="2651760"/>
+          </a:xfrm>
+          <a:prstGeom prst="roundRect">
+            <a:avLst/>
+          </a:prstGeom>
+          <a:solidFill>
+            <a:srgbClr val="FFFFFF"/>
+          </a:solidFill>
+          <a:ln w="9525">
+            <a:solidFill>
+              <a:srgbClr val="D8E0EE"/>
+            </a:solidFill>
+          </a:ln>
+          <a:effectLst/>
+        </p:spPr>
+        <p:style>
+          <a:lnRef idx="1">
+            <a:schemeClr val="accent1"/>
+          </a:lnRef>
+          <a:fillRef idx="3">
+            <a:schemeClr val="accent1"/>
+          </a:fillRef>
+          <a:effectRef idx="2">
+            <a:schemeClr val="accent1"/>
+          </a:effectRef>
+          <a:fontRef idx="minor">
+            <a:schemeClr val="lt1"/>
+          </a:fontRef>
+        </p:style>
+        <p:txBody>
+          <a:bodyPr rtlCol="0" anchor="ctr"/>
+          <a:lstStyle/>
+          <a:p>
+            <a:pPr algn="ctr"/>
+          </a:p>
+        </p:txBody>
+      </p:sp>
+      <p:sp>
+        <p:nvSpPr>
+          <p:cNvPr id="21" name="Rectangle 20"/>
+          <p:cNvSpPr/>
+          <p:nvPr/>
+        </p:nvSpPr>
+        <p:spPr>
+          <a:xfrm>
+            <a:off x="685800" y="3063240"/>
+            <a:ext cx="68580" cy="2651760"/>
+          </a:xfrm>
+          <a:prstGeom prst="rect">
+            <a:avLst/>
+          </a:prstGeom>
+          <a:solidFill>
+            <a:srgbClr val="0F8F80"/>
+          </a:solidFill>
+          <a:ln>
+            <a:noFill/>
+          </a:ln>
+          <a:effectLst/>
+        </p:spPr>
+        <p:style>
+          <a:lnRef idx="1">
+            <a:schemeClr val="accent1"/>
+          </a:lnRef>
+          <a:fillRef idx="3">
+            <a:schemeClr val="accent1"/>
+          </a:fillRef>
+          <a:effectRef idx="2">
+            <a:schemeClr val="accent1"/>
+          </a:effectRef>
+          <a:fontRef idx="minor">
+            <a:schemeClr val="lt1"/>
+          </a:fontRef>
+        </p:style>
+        <p:txBody>
+          <a:bodyPr rtlCol="0" anchor="ctr"/>
+          <a:lstStyle/>
+          <a:p>
+            <a:pPr algn="ctr"/>
+          </a:p>
+        </p:txBody>
+      </p:sp>
+      <p:sp>
+        <p:nvSpPr>
+          <p:cNvPr id="22" name="TextBox 21"/>
+          <p:cNvSpPr txBox="1"/>
+          <p:nvPr/>
+        </p:nvSpPr>
+        <p:spPr>
+          <a:xfrm>
+            <a:off x="960120" y="3200400"/>
+            <a:ext cx="4846320" cy="2377440"/>
+          </a:xfrm>
+          <a:prstGeom prst="rect">
+            <a:avLst/>
+          </a:prstGeom>
+          <a:noFill/>
+        </p:spPr>
+        <p:txBody>
+          <a:bodyPr wrap="square" anchor="t">
+            <a:spAutoFit/>
+          </a:bodyPr>
+          <a:lstStyle/>
+          <a:p>
+            <a:pPr algn="l">
+              <a:lnSpc>
+                <a:spcPct val="115000"/>
+              </a:lnSpc>
+              <a:spcAft>
+                <a:spcPts val="600"/>
+              </a:spcAft>
+            </a:pPr>
+            <a:r>
+              <a:rPr sz="1400" b="1">
+                <a:solidFill>
+                  <a:srgbClr val="0F8F80"/>
+                </a:solidFill>
+                <a:latin typeface="微软雅黑" a:ea="微软雅黑"/>
+              </a:rPr>
+              <a:t>实测 · 正常路径</a:t>
+            </a:r>
+          </a:p>
+          <a:p>
+            <a:pPr algn="l">
+              <a:lnSpc>
+                <a:spcPct val="115000"/>
+              </a:lnSpc>
+              <a:spcAft>
+                <a:spcPts val="500"/>
+              </a:spcAft>
+            </a:pPr>
+            <a:r>
+              <a:rPr sz="1150" b="0">
+                <a:solidFill>
+                  <a:srgbClr val="16233D"/>
+                </a:solidFill>
+                <a:latin typeface="微软雅黑" a:ea="微软雅黑"/>
+              </a:rPr>
+              <a:t>问：我只有 5 万预算，适合做这个类目吗？</a:t>
+            </a:r>
+          </a:p>
+          <a:p>
+            <a:pPr algn="l">
+              <a:lnSpc>
+                <a:spcPct val="115000"/>
+              </a:lnSpc>
+              <a:spcAft>
+                <a:spcPts val="500"/>
+              </a:spcAft>
+            </a:pPr>
+            <a:r>
+              <a:rPr sz="1100" b="0">
+                <a:solidFill>
+                  <a:srgbClr val="6B7688"/>
+                </a:solidFill>
+                <a:latin typeface="微软雅黑" a:ea="微软雅黑"/>
+              </a:rPr>
+              <a:t>答：该指标显示 CR5 为 0.8979、brand_cr3 为 1.0，集中度很高，但 avg_confidence 仅 0.433……</a:t>
+            </a:r>
+          </a:p>
+          <a:p>
+            <a:pPr algn="l">
+              <a:lnSpc>
+                <a:spcPct val="115000"/>
+              </a:lnSpc>
+              <a:spcAft>
+                <a:spcPts val="600"/>
+              </a:spcAft>
+            </a:pPr>
+            <a:r>
+              <a:rPr sz="1150" b="1">
+                <a:solidFill>
+                  <a:srgbClr val="0F8F80"/>
+                </a:solidFill>
+                <a:latin typeface="微软雅黑" a:ea="微软雅黑"/>
+              </a:rPr>
+              <a:t>✅ 校验：回答中 8 个数字全部可溯源（citations）</a:t>
+            </a:r>
+          </a:p>
+        </p:txBody>
+      </p:sp>
+      <p:sp>
+        <p:nvSpPr>
+          <p:cNvPr id="23" name="Rounded Rectangle 22"/>
+          <p:cNvSpPr/>
+          <p:nvPr/>
+        </p:nvSpPr>
+        <p:spPr>
+          <a:xfrm>
+            <a:off x="6217920" y="3063240"/>
+            <a:ext cx="5349240" cy="2651760"/>
+          </a:xfrm>
+          <a:prstGeom prst="roundRect">
+            <a:avLst/>
+          </a:prstGeom>
+          <a:solidFill>
+            <a:srgbClr val="FFFFFF"/>
+          </a:solidFill>
+          <a:ln w="9525">
+            <a:solidFill>
+              <a:srgbClr val="D8E0EE"/>
+            </a:solidFill>
+          </a:ln>
+          <a:effectLst/>
+        </p:spPr>
+        <p:style>
+          <a:lnRef idx="1">
+            <a:schemeClr val="accent1"/>
+          </a:lnRef>
+          <a:fillRef idx="3">
+            <a:schemeClr val="accent1"/>
+          </a:fillRef>
+          <a:effectRef idx="2">
+            <a:schemeClr val="accent1"/>
+          </a:effectRef>
+          <a:fontRef idx="minor">
+            <a:schemeClr val="lt1"/>
+          </a:fontRef>
+        </p:style>
+        <p:txBody>
+          <a:bodyPr rtlCol="0" anchor="ctr"/>
+          <a:lstStyle/>
+          <a:p>
+            <a:pPr algn="ctr"/>
+          </a:p>
+        </p:txBody>
+      </p:sp>
+      <p:sp>
+        <p:nvSpPr>
+          <p:cNvPr id="24" name="Rectangle 23"/>
+          <p:cNvSpPr/>
+          <p:nvPr/>
+        </p:nvSpPr>
+        <p:spPr>
+          <a:xfrm>
+            <a:off x="6217920" y="3063240"/>
+            <a:ext cx="68580" cy="2651760"/>
+          </a:xfrm>
+          <a:prstGeom prst="rect">
+            <a:avLst/>
+          </a:prstGeom>
+          <a:solidFill>
+            <a:srgbClr val="B06608"/>
+          </a:solidFill>
+          <a:ln>
+            <a:noFill/>
+          </a:ln>
+          <a:effectLst/>
+        </p:spPr>
+        <p:style>
+          <a:lnRef idx="1">
+            <a:schemeClr val="accent1"/>
+          </a:lnRef>
+          <a:fillRef idx="3">
+            <a:schemeClr val="accent1"/>
+          </a:fillRef>
+          <a:effectRef idx="2">
+            <a:schemeClr val="accent1"/>
+          </a:effectRef>
+          <a:fontRef idx="minor">
+            <a:schemeClr val="lt1"/>
+          </a:fontRef>
+        </p:style>
+        <p:txBody>
+          <a:bodyPr rtlCol="0" anchor="ctr"/>
+          <a:lstStyle/>
+          <a:p>
+            <a:pPr algn="ctr"/>
+          </a:p>
+        </p:txBody>
+      </p:sp>
+      <p:sp>
+        <p:nvSpPr>
+          <p:cNvPr id="25" name="TextBox 24"/>
+          <p:cNvSpPr txBox="1"/>
+          <p:nvPr/>
+        </p:nvSpPr>
+        <p:spPr>
+          <a:xfrm>
+            <a:off x="6492240" y="3200400"/>
+            <a:ext cx="4846320" cy="2377440"/>
+          </a:xfrm>
+          <a:prstGeom prst="rect">
+            <a:avLst/>
+          </a:prstGeom>
+          <a:noFill/>
+        </p:spPr>
+        <p:txBody>
+          <a:bodyPr wrap="square" anchor="t">
+            <a:spAutoFit/>
+          </a:bodyPr>
+          <a:lstStyle/>
+          <a:p>
+            <a:pPr algn="l">
+              <a:lnSpc>
+                <a:spcPct val="115000"/>
+              </a:lnSpc>
+              <a:spcAft>
+                <a:spcPts val="600"/>
+              </a:spcAft>
+            </a:pPr>
+            <a:r>
+              <a:rPr sz="1400" b="1">
+                <a:solidFill>
+                  <a:srgbClr val="B06608"/>
+                </a:solidFill>
+                <a:latin typeface="微软雅黑" a:ea="微软雅黑"/>
+              </a:rPr>
+              <a:t>实测 · 故意让模型自由估算</a:t>
+            </a:r>
+          </a:p>
+          <a:p>
+            <a:pPr algn="l">
+              <a:lnSpc>
+                <a:spcPct val="115000"/>
+              </a:lnSpc>
+              <a:spcAft>
+                <a:spcPts val="500"/>
+              </a:spcAft>
+            </a:pPr>
+            <a:r>
+              <a:rPr sz="1150" b="0">
+                <a:solidFill>
+                  <a:srgbClr val="16233D"/>
+                </a:solidFill>
+                <a:latin typeface="微软雅黑" a:ea="微软雅黑"/>
+              </a:rPr>
+              <a:t>把提示词换成「可以基于常识推断」后，模型回答：</a:t>
+            </a:r>
+          </a:p>
+          <a:p>
+            <a:pPr algn="l">
+              <a:lnSpc>
+                <a:spcPct val="115000"/>
+              </a:lnSpc>
+              <a:spcAft>
+                <a:spcPts val="500"/>
+              </a:spcAft>
+            </a:pPr>
+            <a:r>
+              <a:rPr sz="1100" b="0">
+                <a:solidFill>
+                  <a:srgbClr val="6B7688"/>
+                </a:solidFill>
+                <a:latin typeface="微软雅黑" a:ea="微软雅黑"/>
+              </a:rPr>
+              <a:t>「CR5 达 89.8%、品牌 CR3 为 100%，月销约 2.5 万件，建议首期备货预算 15-25 万元。」</a:t>
+            </a:r>
+          </a:p>
+          <a:p>
+            <a:pPr algn="l">
+              <a:lnSpc>
+                <a:spcPct val="115000"/>
+              </a:lnSpc>
+              <a:spcAft>
+                <a:spcPts val="600"/>
+              </a:spcAft>
+            </a:pPr>
+            <a:r>
+              <a:rPr sz="1150" b="1">
+                <a:solidFill>
+                  <a:srgbClr val="B06608"/>
+                </a:solidFill>
+                <a:latin typeface="微软雅黑" a:ea="微软雅黑"/>
+              </a:rPr>
+              <a:t>❌ 校验：2.5 / 15 / 25 在指标层找不到出处，当场标红</a:t>
+            </a:r>
+          </a:p>
+        </p:txBody>
+      </p:sp>
+      <p:sp>
+        <p:nvSpPr>
+          <p:cNvPr id="26" name="Rounded Rectangle 25"/>
+          <p:cNvSpPr/>
+          <p:nvPr/>
+        </p:nvSpPr>
+        <p:spPr>
+          <a:xfrm>
+            <a:off x="685800" y="5779008"/>
+            <a:ext cx="10881360" cy="457200"/>
+          </a:xfrm>
+          <a:prstGeom prst="roundRect">
+            <a:avLst/>
+          </a:prstGeom>
+          <a:solidFill>
+            <a:srgbClr val="EAF1FF"/>
+          </a:solidFill>
+          <a:ln>
+            <a:noFill/>
+          </a:ln>
+          <a:effectLst/>
+        </p:spPr>
+        <p:style>
+          <a:lnRef idx="1">
+            <a:schemeClr val="accent1"/>
+          </a:lnRef>
+          <a:fillRef idx="3">
+            <a:schemeClr val="accent1"/>
+          </a:fillRef>
+          <a:effectRef idx="2">
+            <a:schemeClr val="accent1"/>
+          </a:effectRef>
+          <a:fontRef idx="minor">
+            <a:schemeClr val="lt1"/>
+          </a:fontRef>
+        </p:style>
+        <p:txBody>
+          <a:bodyPr rtlCol="0" anchor="ctr"/>
+          <a:lstStyle/>
+          <a:p>
+            <a:pPr algn="ctr"/>
+          </a:p>
+        </p:txBody>
+      </p:sp>
+      <p:sp>
+        <p:nvSpPr>
+          <p:cNvPr id="27" name="TextBox 26"/>
+          <p:cNvSpPr txBox="1"/>
+          <p:nvPr/>
+        </p:nvSpPr>
+        <p:spPr>
+          <a:xfrm>
+            <a:off x="914400" y="5779008"/>
+            <a:ext cx="10424160" cy="457200"/>
+          </a:xfrm>
+          <a:prstGeom prst="rect">
+            <a:avLst/>
+          </a:prstGeom>
+          <a:noFill/>
+        </p:spPr>
+        <p:txBody>
+          <a:bodyPr wrap="square" anchor="ctr">
+            <a:spAutoFit/>
+          </a:bodyPr>
+          <a:lstStyle/>
+          <a:p>
+            <a:pPr algn="l">
+              <a:lnSpc>
+                <a:spcPct val="115000"/>
+              </a:lnSpc>
+              <a:spcAft>
+                <a:spcPts val="600"/>
+              </a:spcAft>
+            </a:pPr>
+            <a:r>
+              <a:rPr sz="1200" b="1">
+                <a:solidFill>
+                  <a:srgbClr val="2F6FEB"/>
+                </a:solidFill>
+                <a:latin typeface="微软雅黑" a:ea="微软雅黑"/>
+              </a:rPr>
+              <a:t>★ 我们不要求模型不撒谎，我们要求它撒的谎能被抓住 —— 这一题现场可以演示。</a:t>
+            </a:r>
+          </a:p>
+        </p:txBody>
+      </p:sp>
+      <p:sp>
+        <p:nvSpPr>
+          <p:cNvPr id="28" name="TextBox 27"/>
+          <p:cNvSpPr txBox="1"/>
+          <p:nvPr/>
+        </p:nvSpPr>
+        <p:spPr>
+          <a:xfrm>
+            <a:off x="548640" y="6355080"/>
+            <a:ext cx="7315200" cy="320040"/>
+          </a:xfrm>
+          <a:prstGeom prst="rect">
+            <a:avLst/>
+          </a:prstGeom>
+          <a:noFill/>
+        </p:spPr>
+        <p:txBody>
+          <a:bodyPr wrap="square" anchor="t">
+            <a:spAutoFit/>
+          </a:bodyPr>
+          <a:lstStyle/>
+          <a:p>
+            <a:pPr algn="l">
+              <a:lnSpc>
+                <a:spcPct val="115000"/>
+              </a:lnSpc>
+              <a:spcAft>
+                <a:spcPts val="600"/>
+              </a:spcAft>
+            </a:pPr>
+            <a:r>
+              <a:rPr sz="950" b="0">
+                <a:solidFill>
+                  <a:srgbClr val="6B7688"/>
+                </a:solidFill>
+                <a:latin typeface="微软雅黑" a:ea="微软雅黑"/>
+              </a:rPr>
+              <a:t>商情罗盘 MarketCompass · AI 应用大赛（产业应用 · 数据分析）</a:t>
+            </a:r>
+          </a:p>
+        </p:txBody>
+      </p:sp>
+      <p:sp>
+        <p:nvSpPr>
+          <p:cNvPr id="29" name="TextBox 28"/>
+          <p:cNvSpPr txBox="1"/>
+          <p:nvPr/>
+        </p:nvSpPr>
+        <p:spPr>
+          <a:xfrm>
+            <a:off x="11155680" y="6355080"/>
+            <a:ext cx="548640" cy="320040"/>
+          </a:xfrm>
+          <a:prstGeom prst="rect">
+            <a:avLst/>
+          </a:prstGeom>
+          <a:noFill/>
+        </p:spPr>
+        <p:txBody>
+          <a:bodyPr wrap="square" anchor="t">
+            <a:spAutoFit/>
+          </a:bodyPr>
+          <a:lstStyle/>
+          <a:p>
+            <a:pPr algn="r">
+              <a:lnSpc>
+                <a:spcPct val="115000"/>
+              </a:lnSpc>
+              <a:spcAft>
+                <a:spcPts val="600"/>
+              </a:spcAft>
+            </a:pPr>
+            <a:r>
+              <a:rPr sz="950" b="0">
+                <a:solidFill>
+                  <a:srgbClr val="6B7688"/>
+                </a:solidFill>
+                <a:latin typeface="微软雅黑" a:ea="微软雅黑"/>
+              </a:rPr>
+              <a:t>7</a:t>
+            </a:r>
+          </a:p>
+        </p:txBody>
+      </p:sp>
+    </p:spTree>
+  </p:cSld>
+  <p:clrMapOvr>
+    <a:masterClrMapping/>
+  </p:clrMapOvr>
+</p:sld>
+</file>
+
+<file path=ppt/slides/slide8.xml><?xml version="1.0" encoding="utf-8"?>
 <p:sld xmlns:a="http://schemas.openxmlformats.org/drawingml/2006/main" xmlns:p="http://schemas.openxmlformats.org/presentationml/2006/main" xmlns:r="http://schemas.openxmlformats.org/officeDocument/2006/relationships">
   <p:cSld>
     <p:spTree>
@@ -12411,7 +14797,7 @@
                 </a:solidFill>
                 <a:latin typeface="微软雅黑" a:ea="微软雅黑"/>
               </a:rPr>
-              <a:t>7</a:t>
+              <a:t>8</a:t>
             </a:r>
           </a:p>
         </p:txBody>
@@ -12424,7 +14810,7 @@
 </p:sld>
 </file>
 
-<file path=ppt/slides/slide8.xml><?xml version="1.0" encoding="utf-8"?>
+<file path=ppt/slides/slide9.xml><?xml version="1.0" encoding="utf-8"?>
 <p:sld xmlns:a="http://schemas.openxmlformats.org/drawingml/2006/main" xmlns:p="http://schemas.openxmlformats.org/presentationml/2006/main" xmlns:r="http://schemas.openxmlformats.org/officeDocument/2006/relationships">
   <p:cSld>
     <p:spTree>
@@ -13549,1024 +15935,6 @@
                 </a:solidFill>
                 <a:latin typeface="微软雅黑" a:ea="微软雅黑"/>
               </a:rPr>
-              <a:t>8</a:t>
-            </a:r>
-          </a:p>
-        </p:txBody>
-      </p:sp>
-    </p:spTree>
-  </p:cSld>
-  <p:clrMapOvr>
-    <a:masterClrMapping/>
-  </p:clrMapOvr>
-</p:sld>
-</file>
-
-<file path=ppt/slides/slide9.xml><?xml version="1.0" encoding="utf-8"?>
-<p:sld xmlns:a="http://schemas.openxmlformats.org/drawingml/2006/main" xmlns:p="http://schemas.openxmlformats.org/presentationml/2006/main" xmlns:r="http://schemas.openxmlformats.org/officeDocument/2006/relationships">
-  <p:cSld>
-    <p:spTree>
-      <p:nvGrpSpPr>
-        <p:cNvPr id="1" name=""/>
-        <p:cNvGrpSpPr/>
-        <p:nvPr/>
-      </p:nvGrpSpPr>
-      <p:grpSpPr/>
-      <p:sp>
-        <p:nvSpPr>
-          <p:cNvPr id="2" name="Rectangle 1"/>
-          <p:cNvSpPr/>
-          <p:nvPr/>
-        </p:nvSpPr>
-        <p:spPr>
-          <a:xfrm>
-            <a:off x="548640" y="475488"/>
-            <a:ext cx="100584" cy="457200"/>
-          </a:xfrm>
-          <a:prstGeom prst="rect">
-            <a:avLst/>
-          </a:prstGeom>
-          <a:solidFill>
-            <a:srgbClr val="2F6FEB"/>
-          </a:solidFill>
-          <a:ln>
-            <a:noFill/>
-          </a:ln>
-          <a:effectLst/>
-        </p:spPr>
-        <p:style>
-          <a:lnRef idx="1">
-            <a:schemeClr val="accent1"/>
-          </a:lnRef>
-          <a:fillRef idx="3">
-            <a:schemeClr val="accent1"/>
-          </a:fillRef>
-          <a:effectRef idx="2">
-            <a:schemeClr val="accent1"/>
-          </a:effectRef>
-          <a:fontRef idx="minor">
-            <a:schemeClr val="lt1"/>
-          </a:fontRef>
-        </p:style>
-        <p:txBody>
-          <a:bodyPr rtlCol="0" anchor="ctr"/>
-          <a:lstStyle/>
-          <a:p>
-            <a:pPr algn="ctr"/>
-          </a:p>
-        </p:txBody>
-      </p:sp>
-      <p:sp>
-        <p:nvSpPr>
-          <p:cNvPr id="3" name="TextBox 2"/>
-          <p:cNvSpPr txBox="1"/>
-          <p:nvPr/>
-        </p:nvSpPr>
-        <p:spPr>
-          <a:xfrm>
-            <a:off x="777240" y="402336"/>
-            <a:ext cx="10881360" cy="777240"/>
-          </a:xfrm>
-          <a:prstGeom prst="rect">
-            <a:avLst/>
-          </a:prstGeom>
-          <a:noFill/>
-        </p:spPr>
-        <p:txBody>
-          <a:bodyPr wrap="square" anchor="t">
-            <a:spAutoFit/>
-          </a:bodyPr>
-          <a:lstStyle/>
-          <a:p>
-            <a:pPr algn="l">
-              <a:lnSpc>
-                <a:spcPct val="115000"/>
-              </a:lnSpc>
-              <a:spcAft>
-                <a:spcPts val="200"/>
-              </a:spcAft>
-            </a:pPr>
-            <a:r>
-              <a:rPr sz="2500" b="1">
-                <a:solidFill>
-                  <a:srgbClr val="16233D"/>
-                </a:solidFill>
-                <a:latin typeface="微软雅黑" a:ea="微软雅黑"/>
-              </a:rPr>
-              <a:t>数据源与合规：能抓什么，不抓什么</a:t>
-            </a:r>
-          </a:p>
-          <a:p>
-            <a:pPr algn="l">
-              <a:lnSpc>
-                <a:spcPct val="115000"/>
-              </a:lnSpc>
-              <a:spcAft>
-                <a:spcPts val="600"/>
-              </a:spcAft>
-            </a:pPr>
-            <a:r>
-              <a:rPr sz="1250" b="0">
-                <a:solidFill>
-                  <a:srgbClr val="6B7688"/>
-                </a:solidFill>
-                <a:latin typeface="微软雅黑" a:ea="微软雅黑"/>
-              </a:rPr>
-              <a:t>合规不是答辩时的补丁，而是写进采集器的硬约束</a:t>
-            </a:r>
-          </a:p>
-        </p:txBody>
-      </p:sp>
-      <p:graphicFrame>
-        <p:nvGraphicFramePr>
-          <p:cNvPr id="4" name="Table 3"/>
-          <p:cNvGraphicFramePr>
-            <a:graphicFrameLocks noGrp="1"/>
-          </p:cNvGraphicFramePr>
-          <p:nvPr/>
-        </p:nvGraphicFramePr>
-        <p:xfrm>
-          <a:off x="685800" y="1645920"/>
-          <a:ext cx="5852160" cy="1737360"/>
-        </p:xfrm>
-        <a:graphic>
-          <a:graphicData uri="http://schemas.openxmlformats.org/drawingml/2006/table">
-            <a:tbl>
-              <a:tblPr firstRow="1" bandRow="1">
-                <a:tableStyleId>{5C22544A-7EE6-4342-B048-85BDC9FD1C3A}</a:tableStyleId>
-              </a:tblPr>
-              <a:tblGrid>
-                <a:gridCol w="1554480"/>
-                <a:gridCol w="2103120"/>
-                <a:gridCol w="2194560"/>
-              </a:tblGrid>
-              <a:tr h="434340">
-                <a:tc>
-                  <a:txBody>
-                    <a:bodyPr/>
-                    <a:lstStyle/>
-                    <a:p>
-                      <a:r>
-                        <a:rPr sz="1050" b="1">
-                          <a:solidFill>
-                            <a:srgbClr val="FFFFFF"/>
-                          </a:solidFill>
-                          <a:latin typeface="微软雅黑" a:ea="微软雅黑"/>
-                        </a:rPr>
-                        <a:t>数据源</a:t>
-                      </a:r>
-                    </a:p>
-                  </a:txBody>
-                  <a:tcPr marL="64008">
-                    <a:solidFill>
-                      <a:srgbClr val="2F6FEB"/>
-                    </a:solidFill>
-                  </a:tcPr>
-                </a:tc>
-                <a:tc>
-                  <a:txBody>
-                    <a:bodyPr/>
-                    <a:lstStyle/>
-                    <a:p>
-                      <a:r>
-                        <a:rPr sz="1050" b="1">
-                          <a:solidFill>
-                            <a:srgbClr val="FFFFFF"/>
-                          </a:solidFill>
-                          <a:latin typeface="微软雅黑" a:ea="微软雅黑"/>
-                        </a:rPr>
-                        <a:t>接入方式</a:t>
-                      </a:r>
-                    </a:p>
-                  </a:txBody>
-                  <a:tcPr marL="64008">
-                    <a:solidFill>
-                      <a:srgbClr val="2F6FEB"/>
-                    </a:solidFill>
-                  </a:tcPr>
-                </a:tc>
-                <a:tc>
-                  <a:txBody>
-                    <a:bodyPr/>
-                    <a:lstStyle/>
-                    <a:p>
-                      <a:r>
-                        <a:rPr sz="1050" b="1">
-                          <a:solidFill>
-                            <a:srgbClr val="FFFFFF"/>
-                          </a:solidFill>
-                          <a:latin typeface="微软雅黑" a:ea="微软雅黑"/>
-                        </a:rPr>
-                        <a:t>实测结果</a:t>
-                      </a:r>
-                    </a:p>
-                  </a:txBody>
-                  <a:tcPr marL="64008">
-                    <a:solidFill>
-                      <a:srgbClr val="2F6FEB"/>
-                    </a:solidFill>
-                  </a:tcPr>
-                </a:tc>
-              </a:tr>
-              <a:tr h="434340">
-                <a:tc>
-                  <a:txBody>
-                    <a:bodyPr/>
-                    <a:lstStyle/>
-                    <a:p>
-                      <a:r>
-                        <a:rPr sz="1000" b="0">
-                          <a:solidFill>
-                            <a:srgbClr val="6B7688"/>
-                          </a:solidFill>
-                          <a:latin typeface="微软雅黑" a:ea="微软雅黑"/>
-                        </a:rPr>
-                        <a:t>苏宁易购</a:t>
-                      </a:r>
-                    </a:p>
-                  </a:txBody>
-                  <a:tcPr marL="64008">
-                    <a:solidFill>
-                      <a:srgbClr val="FFFFFF"/>
-                    </a:solidFill>
-                  </a:tcPr>
-                </a:tc>
-                <a:tc>
-                  <a:txBody>
-                    <a:bodyPr/>
-                    <a:lstStyle/>
-                    <a:p>
-                      <a:r>
-                        <a:rPr sz="1000" b="0">
-                          <a:solidFill>
-                            <a:srgbClr val="6B7688"/>
-                          </a:solidFill>
-                          <a:latin typeface="微软雅黑" a:ea="微软雅黑"/>
-                        </a:rPr>
-                        <a:t>公开搜索结果页</a:t>
-                      </a:r>
-                    </a:p>
-                  </a:txBody>
-                  <a:tcPr marL="64008">
-                    <a:solidFill>
-                      <a:srgbClr val="FFFFFF"/>
-                    </a:solidFill>
-                  </a:tcPr>
-                </a:tc>
-                <a:tc>
-                  <a:txBody>
-                    <a:bodyPr/>
-                    <a:lstStyle/>
-                    <a:p>
-                      <a:r>
-                        <a:rPr sz="1000" b="0">
-                          <a:solidFill>
-                            <a:srgbClr val="6B7688"/>
-                          </a:solidFill>
-                          <a:latin typeface="微软雅黑" a:ea="微软雅黑"/>
-                        </a:rPr>
-                        <a:t>✅ 稳定解析 SKU/标题/卖点/评价数/店铺/排名</a:t>
-                      </a:r>
-                    </a:p>
-                  </a:txBody>
-                  <a:tcPr marL="64008">
-                    <a:solidFill>
-                      <a:srgbClr val="FFFFFF"/>
-                    </a:solidFill>
-                  </a:tcPr>
-                </a:tc>
-              </a:tr>
-              <a:tr h="434340">
-                <a:tc>
-                  <a:txBody>
-                    <a:bodyPr/>
-                    <a:lstStyle/>
-                    <a:p>
-                      <a:r>
-                        <a:rPr sz="1000" b="0">
-                          <a:solidFill>
-                            <a:srgbClr val="6B7688"/>
-                          </a:solidFill>
-                          <a:latin typeface="微软雅黑" a:ea="微软雅黑"/>
-                        </a:rPr>
-                        <a:t>官方开放平台</a:t>
-                      </a:r>
-                    </a:p>
-                  </a:txBody>
-                  <a:tcPr marL="64008">
-                    <a:solidFill>
-                      <a:srgbClr val="F5F7FA"/>
-                    </a:solidFill>
-                  </a:tcPr>
-                </a:tc>
-                <a:tc>
-                  <a:txBody>
-                    <a:bodyPr/>
-                    <a:lstStyle/>
-                    <a:p>
-                      <a:r>
-                        <a:rPr sz="1000" b="0">
-                          <a:solidFill>
-                            <a:srgbClr val="6B7688"/>
-                          </a:solidFill>
-                          <a:latin typeface="微软雅黑" a:ea="微软雅黑"/>
-                        </a:rPr>
-                        <a:t>淘宝 / 京东 / 拼多多授权接口</a:t>
-                      </a:r>
-                    </a:p>
-                  </a:txBody>
-                  <a:tcPr marL="64008">
-                    <a:solidFill>
-                      <a:srgbClr val="F5F7FA"/>
-                    </a:solidFill>
-                  </a:tcPr>
-                </a:tc>
-                <a:tc>
-                  <a:txBody>
-                    <a:bodyPr/>
-                    <a:lstStyle/>
-                    <a:p>
-                      <a:r>
-                        <a:rPr sz="1000" b="0">
-                          <a:solidFill>
-                            <a:srgbClr val="6B7688"/>
-                          </a:solidFill>
-                          <a:latin typeface="微软雅黑" a:ea="微软雅黑"/>
-                        </a:rPr>
-                        <a:t>✅ 适配器与配置向导完成，待凭据启用</a:t>
-                      </a:r>
-                    </a:p>
-                  </a:txBody>
-                  <a:tcPr marL="64008">
-                    <a:solidFill>
-                      <a:srgbClr val="F5F7FA"/>
-                    </a:solidFill>
-                  </a:tcPr>
-                </a:tc>
-              </a:tr>
-              <a:tr h="434340">
-                <a:tc>
-                  <a:txBody>
-                    <a:bodyPr/>
-                    <a:lstStyle/>
-                    <a:p>
-                      <a:r>
-                        <a:rPr sz="1000" b="0">
-                          <a:solidFill>
-                            <a:srgbClr val="6B7688"/>
-                          </a:solidFill>
-                          <a:latin typeface="微软雅黑" a:ea="微软雅黑"/>
-                        </a:rPr>
-                        <a:t>演示数据集</a:t>
-                      </a:r>
-                    </a:p>
-                  </a:txBody>
-                  <a:tcPr marL="64008">
-                    <a:solidFill>
-                      <a:srgbClr val="FFFFFF"/>
-                    </a:solidFill>
-                  </a:tcPr>
-                </a:tc>
-                <a:tc>
-                  <a:txBody>
-                    <a:bodyPr/>
-                    <a:lstStyle/>
-                    <a:p>
-                      <a:r>
-                        <a:rPr sz="1000" b="0">
-                          <a:solidFill>
-                            <a:srgbClr val="6B7688"/>
-                          </a:solidFill>
-                          <a:latin typeface="微软雅黑" a:ea="微软雅黑"/>
-                        </a:rPr>
-                        <a:t>本地合成</a:t>
-                      </a:r>
-                    </a:p>
-                  </a:txBody>
-                  <a:tcPr marL="64008">
-                    <a:solidFill>
-                      <a:srgbClr val="FFFFFF"/>
-                    </a:solidFill>
-                  </a:tcPr>
-                </a:tc>
-                <a:tc>
-                  <a:txBody>
-                    <a:bodyPr/>
-                    <a:lstStyle/>
-                    <a:p>
-                      <a:r>
-                        <a:rPr sz="1000" b="0">
-                          <a:solidFill>
-                            <a:srgbClr val="6B7688"/>
-                          </a:solidFill>
-                          <a:latin typeface="微软雅黑" a:ea="微软雅黑"/>
-                        </a:rPr>
-                        <a:t>✅ 4 大类 15 子类 / 356 条目 / 19,936 条日指标</a:t>
-                      </a:r>
-                    </a:p>
-                  </a:txBody>
-                  <a:tcPr marL="64008">
-                    <a:solidFill>
-                      <a:srgbClr val="FFFFFF"/>
-                    </a:solidFill>
-                  </a:tcPr>
-                </a:tc>
-              </a:tr>
-            </a:tbl>
-          </a:graphicData>
-        </a:graphic>
-      </p:graphicFrame>
-      <p:sp>
-        <p:nvSpPr>
-          <p:cNvPr id="5" name="Rounded Rectangle 4"/>
-          <p:cNvSpPr/>
-          <p:nvPr/>
-        </p:nvSpPr>
-        <p:spPr>
-          <a:xfrm>
-            <a:off x="685800" y="3611880"/>
-            <a:ext cx="5852160" cy="2286000"/>
-          </a:xfrm>
-          <a:prstGeom prst="roundRect">
-            <a:avLst/>
-          </a:prstGeom>
-          <a:solidFill>
-            <a:srgbClr val="FFFFFF"/>
-          </a:solidFill>
-          <a:ln w="9525">
-            <a:solidFill>
-              <a:srgbClr val="D8E0EE"/>
-            </a:solidFill>
-          </a:ln>
-          <a:effectLst/>
-        </p:spPr>
-        <p:style>
-          <a:lnRef idx="1">
-            <a:schemeClr val="accent1"/>
-          </a:lnRef>
-          <a:fillRef idx="3">
-            <a:schemeClr val="accent1"/>
-          </a:fillRef>
-          <a:effectRef idx="2">
-            <a:schemeClr val="accent1"/>
-          </a:effectRef>
-          <a:fontRef idx="minor">
-            <a:schemeClr val="lt1"/>
-          </a:fontRef>
-        </p:style>
-        <p:txBody>
-          <a:bodyPr rtlCol="0" anchor="ctr"/>
-          <a:lstStyle/>
-          <a:p>
-            <a:pPr algn="ctr"/>
-          </a:p>
-        </p:txBody>
-      </p:sp>
-      <p:sp>
-        <p:nvSpPr>
-          <p:cNvPr id="6" name="Rectangle 5"/>
-          <p:cNvSpPr/>
-          <p:nvPr/>
-        </p:nvSpPr>
-        <p:spPr>
-          <a:xfrm>
-            <a:off x="685800" y="3611880"/>
-            <a:ext cx="68580" cy="2286000"/>
-          </a:xfrm>
-          <a:prstGeom prst="rect">
-            <a:avLst/>
-          </a:prstGeom>
-          <a:solidFill>
-            <a:srgbClr val="0F8F80"/>
-          </a:solidFill>
-          <a:ln>
-            <a:noFill/>
-          </a:ln>
-          <a:effectLst/>
-        </p:spPr>
-        <p:style>
-          <a:lnRef idx="1">
-            <a:schemeClr val="accent1"/>
-          </a:lnRef>
-          <a:fillRef idx="3">
-            <a:schemeClr val="accent1"/>
-          </a:fillRef>
-          <a:effectRef idx="2">
-            <a:schemeClr val="accent1"/>
-          </a:effectRef>
-          <a:fontRef idx="minor">
-            <a:schemeClr val="lt1"/>
-          </a:fontRef>
-        </p:style>
-        <p:txBody>
-          <a:bodyPr rtlCol="0" anchor="ctr"/>
-          <a:lstStyle/>
-          <a:p>
-            <a:pPr algn="ctr"/>
-          </a:p>
-        </p:txBody>
-      </p:sp>
-      <p:sp>
-        <p:nvSpPr>
-          <p:cNvPr id="7" name="TextBox 6"/>
-          <p:cNvSpPr txBox="1"/>
-          <p:nvPr/>
-        </p:nvSpPr>
-        <p:spPr>
-          <a:xfrm>
-            <a:off x="941832" y="3776472"/>
-            <a:ext cx="5394960" cy="2011680"/>
-          </a:xfrm>
-          <a:prstGeom prst="rect">
-            <a:avLst/>
-          </a:prstGeom>
-          <a:noFill/>
-        </p:spPr>
-        <p:txBody>
-          <a:bodyPr wrap="square" anchor="t">
-            <a:spAutoFit/>
-          </a:bodyPr>
-          <a:lstStyle/>
-          <a:p>
-            <a:pPr algn="l">
-              <a:lnSpc>
-                <a:spcPct val="115000"/>
-              </a:lnSpc>
-              <a:spcAft>
-                <a:spcPts val="600"/>
-              </a:spcAft>
-            </a:pPr>
-            <a:r>
-              <a:rPr sz="1600" b="1">
-                <a:solidFill>
-                  <a:srgbClr val="16233D"/>
-                </a:solidFill>
-                <a:latin typeface="微软雅黑" a:ea="微软雅黑"/>
-              </a:rPr>
-              <a:t>合规红线（已写入代码）</a:t>
-            </a:r>
-          </a:p>
-          <a:p>
-            <a:pPr algn="l">
-              <a:lnSpc>
-                <a:spcPct val="125000"/>
-              </a:lnSpc>
-              <a:spcAft>
-                <a:spcPts val="400"/>
-              </a:spcAft>
-            </a:pPr>
-            <a:r>
-              <a:rPr sz="1250" b="0">
-                <a:solidFill>
-                  <a:srgbClr val="6B7688"/>
-                </a:solidFill>
-                <a:latin typeface="微软雅黑" a:ea="微软雅黑"/>
-              </a:rPr>
-              <a:t>遵守 robots.txt，且识别「robots.txt 被返回成首页 HTML」的陷阱</a:t>
-            </a:r>
-          </a:p>
-          <a:p>
-            <a:pPr algn="l">
-              <a:lnSpc>
-                <a:spcPct val="125000"/>
-              </a:lnSpc>
-              <a:spcAft>
-                <a:spcPts val="400"/>
-              </a:spcAft>
-            </a:pPr>
-            <a:r>
-              <a:rPr sz="1250" b="0">
-                <a:solidFill>
-                  <a:srgbClr val="6B7688"/>
-                </a:solidFill>
-                <a:latin typeface="微软雅黑" a:ea="微软雅黑"/>
-              </a:rPr>
-              <a:t>默认限速 3 秒/请求，不并发、不重试轰炸</a:t>
-            </a:r>
-          </a:p>
-          <a:p>
-            <a:pPr algn="l">
-              <a:lnSpc>
-                <a:spcPct val="125000"/>
-              </a:lnSpc>
-              <a:spcAft>
-                <a:spcPts val="400"/>
-              </a:spcAft>
-            </a:pPr>
-            <a:r>
-              <a:rPr sz="1250" b="0">
-                <a:solidFill>
-                  <a:srgbClr val="6B7688"/>
-                </a:solidFill>
-                <a:latin typeface="微软雅黑" a:ea="微软雅黑"/>
-              </a:rPr>
-              <a:t>不采集任何个人信息（无用户 ID、无评论正文）</a:t>
-            </a:r>
-          </a:p>
-          <a:p>
-            <a:pPr algn="l">
-              <a:lnSpc>
-                <a:spcPct val="125000"/>
-              </a:lnSpc>
-              <a:spcAft>
-                <a:spcPts val="400"/>
-              </a:spcAft>
-            </a:pPr>
-            <a:r>
-              <a:rPr sz="1250" b="0">
-                <a:solidFill>
-                  <a:srgbClr val="6B7688"/>
-                </a:solidFill>
-                <a:latin typeface="微软雅黑" a:ea="微软雅黑"/>
-              </a:rPr>
-              <a:t>不绕过登录与风控；被禁止的平台直接不抓</a:t>
-            </a:r>
-          </a:p>
-          <a:p>
-            <a:pPr algn="l">
-              <a:lnSpc>
-                <a:spcPct val="125000"/>
-              </a:lnSpc>
-              <a:spcAft>
-                <a:spcPts val="400"/>
-              </a:spcAft>
-            </a:pPr>
-            <a:r>
-              <a:rPr sz="1250" b="0">
-                <a:solidFill>
-                  <a:srgbClr val="6B7688"/>
-                </a:solidFill>
-                <a:latin typeface="微软雅黑" a:ea="微软雅黑"/>
-              </a:rPr>
-              <a:t>每次采集写审计台账：来源 / URL / 时间 / robots 判定 / 字段 / 批次</a:t>
-            </a:r>
-          </a:p>
-        </p:txBody>
-      </p:sp>
-      <p:sp>
-        <p:nvSpPr>
-          <p:cNvPr id="8" name="Rounded Rectangle 7"/>
-          <p:cNvSpPr/>
-          <p:nvPr/>
-        </p:nvSpPr>
-        <p:spPr>
-          <a:xfrm>
-            <a:off x="6858000" y="1645920"/>
-            <a:ext cx="4709160" cy="4251960"/>
-          </a:xfrm>
-          <a:prstGeom prst="roundRect">
-            <a:avLst/>
-          </a:prstGeom>
-          <a:solidFill>
-            <a:srgbClr val="FFFFFF"/>
-          </a:solidFill>
-          <a:ln w="9525">
-            <a:solidFill>
-              <a:srgbClr val="D8E0EE"/>
-            </a:solidFill>
-          </a:ln>
-          <a:effectLst/>
-        </p:spPr>
-        <p:style>
-          <a:lnRef idx="1">
-            <a:schemeClr val="accent1"/>
-          </a:lnRef>
-          <a:fillRef idx="3">
-            <a:schemeClr val="accent1"/>
-          </a:fillRef>
-          <a:effectRef idx="2">
-            <a:schemeClr val="accent1"/>
-          </a:effectRef>
-          <a:fontRef idx="minor">
-            <a:schemeClr val="lt1"/>
-          </a:fontRef>
-        </p:style>
-        <p:txBody>
-          <a:bodyPr rtlCol="0" anchor="ctr"/>
-          <a:lstStyle/>
-          <a:p>
-            <a:pPr algn="ctr"/>
-          </a:p>
-        </p:txBody>
-      </p:sp>
-      <p:sp>
-        <p:nvSpPr>
-          <p:cNvPr id="9" name="Rectangle 8"/>
-          <p:cNvSpPr/>
-          <p:nvPr/>
-        </p:nvSpPr>
-        <p:spPr>
-          <a:xfrm>
-            <a:off x="6858000" y="1645920"/>
-            <a:ext cx="68580" cy="4251960"/>
-          </a:xfrm>
-          <a:prstGeom prst="rect">
-            <a:avLst/>
-          </a:prstGeom>
-          <a:solidFill>
-            <a:srgbClr val="B06608"/>
-          </a:solidFill>
-          <a:ln>
-            <a:noFill/>
-          </a:ln>
-          <a:effectLst/>
-        </p:spPr>
-        <p:style>
-          <a:lnRef idx="1">
-            <a:schemeClr val="accent1"/>
-          </a:lnRef>
-          <a:fillRef idx="3">
-            <a:schemeClr val="accent1"/>
-          </a:fillRef>
-          <a:effectRef idx="2">
-            <a:schemeClr val="accent1"/>
-          </a:effectRef>
-          <a:fontRef idx="minor">
-            <a:schemeClr val="lt1"/>
-          </a:fontRef>
-        </p:style>
-        <p:txBody>
-          <a:bodyPr rtlCol="0" anchor="ctr"/>
-          <a:lstStyle/>
-          <a:p>
-            <a:pPr algn="ctr"/>
-          </a:p>
-        </p:txBody>
-      </p:sp>
-      <p:sp>
-        <p:nvSpPr>
-          <p:cNvPr id="10" name="TextBox 9"/>
-          <p:cNvSpPr txBox="1"/>
-          <p:nvPr/>
-        </p:nvSpPr>
-        <p:spPr>
-          <a:xfrm>
-            <a:off x="7114032" y="1810512"/>
-            <a:ext cx="4251960" cy="3977640"/>
-          </a:xfrm>
-          <a:prstGeom prst="rect">
-            <a:avLst/>
-          </a:prstGeom>
-          <a:noFill/>
-        </p:spPr>
-        <p:txBody>
-          <a:bodyPr wrap="square" anchor="t">
-            <a:spAutoFit/>
-          </a:bodyPr>
-          <a:lstStyle/>
-          <a:p>
-            <a:pPr algn="l">
-              <a:lnSpc>
-                <a:spcPct val="115000"/>
-              </a:lnSpc>
-              <a:spcAft>
-                <a:spcPts val="600"/>
-              </a:spcAft>
-            </a:pPr>
-            <a:r>
-              <a:rPr sz="1600" b="1">
-                <a:solidFill>
-                  <a:srgbClr val="16233D"/>
-                </a:solidFill>
-                <a:latin typeface="微软雅黑" a:ea="微软雅黑"/>
-              </a:rPr>
-              <a:t>为什么坚持合规路线</a:t>
-            </a:r>
-          </a:p>
-          <a:p>
-            <a:pPr algn="l">
-              <a:lnSpc>
-                <a:spcPct val="125000"/>
-              </a:lnSpc>
-              <a:spcAft>
-                <a:spcPts val="400"/>
-              </a:spcAft>
-            </a:pPr>
-            <a:r>
-              <a:rPr sz="1250" b="0">
-                <a:solidFill>
-                  <a:srgbClr val="6B7688"/>
-                </a:solidFill>
-                <a:latin typeface="微软雅黑" a:ea="微软雅黑"/>
-              </a:rPr>
-              <a:t>灰产式抓包（逆向 App 接口、绕过签名与验证码）违反平台协议，</a:t>
-            </a:r>
-          </a:p>
-          <a:p>
-            <a:pPr algn="l">
-              <a:lnSpc>
-                <a:spcPct val="125000"/>
-              </a:lnSpc>
-              <a:spcAft>
-                <a:spcPts val="400"/>
-              </a:spcAft>
-            </a:pPr>
-            <a:r>
-              <a:rPr sz="1250" b="0">
-                <a:solidFill>
-                  <a:srgbClr val="6B7688"/>
-                </a:solidFill>
-                <a:latin typeface="微软雅黑" a:ea="微软雅黑"/>
-              </a:rPr>
-              <a:t>可能触及《反不正当竞争法》《数据安全法》，</a:t>
-            </a:r>
-          </a:p>
-          <a:p>
-            <a:pPr algn="l">
-              <a:lnSpc>
-                <a:spcPct val="125000"/>
-              </a:lnSpc>
-              <a:spcAft>
-                <a:spcPts val="400"/>
-              </a:spcAft>
-            </a:pPr>
-            <a:r>
-              <a:rPr sz="1250" b="0">
-                <a:solidFill>
-                  <a:srgbClr val="6B7688"/>
-                </a:solidFill>
-                <a:latin typeface="微软雅黑" a:ea="微软雅黑"/>
-              </a:rPr>
-              <a:t>在产业应用赛道属于一票否决风险。</a:t>
-            </a:r>
-          </a:p>
-          <a:p>
-            <a:pPr algn="l">
-              <a:lnSpc>
-                <a:spcPct val="125000"/>
-              </a:lnSpc>
-              <a:spcAft>
-                <a:spcPts val="400"/>
-              </a:spcAft>
-            </a:pPr>
-          </a:p>
-          <a:p>
-            <a:pPr algn="l">
-              <a:lnSpc>
-                <a:spcPct val="125000"/>
-              </a:lnSpc>
-              <a:spcAft>
-                <a:spcPts val="400"/>
-              </a:spcAft>
-            </a:pPr>
-            <a:r>
-              <a:rPr sz="1250" b="0">
-                <a:solidFill>
-                  <a:srgbClr val="6B7688"/>
-                </a:solidFill>
-                <a:latin typeface="微软雅黑" a:ea="微软雅黑"/>
-              </a:rPr>
-              <a:t>我们选择：公开数据 + 官方授权接口 + 用户授权导入，</a:t>
-            </a:r>
-          </a:p>
-          <a:p>
-            <a:pPr algn="l">
-              <a:lnSpc>
-                <a:spcPct val="125000"/>
-              </a:lnSpc>
-              <a:spcAft>
-                <a:spcPts val="400"/>
-              </a:spcAft>
-            </a:pPr>
-            <a:r>
-              <a:rPr sz="1250" b="0">
-                <a:solidFill>
-                  <a:srgbClr val="6B7688"/>
-                </a:solidFill>
-                <a:latin typeface="微软雅黑" a:ea="微软雅黑"/>
-              </a:rPr>
-              <a:t>并把每次采集的合规判定写进审计台账，</a:t>
-            </a:r>
-          </a:p>
-          <a:p>
-            <a:pPr algn="l">
-              <a:lnSpc>
-                <a:spcPct val="125000"/>
-              </a:lnSpc>
-              <a:spcAft>
-                <a:spcPts val="400"/>
-              </a:spcAft>
-            </a:pPr>
-            <a:r>
-              <a:rPr sz="1250" b="0">
-                <a:solidFill>
-                  <a:srgbClr val="6B7688"/>
-                </a:solidFill>
-                <a:latin typeface="微软雅黑" a:ea="微软雅黑"/>
-              </a:rPr>
-              <a:t>答辩时可以直接回答「这条数据哪来的」。</a:t>
-            </a:r>
-          </a:p>
-          <a:p>
-            <a:pPr algn="l">
-              <a:lnSpc>
-                <a:spcPct val="125000"/>
-              </a:lnSpc>
-              <a:spcAft>
-                <a:spcPts val="400"/>
-              </a:spcAft>
-            </a:pPr>
-          </a:p>
-          <a:p>
-            <a:pPr algn="l">
-              <a:lnSpc>
-                <a:spcPct val="125000"/>
-              </a:lnSpc>
-              <a:spcAft>
-                <a:spcPts val="400"/>
-              </a:spcAft>
-            </a:pPr>
-            <a:r>
-              <a:rPr sz="1250" b="0">
-                <a:solidFill>
-                  <a:srgbClr val="6B7688"/>
-                </a:solidFill>
-                <a:latin typeface="微软雅黑" a:ea="微软雅黑"/>
-              </a:rPr>
-              <a:t>代价是数据完整度不如灰产，收益是产品可以真的落地。</a:t>
-            </a:r>
-          </a:p>
-        </p:txBody>
-      </p:sp>
-      <p:sp>
-        <p:nvSpPr>
-          <p:cNvPr id="11" name="TextBox 10"/>
-          <p:cNvSpPr txBox="1"/>
-          <p:nvPr/>
-        </p:nvSpPr>
-        <p:spPr>
-          <a:xfrm>
-            <a:off x="548640" y="6355080"/>
-            <a:ext cx="7315200" cy="320040"/>
-          </a:xfrm>
-          <a:prstGeom prst="rect">
-            <a:avLst/>
-          </a:prstGeom>
-          <a:noFill/>
-        </p:spPr>
-        <p:txBody>
-          <a:bodyPr wrap="square" anchor="t">
-            <a:spAutoFit/>
-          </a:bodyPr>
-          <a:lstStyle/>
-          <a:p>
-            <a:pPr algn="l">
-              <a:lnSpc>
-                <a:spcPct val="115000"/>
-              </a:lnSpc>
-              <a:spcAft>
-                <a:spcPts val="600"/>
-              </a:spcAft>
-            </a:pPr>
-            <a:r>
-              <a:rPr sz="950" b="0">
-                <a:solidFill>
-                  <a:srgbClr val="6B7688"/>
-                </a:solidFill>
-                <a:latin typeface="微软雅黑" a:ea="微软雅黑"/>
-              </a:rPr>
-              <a:t>商情罗盘 MarketCompass · AI 应用大赛（产业应用 · 数据分析）</a:t>
-            </a:r>
-          </a:p>
-        </p:txBody>
-      </p:sp>
-      <p:sp>
-        <p:nvSpPr>
-          <p:cNvPr id="12" name="TextBox 11"/>
-          <p:cNvSpPr txBox="1"/>
-          <p:nvPr/>
-        </p:nvSpPr>
-        <p:spPr>
-          <a:xfrm>
-            <a:off x="11155680" y="6355080"/>
-            <a:ext cx="548640" cy="320040"/>
-          </a:xfrm>
-          <a:prstGeom prst="rect">
-            <a:avLst/>
-          </a:prstGeom>
-          <a:noFill/>
-        </p:spPr>
-        <p:txBody>
-          <a:bodyPr wrap="square" anchor="t">
-            <a:spAutoFit/>
-          </a:bodyPr>
-          <a:lstStyle/>
-          <a:p>
-            <a:pPr algn="r">
-              <a:lnSpc>
-                <a:spcPct val="115000"/>
-              </a:lnSpc>
-              <a:spcAft>
-                <a:spcPts val="600"/>
-              </a:spcAft>
-            </a:pPr>
-            <a:r>
-              <a:rPr sz="950" b="0">
-                <a:solidFill>
-                  <a:srgbClr val="6B7688"/>
-                </a:solidFill>
-                <a:latin typeface="微软雅黑" a:ea="微软雅黑"/>
-              </a:rPr>
               <a:t>9</a:t>
             </a:r>
           </a:p>

--- a/docs/参赛材料/02-演示PPT.pptx
+++ b/docs/参赛材料/02-演示PPT.pptx
@@ -13585,7 +13585,7 @@
                 </a:solidFill>
                 <a:latin typeface="微软雅黑" a:ea="微软雅黑"/>
               </a:rPr>
-              <a:t>答：该指标显示 CR5 为 0.8979、brand_cr3 为 1.0，集中度很高，但 avg_confidence 仅 0.433……</a:t>
+              <a:t>答：CR5 高达 0.8979、brand_cr3 为 1.0，头部几乎垄断可见份额，不建议正面硬拼；建议先用小预算测细分场景……</a:t>
             </a:r>
           </a:p>
           <a:p>
@@ -13604,7 +13604,7 @@
                 </a:solidFill>
                 <a:latin typeface="微软雅黑" a:ea="微软雅黑"/>
               </a:rPr>
-              <a:t>✅ 校验：回答中 8 个数字全部可溯源（citations）</a:t>
+              <a:t>✅ 校验：回答中 11 个数字全部可溯源（citations）</a:t>
             </a:r>
           </a:p>
         </p:txBody>

--- a/docs/参赛材料/02-演示PPT.pptx
+++ b/docs/参赛材料/02-演示PPT.pptx
@@ -4895,7 +4895,7 @@
                 </a:solidFill>
                 <a:latin typeface="微软雅黑" a:ea="微软雅黑"/>
               </a:rPr>
-              <a:t>62</a:t>
+              <a:t>63</a:t>
             </a:r>
           </a:p>
           <a:p>
@@ -4933,7 +4933,7 @@
                 </a:solidFill>
                 <a:latin typeface="微软雅黑" a:ea="微软雅黑"/>
               </a:rPr>
-              <a:t>35 端到端 + 18 适配器 + 9 AI 溯源</a:t>
+              <a:t>35 端到端 + 18 适配器 + 10 AI 溯源</a:t>
             </a:r>
           </a:p>
         </p:txBody>
@@ -7155,7 +7155,7 @@
                 </a:solidFill>
                 <a:latin typeface="微软雅黑" a:ea="微软雅黑"/>
               </a:rPr>
-              <a:t>80 个真实商品已入库   ·   20,082 条日指标   ·   62 项测试通过   ·   0 第三方依赖</a:t>
+              <a:t>80 个真实商品已入库   ·   20,082 条日指标   ·   63 项测试通过   ·   0 第三方依赖</a:t>
             </a:r>
           </a:p>
           <a:p>
@@ -13585,7 +13585,7 @@
                 </a:solidFill>
                 <a:latin typeface="微软雅黑" a:ea="微软雅黑"/>
               </a:rPr>
-              <a:t>答：CR5 高达 0.8979、brand_cr3 为 1.0，头部几乎垄断可见份额，不建议正面硬拼；建议先用小预算测细分场景……</a:t>
+              <a:t>答：前五名商品集中度高达 0.8979、前三品牌份额为 1.0，头部几乎垄断可见份额，不建议正面硬拼……</a:t>
             </a:r>
           </a:p>
           <a:p>

--- a/docs/参赛材料/02-演示PPT.pptx
+++ b/docs/参赛材料/02-演示PPT.pptx
@@ -18,6 +18,7 @@
     <p:sldId id="266" r:id="rId17"/>
     <p:sldId id="267" r:id="rId18"/>
     <p:sldId id="268" r:id="rId19"/>
+    <p:sldId id="269" r:id="rId20"/>
   </p:sldIdLst>
   <p:sldSz cx="12191695" cy="6858000" type="screen4x3"/>
   <p:notesSz cx="6858000" cy="9144000"/>
@@ -4319,7 +4320,7 @@
                 </a:solidFill>
                 <a:latin typeface="微软雅黑" a:ea="微软雅黑"/>
               </a:rPr>
-              <a:t>答辩时可以直接回答「这条数据哪来的」。</a:t>
+              <a:t>这条审计链让「数据哪来的」永远有答案。</a:t>
             </a:r>
           </a:p>
           <a:p>
@@ -5663,6 +5664,295 @@
                 </a:solidFill>
                 <a:latin typeface="微软雅黑" a:ea="微软雅黑"/>
               </a:rPr>
+              <a:t>产品界面实拍</a:t>
+            </a:r>
+          </a:p>
+          <a:p>
+            <a:pPr algn="l">
+              <a:lnSpc>
+                <a:spcPct val="115000"/>
+              </a:lnSpc>
+              <a:spcAft>
+                <a:spcPts val="600"/>
+              </a:spcAft>
+            </a:pPr>
+            <a:r>
+              <a:rPr sz="1250" b="0">
+                <a:solidFill>
+                  <a:srgbClr val="6B7688"/>
+                </a:solidFill>
+                <a:latin typeface="微软雅黑" a:ea="微软雅黑"/>
+              </a:rPr>
+              <a:t>真实运行截屏，未经修饰 · 顶栏可见 AI 模式与数据窗口；第 1 张含演示数据（全量视角），第 2、3 张为苏宁真实数据</a:t>
+            </a:r>
+          </a:p>
+        </p:txBody>
+      </p:sp>
+      <p:pic>
+        <p:nvPicPr>
+          <p:cNvPr id="4" name="Picture 3" descr="屏幕截图 2026-10-18 033450.png"/>
+          <p:cNvPicPr>
+            <a:picLocks noChangeAspect="1"/>
+          </p:cNvPicPr>
+          <p:nvPr/>
+        </p:nvPicPr>
+        <p:blipFill>
+          <a:blip r:embed="rId2"/>
+          <a:stretch>
+            <a:fillRect/>
+          </a:stretch>
+        </p:blipFill>
+        <p:spPr>
+          <a:xfrm>
+            <a:off x="777240" y="1417320"/>
+            <a:ext cx="5257800" cy="2912937"/>
+          </a:xfrm>
+          <a:prstGeom prst="rect">
+            <a:avLst/>
+          </a:prstGeom>
+          <a:ln w="9525">
+            <a:solidFill>
+              <a:srgbClr val="D8E0EE"/>
+            </a:solidFill>
+          </a:ln>
+        </p:spPr>
+      </p:pic>
+      <p:pic>
+        <p:nvPicPr>
+          <p:cNvPr id="5" name="Picture 4" descr="屏幕截图 2026-10-18 033541.png"/>
+          <p:cNvPicPr>
+            <a:picLocks noChangeAspect="1"/>
+          </p:cNvPicPr>
+          <p:nvPr/>
+        </p:nvPicPr>
+        <p:blipFill>
+          <a:blip r:embed="rId3"/>
+          <a:stretch>
+            <a:fillRect/>
+          </a:stretch>
+        </p:blipFill>
+        <p:spPr>
+          <a:xfrm>
+            <a:off x="6217920" y="1417320"/>
+            <a:ext cx="5257800" cy="2899568"/>
+          </a:xfrm>
+          <a:prstGeom prst="rect">
+            <a:avLst/>
+          </a:prstGeom>
+          <a:ln w="9525">
+            <a:solidFill>
+              <a:srgbClr val="D8E0EE"/>
+            </a:solidFill>
+          </a:ln>
+        </p:spPr>
+      </p:pic>
+      <p:pic>
+        <p:nvPicPr>
+          <p:cNvPr id="6" name="Picture 5" descr="屏幕截图 2026-10-18 034001.png"/>
+          <p:cNvPicPr>
+            <a:picLocks noChangeAspect="1"/>
+          </p:cNvPicPr>
+          <p:nvPr/>
+        </p:nvPicPr>
+        <p:blipFill>
+          <a:blip r:embed="rId4"/>
+          <a:stretch>
+            <a:fillRect/>
+          </a:stretch>
+        </p:blipFill>
+        <p:spPr>
+          <a:xfrm>
+            <a:off x="777240" y="4494848"/>
+            <a:ext cx="10241280" cy="1793252"/>
+          </a:xfrm>
+          <a:prstGeom prst="rect">
+            <a:avLst/>
+          </a:prstGeom>
+        </p:spPr>
+      </p:pic>
+      <p:sp>
+        <p:nvSpPr>
+          <p:cNvPr id="7" name="TextBox 6"/>
+          <p:cNvSpPr txBox="1"/>
+          <p:nvPr/>
+        </p:nvSpPr>
+        <p:spPr>
+          <a:xfrm>
+            <a:off x="548640" y="6355080"/>
+            <a:ext cx="7315200" cy="320040"/>
+          </a:xfrm>
+          <a:prstGeom prst="rect">
+            <a:avLst/>
+          </a:prstGeom>
+          <a:noFill/>
+        </p:spPr>
+        <p:txBody>
+          <a:bodyPr wrap="square" anchor="t">
+            <a:spAutoFit/>
+          </a:bodyPr>
+          <a:lstStyle/>
+          <a:p>
+            <a:pPr algn="l">
+              <a:lnSpc>
+                <a:spcPct val="115000"/>
+              </a:lnSpc>
+              <a:spcAft>
+                <a:spcPts val="600"/>
+              </a:spcAft>
+            </a:pPr>
+            <a:r>
+              <a:rPr sz="950" b="0">
+                <a:solidFill>
+                  <a:srgbClr val="6B7688"/>
+                </a:solidFill>
+                <a:latin typeface="微软雅黑" a:ea="微软雅黑"/>
+              </a:rPr>
+              <a:t>商情罗盘 MarketCompass · AI 应用大赛（产业应用 · 数据分析）</a:t>
+            </a:r>
+          </a:p>
+        </p:txBody>
+      </p:sp>
+      <p:sp>
+        <p:nvSpPr>
+          <p:cNvPr id="8" name="TextBox 7"/>
+          <p:cNvSpPr txBox="1"/>
+          <p:nvPr/>
+        </p:nvSpPr>
+        <p:spPr>
+          <a:xfrm>
+            <a:off x="11155680" y="6355080"/>
+            <a:ext cx="548640" cy="320040"/>
+          </a:xfrm>
+          <a:prstGeom prst="rect">
+            <a:avLst/>
+          </a:prstGeom>
+          <a:noFill/>
+        </p:spPr>
+        <p:txBody>
+          <a:bodyPr wrap="square" anchor="t">
+            <a:spAutoFit/>
+          </a:bodyPr>
+          <a:lstStyle/>
+          <a:p>
+            <a:pPr algn="r">
+              <a:lnSpc>
+                <a:spcPct val="115000"/>
+              </a:lnSpc>
+              <a:spcAft>
+                <a:spcPts val="600"/>
+              </a:spcAft>
+            </a:pPr>
+            <a:r>
+              <a:rPr sz="950" b="0">
+                <a:solidFill>
+                  <a:srgbClr val="6B7688"/>
+                </a:solidFill>
+                <a:latin typeface="微软雅黑" a:ea="微软雅黑"/>
+              </a:rPr>
+              <a:t>12</a:t>
+            </a:r>
+          </a:p>
+        </p:txBody>
+      </p:sp>
+    </p:spTree>
+  </p:cSld>
+  <p:clrMapOvr>
+    <a:masterClrMapping/>
+  </p:clrMapOvr>
+</p:sld>
+</file>
+
+<file path=ppt/slides/slide13.xml><?xml version="1.0" encoding="utf-8"?>
+<p:sld xmlns:a="http://schemas.openxmlformats.org/drawingml/2006/main" xmlns:p="http://schemas.openxmlformats.org/presentationml/2006/main" xmlns:r="http://schemas.openxmlformats.org/officeDocument/2006/relationships">
+  <p:cSld>
+    <p:spTree>
+      <p:nvGrpSpPr>
+        <p:cNvPr id="1" name=""/>
+        <p:cNvGrpSpPr/>
+        <p:nvPr/>
+      </p:nvGrpSpPr>
+      <p:grpSpPr/>
+      <p:sp>
+        <p:nvSpPr>
+          <p:cNvPr id="2" name="Rectangle 1"/>
+          <p:cNvSpPr/>
+          <p:nvPr/>
+        </p:nvSpPr>
+        <p:spPr>
+          <a:xfrm>
+            <a:off x="548640" y="475488"/>
+            <a:ext cx="100584" cy="457200"/>
+          </a:xfrm>
+          <a:prstGeom prst="rect">
+            <a:avLst/>
+          </a:prstGeom>
+          <a:solidFill>
+            <a:srgbClr val="2F6FEB"/>
+          </a:solidFill>
+          <a:ln>
+            <a:noFill/>
+          </a:ln>
+          <a:effectLst/>
+        </p:spPr>
+        <p:style>
+          <a:lnRef idx="1">
+            <a:schemeClr val="accent1"/>
+          </a:lnRef>
+          <a:fillRef idx="3">
+            <a:schemeClr val="accent1"/>
+          </a:fillRef>
+          <a:effectRef idx="2">
+            <a:schemeClr val="accent1"/>
+          </a:effectRef>
+          <a:fontRef idx="minor">
+            <a:schemeClr val="lt1"/>
+          </a:fontRef>
+        </p:style>
+        <p:txBody>
+          <a:bodyPr rtlCol="0" anchor="ctr"/>
+          <a:lstStyle/>
+          <a:p>
+            <a:pPr algn="ctr"/>
+          </a:p>
+        </p:txBody>
+      </p:sp>
+      <p:sp>
+        <p:nvSpPr>
+          <p:cNvPr id="3" name="TextBox 2"/>
+          <p:cNvSpPr txBox="1"/>
+          <p:nvPr/>
+        </p:nvSpPr>
+        <p:spPr>
+          <a:xfrm>
+            <a:off x="777240" y="402336"/>
+            <a:ext cx="10881360" cy="777240"/>
+          </a:xfrm>
+          <a:prstGeom prst="rect">
+            <a:avLst/>
+          </a:prstGeom>
+          <a:noFill/>
+        </p:spPr>
+        <p:txBody>
+          <a:bodyPr wrap="square" anchor="t">
+            <a:spAutoFit/>
+          </a:bodyPr>
+          <a:lstStyle/>
+          <a:p>
+            <a:pPr algn="l">
+              <a:lnSpc>
+                <a:spcPct val="115000"/>
+              </a:lnSpc>
+              <a:spcAft>
+                <a:spcPts val="200"/>
+              </a:spcAft>
+            </a:pPr>
+            <a:r>
+              <a:rPr sz="2500" b="1">
+                <a:solidFill>
+                  <a:srgbClr val="16233D"/>
+                </a:solidFill>
+                <a:latin typeface="微软雅黑" a:ea="微软雅黑"/>
+              </a:rPr>
               <a:t>产业价值与落地路径</a:t>
             </a:r>
           </a:p>
@@ -6902,7 +7192,7 @@
                 </a:solidFill>
                 <a:latin typeface="微软雅黑" a:ea="微软雅黑"/>
               </a:rPr>
-              <a:t>12</a:t>
+              <a:t>13</a:t>
             </a:r>
           </a:p>
         </p:txBody>
@@ -6915,7 +7205,7 @@
 </p:sld>
 </file>
 
-<file path=ppt/slides/slide13.xml><?xml version="1.0" encoding="utf-8"?>
+<file path=ppt/slides/slide14.xml><?xml version="1.0" encoding="utf-8"?>
 <p:sld xmlns:a="http://schemas.openxmlformats.org/drawingml/2006/main" xmlns:p="http://schemas.openxmlformats.org/presentationml/2006/main" xmlns:r="http://schemas.openxmlformats.org/officeDocument/2006/relationships">
   <p:cSld>
     <p:spTree>

--- a/docs/参赛材料/02-演示PPT.pptx
+++ b/docs/参赛材料/02-演示PPT.pptx
@@ -10528,7 +10528,7 @@
                 </a:solidFill>
                 <a:latin typeface="微软雅黑" a:ea="微软雅黑"/>
               </a:rPr>
-              <a:t>清洗标准化 · 跨平台同款对齐 · SPS 指标引擎（四种口径） · 评价挖掘</a:t>
+              <a:t>清洗标准化 · 跨平台同款对齐 · SPS 指标引擎（五种口径） · 评价挖掘</a:t>
             </a:r>
           </a:p>
         </p:txBody>

--- a/docs/参赛材料/02-演示PPT.pptx
+++ b/docs/参赛材料/02-演示PPT.pptx
@@ -5683,14 +5683,14 @@
                 </a:solidFill>
                 <a:latin typeface="微软雅黑" a:ea="微软雅黑"/>
               </a:rPr>
-              <a:t>真实运行截屏，未经修饰 · 顶栏可见 AI 模式与数据窗口；第 1 张含演示数据（全量视角），第 2、3 张为苏宁真实数据</a:t>
+              <a:t>真实运行截屏 · AI 选品参谋（能力栈 + 建议报告）/ BYOK 接入面板 / AI 接入入口</a:t>
             </a:r>
           </a:p>
         </p:txBody>
       </p:sp>
       <p:pic>
         <p:nvPicPr>
-          <p:cNvPr id="4" name="Picture 3" descr="屏幕截图 2026-10-18 033450.png"/>
+          <p:cNvPr id="4" name="Picture 3" descr="ai-advisor.png"/>
           <p:cNvPicPr>
             <a:picLocks noChangeAspect="1"/>
           </p:cNvPicPr>
@@ -5704,8 +5704,8 @@
         </p:blipFill>
         <p:spPr>
           <a:xfrm>
-            <a:off x="777240" y="1417320"/>
-            <a:ext cx="5257800" cy="2912937"/>
+            <a:off x="685800" y="1417320"/>
+            <a:ext cx="6217920" cy="3431507"/>
           </a:xfrm>
           <a:prstGeom prst="rect">
             <a:avLst/>
@@ -5719,7 +5719,7 @@
       </p:pic>
       <p:pic>
         <p:nvPicPr>
-          <p:cNvPr id="5" name="Picture 4" descr="屏幕截图 2026-10-18 033541.png"/>
+          <p:cNvPr id="5" name="Picture 4" descr="ai-byok.png"/>
           <p:cNvPicPr>
             <a:picLocks noChangeAspect="1"/>
           </p:cNvPicPr>
@@ -5733,8 +5733,8 @@
         </p:blipFill>
         <p:spPr>
           <a:xfrm>
-            <a:off x="6217920" y="1417320"/>
-            <a:ext cx="5257800" cy="2899568"/>
+            <a:off x="7086600" y="1417320"/>
+            <a:ext cx="2743200" cy="3123248"/>
           </a:xfrm>
           <a:prstGeom prst="rect">
             <a:avLst/>
@@ -5748,7 +5748,7 @@
       </p:pic>
       <p:pic>
         <p:nvPicPr>
-          <p:cNvPr id="6" name="Picture 5" descr="屏幕截图 2026-10-18 034001.png"/>
+          <p:cNvPr id="6" name="Picture 5" descr="ai-menu.png"/>
           <p:cNvPicPr>
             <a:picLocks noChangeAspect="1"/>
           </p:cNvPicPr>
@@ -5762,12 +5762,17 @@
         </p:blipFill>
         <p:spPr>
           <a:xfrm>
-            <a:off x="777240" y="4494848"/>
-            <a:ext cx="10241280" cy="1793252"/>
-          </a:xfrm>
-          <a:prstGeom prst="rect">
-            <a:avLst/>
-          </a:prstGeom>
+            <a:off x="7086600" y="4663440"/>
+            <a:ext cx="2743200" cy="1156648"/>
+          </a:xfrm>
+          <a:prstGeom prst="rect">
+            <a:avLst/>
+          </a:prstGeom>
+          <a:ln w="9525">
+            <a:solidFill>
+              <a:srgbClr val="D8E0EE"/>
+            </a:solidFill>
+          </a:ln>
         </p:spPr>
       </p:pic>
       <p:sp>
@@ -5778,8 +5783,8 @@
         </p:nvSpPr>
         <p:spPr>
           <a:xfrm>
-            <a:off x="548640" y="6355080"/>
-            <a:ext cx="7315200" cy="320040"/>
+            <a:off x="777240" y="5074920"/>
+            <a:ext cx="6035040" cy="1188720"/>
           </a:xfrm>
           <a:prstGeom prst="rect">
             <a:avLst/>
@@ -5797,10 +5802,90 @@
                 <a:spcPct val="115000"/>
               </a:lnSpc>
               <a:spcAft>
+                <a:spcPts val="500"/>
+              </a:spcAft>
+            </a:pPr>
+            <a:r>
+              <a:rPr sz="1050" b="0">
+                <a:solidFill>
+                  <a:srgbClr val="16233D"/>
+                </a:solidFill>
+                <a:latin typeface="微软雅黑" a:ea="微软雅黑"/>
+              </a:rPr>
+              <a:t>① 输入商品名 → 意图解析 → 指标罗列 → 带证据链的建议动作</a:t>
+            </a:r>
+          </a:p>
+          <a:p>
+            <a:pPr algn="l">
+              <a:lnSpc>
+                <a:spcPct val="115000"/>
+              </a:lnSpc>
+              <a:spcAft>
+                <a:spcPts val="500"/>
+              </a:spcAft>
+            </a:pPr>
+            <a:r>
+              <a:rPr sz="1050" b="0">
+                <a:solidFill>
+                  <a:srgbClr val="16233D"/>
+                </a:solidFill>
+                <a:latin typeface="微软雅黑" a:ea="微软雅黑"/>
+              </a:rPr>
+              <a:t>② 右上：填入自己的 API Key 即可接入，协议可选 OpenAI / Anthropic</a:t>
+            </a:r>
+          </a:p>
+          <a:p>
+            <a:pPr algn="l">
+              <a:lnSpc>
+                <a:spcPct val="115000"/>
+              </a:lnSpc>
+              <a:spcAft>
                 <a:spcPts val="600"/>
               </a:spcAft>
             </a:pPr>
             <a:r>
+              <a:rPr sz="1050" b="0">
+                <a:solidFill>
+                  <a:srgbClr val="16233D"/>
+                </a:solidFill>
+                <a:latin typeface="微软雅黑" a:ea="微软雅黑"/>
+              </a:rPr>
+              <a:t>③ 右下：顶栏 AI 徽章下拉进入配置，支持连接测试与密钥掩码</a:t>
+            </a:r>
+          </a:p>
+        </p:txBody>
+      </p:sp>
+      <p:sp>
+        <p:nvSpPr>
+          <p:cNvPr id="8" name="TextBox 7"/>
+          <p:cNvSpPr txBox="1"/>
+          <p:nvPr/>
+        </p:nvSpPr>
+        <p:spPr>
+          <a:xfrm>
+            <a:off x="548640" y="6355080"/>
+            <a:ext cx="7315200" cy="320040"/>
+          </a:xfrm>
+          <a:prstGeom prst="rect">
+            <a:avLst/>
+          </a:prstGeom>
+          <a:noFill/>
+        </p:spPr>
+        <p:txBody>
+          <a:bodyPr wrap="square" anchor="t">
+            <a:spAutoFit/>
+          </a:bodyPr>
+          <a:lstStyle/>
+          <a:p>
+            <a:pPr algn="l">
+              <a:lnSpc>
+                <a:spcPct val="115000"/>
+              </a:lnSpc>
+              <a:spcAft>
+                <a:spcPts val="600"/>
+              </a:spcAft>
+            </a:pPr>
+            <a:r>
               <a:rPr sz="950" b="0">
                 <a:solidFill>
                   <a:srgbClr val="6B7688"/>
@@ -5814,7 +5899,7 @@
       </p:sp>
       <p:sp>
         <p:nvSpPr>
-          <p:cNvPr id="8" name="TextBox 7"/>
+          <p:cNvPr id="9" name="TextBox 8"/>
           <p:cNvSpPr txBox="1"/>
           <p:nvPr/>
         </p:nvSpPr>
